--- a/AI_Document_OCR_Scanner_Similarity_Detector_PBL.pptx
+++ b/AI_Document_OCR_Scanner_Similarity_Detector_PBL.pptx
@@ -3135,8 +3135,8 @@
         </p:nvSpPr>
         <p:spPr>
           <a:xfrm>
-            <a:off x="685800" y="274320"/>
-            <a:ext cx="10817352" cy="1188720"/>
+            <a:off x="685800" y="182880"/>
+            <a:ext cx="10817352" cy="1280160"/>
           </a:xfrm>
           <a:prstGeom prst="rect">
             <a:avLst/>
@@ -3150,7 +3150,7 @@
           <a:lstStyle/>
           <a:p>
             <a:pPr algn="ctr">
-              <a:defRPr sz="3200" b="1">
+              <a:defRPr sz="2800" b="1">
                 <a:solidFill>
                   <a:srgbClr val="38BDF8"/>
                 </a:solidFill>
@@ -3158,7 +3158,7 @@
               </a:defRPr>
             </a:pPr>
             <a:r>
-              <a:t>AI Document OCR Scanner &amp; Similarity Detector</a:t>
+              <a:t>AI-Based Document Similarity &amp; Duplicate Detection System Using NLP</a:t>
             </a:r>
           </a:p>
           <a:p>
@@ -7094,7 +7094,7 @@
       </p:sp>
       <p:pic>
         <p:nvPicPr>
-          <p:cNvPr id="4" name="Picture 3" descr="latest_ui_scan.png"/>
+          <p:cNvPr id="4" name="Picture 3" descr="ui_sandbox.png"/>
           <p:cNvPicPr>
             <a:picLocks noChangeAspect="1"/>
           </p:cNvPicPr>
@@ -7650,7 +7650,7 @@
       </p:sp>
       <p:pic>
         <p:nvPicPr>
-          <p:cNvPr id="4" name="Picture 3" descr="latest_ui_scan.png"/>
+          <p:cNvPr id="4" name="Picture 3" descr="ui_sandbox.png"/>
           <p:cNvPicPr>
             <a:picLocks noChangeAspect="1"/>
           </p:cNvPicPr>

--- a/AI_Document_OCR_Scanner_Similarity_Detector_PBL.pptx
+++ b/AI_Document_OCR_Scanner_Similarity_Detector_PBL.pptx
@@ -3306,7 +3306,7 @@
                 </a:solidFill>
                 <a:latin typeface="Segoe UI"/>
               </a:rPr>
-              <a:t>Nimavat Jaydeep M.</a:t>
+              <a:t/>
             </a:r>
           </a:p>
         </p:txBody>
@@ -3392,7 +3392,7 @@
                 </a:solidFill>
                 <a:latin typeface="Segoe UI"/>
               </a:rPr>
-              <a:t>250043107032</a:t>
+              <a:t/>
             </a:r>
           </a:p>
         </p:txBody>

--- a/AI_Document_OCR_Scanner_Similarity_Detector_PBL.pptx
+++ b/AI_Document_OCR_Scanner_Similarity_Detector_PBL.pptx
@@ -4857,15 +4857,42 @@
               <a:spcAft>
                 <a:spcPts val="200"/>
               </a:spcAft>
-              <a:defRPr sz="1200">
-                <a:solidFill>
-                  <a:srgbClr val="94E2FF"/>
-                </a:solidFill>
-                <a:latin typeface="Consolas"/>
-              </a:defRPr>
-            </a:pPr>
-            <a:r>
-              <a:t>Tesseract.recognize(</a:t>
+            </a:pPr>
+            <a:r>
+              <a:rPr sz="1200">
+                <a:solidFill>
+                  <a:srgbClr val="38BDF8"/>
+                </a:solidFill>
+                <a:latin typeface="Consolas"/>
+              </a:rPr>
+              <a:t>Tesseract</a:t>
+            </a:r>
+            <a:r>
+              <a:rPr sz="1200">
+                <a:solidFill>
+                  <a:srgbClr val="F1F5F9"/>
+                </a:solidFill>
+                <a:latin typeface="Consolas"/>
+              </a:rPr>
+              <a:t>.</a:t>
+            </a:r>
+            <a:r>
+              <a:rPr sz="1200">
+                <a:solidFill>
+                  <a:srgbClr val="F1F5F9"/>
+                </a:solidFill>
+                <a:latin typeface="Consolas"/>
+              </a:rPr>
+              <a:t>recognize</a:t>
+            </a:r>
+            <a:r>
+              <a:rPr sz="1200">
+                <a:solidFill>
+                  <a:srgbClr val="F1F5F9"/>
+                </a:solidFill>
+                <a:latin typeface="Consolas"/>
+              </a:rPr>
+              <a:t>(</a:t>
             </a:r>
           </a:p>
           <a:p>
@@ -4873,15 +4900,33 @@
               <a:spcAft>
                 <a:spcPts val="200"/>
               </a:spcAft>
-              <a:defRPr sz="1200">
-                <a:solidFill>
-                  <a:srgbClr val="94E2FF"/>
-                </a:solidFill>
-                <a:latin typeface="Consolas"/>
-              </a:defRPr>
-            </a:pPr>
-            <a:r>
-              <a:t>    file,</a:t>
+            </a:pPr>
+            <a:r>
+              <a:rPr sz="1200">
+                <a:solidFill>
+                  <a:srgbClr val="F1F5F9"/>
+                </a:solidFill>
+                <a:latin typeface="Consolas"/>
+              </a:rPr>
+              <a:t>    </a:t>
+            </a:r>
+            <a:r>
+              <a:rPr sz="1200">
+                <a:solidFill>
+                  <a:srgbClr val="F1F5F9"/>
+                </a:solidFill>
+                <a:latin typeface="Consolas"/>
+              </a:rPr>
+              <a:t>file</a:t>
+            </a:r>
+            <a:r>
+              <a:rPr sz="1200">
+                <a:solidFill>
+                  <a:srgbClr val="F1F5F9"/>
+                </a:solidFill>
+                <a:latin typeface="Consolas"/>
+              </a:rPr>
+              <a:t>,</a:t>
             </a:r>
           </a:p>
           <a:p>
@@ -4889,15 +4934,33 @@
               <a:spcAft>
                 <a:spcPts val="200"/>
               </a:spcAft>
-              <a:defRPr sz="1200">
-                <a:solidFill>
-                  <a:srgbClr val="94E2FF"/>
-                </a:solidFill>
-                <a:latin typeface="Consolas"/>
-              </a:defRPr>
-            </a:pPr>
-            <a:r>
-              <a:t>    'eng',</a:t>
+            </a:pPr>
+            <a:r>
+              <a:rPr sz="1200">
+                <a:solidFill>
+                  <a:srgbClr val="F1F5F9"/>
+                </a:solidFill>
+                <a:latin typeface="Consolas"/>
+              </a:rPr>
+              <a:t>    </a:t>
+            </a:r>
+            <a:r>
+              <a:rPr sz="1200">
+                <a:solidFill>
+                  <a:srgbClr val="FDBA74"/>
+                </a:solidFill>
+                <a:latin typeface="Consolas"/>
+              </a:rPr>
+              <a:t>'eng'</a:t>
+            </a:r>
+            <a:r>
+              <a:rPr sz="1200">
+                <a:solidFill>
+                  <a:srgbClr val="F1F5F9"/>
+                </a:solidFill>
+                <a:latin typeface="Consolas"/>
+              </a:rPr>
+              <a:t>,</a:t>
             </a:r>
           </a:p>
           <a:p>
@@ -4905,15 +4968,24 @@
               <a:spcAft>
                 <a:spcPts val="200"/>
               </a:spcAft>
-              <a:defRPr sz="1200">
-                <a:solidFill>
-                  <a:srgbClr val="94E2FF"/>
-                </a:solidFill>
-                <a:latin typeface="Consolas"/>
-              </a:defRPr>
-            </a:pPr>
-            <a:r>
-              <a:t>    {</a:t>
+            </a:pPr>
+            <a:r>
+              <a:rPr sz="1200">
+                <a:solidFill>
+                  <a:srgbClr val="F1F5F9"/>
+                </a:solidFill>
+                <a:latin typeface="Consolas"/>
+              </a:rPr>
+              <a:t>    </a:t>
+            </a:r>
+            <a:r>
+              <a:rPr sz="1200">
+                <a:solidFill>
+                  <a:srgbClr val="F1F5F9"/>
+                </a:solidFill>
+                <a:latin typeface="Consolas"/>
+              </a:rPr>
+              <a:t>{</a:t>
             </a:r>
           </a:p>
           <a:p>
@@ -4921,15 +4993,87 @@
               <a:spcAft>
                 <a:spcPts val="200"/>
               </a:spcAft>
-              <a:defRPr sz="1200">
-                <a:solidFill>
-                  <a:srgbClr val="94E2FF"/>
-                </a:solidFill>
-                <a:latin typeface="Consolas"/>
-              </a:defRPr>
-            </a:pPr>
-            <a:r>
-              <a:t>        logger: m =&gt; {</a:t>
+            </a:pPr>
+            <a:r>
+              <a:rPr sz="1200">
+                <a:solidFill>
+                  <a:srgbClr val="F1F5F9"/>
+                </a:solidFill>
+                <a:latin typeface="Consolas"/>
+              </a:rPr>
+              <a:t>        </a:t>
+            </a:r>
+            <a:r>
+              <a:rPr sz="1200">
+                <a:solidFill>
+                  <a:srgbClr val="F1F5F9"/>
+                </a:solidFill>
+                <a:latin typeface="Consolas"/>
+              </a:rPr>
+              <a:t>logger</a:t>
+            </a:r>
+            <a:r>
+              <a:rPr sz="1200">
+                <a:solidFill>
+                  <a:srgbClr val="F1F5F9"/>
+                </a:solidFill>
+                <a:latin typeface="Consolas"/>
+              </a:rPr>
+              <a:t>:</a:t>
+            </a:r>
+            <a:r>
+              <a:rPr sz="1200">
+                <a:solidFill>
+                  <a:srgbClr val="F1F5F9"/>
+                </a:solidFill>
+                <a:latin typeface="Consolas"/>
+              </a:rPr>
+              <a:t> </a:t>
+            </a:r>
+            <a:r>
+              <a:rPr sz="1200">
+                <a:solidFill>
+                  <a:srgbClr val="F1F5F9"/>
+                </a:solidFill>
+                <a:latin typeface="Consolas"/>
+              </a:rPr>
+              <a:t>m</a:t>
+            </a:r>
+            <a:r>
+              <a:rPr sz="1200">
+                <a:solidFill>
+                  <a:srgbClr val="F1F5F9"/>
+                </a:solidFill>
+                <a:latin typeface="Consolas"/>
+              </a:rPr>
+              <a:t> </a:t>
+            </a:r>
+            <a:r>
+              <a:rPr sz="1200">
+                <a:solidFill>
+                  <a:srgbClr val="F1F5F9"/>
+                </a:solidFill>
+                <a:latin typeface="Consolas"/>
+              </a:rPr>
+              <a:t>=&gt;</a:t>
+            </a:r>
+            <a:r>
+              <a:rPr sz="1200">
+                <a:solidFill>
+                  <a:srgbClr val="F1F5F9"/>
+                </a:solidFill>
+                <a:latin typeface="Consolas"/>
+              </a:rPr>
+              <a:t> </a:t>
+            </a:r>
+            <a:r>
+              <a:rPr sz="1200">
+                <a:solidFill>
+                  <a:srgbClr val="F1F5F9"/>
+                </a:solidFill>
+                <a:latin typeface="Consolas"/>
+              </a:rPr>
+              <a:t>{</a:t>
             </a:r>
           </a:p>
           <a:p>
@@ -4937,15 +5081,132 @@
               <a:spcAft>
                 <a:spcPts val="200"/>
               </a:spcAft>
-              <a:defRPr sz="1200">
-                <a:solidFill>
-                  <a:srgbClr val="94E2FF"/>
-                </a:solidFill>
-                <a:latin typeface="Consolas"/>
-              </a:defRPr>
-            </a:pPr>
-            <a:r>
-              <a:t>            if (m.status === 'recognizing text') {</a:t>
+            </a:pPr>
+            <a:r>
+              <a:rPr sz="1200">
+                <a:solidFill>
+                  <a:srgbClr val="F1F5F9"/>
+                </a:solidFill>
+                <a:latin typeface="Consolas"/>
+              </a:rPr>
+              <a:t>            </a:t>
+            </a:r>
+            <a:r>
+              <a:rPr sz="1200" b="1">
+                <a:solidFill>
+                  <a:srgbClr val="F472B6"/>
+                </a:solidFill>
+                <a:latin typeface="Consolas"/>
+              </a:rPr>
+              <a:t>if</a:t>
+            </a:r>
+            <a:r>
+              <a:rPr sz="1200">
+                <a:solidFill>
+                  <a:srgbClr val="F1F5F9"/>
+                </a:solidFill>
+                <a:latin typeface="Consolas"/>
+              </a:rPr>
+              <a:t> </a:t>
+            </a:r>
+            <a:r>
+              <a:rPr sz="1200">
+                <a:solidFill>
+                  <a:srgbClr val="F1F5F9"/>
+                </a:solidFill>
+                <a:latin typeface="Consolas"/>
+              </a:rPr>
+              <a:t>(</a:t>
+            </a:r>
+            <a:r>
+              <a:rPr sz="1200">
+                <a:solidFill>
+                  <a:srgbClr val="F1F5F9"/>
+                </a:solidFill>
+                <a:latin typeface="Consolas"/>
+              </a:rPr>
+              <a:t>m</a:t>
+            </a:r>
+            <a:r>
+              <a:rPr sz="1200">
+                <a:solidFill>
+                  <a:srgbClr val="F1F5F9"/>
+                </a:solidFill>
+                <a:latin typeface="Consolas"/>
+              </a:rPr>
+              <a:t>.</a:t>
+            </a:r>
+            <a:r>
+              <a:rPr sz="1200">
+                <a:solidFill>
+                  <a:srgbClr val="F1F5F9"/>
+                </a:solidFill>
+                <a:latin typeface="Consolas"/>
+              </a:rPr>
+              <a:t>status</a:t>
+            </a:r>
+            <a:r>
+              <a:rPr sz="1200">
+                <a:solidFill>
+                  <a:srgbClr val="F1F5F9"/>
+                </a:solidFill>
+                <a:latin typeface="Consolas"/>
+              </a:rPr>
+              <a:t> </a:t>
+            </a:r>
+            <a:r>
+              <a:rPr sz="1200">
+                <a:solidFill>
+                  <a:srgbClr val="F1F5F9"/>
+                </a:solidFill>
+                <a:latin typeface="Consolas"/>
+              </a:rPr>
+              <a:t>===</a:t>
+            </a:r>
+            <a:r>
+              <a:rPr sz="1200">
+                <a:solidFill>
+                  <a:srgbClr val="F1F5F9"/>
+                </a:solidFill>
+                <a:latin typeface="Consolas"/>
+              </a:rPr>
+              <a:t> </a:t>
+            </a:r>
+            <a:r>
+              <a:rPr sz="1200">
+                <a:solidFill>
+                  <a:srgbClr val="FDBA74"/>
+                </a:solidFill>
+                <a:latin typeface="Consolas"/>
+              </a:rPr>
+              <a:t>'recognizing text'</a:t>
+            </a:r>
+            <a:r>
+              <a:rPr sz="1200">
+                <a:solidFill>
+                  <a:srgbClr val="F1F5F9"/>
+                </a:solidFill>
+                <a:latin typeface="Consolas"/>
+              </a:rPr>
+              <a:t>)</a:t>
+            </a:r>
+            <a:r>
+              <a:rPr sz="1200">
+                <a:solidFill>
+                  <a:srgbClr val="F1F5F9"/>
+                </a:solidFill>
+                <a:latin typeface="Consolas"/>
+              </a:rPr>
+              <a:t> </a:t>
+            </a:r>
+            <a:r>
+              <a:rPr sz="1200">
+                <a:solidFill>
+                  <a:srgbClr val="F1F5F9"/>
+                </a:solidFill>
+                <a:latin typeface="Consolas"/>
+              </a:rPr>
+              <a:t>{</a:t>
             </a:r>
           </a:p>
           <a:p>
@@ -4953,15 +5214,177 @@
               <a:spcAft>
                 <a:spcPts val="200"/>
               </a:spcAft>
-              <a:defRPr sz="1200">
-                <a:solidFill>
-                  <a:srgbClr val="94E2FF"/>
-                </a:solidFill>
-                <a:latin typeface="Consolas"/>
-              </a:defRPr>
-            </a:pPr>
-            <a:r>
-              <a:t>                const pct = Math.round(m.progress * 100);</a:t>
+            </a:pPr>
+            <a:r>
+              <a:rPr sz="1200">
+                <a:solidFill>
+                  <a:srgbClr val="F1F5F9"/>
+                </a:solidFill>
+                <a:latin typeface="Consolas"/>
+              </a:rPr>
+              <a:t>                </a:t>
+            </a:r>
+            <a:r>
+              <a:rPr sz="1200" b="1">
+                <a:solidFill>
+                  <a:srgbClr val="F472B6"/>
+                </a:solidFill>
+                <a:latin typeface="Consolas"/>
+              </a:rPr>
+              <a:t>const</a:t>
+            </a:r>
+            <a:r>
+              <a:rPr sz="1200">
+                <a:solidFill>
+                  <a:srgbClr val="F1F5F9"/>
+                </a:solidFill>
+                <a:latin typeface="Consolas"/>
+              </a:rPr>
+              <a:t> </a:t>
+            </a:r>
+            <a:r>
+              <a:rPr sz="1200">
+                <a:solidFill>
+                  <a:srgbClr val="F1F5F9"/>
+                </a:solidFill>
+                <a:latin typeface="Consolas"/>
+              </a:rPr>
+              <a:t>pct</a:t>
+            </a:r>
+            <a:r>
+              <a:rPr sz="1200">
+                <a:solidFill>
+                  <a:srgbClr val="F1F5F9"/>
+                </a:solidFill>
+                <a:latin typeface="Consolas"/>
+              </a:rPr>
+              <a:t> </a:t>
+            </a:r>
+            <a:r>
+              <a:rPr sz="1200">
+                <a:solidFill>
+                  <a:srgbClr val="F1F5F9"/>
+                </a:solidFill>
+                <a:latin typeface="Consolas"/>
+              </a:rPr>
+              <a:t>=</a:t>
+            </a:r>
+            <a:r>
+              <a:rPr sz="1200">
+                <a:solidFill>
+                  <a:srgbClr val="F1F5F9"/>
+                </a:solidFill>
+                <a:latin typeface="Consolas"/>
+              </a:rPr>
+              <a:t> </a:t>
+            </a:r>
+            <a:r>
+              <a:rPr sz="1200">
+                <a:solidFill>
+                  <a:srgbClr val="F1F5F9"/>
+                </a:solidFill>
+                <a:latin typeface="Consolas"/>
+              </a:rPr>
+              <a:t>Math</a:t>
+            </a:r>
+            <a:r>
+              <a:rPr sz="1200">
+                <a:solidFill>
+                  <a:srgbClr val="F1F5F9"/>
+                </a:solidFill>
+                <a:latin typeface="Consolas"/>
+              </a:rPr>
+              <a:t>.</a:t>
+            </a:r>
+            <a:r>
+              <a:rPr sz="1200">
+                <a:solidFill>
+                  <a:srgbClr val="F1F5F9"/>
+                </a:solidFill>
+                <a:latin typeface="Consolas"/>
+              </a:rPr>
+              <a:t>round</a:t>
+            </a:r>
+            <a:r>
+              <a:rPr sz="1200">
+                <a:solidFill>
+                  <a:srgbClr val="F1F5F9"/>
+                </a:solidFill>
+                <a:latin typeface="Consolas"/>
+              </a:rPr>
+              <a:t>(</a:t>
+            </a:r>
+            <a:r>
+              <a:rPr sz="1200">
+                <a:solidFill>
+                  <a:srgbClr val="F1F5F9"/>
+                </a:solidFill>
+                <a:latin typeface="Consolas"/>
+              </a:rPr>
+              <a:t>m</a:t>
+            </a:r>
+            <a:r>
+              <a:rPr sz="1200">
+                <a:solidFill>
+                  <a:srgbClr val="F1F5F9"/>
+                </a:solidFill>
+                <a:latin typeface="Consolas"/>
+              </a:rPr>
+              <a:t>.</a:t>
+            </a:r>
+            <a:r>
+              <a:rPr sz="1200">
+                <a:solidFill>
+                  <a:srgbClr val="F1F5F9"/>
+                </a:solidFill>
+                <a:latin typeface="Consolas"/>
+              </a:rPr>
+              <a:t>progress</a:t>
+            </a:r>
+            <a:r>
+              <a:rPr sz="1200">
+                <a:solidFill>
+                  <a:srgbClr val="F1F5F9"/>
+                </a:solidFill>
+                <a:latin typeface="Consolas"/>
+              </a:rPr>
+              <a:t> </a:t>
+            </a:r>
+            <a:r>
+              <a:rPr sz="1200">
+                <a:solidFill>
+                  <a:srgbClr val="F1F5F9"/>
+                </a:solidFill>
+                <a:latin typeface="Consolas"/>
+              </a:rPr>
+              <a:t>*</a:t>
+            </a:r>
+            <a:r>
+              <a:rPr sz="1200">
+                <a:solidFill>
+                  <a:srgbClr val="F1F5F9"/>
+                </a:solidFill>
+                <a:latin typeface="Consolas"/>
+              </a:rPr>
+              <a:t> </a:t>
+            </a:r>
+            <a:r>
+              <a:rPr sz="1200">
+                <a:solidFill>
+                  <a:srgbClr val="818CF8"/>
+                </a:solidFill>
+                <a:latin typeface="Consolas"/>
+              </a:rPr>
+              <a:t>100</a:t>
+            </a:r>
+            <a:r>
+              <a:rPr sz="1200">
+                <a:solidFill>
+                  <a:srgbClr val="F1F5F9"/>
+                </a:solidFill>
+                <a:latin typeface="Consolas"/>
+              </a:rPr>
+              <a:t>);</a:t>
             </a:r>
           </a:p>
           <a:p>
@@ -4969,15 +5392,114 @@
               <a:spcAft>
                 <a:spcPts val="200"/>
               </a:spcAft>
-              <a:defRPr sz="1200">
-                <a:solidFill>
-                  <a:srgbClr val="94E2FF"/>
-                </a:solidFill>
-                <a:latin typeface="Consolas"/>
-              </a:defRPr>
-            </a:pPr>
-            <a:r>
-              <a:t>                updateStatus(`📷 Scanning Image: ${pct}%`);</a:t>
+            </a:pPr>
+            <a:r>
+              <a:rPr sz="1200">
+                <a:solidFill>
+                  <a:srgbClr val="F1F5F9"/>
+                </a:solidFill>
+                <a:latin typeface="Consolas"/>
+              </a:rPr>
+              <a:t>                </a:t>
+            </a:r>
+            <a:r>
+              <a:rPr sz="1200">
+                <a:solidFill>
+                  <a:srgbClr val="F1F5F9"/>
+                </a:solidFill>
+                <a:latin typeface="Consolas"/>
+              </a:rPr>
+              <a:t>updateStatus</a:t>
+            </a:r>
+            <a:r>
+              <a:rPr sz="1200">
+                <a:solidFill>
+                  <a:srgbClr val="F1F5F9"/>
+                </a:solidFill>
+                <a:latin typeface="Consolas"/>
+              </a:rPr>
+              <a:t>(`📷</a:t>
+            </a:r>
+            <a:r>
+              <a:rPr sz="1200">
+                <a:solidFill>
+                  <a:srgbClr val="F1F5F9"/>
+                </a:solidFill>
+                <a:latin typeface="Consolas"/>
+              </a:rPr>
+              <a:t> </a:t>
+            </a:r>
+            <a:r>
+              <a:rPr sz="1200">
+                <a:solidFill>
+                  <a:srgbClr val="F1F5F9"/>
+                </a:solidFill>
+                <a:latin typeface="Consolas"/>
+              </a:rPr>
+              <a:t>Scanning</a:t>
+            </a:r>
+            <a:r>
+              <a:rPr sz="1200">
+                <a:solidFill>
+                  <a:srgbClr val="F1F5F9"/>
+                </a:solidFill>
+                <a:latin typeface="Consolas"/>
+              </a:rPr>
+              <a:t> </a:t>
+            </a:r>
+            <a:r>
+              <a:rPr sz="1200">
+                <a:solidFill>
+                  <a:srgbClr val="F1F5F9"/>
+                </a:solidFill>
+                <a:latin typeface="Consolas"/>
+              </a:rPr>
+              <a:t>Image</a:t>
+            </a:r>
+            <a:r>
+              <a:rPr sz="1200">
+                <a:solidFill>
+                  <a:srgbClr val="F1F5F9"/>
+                </a:solidFill>
+                <a:latin typeface="Consolas"/>
+              </a:rPr>
+              <a:t>:</a:t>
+            </a:r>
+            <a:r>
+              <a:rPr sz="1200">
+                <a:solidFill>
+                  <a:srgbClr val="F1F5F9"/>
+                </a:solidFill>
+                <a:latin typeface="Consolas"/>
+              </a:rPr>
+              <a:t> </a:t>
+            </a:r>
+            <a:r>
+              <a:rPr sz="1200">
+                <a:solidFill>
+                  <a:srgbClr val="F1F5F9"/>
+                </a:solidFill>
+                <a:latin typeface="Consolas"/>
+              </a:rPr>
+              <a:t>${</a:t>
+            </a:r>
+            <a:r>
+              <a:rPr sz="1200">
+                <a:solidFill>
+                  <a:srgbClr val="F1F5F9"/>
+                </a:solidFill>
+                <a:latin typeface="Consolas"/>
+              </a:rPr>
+              <a:t>pct</a:t>
+            </a:r>
+            <a:r>
+              <a:rPr sz="1200">
+                <a:solidFill>
+                  <a:srgbClr val="F1F5F9"/>
+                </a:solidFill>
+                <a:latin typeface="Consolas"/>
+              </a:rPr>
+              <a:t>}%`);</a:t>
             </a:r>
           </a:p>
           <a:p>
@@ -4985,15 +5507,24 @@
               <a:spcAft>
                 <a:spcPts val="200"/>
               </a:spcAft>
-              <a:defRPr sz="1200">
-                <a:solidFill>
-                  <a:srgbClr val="94E2FF"/>
-                </a:solidFill>
-                <a:latin typeface="Consolas"/>
-              </a:defRPr>
-            </a:pPr>
-            <a:r>
-              <a:t>            }</a:t>
+            </a:pPr>
+            <a:r>
+              <a:rPr sz="1200">
+                <a:solidFill>
+                  <a:srgbClr val="F1F5F9"/>
+                </a:solidFill>
+                <a:latin typeface="Consolas"/>
+              </a:rPr>
+              <a:t>            </a:t>
+            </a:r>
+            <a:r>
+              <a:rPr sz="1200">
+                <a:solidFill>
+                  <a:srgbClr val="F1F5F9"/>
+                </a:solidFill>
+                <a:latin typeface="Consolas"/>
+              </a:rPr>
+              <a:t>}</a:t>
             </a:r>
           </a:p>
           <a:p>
@@ -5001,15 +5532,24 @@
               <a:spcAft>
                 <a:spcPts val="200"/>
               </a:spcAft>
-              <a:defRPr sz="1200">
-                <a:solidFill>
-                  <a:srgbClr val="94E2FF"/>
-                </a:solidFill>
-                <a:latin typeface="Consolas"/>
-              </a:defRPr>
-            </a:pPr>
-            <a:r>
-              <a:t>        }</a:t>
+            </a:pPr>
+            <a:r>
+              <a:rPr sz="1200">
+                <a:solidFill>
+                  <a:srgbClr val="F1F5F9"/>
+                </a:solidFill>
+                <a:latin typeface="Consolas"/>
+              </a:rPr>
+              <a:t>        </a:t>
+            </a:r>
+            <a:r>
+              <a:rPr sz="1200">
+                <a:solidFill>
+                  <a:srgbClr val="F1F5F9"/>
+                </a:solidFill>
+                <a:latin typeface="Consolas"/>
+              </a:rPr>
+              <a:t>}</a:t>
             </a:r>
           </a:p>
           <a:p>
@@ -5017,15 +5557,24 @@
               <a:spcAft>
                 <a:spcPts val="200"/>
               </a:spcAft>
-              <a:defRPr sz="1200">
-                <a:solidFill>
-                  <a:srgbClr val="94E2FF"/>
-                </a:solidFill>
-                <a:latin typeface="Consolas"/>
-              </a:defRPr>
-            </a:pPr>
-            <a:r>
-              <a:t>    }</a:t>
+            </a:pPr>
+            <a:r>
+              <a:rPr sz="1200">
+                <a:solidFill>
+                  <a:srgbClr val="F1F5F9"/>
+                </a:solidFill>
+                <a:latin typeface="Consolas"/>
+              </a:rPr>
+              <a:t>    </a:t>
+            </a:r>
+            <a:r>
+              <a:rPr sz="1200">
+                <a:solidFill>
+                  <a:srgbClr val="F1F5F9"/>
+                </a:solidFill>
+                <a:latin typeface="Consolas"/>
+              </a:rPr>
+              <a:t>}</a:t>
             </a:r>
           </a:p>
           <a:p>
@@ -5033,15 +5582,168 @@
               <a:spcAft>
                 <a:spcPts val="200"/>
               </a:spcAft>
-              <a:defRPr sz="1200">
-                <a:solidFill>
-                  <a:srgbClr val="94E2FF"/>
-                </a:solidFill>
-                <a:latin typeface="Consolas"/>
-              </a:defRPr>
-            </a:pPr>
-            <a:r>
-              <a:t>).then(({ data: { text } }) =&gt; {</a:t>
+            </a:pPr>
+            <a:r>
+              <a:rPr sz="1200">
+                <a:solidFill>
+                  <a:srgbClr val="F1F5F9"/>
+                </a:solidFill>
+                <a:latin typeface="Consolas"/>
+              </a:rPr>
+              <a:t>).</a:t>
+            </a:r>
+            <a:r>
+              <a:rPr sz="1200" b="1">
+                <a:solidFill>
+                  <a:srgbClr val="F472B6"/>
+                </a:solidFill>
+                <a:latin typeface="Consolas"/>
+              </a:rPr>
+              <a:t>then</a:t>
+            </a:r>
+            <a:r>
+              <a:rPr sz="1200">
+                <a:solidFill>
+                  <a:srgbClr val="F1F5F9"/>
+                </a:solidFill>
+                <a:latin typeface="Consolas"/>
+              </a:rPr>
+              <a:t>(({</a:t>
+            </a:r>
+            <a:r>
+              <a:rPr sz="1200">
+                <a:solidFill>
+                  <a:srgbClr val="F1F5F9"/>
+                </a:solidFill>
+                <a:latin typeface="Consolas"/>
+              </a:rPr>
+              <a:t> </a:t>
+            </a:r>
+            <a:r>
+              <a:rPr sz="1200">
+                <a:solidFill>
+                  <a:srgbClr val="F1F5F9"/>
+                </a:solidFill>
+                <a:latin typeface="Consolas"/>
+              </a:rPr>
+              <a:t>data</a:t>
+            </a:r>
+            <a:r>
+              <a:rPr sz="1200">
+                <a:solidFill>
+                  <a:srgbClr val="F1F5F9"/>
+                </a:solidFill>
+                <a:latin typeface="Consolas"/>
+              </a:rPr>
+              <a:t>:</a:t>
+            </a:r>
+            <a:r>
+              <a:rPr sz="1200">
+                <a:solidFill>
+                  <a:srgbClr val="F1F5F9"/>
+                </a:solidFill>
+                <a:latin typeface="Consolas"/>
+              </a:rPr>
+              <a:t> </a:t>
+            </a:r>
+            <a:r>
+              <a:rPr sz="1200">
+                <a:solidFill>
+                  <a:srgbClr val="F1F5F9"/>
+                </a:solidFill>
+                <a:latin typeface="Consolas"/>
+              </a:rPr>
+              <a:t>{</a:t>
+            </a:r>
+            <a:r>
+              <a:rPr sz="1200">
+                <a:solidFill>
+                  <a:srgbClr val="F1F5F9"/>
+                </a:solidFill>
+                <a:latin typeface="Consolas"/>
+              </a:rPr>
+              <a:t> </a:t>
+            </a:r>
+            <a:r>
+              <a:rPr sz="1200">
+                <a:solidFill>
+                  <a:srgbClr val="F1F5F9"/>
+                </a:solidFill>
+                <a:latin typeface="Consolas"/>
+              </a:rPr>
+              <a:t>text</a:t>
+            </a:r>
+            <a:r>
+              <a:rPr sz="1200">
+                <a:solidFill>
+                  <a:srgbClr val="F1F5F9"/>
+                </a:solidFill>
+                <a:latin typeface="Consolas"/>
+              </a:rPr>
+              <a:t> </a:t>
+            </a:r>
+            <a:r>
+              <a:rPr sz="1200">
+                <a:solidFill>
+                  <a:srgbClr val="F1F5F9"/>
+                </a:solidFill>
+                <a:latin typeface="Consolas"/>
+              </a:rPr>
+              <a:t>}</a:t>
+            </a:r>
+            <a:r>
+              <a:rPr sz="1200">
+                <a:solidFill>
+                  <a:srgbClr val="F1F5F9"/>
+                </a:solidFill>
+                <a:latin typeface="Consolas"/>
+              </a:rPr>
+              <a:t> </a:t>
+            </a:r>
+            <a:r>
+              <a:rPr sz="1200">
+                <a:solidFill>
+                  <a:srgbClr val="F1F5F9"/>
+                </a:solidFill>
+                <a:latin typeface="Consolas"/>
+              </a:rPr>
+              <a:t>})</a:t>
+            </a:r>
+            <a:r>
+              <a:rPr sz="1200">
+                <a:solidFill>
+                  <a:srgbClr val="F1F5F9"/>
+                </a:solidFill>
+                <a:latin typeface="Consolas"/>
+              </a:rPr>
+              <a:t> </a:t>
+            </a:r>
+            <a:r>
+              <a:rPr sz="1200">
+                <a:solidFill>
+                  <a:srgbClr val="F1F5F9"/>
+                </a:solidFill>
+                <a:latin typeface="Consolas"/>
+              </a:rPr>
+              <a:t>=&gt;</a:t>
+            </a:r>
+            <a:r>
+              <a:rPr sz="1200">
+                <a:solidFill>
+                  <a:srgbClr val="F1F5F9"/>
+                </a:solidFill>
+                <a:latin typeface="Consolas"/>
+              </a:rPr>
+              <a:t> </a:t>
+            </a:r>
+            <a:r>
+              <a:rPr sz="1200">
+                <a:solidFill>
+                  <a:srgbClr val="F1F5F9"/>
+                </a:solidFill>
+                <a:latin typeface="Consolas"/>
+              </a:rPr>
+              <a:t>{</a:t>
             </a:r>
           </a:p>
           <a:p>
@@ -5049,15 +5751,51 @@
               <a:spcAft>
                 <a:spcPts val="200"/>
               </a:spcAft>
-              <a:defRPr sz="1200">
-                <a:solidFill>
-                  <a:srgbClr val="94E2FF"/>
-                </a:solidFill>
-                <a:latin typeface="Consolas"/>
-              </a:defRPr>
-            </a:pPr>
-            <a:r>
-              <a:t>    resolve(text);</a:t>
+            </a:pPr>
+            <a:r>
+              <a:rPr sz="1200">
+                <a:solidFill>
+                  <a:srgbClr val="F1F5F9"/>
+                </a:solidFill>
+                <a:latin typeface="Consolas"/>
+              </a:rPr>
+              <a:t>    </a:t>
+            </a:r>
+            <a:r>
+              <a:rPr sz="1200" b="1">
+                <a:solidFill>
+                  <a:srgbClr val="F472B6"/>
+                </a:solidFill>
+                <a:latin typeface="Consolas"/>
+              </a:rPr>
+              <a:t>resolve</a:t>
+            </a:r>
+            <a:r>
+              <a:rPr sz="1200">
+                <a:solidFill>
+                  <a:srgbClr val="F1F5F9"/>
+                </a:solidFill>
+                <a:latin typeface="Consolas"/>
+              </a:rPr>
+              <a:t>(</a:t>
+            </a:r>
+            <a:r>
+              <a:rPr sz="1200">
+                <a:solidFill>
+                  <a:srgbClr val="F1F5F9"/>
+                </a:solidFill>
+                <a:latin typeface="Consolas"/>
+              </a:rPr>
+              <a:t>text</a:t>
+            </a:r>
+            <a:r>
+              <a:rPr sz="1200">
+                <a:solidFill>
+                  <a:srgbClr val="F1F5F9"/>
+                </a:solidFill>
+                <a:latin typeface="Consolas"/>
+              </a:rPr>
+              <a:t>);</a:t>
             </a:r>
           </a:p>
           <a:p>
@@ -5065,14 +5803,14 @@
               <a:spcAft>
                 <a:spcPts val="200"/>
               </a:spcAft>
-              <a:defRPr sz="1200">
-                <a:solidFill>
-                  <a:srgbClr val="94E2FF"/>
-                </a:solidFill>
-                <a:latin typeface="Consolas"/>
-              </a:defRPr>
-            </a:pPr>
-            <a:r>
+            </a:pPr>
+            <a:r>
+              <a:rPr sz="1200">
+                <a:solidFill>
+                  <a:srgbClr val="F1F5F9"/>
+                </a:solidFill>
+                <a:latin typeface="Consolas"/>
+              </a:rPr>
               <a:t>});</a:t>
             </a:r>
           </a:p>
@@ -6198,15 +6936,78 @@
               <a:spcAft>
                 <a:spcPts val="200"/>
               </a:spcAft>
-              <a:defRPr sz="1200">
-                <a:solidFill>
-                  <a:srgbClr val="94E2FF"/>
-                </a:solidFill>
-                <a:latin typeface="Consolas"/>
-              </a:defRPr>
-            </a:pPr>
-            <a:r>
-              <a:t>let dotProduct = 0;</a:t>
+            </a:pPr>
+            <a:r>
+              <a:rPr sz="1200" b="1">
+                <a:solidFill>
+                  <a:srgbClr val="F472B6"/>
+                </a:solidFill>
+                <a:latin typeface="Consolas"/>
+              </a:rPr>
+              <a:t>let</a:t>
+            </a:r>
+            <a:r>
+              <a:rPr sz="1200">
+                <a:solidFill>
+                  <a:srgbClr val="F1F5F9"/>
+                </a:solidFill>
+                <a:latin typeface="Consolas"/>
+              </a:rPr>
+              <a:t> </a:t>
+            </a:r>
+            <a:r>
+              <a:rPr sz="1200">
+                <a:solidFill>
+                  <a:srgbClr val="F1F5F9"/>
+                </a:solidFill>
+                <a:latin typeface="Consolas"/>
+              </a:rPr>
+              <a:t>dotProduct</a:t>
+            </a:r>
+            <a:r>
+              <a:rPr sz="1200">
+                <a:solidFill>
+                  <a:srgbClr val="F1F5F9"/>
+                </a:solidFill>
+                <a:latin typeface="Consolas"/>
+              </a:rPr>
+              <a:t> </a:t>
+            </a:r>
+            <a:r>
+              <a:rPr sz="1200">
+                <a:solidFill>
+                  <a:srgbClr val="F1F5F9"/>
+                </a:solidFill>
+                <a:latin typeface="Consolas"/>
+              </a:rPr>
+              <a:t>=</a:t>
+            </a:r>
+            <a:r>
+              <a:rPr sz="1200">
+                <a:solidFill>
+                  <a:srgbClr val="F1F5F9"/>
+                </a:solidFill>
+                <a:latin typeface="Consolas"/>
+              </a:rPr>
+              <a:t> </a:t>
+            </a:r>
+            <a:r>
+              <a:rPr sz="1200">
+                <a:solidFill>
+                  <a:srgbClr val="818CF8"/>
+                </a:solidFill>
+                <a:latin typeface="Consolas"/>
+              </a:rPr>
+              <a:t>0</a:t>
+            </a:r>
+            <a:r>
+              <a:rPr sz="1200">
+                <a:solidFill>
+                  <a:srgbClr val="F1F5F9"/>
+                </a:solidFill>
+                <a:latin typeface="Consolas"/>
+              </a:rPr>
+              <a:t>;</a:t>
             </a:r>
           </a:p>
           <a:p>
@@ -6214,15 +7015,141 @@
               <a:spcAft>
                 <a:spcPts val="200"/>
               </a:spcAft>
-              <a:defRPr sz="1200">
-                <a:solidFill>
-                  <a:srgbClr val="94E2FF"/>
-                </a:solidFill>
-                <a:latin typeface="Consolas"/>
-              </a:defRPr>
-            </a:pPr>
-            <a:r>
-              <a:t>let mag1 = 0, mag2 = 0;</a:t>
+            </a:pPr>
+            <a:r>
+              <a:rPr sz="1200" b="1">
+                <a:solidFill>
+                  <a:srgbClr val="F472B6"/>
+                </a:solidFill>
+                <a:latin typeface="Consolas"/>
+              </a:rPr>
+              <a:t>let</a:t>
+            </a:r>
+            <a:r>
+              <a:rPr sz="1200">
+                <a:solidFill>
+                  <a:srgbClr val="F1F5F9"/>
+                </a:solidFill>
+                <a:latin typeface="Consolas"/>
+              </a:rPr>
+              <a:t> </a:t>
+            </a:r>
+            <a:r>
+              <a:rPr sz="1200">
+                <a:solidFill>
+                  <a:srgbClr val="F1F5F9"/>
+                </a:solidFill>
+                <a:latin typeface="Consolas"/>
+              </a:rPr>
+              <a:t>mag1</a:t>
+            </a:r>
+            <a:r>
+              <a:rPr sz="1200">
+                <a:solidFill>
+                  <a:srgbClr val="F1F5F9"/>
+                </a:solidFill>
+                <a:latin typeface="Consolas"/>
+              </a:rPr>
+              <a:t> </a:t>
+            </a:r>
+            <a:r>
+              <a:rPr sz="1200">
+                <a:solidFill>
+                  <a:srgbClr val="F1F5F9"/>
+                </a:solidFill>
+                <a:latin typeface="Consolas"/>
+              </a:rPr>
+              <a:t>=</a:t>
+            </a:r>
+            <a:r>
+              <a:rPr sz="1200">
+                <a:solidFill>
+                  <a:srgbClr val="F1F5F9"/>
+                </a:solidFill>
+                <a:latin typeface="Consolas"/>
+              </a:rPr>
+              <a:t> </a:t>
+            </a:r>
+            <a:r>
+              <a:rPr sz="1200">
+                <a:solidFill>
+                  <a:srgbClr val="818CF8"/>
+                </a:solidFill>
+                <a:latin typeface="Consolas"/>
+              </a:rPr>
+              <a:t>0</a:t>
+            </a:r>
+            <a:r>
+              <a:rPr sz="1200">
+                <a:solidFill>
+                  <a:srgbClr val="F1F5F9"/>
+                </a:solidFill>
+                <a:latin typeface="Consolas"/>
+              </a:rPr>
+              <a:t>,</a:t>
+            </a:r>
+            <a:r>
+              <a:rPr sz="1200">
+                <a:solidFill>
+                  <a:srgbClr val="F1F5F9"/>
+                </a:solidFill>
+                <a:latin typeface="Consolas"/>
+              </a:rPr>
+              <a:t> </a:t>
+            </a:r>
+            <a:r>
+              <a:rPr sz="1200">
+                <a:solidFill>
+                  <a:srgbClr val="F1F5F9"/>
+                </a:solidFill>
+                <a:latin typeface="Consolas"/>
+              </a:rPr>
+              <a:t>mag2</a:t>
+            </a:r>
+            <a:r>
+              <a:rPr sz="1200">
+                <a:solidFill>
+                  <a:srgbClr val="F1F5F9"/>
+                </a:solidFill>
+                <a:latin typeface="Consolas"/>
+              </a:rPr>
+              <a:t> </a:t>
+            </a:r>
+            <a:r>
+              <a:rPr sz="1200">
+                <a:solidFill>
+                  <a:srgbClr val="F1F5F9"/>
+                </a:solidFill>
+                <a:latin typeface="Consolas"/>
+              </a:rPr>
+              <a:t>=</a:t>
+            </a:r>
+            <a:r>
+              <a:rPr sz="1200">
+                <a:solidFill>
+                  <a:srgbClr val="F1F5F9"/>
+                </a:solidFill>
+                <a:latin typeface="Consolas"/>
+              </a:rPr>
+              <a:t> </a:t>
+            </a:r>
+            <a:r>
+              <a:rPr sz="1200">
+                <a:solidFill>
+                  <a:srgbClr val="818CF8"/>
+                </a:solidFill>
+                <a:latin typeface="Consolas"/>
+              </a:rPr>
+              <a:t>0</a:t>
+            </a:r>
+            <a:r>
+              <a:rPr sz="1200">
+                <a:solidFill>
+                  <a:srgbClr val="F1F5F9"/>
+                </a:solidFill>
+                <a:latin typeface="Consolas"/>
+              </a:rPr>
+              <a:t>;</a:t>
             </a:r>
           </a:p>
           <a:p>
@@ -6230,15 +7157,87 @@
               <a:spcAft>
                 <a:spcPts val="200"/>
               </a:spcAft>
-              <a:defRPr sz="1200">
-                <a:solidFill>
-                  <a:srgbClr val="94E2FF"/>
-                </a:solidFill>
-                <a:latin typeface="Consolas"/>
-              </a:defRPr>
-            </a:pPr>
-            <a:r>
-              <a:t>vocab.forEach(word =&gt; {</a:t>
+            </a:pPr>
+            <a:r>
+              <a:rPr sz="1200">
+                <a:solidFill>
+                  <a:srgbClr val="F1F5F9"/>
+                </a:solidFill>
+                <a:latin typeface="Consolas"/>
+              </a:rPr>
+              <a:t>vocab</a:t>
+            </a:r>
+            <a:r>
+              <a:rPr sz="1200">
+                <a:solidFill>
+                  <a:srgbClr val="F1F5F9"/>
+                </a:solidFill>
+                <a:latin typeface="Consolas"/>
+              </a:rPr>
+              <a:t>.</a:t>
+            </a:r>
+            <a:r>
+              <a:rPr sz="1200">
+                <a:solidFill>
+                  <a:srgbClr val="F1F5F9"/>
+                </a:solidFill>
+                <a:latin typeface="Consolas"/>
+              </a:rPr>
+              <a:t>forEach</a:t>
+            </a:r>
+            <a:r>
+              <a:rPr sz="1200">
+                <a:solidFill>
+                  <a:srgbClr val="F1F5F9"/>
+                </a:solidFill>
+                <a:latin typeface="Consolas"/>
+              </a:rPr>
+              <a:t>(</a:t>
+            </a:r>
+            <a:r>
+              <a:rPr sz="1200">
+                <a:solidFill>
+                  <a:srgbClr val="F1F5F9"/>
+                </a:solidFill>
+                <a:latin typeface="Consolas"/>
+              </a:rPr>
+              <a:t>word</a:t>
+            </a:r>
+            <a:r>
+              <a:rPr sz="1200">
+                <a:solidFill>
+                  <a:srgbClr val="F1F5F9"/>
+                </a:solidFill>
+                <a:latin typeface="Consolas"/>
+              </a:rPr>
+              <a:t> </a:t>
+            </a:r>
+            <a:r>
+              <a:rPr sz="1200">
+                <a:solidFill>
+                  <a:srgbClr val="F1F5F9"/>
+                </a:solidFill>
+                <a:latin typeface="Consolas"/>
+              </a:rPr>
+              <a:t>=&gt;</a:t>
+            </a:r>
+            <a:r>
+              <a:rPr sz="1200">
+                <a:solidFill>
+                  <a:srgbClr val="F1F5F9"/>
+                </a:solidFill>
+                <a:latin typeface="Consolas"/>
+              </a:rPr>
+              <a:t> </a:t>
+            </a:r>
+            <a:r>
+              <a:rPr sz="1200">
+                <a:solidFill>
+                  <a:srgbClr val="F1F5F9"/>
+                </a:solidFill>
+                <a:latin typeface="Consolas"/>
+              </a:rPr>
+              <a:t>{</a:t>
             </a:r>
           </a:p>
           <a:p>
@@ -6246,15 +7245,150 @@
               <a:spcAft>
                 <a:spcPts val="200"/>
               </a:spcAft>
-              <a:defRPr sz="1200">
-                <a:solidFill>
-                  <a:srgbClr val="94E2FF"/>
-                </a:solidFill>
-                <a:latin typeface="Consolas"/>
-              </a:defRPr>
-            </a:pPr>
-            <a:r>
-              <a:t>    dotProduct += freq1[word] * freq2[word];</a:t>
+            </a:pPr>
+            <a:r>
+              <a:rPr sz="1200">
+                <a:solidFill>
+                  <a:srgbClr val="F1F5F9"/>
+                </a:solidFill>
+                <a:latin typeface="Consolas"/>
+              </a:rPr>
+              <a:t>    </a:t>
+            </a:r>
+            <a:r>
+              <a:rPr sz="1200">
+                <a:solidFill>
+                  <a:srgbClr val="F1F5F9"/>
+                </a:solidFill>
+                <a:latin typeface="Consolas"/>
+              </a:rPr>
+              <a:t>dotProduct</a:t>
+            </a:r>
+            <a:r>
+              <a:rPr sz="1200">
+                <a:solidFill>
+                  <a:srgbClr val="F1F5F9"/>
+                </a:solidFill>
+                <a:latin typeface="Consolas"/>
+              </a:rPr>
+              <a:t> </a:t>
+            </a:r>
+            <a:r>
+              <a:rPr sz="1200">
+                <a:solidFill>
+                  <a:srgbClr val="F1F5F9"/>
+                </a:solidFill>
+                <a:latin typeface="Consolas"/>
+              </a:rPr>
+              <a:t>+=</a:t>
+            </a:r>
+            <a:r>
+              <a:rPr sz="1200">
+                <a:solidFill>
+                  <a:srgbClr val="F1F5F9"/>
+                </a:solidFill>
+                <a:latin typeface="Consolas"/>
+              </a:rPr>
+              <a:t> </a:t>
+            </a:r>
+            <a:r>
+              <a:rPr sz="1200">
+                <a:solidFill>
+                  <a:srgbClr val="F1F5F9"/>
+                </a:solidFill>
+                <a:latin typeface="Consolas"/>
+              </a:rPr>
+              <a:t>freq1</a:t>
+            </a:r>
+            <a:r>
+              <a:rPr sz="1200">
+                <a:solidFill>
+                  <a:srgbClr val="F1F5F9"/>
+                </a:solidFill>
+                <a:latin typeface="Consolas"/>
+              </a:rPr>
+              <a:t>[</a:t>
+            </a:r>
+            <a:r>
+              <a:rPr sz="1200">
+                <a:solidFill>
+                  <a:srgbClr val="F1F5F9"/>
+                </a:solidFill>
+                <a:latin typeface="Consolas"/>
+              </a:rPr>
+              <a:t>word</a:t>
+            </a:r>
+            <a:r>
+              <a:rPr sz="1200">
+                <a:solidFill>
+                  <a:srgbClr val="F1F5F9"/>
+                </a:solidFill>
+                <a:latin typeface="Consolas"/>
+              </a:rPr>
+              <a:t>]</a:t>
+            </a:r>
+            <a:r>
+              <a:rPr sz="1200">
+                <a:solidFill>
+                  <a:srgbClr val="F1F5F9"/>
+                </a:solidFill>
+                <a:latin typeface="Consolas"/>
+              </a:rPr>
+              <a:t> </a:t>
+            </a:r>
+            <a:r>
+              <a:rPr sz="1200">
+                <a:solidFill>
+                  <a:srgbClr val="F1F5F9"/>
+                </a:solidFill>
+                <a:latin typeface="Consolas"/>
+              </a:rPr>
+              <a:t>*</a:t>
+            </a:r>
+            <a:r>
+              <a:rPr sz="1200">
+                <a:solidFill>
+                  <a:srgbClr val="F1F5F9"/>
+                </a:solidFill>
+                <a:latin typeface="Consolas"/>
+              </a:rPr>
+              <a:t> </a:t>
+            </a:r>
+            <a:r>
+              <a:rPr sz="1200">
+                <a:solidFill>
+                  <a:srgbClr val="F1F5F9"/>
+                </a:solidFill>
+                <a:latin typeface="Consolas"/>
+              </a:rPr>
+              <a:t>freq2</a:t>
+            </a:r>
+            <a:r>
+              <a:rPr sz="1200">
+                <a:solidFill>
+                  <a:srgbClr val="F1F5F9"/>
+                </a:solidFill>
+                <a:latin typeface="Consolas"/>
+              </a:rPr>
+              <a:t>[</a:t>
+            </a:r>
+            <a:r>
+              <a:rPr sz="1200">
+                <a:solidFill>
+                  <a:srgbClr val="F1F5F9"/>
+                </a:solidFill>
+                <a:latin typeface="Consolas"/>
+              </a:rPr>
+              <a:t>word</a:t>
+            </a:r>
+            <a:r>
+              <a:rPr sz="1200">
+                <a:solidFill>
+                  <a:srgbClr val="F1F5F9"/>
+                </a:solidFill>
+                <a:latin typeface="Consolas"/>
+              </a:rPr>
+              <a:t>];</a:t>
             </a:r>
           </a:p>
           <a:p>
@@ -6262,15 +7396,150 @@
               <a:spcAft>
                 <a:spcPts val="200"/>
               </a:spcAft>
-              <a:defRPr sz="1200">
-                <a:solidFill>
-                  <a:srgbClr val="94E2FF"/>
-                </a:solidFill>
-                <a:latin typeface="Consolas"/>
-              </a:defRPr>
-            </a:pPr>
-            <a:r>
-              <a:t>    mag1 += freq1[word] * freq1[word];</a:t>
+            </a:pPr>
+            <a:r>
+              <a:rPr sz="1200">
+                <a:solidFill>
+                  <a:srgbClr val="F1F5F9"/>
+                </a:solidFill>
+                <a:latin typeface="Consolas"/>
+              </a:rPr>
+              <a:t>    </a:t>
+            </a:r>
+            <a:r>
+              <a:rPr sz="1200">
+                <a:solidFill>
+                  <a:srgbClr val="F1F5F9"/>
+                </a:solidFill>
+                <a:latin typeface="Consolas"/>
+              </a:rPr>
+              <a:t>mag1</a:t>
+            </a:r>
+            <a:r>
+              <a:rPr sz="1200">
+                <a:solidFill>
+                  <a:srgbClr val="F1F5F9"/>
+                </a:solidFill>
+                <a:latin typeface="Consolas"/>
+              </a:rPr>
+              <a:t> </a:t>
+            </a:r>
+            <a:r>
+              <a:rPr sz="1200">
+                <a:solidFill>
+                  <a:srgbClr val="F1F5F9"/>
+                </a:solidFill>
+                <a:latin typeface="Consolas"/>
+              </a:rPr>
+              <a:t>+=</a:t>
+            </a:r>
+            <a:r>
+              <a:rPr sz="1200">
+                <a:solidFill>
+                  <a:srgbClr val="F1F5F9"/>
+                </a:solidFill>
+                <a:latin typeface="Consolas"/>
+              </a:rPr>
+              <a:t> </a:t>
+            </a:r>
+            <a:r>
+              <a:rPr sz="1200">
+                <a:solidFill>
+                  <a:srgbClr val="F1F5F9"/>
+                </a:solidFill>
+                <a:latin typeface="Consolas"/>
+              </a:rPr>
+              <a:t>freq1</a:t>
+            </a:r>
+            <a:r>
+              <a:rPr sz="1200">
+                <a:solidFill>
+                  <a:srgbClr val="F1F5F9"/>
+                </a:solidFill>
+                <a:latin typeface="Consolas"/>
+              </a:rPr>
+              <a:t>[</a:t>
+            </a:r>
+            <a:r>
+              <a:rPr sz="1200">
+                <a:solidFill>
+                  <a:srgbClr val="F1F5F9"/>
+                </a:solidFill>
+                <a:latin typeface="Consolas"/>
+              </a:rPr>
+              <a:t>word</a:t>
+            </a:r>
+            <a:r>
+              <a:rPr sz="1200">
+                <a:solidFill>
+                  <a:srgbClr val="F1F5F9"/>
+                </a:solidFill>
+                <a:latin typeface="Consolas"/>
+              </a:rPr>
+              <a:t>]</a:t>
+            </a:r>
+            <a:r>
+              <a:rPr sz="1200">
+                <a:solidFill>
+                  <a:srgbClr val="F1F5F9"/>
+                </a:solidFill>
+                <a:latin typeface="Consolas"/>
+              </a:rPr>
+              <a:t> </a:t>
+            </a:r>
+            <a:r>
+              <a:rPr sz="1200">
+                <a:solidFill>
+                  <a:srgbClr val="F1F5F9"/>
+                </a:solidFill>
+                <a:latin typeface="Consolas"/>
+              </a:rPr>
+              <a:t>*</a:t>
+            </a:r>
+            <a:r>
+              <a:rPr sz="1200">
+                <a:solidFill>
+                  <a:srgbClr val="F1F5F9"/>
+                </a:solidFill>
+                <a:latin typeface="Consolas"/>
+              </a:rPr>
+              <a:t> </a:t>
+            </a:r>
+            <a:r>
+              <a:rPr sz="1200">
+                <a:solidFill>
+                  <a:srgbClr val="F1F5F9"/>
+                </a:solidFill>
+                <a:latin typeface="Consolas"/>
+              </a:rPr>
+              <a:t>freq1</a:t>
+            </a:r>
+            <a:r>
+              <a:rPr sz="1200">
+                <a:solidFill>
+                  <a:srgbClr val="F1F5F9"/>
+                </a:solidFill>
+                <a:latin typeface="Consolas"/>
+              </a:rPr>
+              <a:t>[</a:t>
+            </a:r>
+            <a:r>
+              <a:rPr sz="1200">
+                <a:solidFill>
+                  <a:srgbClr val="F1F5F9"/>
+                </a:solidFill>
+                <a:latin typeface="Consolas"/>
+              </a:rPr>
+              <a:t>word</a:t>
+            </a:r>
+            <a:r>
+              <a:rPr sz="1200">
+                <a:solidFill>
+                  <a:srgbClr val="F1F5F9"/>
+                </a:solidFill>
+                <a:latin typeface="Consolas"/>
+              </a:rPr>
+              <a:t>];</a:t>
             </a:r>
           </a:p>
           <a:p>
@@ -6278,15 +7547,150 @@
               <a:spcAft>
                 <a:spcPts val="200"/>
               </a:spcAft>
-              <a:defRPr sz="1200">
-                <a:solidFill>
-                  <a:srgbClr val="94E2FF"/>
-                </a:solidFill>
-                <a:latin typeface="Consolas"/>
-              </a:defRPr>
-            </a:pPr>
-            <a:r>
-              <a:t>    mag2 += freq2[word] * freq2[word];</a:t>
+            </a:pPr>
+            <a:r>
+              <a:rPr sz="1200">
+                <a:solidFill>
+                  <a:srgbClr val="F1F5F9"/>
+                </a:solidFill>
+                <a:latin typeface="Consolas"/>
+              </a:rPr>
+              <a:t>    </a:t>
+            </a:r>
+            <a:r>
+              <a:rPr sz="1200">
+                <a:solidFill>
+                  <a:srgbClr val="F1F5F9"/>
+                </a:solidFill>
+                <a:latin typeface="Consolas"/>
+              </a:rPr>
+              <a:t>mag2</a:t>
+            </a:r>
+            <a:r>
+              <a:rPr sz="1200">
+                <a:solidFill>
+                  <a:srgbClr val="F1F5F9"/>
+                </a:solidFill>
+                <a:latin typeface="Consolas"/>
+              </a:rPr>
+              <a:t> </a:t>
+            </a:r>
+            <a:r>
+              <a:rPr sz="1200">
+                <a:solidFill>
+                  <a:srgbClr val="F1F5F9"/>
+                </a:solidFill>
+                <a:latin typeface="Consolas"/>
+              </a:rPr>
+              <a:t>+=</a:t>
+            </a:r>
+            <a:r>
+              <a:rPr sz="1200">
+                <a:solidFill>
+                  <a:srgbClr val="F1F5F9"/>
+                </a:solidFill>
+                <a:latin typeface="Consolas"/>
+              </a:rPr>
+              <a:t> </a:t>
+            </a:r>
+            <a:r>
+              <a:rPr sz="1200">
+                <a:solidFill>
+                  <a:srgbClr val="F1F5F9"/>
+                </a:solidFill>
+                <a:latin typeface="Consolas"/>
+              </a:rPr>
+              <a:t>freq2</a:t>
+            </a:r>
+            <a:r>
+              <a:rPr sz="1200">
+                <a:solidFill>
+                  <a:srgbClr val="F1F5F9"/>
+                </a:solidFill>
+                <a:latin typeface="Consolas"/>
+              </a:rPr>
+              <a:t>[</a:t>
+            </a:r>
+            <a:r>
+              <a:rPr sz="1200">
+                <a:solidFill>
+                  <a:srgbClr val="F1F5F9"/>
+                </a:solidFill>
+                <a:latin typeface="Consolas"/>
+              </a:rPr>
+              <a:t>word</a:t>
+            </a:r>
+            <a:r>
+              <a:rPr sz="1200">
+                <a:solidFill>
+                  <a:srgbClr val="F1F5F9"/>
+                </a:solidFill>
+                <a:latin typeface="Consolas"/>
+              </a:rPr>
+              <a:t>]</a:t>
+            </a:r>
+            <a:r>
+              <a:rPr sz="1200">
+                <a:solidFill>
+                  <a:srgbClr val="F1F5F9"/>
+                </a:solidFill>
+                <a:latin typeface="Consolas"/>
+              </a:rPr>
+              <a:t> </a:t>
+            </a:r>
+            <a:r>
+              <a:rPr sz="1200">
+                <a:solidFill>
+                  <a:srgbClr val="F1F5F9"/>
+                </a:solidFill>
+                <a:latin typeface="Consolas"/>
+              </a:rPr>
+              <a:t>*</a:t>
+            </a:r>
+            <a:r>
+              <a:rPr sz="1200">
+                <a:solidFill>
+                  <a:srgbClr val="F1F5F9"/>
+                </a:solidFill>
+                <a:latin typeface="Consolas"/>
+              </a:rPr>
+              <a:t> </a:t>
+            </a:r>
+            <a:r>
+              <a:rPr sz="1200">
+                <a:solidFill>
+                  <a:srgbClr val="F1F5F9"/>
+                </a:solidFill>
+                <a:latin typeface="Consolas"/>
+              </a:rPr>
+              <a:t>freq2</a:t>
+            </a:r>
+            <a:r>
+              <a:rPr sz="1200">
+                <a:solidFill>
+                  <a:srgbClr val="F1F5F9"/>
+                </a:solidFill>
+                <a:latin typeface="Consolas"/>
+              </a:rPr>
+              <a:t>[</a:t>
+            </a:r>
+            <a:r>
+              <a:rPr sz="1200">
+                <a:solidFill>
+                  <a:srgbClr val="F1F5F9"/>
+                </a:solidFill>
+                <a:latin typeface="Consolas"/>
+              </a:rPr>
+              <a:t>word</a:t>
+            </a:r>
+            <a:r>
+              <a:rPr sz="1200">
+                <a:solidFill>
+                  <a:srgbClr val="F1F5F9"/>
+                </a:solidFill>
+                <a:latin typeface="Consolas"/>
+              </a:rPr>
+              <a:t>];</a:t>
             </a:r>
           </a:p>
           <a:p>
@@ -6294,14 +7698,14 @@
               <a:spcAft>
                 <a:spcPts val="200"/>
               </a:spcAft>
-              <a:defRPr sz="1200">
-                <a:solidFill>
-                  <a:srgbClr val="94E2FF"/>
-                </a:solidFill>
-                <a:latin typeface="Consolas"/>
-              </a:defRPr>
-            </a:pPr>
-            <a:r>
+            </a:pPr>
+            <a:r>
+              <a:rPr sz="1200">
+                <a:solidFill>
+                  <a:srgbClr val="F1F5F9"/>
+                </a:solidFill>
+                <a:latin typeface="Consolas"/>
+              </a:rPr>
               <a:t>});</a:t>
             </a:r>
           </a:p>
@@ -6310,15 +7714,204 @@
               <a:spcAft>
                 <a:spcPts val="200"/>
               </a:spcAft>
-              <a:defRPr sz="1200">
-                <a:solidFill>
-                  <a:srgbClr val="94E2FF"/>
-                </a:solidFill>
-                <a:latin typeface="Consolas"/>
-              </a:defRPr>
-            </a:pPr>
-            <a:r>
-              <a:t>if (mag1 === 0 || mag2 === 0) return 0;</a:t>
+            </a:pPr>
+            <a:r>
+              <a:rPr sz="1200" b="1">
+                <a:solidFill>
+                  <a:srgbClr val="F472B6"/>
+                </a:solidFill>
+                <a:latin typeface="Consolas"/>
+              </a:rPr>
+              <a:t>if</a:t>
+            </a:r>
+            <a:r>
+              <a:rPr sz="1200">
+                <a:solidFill>
+                  <a:srgbClr val="F1F5F9"/>
+                </a:solidFill>
+                <a:latin typeface="Consolas"/>
+              </a:rPr>
+              <a:t> </a:t>
+            </a:r>
+            <a:r>
+              <a:rPr sz="1200">
+                <a:solidFill>
+                  <a:srgbClr val="F1F5F9"/>
+                </a:solidFill>
+                <a:latin typeface="Consolas"/>
+              </a:rPr>
+              <a:t>(</a:t>
+            </a:r>
+            <a:r>
+              <a:rPr sz="1200">
+                <a:solidFill>
+                  <a:srgbClr val="F1F5F9"/>
+                </a:solidFill>
+                <a:latin typeface="Consolas"/>
+              </a:rPr>
+              <a:t>mag1</a:t>
+            </a:r>
+            <a:r>
+              <a:rPr sz="1200">
+                <a:solidFill>
+                  <a:srgbClr val="F1F5F9"/>
+                </a:solidFill>
+                <a:latin typeface="Consolas"/>
+              </a:rPr>
+              <a:t> </a:t>
+            </a:r>
+            <a:r>
+              <a:rPr sz="1200">
+                <a:solidFill>
+                  <a:srgbClr val="F1F5F9"/>
+                </a:solidFill>
+                <a:latin typeface="Consolas"/>
+              </a:rPr>
+              <a:t>===</a:t>
+            </a:r>
+            <a:r>
+              <a:rPr sz="1200">
+                <a:solidFill>
+                  <a:srgbClr val="F1F5F9"/>
+                </a:solidFill>
+                <a:latin typeface="Consolas"/>
+              </a:rPr>
+              <a:t> </a:t>
+            </a:r>
+            <a:r>
+              <a:rPr sz="1200">
+                <a:solidFill>
+                  <a:srgbClr val="818CF8"/>
+                </a:solidFill>
+                <a:latin typeface="Consolas"/>
+              </a:rPr>
+              <a:t>0</a:t>
+            </a:r>
+            <a:r>
+              <a:rPr sz="1200">
+                <a:solidFill>
+                  <a:srgbClr val="F1F5F9"/>
+                </a:solidFill>
+                <a:latin typeface="Consolas"/>
+              </a:rPr>
+              <a:t> </a:t>
+            </a:r>
+            <a:r>
+              <a:rPr sz="1200">
+                <a:solidFill>
+                  <a:srgbClr val="F1F5F9"/>
+                </a:solidFill>
+                <a:latin typeface="Consolas"/>
+              </a:rPr>
+              <a:t>||</a:t>
+            </a:r>
+            <a:r>
+              <a:rPr sz="1200">
+                <a:solidFill>
+                  <a:srgbClr val="F1F5F9"/>
+                </a:solidFill>
+                <a:latin typeface="Consolas"/>
+              </a:rPr>
+              <a:t> </a:t>
+            </a:r>
+            <a:r>
+              <a:rPr sz="1200">
+                <a:solidFill>
+                  <a:srgbClr val="F1F5F9"/>
+                </a:solidFill>
+                <a:latin typeface="Consolas"/>
+              </a:rPr>
+              <a:t>mag2</a:t>
+            </a:r>
+            <a:r>
+              <a:rPr sz="1200">
+                <a:solidFill>
+                  <a:srgbClr val="F1F5F9"/>
+                </a:solidFill>
+                <a:latin typeface="Consolas"/>
+              </a:rPr>
+              <a:t> </a:t>
+            </a:r>
+            <a:r>
+              <a:rPr sz="1200">
+                <a:solidFill>
+                  <a:srgbClr val="F1F5F9"/>
+                </a:solidFill>
+                <a:latin typeface="Consolas"/>
+              </a:rPr>
+              <a:t>===</a:t>
+            </a:r>
+            <a:r>
+              <a:rPr sz="1200">
+                <a:solidFill>
+                  <a:srgbClr val="F1F5F9"/>
+                </a:solidFill>
+                <a:latin typeface="Consolas"/>
+              </a:rPr>
+              <a:t> </a:t>
+            </a:r>
+            <a:r>
+              <a:rPr sz="1200">
+                <a:solidFill>
+                  <a:srgbClr val="818CF8"/>
+                </a:solidFill>
+                <a:latin typeface="Consolas"/>
+              </a:rPr>
+              <a:t>0</a:t>
+            </a:r>
+            <a:r>
+              <a:rPr sz="1200">
+                <a:solidFill>
+                  <a:srgbClr val="F1F5F9"/>
+                </a:solidFill>
+                <a:latin typeface="Consolas"/>
+              </a:rPr>
+              <a:t>)</a:t>
+            </a:r>
+            <a:r>
+              <a:rPr sz="1200">
+                <a:solidFill>
+                  <a:srgbClr val="F1F5F9"/>
+                </a:solidFill>
+                <a:latin typeface="Consolas"/>
+              </a:rPr>
+              <a:t> </a:t>
+            </a:r>
+            <a:r>
+              <a:rPr sz="1200" b="1">
+                <a:solidFill>
+                  <a:srgbClr val="F472B6"/>
+                </a:solidFill>
+                <a:latin typeface="Consolas"/>
+              </a:rPr>
+              <a:t>return</a:t>
+            </a:r>
+            <a:r>
+              <a:rPr sz="1200">
+                <a:solidFill>
+                  <a:srgbClr val="F1F5F9"/>
+                </a:solidFill>
+                <a:latin typeface="Consolas"/>
+              </a:rPr>
+              <a:t> </a:t>
+            </a:r>
+            <a:r>
+              <a:rPr sz="1200">
+                <a:solidFill>
+                  <a:srgbClr val="818CF8"/>
+                </a:solidFill>
+                <a:latin typeface="Consolas"/>
+              </a:rPr>
+              <a:t>0</a:t>
+            </a:r>
+            <a:r>
+              <a:rPr sz="1200">
+                <a:solidFill>
+                  <a:srgbClr val="F1F5F9"/>
+                </a:solidFill>
+                <a:latin typeface="Consolas"/>
+              </a:rPr>
+              <a:t>;</a:t>
             </a:r>
           </a:p>
           <a:p>
@@ -6326,15 +7919,258 @@
               <a:spcAft>
                 <a:spcPts val="200"/>
               </a:spcAft>
-              <a:defRPr sz="1200">
-                <a:solidFill>
-                  <a:srgbClr val="94E2FF"/>
-                </a:solidFill>
-                <a:latin typeface="Consolas"/>
-              </a:defRPr>
-            </a:pPr>
-            <a:r>
-              <a:t>return (dotProduct / (Math.sqrt(mag1) * Math.sqrt(mag2))) * 100;</a:t>
+            </a:pPr>
+            <a:r>
+              <a:rPr sz="1200" b="1">
+                <a:solidFill>
+                  <a:srgbClr val="F472B6"/>
+                </a:solidFill>
+                <a:latin typeface="Consolas"/>
+              </a:rPr>
+              <a:t>return</a:t>
+            </a:r>
+            <a:r>
+              <a:rPr sz="1200">
+                <a:solidFill>
+                  <a:srgbClr val="F1F5F9"/>
+                </a:solidFill>
+                <a:latin typeface="Consolas"/>
+              </a:rPr>
+              <a:t> </a:t>
+            </a:r>
+            <a:r>
+              <a:rPr sz="1200">
+                <a:solidFill>
+                  <a:srgbClr val="F1F5F9"/>
+                </a:solidFill>
+                <a:latin typeface="Consolas"/>
+              </a:rPr>
+              <a:t>(</a:t>
+            </a:r>
+            <a:r>
+              <a:rPr sz="1200">
+                <a:solidFill>
+                  <a:srgbClr val="F1F5F9"/>
+                </a:solidFill>
+                <a:latin typeface="Consolas"/>
+              </a:rPr>
+              <a:t>dotProduct</a:t>
+            </a:r>
+            <a:r>
+              <a:rPr sz="1200">
+                <a:solidFill>
+                  <a:srgbClr val="F1F5F9"/>
+                </a:solidFill>
+                <a:latin typeface="Consolas"/>
+              </a:rPr>
+              <a:t> </a:t>
+            </a:r>
+            <a:r>
+              <a:rPr sz="1200">
+                <a:solidFill>
+                  <a:srgbClr val="F1F5F9"/>
+                </a:solidFill>
+                <a:latin typeface="Consolas"/>
+              </a:rPr>
+              <a:t>/</a:t>
+            </a:r>
+            <a:r>
+              <a:rPr sz="1200">
+                <a:solidFill>
+                  <a:srgbClr val="F1F5F9"/>
+                </a:solidFill>
+                <a:latin typeface="Consolas"/>
+              </a:rPr>
+              <a:t> </a:t>
+            </a:r>
+            <a:r>
+              <a:rPr sz="1200">
+                <a:solidFill>
+                  <a:srgbClr val="F1F5F9"/>
+                </a:solidFill>
+                <a:latin typeface="Consolas"/>
+              </a:rPr>
+              <a:t>(</a:t>
+            </a:r>
+            <a:r>
+              <a:rPr sz="1200">
+                <a:solidFill>
+                  <a:srgbClr val="F1F5F9"/>
+                </a:solidFill>
+                <a:latin typeface="Consolas"/>
+              </a:rPr>
+              <a:t>Math</a:t>
+            </a:r>
+            <a:r>
+              <a:rPr sz="1200">
+                <a:solidFill>
+                  <a:srgbClr val="F1F5F9"/>
+                </a:solidFill>
+                <a:latin typeface="Consolas"/>
+              </a:rPr>
+              <a:t>.</a:t>
+            </a:r>
+            <a:r>
+              <a:rPr sz="1200">
+                <a:solidFill>
+                  <a:srgbClr val="F1F5F9"/>
+                </a:solidFill>
+                <a:latin typeface="Consolas"/>
+              </a:rPr>
+              <a:t>sqrt</a:t>
+            </a:r>
+            <a:r>
+              <a:rPr sz="1200">
+                <a:solidFill>
+                  <a:srgbClr val="F1F5F9"/>
+                </a:solidFill>
+                <a:latin typeface="Consolas"/>
+              </a:rPr>
+              <a:t>(</a:t>
+            </a:r>
+            <a:r>
+              <a:rPr sz="1200">
+                <a:solidFill>
+                  <a:srgbClr val="F1F5F9"/>
+                </a:solidFill>
+                <a:latin typeface="Consolas"/>
+              </a:rPr>
+              <a:t>mag1</a:t>
+            </a:r>
+            <a:r>
+              <a:rPr sz="1200">
+                <a:solidFill>
+                  <a:srgbClr val="F1F5F9"/>
+                </a:solidFill>
+                <a:latin typeface="Consolas"/>
+              </a:rPr>
+              <a:t>)</a:t>
+            </a:r>
+            <a:r>
+              <a:rPr sz="1200">
+                <a:solidFill>
+                  <a:srgbClr val="F1F5F9"/>
+                </a:solidFill>
+                <a:latin typeface="Consolas"/>
+              </a:rPr>
+              <a:t> </a:t>
+            </a:r>
+            <a:r>
+              <a:rPr sz="1200">
+                <a:solidFill>
+                  <a:srgbClr val="F1F5F9"/>
+                </a:solidFill>
+                <a:latin typeface="Consolas"/>
+              </a:rPr>
+              <a:t>*</a:t>
+            </a:r>
+            <a:r>
+              <a:rPr sz="1200">
+                <a:solidFill>
+                  <a:srgbClr val="F1F5F9"/>
+                </a:solidFill>
+                <a:latin typeface="Consolas"/>
+              </a:rPr>
+              <a:t> </a:t>
+            </a:r>
+            <a:r>
+              <a:rPr sz="1200">
+                <a:solidFill>
+                  <a:srgbClr val="F1F5F9"/>
+                </a:solidFill>
+                <a:latin typeface="Consolas"/>
+              </a:rPr>
+              <a:t>Math</a:t>
+            </a:r>
+            <a:r>
+              <a:rPr sz="1200">
+                <a:solidFill>
+                  <a:srgbClr val="F1F5F9"/>
+                </a:solidFill>
+                <a:latin typeface="Consolas"/>
+              </a:rPr>
+              <a:t>.</a:t>
+            </a:r>
+            <a:r>
+              <a:rPr sz="1200">
+                <a:solidFill>
+                  <a:srgbClr val="F1F5F9"/>
+                </a:solidFill>
+                <a:latin typeface="Consolas"/>
+              </a:rPr>
+              <a:t>sqrt</a:t>
+            </a:r>
+            <a:r>
+              <a:rPr sz="1200">
+                <a:solidFill>
+                  <a:srgbClr val="F1F5F9"/>
+                </a:solidFill>
+                <a:latin typeface="Consolas"/>
+              </a:rPr>
+              <a:t>(</a:t>
+            </a:r>
+            <a:r>
+              <a:rPr sz="1200">
+                <a:solidFill>
+                  <a:srgbClr val="F1F5F9"/>
+                </a:solidFill>
+                <a:latin typeface="Consolas"/>
+              </a:rPr>
+              <a:t>mag2</a:t>
+            </a:r>
+            <a:r>
+              <a:rPr sz="1200">
+                <a:solidFill>
+                  <a:srgbClr val="F1F5F9"/>
+                </a:solidFill>
+                <a:latin typeface="Consolas"/>
+              </a:rPr>
+              <a:t>)))</a:t>
+            </a:r>
+            <a:r>
+              <a:rPr sz="1200">
+                <a:solidFill>
+                  <a:srgbClr val="F1F5F9"/>
+                </a:solidFill>
+                <a:latin typeface="Consolas"/>
+              </a:rPr>
+              <a:t> </a:t>
+            </a:r>
+            <a:r>
+              <a:rPr sz="1200">
+                <a:solidFill>
+                  <a:srgbClr val="F1F5F9"/>
+                </a:solidFill>
+                <a:latin typeface="Consolas"/>
+              </a:rPr>
+              <a:t>*</a:t>
+            </a:r>
+            <a:r>
+              <a:rPr sz="1200">
+                <a:solidFill>
+                  <a:srgbClr val="F1F5F9"/>
+                </a:solidFill>
+                <a:latin typeface="Consolas"/>
+              </a:rPr>
+              <a:t> </a:t>
+            </a:r>
+            <a:r>
+              <a:rPr sz="1200">
+                <a:solidFill>
+                  <a:srgbClr val="818CF8"/>
+                </a:solidFill>
+                <a:latin typeface="Consolas"/>
+              </a:rPr>
+              <a:t>100</a:t>
+            </a:r>
+            <a:r>
+              <a:rPr sz="1200">
+                <a:solidFill>
+                  <a:srgbClr val="F1F5F9"/>
+                </a:solidFill>
+                <a:latin typeface="Consolas"/>
+              </a:rPr>
+              <a:t>;</a:t>
             </a:r>
           </a:p>
         </p:txBody>
@@ -6565,15 +8401,150 @@
               <a:spcAft>
                 <a:spcPts val="200"/>
               </a:spcAft>
-              <a:defRPr sz="1100">
-                <a:solidFill>
-                  <a:srgbClr val="94E2FF"/>
-                </a:solidFill>
-                <a:latin typeface="Consolas"/>
-              </a:defRPr>
-            </a:pPr>
-            <a:r>
-              <a:t>const words1 = new Set(t1.split(/\s+/));</a:t>
+            </a:pPr>
+            <a:r>
+              <a:rPr sz="1100" b="1">
+                <a:solidFill>
+                  <a:srgbClr val="F472B6"/>
+                </a:solidFill>
+                <a:latin typeface="Consolas"/>
+              </a:rPr>
+              <a:t>const</a:t>
+            </a:r>
+            <a:r>
+              <a:rPr sz="1100">
+                <a:solidFill>
+                  <a:srgbClr val="F1F5F9"/>
+                </a:solidFill>
+                <a:latin typeface="Consolas"/>
+              </a:rPr>
+              <a:t> </a:t>
+            </a:r>
+            <a:r>
+              <a:rPr sz="1100">
+                <a:solidFill>
+                  <a:srgbClr val="F1F5F9"/>
+                </a:solidFill>
+                <a:latin typeface="Consolas"/>
+              </a:rPr>
+              <a:t>words1</a:t>
+            </a:r>
+            <a:r>
+              <a:rPr sz="1100">
+                <a:solidFill>
+                  <a:srgbClr val="F1F5F9"/>
+                </a:solidFill>
+                <a:latin typeface="Consolas"/>
+              </a:rPr>
+              <a:t> </a:t>
+            </a:r>
+            <a:r>
+              <a:rPr sz="1100">
+                <a:solidFill>
+                  <a:srgbClr val="F1F5F9"/>
+                </a:solidFill>
+                <a:latin typeface="Consolas"/>
+              </a:rPr>
+              <a:t>=</a:t>
+            </a:r>
+            <a:r>
+              <a:rPr sz="1100">
+                <a:solidFill>
+                  <a:srgbClr val="F1F5F9"/>
+                </a:solidFill>
+                <a:latin typeface="Consolas"/>
+              </a:rPr>
+              <a:t> </a:t>
+            </a:r>
+            <a:r>
+              <a:rPr sz="1100" b="1">
+                <a:solidFill>
+                  <a:srgbClr val="F472B6"/>
+                </a:solidFill>
+                <a:latin typeface="Consolas"/>
+              </a:rPr>
+              <a:t>new</a:t>
+            </a:r>
+            <a:r>
+              <a:rPr sz="1100">
+                <a:solidFill>
+                  <a:srgbClr val="F1F5F9"/>
+                </a:solidFill>
+                <a:latin typeface="Consolas"/>
+              </a:rPr>
+              <a:t> </a:t>
+            </a:r>
+            <a:r>
+              <a:rPr sz="1100">
+                <a:solidFill>
+                  <a:srgbClr val="F1F5F9"/>
+                </a:solidFill>
+                <a:latin typeface="Consolas"/>
+              </a:rPr>
+              <a:t>Set</a:t>
+            </a:r>
+            <a:r>
+              <a:rPr sz="1100">
+                <a:solidFill>
+                  <a:srgbClr val="F1F5F9"/>
+                </a:solidFill>
+                <a:latin typeface="Consolas"/>
+              </a:rPr>
+              <a:t>(</a:t>
+            </a:r>
+            <a:r>
+              <a:rPr sz="1100">
+                <a:solidFill>
+                  <a:srgbClr val="F1F5F9"/>
+                </a:solidFill>
+                <a:latin typeface="Consolas"/>
+              </a:rPr>
+              <a:t>t1</a:t>
+            </a:r>
+            <a:r>
+              <a:rPr sz="1100">
+                <a:solidFill>
+                  <a:srgbClr val="F1F5F9"/>
+                </a:solidFill>
+                <a:latin typeface="Consolas"/>
+              </a:rPr>
+              <a:t>.</a:t>
+            </a:r>
+            <a:r>
+              <a:rPr sz="1100">
+                <a:solidFill>
+                  <a:srgbClr val="F1F5F9"/>
+                </a:solidFill>
+                <a:latin typeface="Consolas"/>
+              </a:rPr>
+              <a:t>split</a:t>
+            </a:r>
+            <a:r>
+              <a:rPr sz="1100">
+                <a:solidFill>
+                  <a:srgbClr val="F1F5F9"/>
+                </a:solidFill>
+                <a:latin typeface="Consolas"/>
+              </a:rPr>
+              <a:t>(/\</a:t>
+            </a:r>
+            <a:r>
+              <a:rPr sz="1100">
+                <a:solidFill>
+                  <a:srgbClr val="F1F5F9"/>
+                </a:solidFill>
+                <a:latin typeface="Consolas"/>
+              </a:rPr>
+              <a:t>s</a:t>
+            </a:r>
+            <a:r>
+              <a:rPr sz="1100">
+                <a:solidFill>
+                  <a:srgbClr val="F1F5F9"/>
+                </a:solidFill>
+                <a:latin typeface="Consolas"/>
+              </a:rPr>
+              <a:t>+/));</a:t>
             </a:r>
           </a:p>
           <a:p>
@@ -6581,15 +8552,150 @@
               <a:spcAft>
                 <a:spcPts val="200"/>
               </a:spcAft>
-              <a:defRPr sz="1100">
-                <a:solidFill>
-                  <a:srgbClr val="94E2FF"/>
-                </a:solidFill>
-                <a:latin typeface="Consolas"/>
-              </a:defRPr>
-            </a:pPr>
-            <a:r>
-              <a:t>const words2 = new Set(t2.split(/\s+/));</a:t>
+            </a:pPr>
+            <a:r>
+              <a:rPr sz="1100" b="1">
+                <a:solidFill>
+                  <a:srgbClr val="F472B6"/>
+                </a:solidFill>
+                <a:latin typeface="Consolas"/>
+              </a:rPr>
+              <a:t>const</a:t>
+            </a:r>
+            <a:r>
+              <a:rPr sz="1100">
+                <a:solidFill>
+                  <a:srgbClr val="F1F5F9"/>
+                </a:solidFill>
+                <a:latin typeface="Consolas"/>
+              </a:rPr>
+              <a:t> </a:t>
+            </a:r>
+            <a:r>
+              <a:rPr sz="1100">
+                <a:solidFill>
+                  <a:srgbClr val="F1F5F9"/>
+                </a:solidFill>
+                <a:latin typeface="Consolas"/>
+              </a:rPr>
+              <a:t>words2</a:t>
+            </a:r>
+            <a:r>
+              <a:rPr sz="1100">
+                <a:solidFill>
+                  <a:srgbClr val="F1F5F9"/>
+                </a:solidFill>
+                <a:latin typeface="Consolas"/>
+              </a:rPr>
+              <a:t> </a:t>
+            </a:r>
+            <a:r>
+              <a:rPr sz="1100">
+                <a:solidFill>
+                  <a:srgbClr val="F1F5F9"/>
+                </a:solidFill>
+                <a:latin typeface="Consolas"/>
+              </a:rPr>
+              <a:t>=</a:t>
+            </a:r>
+            <a:r>
+              <a:rPr sz="1100">
+                <a:solidFill>
+                  <a:srgbClr val="F1F5F9"/>
+                </a:solidFill>
+                <a:latin typeface="Consolas"/>
+              </a:rPr>
+              <a:t> </a:t>
+            </a:r>
+            <a:r>
+              <a:rPr sz="1100" b="1">
+                <a:solidFill>
+                  <a:srgbClr val="F472B6"/>
+                </a:solidFill>
+                <a:latin typeface="Consolas"/>
+              </a:rPr>
+              <a:t>new</a:t>
+            </a:r>
+            <a:r>
+              <a:rPr sz="1100">
+                <a:solidFill>
+                  <a:srgbClr val="F1F5F9"/>
+                </a:solidFill>
+                <a:latin typeface="Consolas"/>
+              </a:rPr>
+              <a:t> </a:t>
+            </a:r>
+            <a:r>
+              <a:rPr sz="1100">
+                <a:solidFill>
+                  <a:srgbClr val="F1F5F9"/>
+                </a:solidFill>
+                <a:latin typeface="Consolas"/>
+              </a:rPr>
+              <a:t>Set</a:t>
+            </a:r>
+            <a:r>
+              <a:rPr sz="1100">
+                <a:solidFill>
+                  <a:srgbClr val="F1F5F9"/>
+                </a:solidFill>
+                <a:latin typeface="Consolas"/>
+              </a:rPr>
+              <a:t>(</a:t>
+            </a:r>
+            <a:r>
+              <a:rPr sz="1100">
+                <a:solidFill>
+                  <a:srgbClr val="F1F5F9"/>
+                </a:solidFill>
+                <a:latin typeface="Consolas"/>
+              </a:rPr>
+              <a:t>t2</a:t>
+            </a:r>
+            <a:r>
+              <a:rPr sz="1100">
+                <a:solidFill>
+                  <a:srgbClr val="F1F5F9"/>
+                </a:solidFill>
+                <a:latin typeface="Consolas"/>
+              </a:rPr>
+              <a:t>.</a:t>
+            </a:r>
+            <a:r>
+              <a:rPr sz="1100">
+                <a:solidFill>
+                  <a:srgbClr val="F1F5F9"/>
+                </a:solidFill>
+                <a:latin typeface="Consolas"/>
+              </a:rPr>
+              <a:t>split</a:t>
+            </a:r>
+            <a:r>
+              <a:rPr sz="1100">
+                <a:solidFill>
+                  <a:srgbClr val="F1F5F9"/>
+                </a:solidFill>
+                <a:latin typeface="Consolas"/>
+              </a:rPr>
+              <a:t>(/\</a:t>
+            </a:r>
+            <a:r>
+              <a:rPr sz="1100">
+                <a:solidFill>
+                  <a:srgbClr val="F1F5F9"/>
+                </a:solidFill>
+                <a:latin typeface="Consolas"/>
+              </a:rPr>
+              <a:t>s</a:t>
+            </a:r>
+            <a:r>
+              <a:rPr sz="1100">
+                <a:solidFill>
+                  <a:srgbClr val="F1F5F9"/>
+                </a:solidFill>
+                <a:latin typeface="Consolas"/>
+              </a:rPr>
+              <a:t>+/));</a:t>
             </a:r>
           </a:p>
           <a:p>
@@ -6597,15 +8703,96 @@
               <a:spcAft>
                 <a:spcPts val="200"/>
               </a:spcAft>
-              <a:defRPr sz="1100">
-                <a:solidFill>
-                  <a:srgbClr val="94E2FF"/>
-                </a:solidFill>
-                <a:latin typeface="Consolas"/>
-              </a:defRPr>
-            </a:pPr>
-            <a:r>
-              <a:t>const intersection = new Set(</a:t>
+            </a:pPr>
+            <a:r>
+              <a:rPr sz="1100" b="1">
+                <a:solidFill>
+                  <a:srgbClr val="F472B6"/>
+                </a:solidFill>
+                <a:latin typeface="Consolas"/>
+              </a:rPr>
+              <a:t>const</a:t>
+            </a:r>
+            <a:r>
+              <a:rPr sz="1100">
+                <a:solidFill>
+                  <a:srgbClr val="F1F5F9"/>
+                </a:solidFill>
+                <a:latin typeface="Consolas"/>
+              </a:rPr>
+              <a:t> </a:t>
+            </a:r>
+            <a:r>
+              <a:rPr sz="1100">
+                <a:solidFill>
+                  <a:srgbClr val="F1F5F9"/>
+                </a:solidFill>
+                <a:latin typeface="Consolas"/>
+              </a:rPr>
+              <a:t>intersection</a:t>
+            </a:r>
+            <a:r>
+              <a:rPr sz="1100">
+                <a:solidFill>
+                  <a:srgbClr val="F1F5F9"/>
+                </a:solidFill>
+                <a:latin typeface="Consolas"/>
+              </a:rPr>
+              <a:t> </a:t>
+            </a:r>
+            <a:r>
+              <a:rPr sz="1100">
+                <a:solidFill>
+                  <a:srgbClr val="F1F5F9"/>
+                </a:solidFill>
+                <a:latin typeface="Consolas"/>
+              </a:rPr>
+              <a:t>=</a:t>
+            </a:r>
+            <a:r>
+              <a:rPr sz="1100">
+                <a:solidFill>
+                  <a:srgbClr val="F1F5F9"/>
+                </a:solidFill>
+                <a:latin typeface="Consolas"/>
+              </a:rPr>
+              <a:t> </a:t>
+            </a:r>
+            <a:r>
+              <a:rPr sz="1100" b="1">
+                <a:solidFill>
+                  <a:srgbClr val="F472B6"/>
+                </a:solidFill>
+                <a:latin typeface="Consolas"/>
+              </a:rPr>
+              <a:t>new</a:t>
+            </a:r>
+            <a:r>
+              <a:rPr sz="1100">
+                <a:solidFill>
+                  <a:srgbClr val="F1F5F9"/>
+                </a:solidFill>
+                <a:latin typeface="Consolas"/>
+              </a:rPr>
+              <a:t> </a:t>
+            </a:r>
+            <a:r>
+              <a:rPr sz="1100">
+                <a:solidFill>
+                  <a:srgbClr val="F1F5F9"/>
+                </a:solidFill>
+                <a:latin typeface="Consolas"/>
+              </a:rPr>
+              <a:t>Set</a:t>
+            </a:r>
+            <a:r>
+              <a:rPr sz="1100">
+                <a:solidFill>
+                  <a:srgbClr val="F1F5F9"/>
+                </a:solidFill>
+                <a:latin typeface="Consolas"/>
+              </a:rPr>
+              <a:t>(</a:t>
             </a:r>
           </a:p>
           <a:p>
@@ -6613,15 +8800,150 @@
               <a:spcAft>
                 <a:spcPts val="200"/>
               </a:spcAft>
-              <a:defRPr sz="1100">
-                <a:solidFill>
-                  <a:srgbClr val="94E2FF"/>
-                </a:solidFill>
-                <a:latin typeface="Consolas"/>
-              </a:defRPr>
-            </a:pPr>
-            <a:r>
-              <a:t>    [...words1].filter(x =&gt; words2.has(x))</a:t>
+            </a:pPr>
+            <a:r>
+              <a:rPr sz="1100">
+                <a:solidFill>
+                  <a:srgbClr val="F1F5F9"/>
+                </a:solidFill>
+                <a:latin typeface="Consolas"/>
+              </a:rPr>
+              <a:t>    </a:t>
+            </a:r>
+            <a:r>
+              <a:rPr sz="1100">
+                <a:solidFill>
+                  <a:srgbClr val="F1F5F9"/>
+                </a:solidFill>
+                <a:latin typeface="Consolas"/>
+              </a:rPr>
+              <a:t>[...</a:t>
+            </a:r>
+            <a:r>
+              <a:rPr sz="1100">
+                <a:solidFill>
+                  <a:srgbClr val="F1F5F9"/>
+                </a:solidFill>
+                <a:latin typeface="Consolas"/>
+              </a:rPr>
+              <a:t>words1</a:t>
+            </a:r>
+            <a:r>
+              <a:rPr sz="1100">
+                <a:solidFill>
+                  <a:srgbClr val="F1F5F9"/>
+                </a:solidFill>
+                <a:latin typeface="Consolas"/>
+              </a:rPr>
+              <a:t>].</a:t>
+            </a:r>
+            <a:r>
+              <a:rPr sz="1100">
+                <a:solidFill>
+                  <a:srgbClr val="F1F5F9"/>
+                </a:solidFill>
+                <a:latin typeface="Consolas"/>
+              </a:rPr>
+              <a:t>filter</a:t>
+            </a:r>
+            <a:r>
+              <a:rPr sz="1100">
+                <a:solidFill>
+                  <a:srgbClr val="F1F5F9"/>
+                </a:solidFill>
+                <a:latin typeface="Consolas"/>
+              </a:rPr>
+              <a:t>(</a:t>
+            </a:r>
+            <a:r>
+              <a:rPr sz="1100">
+                <a:solidFill>
+                  <a:srgbClr val="F1F5F9"/>
+                </a:solidFill>
+                <a:latin typeface="Consolas"/>
+              </a:rPr>
+              <a:t>x</a:t>
+            </a:r>
+            <a:r>
+              <a:rPr sz="1100">
+                <a:solidFill>
+                  <a:srgbClr val="F1F5F9"/>
+                </a:solidFill>
+                <a:latin typeface="Consolas"/>
+              </a:rPr>
+              <a:t> </a:t>
+            </a:r>
+            <a:r>
+              <a:rPr sz="1100">
+                <a:solidFill>
+                  <a:srgbClr val="F1F5F9"/>
+                </a:solidFill>
+                <a:latin typeface="Consolas"/>
+              </a:rPr>
+              <a:t>=&gt;</a:t>
+            </a:r>
+            <a:r>
+              <a:rPr sz="1100">
+                <a:solidFill>
+                  <a:srgbClr val="F1F5F9"/>
+                </a:solidFill>
+                <a:latin typeface="Consolas"/>
+              </a:rPr>
+              <a:t> </a:t>
+            </a:r>
+            <a:r>
+              <a:rPr sz="1100">
+                <a:solidFill>
+                  <a:srgbClr val="F1F5F9"/>
+                </a:solidFill>
+                <a:latin typeface="Consolas"/>
+              </a:rPr>
+              <a:t>words2</a:t>
+            </a:r>
+            <a:r>
+              <a:rPr sz="1100">
+                <a:solidFill>
+                  <a:srgbClr val="F1F5F9"/>
+                </a:solidFill>
+                <a:latin typeface="Consolas"/>
+              </a:rPr>
+              <a:t>.</a:t>
+            </a:r>
+            <a:r>
+              <a:rPr sz="1100">
+                <a:solidFill>
+                  <a:srgbClr val="F1F5F9"/>
+                </a:solidFill>
+                <a:latin typeface="Consolas"/>
+              </a:rPr>
+              <a:t>has</a:t>
+            </a:r>
+            <a:r>
+              <a:rPr sz="1100">
+                <a:solidFill>
+                  <a:srgbClr val="F1F5F9"/>
+                </a:solidFill>
+                <a:latin typeface="Consolas"/>
+              </a:rPr>
+              <a:t>(</a:t>
+            </a:r>
+            <a:r>
+              <a:rPr sz="1100">
+                <a:solidFill>
+                  <a:srgbClr val="F1F5F9"/>
+                </a:solidFill>
+                <a:latin typeface="Consolas"/>
+              </a:rPr>
+              <a:t>x</a:t>
+            </a:r>
+            <a:r>
+              <a:rPr sz="1100">
+                <a:solidFill>
+                  <a:srgbClr val="F1F5F9"/>
+                </a:solidFill>
+                <a:latin typeface="Consolas"/>
+              </a:rPr>
+              <a:t>))</a:t>
             </a:r>
           </a:p>
           <a:p>
@@ -6629,14 +8951,14 @@
               <a:spcAft>
                 <a:spcPts val="200"/>
               </a:spcAft>
-              <a:defRPr sz="1100">
-                <a:solidFill>
-                  <a:srgbClr val="94E2FF"/>
-                </a:solidFill>
-                <a:latin typeface="Consolas"/>
-              </a:defRPr>
-            </a:pPr>
-            <a:r>
+            </a:pPr>
+            <a:r>
+              <a:rPr sz="1100">
+                <a:solidFill>
+                  <a:srgbClr val="F1F5F9"/>
+                </a:solidFill>
+                <a:latin typeface="Consolas"/>
+              </a:rPr>
               <a:t>);</a:t>
             </a:r>
           </a:p>
@@ -6645,15 +8967,150 @@
               <a:spcAft>
                 <a:spcPts val="200"/>
               </a:spcAft>
-              <a:defRPr sz="1100">
-                <a:solidFill>
-                  <a:srgbClr val="94E2FF"/>
-                </a:solidFill>
-                <a:latin typeface="Consolas"/>
-              </a:defRPr>
-            </a:pPr>
-            <a:r>
-              <a:t>const union = new Set([...words1, ...words2]);</a:t>
+            </a:pPr>
+            <a:r>
+              <a:rPr sz="1100" b="1">
+                <a:solidFill>
+                  <a:srgbClr val="F472B6"/>
+                </a:solidFill>
+                <a:latin typeface="Consolas"/>
+              </a:rPr>
+              <a:t>const</a:t>
+            </a:r>
+            <a:r>
+              <a:rPr sz="1100">
+                <a:solidFill>
+                  <a:srgbClr val="F1F5F9"/>
+                </a:solidFill>
+                <a:latin typeface="Consolas"/>
+              </a:rPr>
+              <a:t> </a:t>
+            </a:r>
+            <a:r>
+              <a:rPr sz="1100">
+                <a:solidFill>
+                  <a:srgbClr val="F1F5F9"/>
+                </a:solidFill>
+                <a:latin typeface="Consolas"/>
+              </a:rPr>
+              <a:t>union</a:t>
+            </a:r>
+            <a:r>
+              <a:rPr sz="1100">
+                <a:solidFill>
+                  <a:srgbClr val="F1F5F9"/>
+                </a:solidFill>
+                <a:latin typeface="Consolas"/>
+              </a:rPr>
+              <a:t> </a:t>
+            </a:r>
+            <a:r>
+              <a:rPr sz="1100">
+                <a:solidFill>
+                  <a:srgbClr val="F1F5F9"/>
+                </a:solidFill>
+                <a:latin typeface="Consolas"/>
+              </a:rPr>
+              <a:t>=</a:t>
+            </a:r>
+            <a:r>
+              <a:rPr sz="1100">
+                <a:solidFill>
+                  <a:srgbClr val="F1F5F9"/>
+                </a:solidFill>
+                <a:latin typeface="Consolas"/>
+              </a:rPr>
+              <a:t> </a:t>
+            </a:r>
+            <a:r>
+              <a:rPr sz="1100" b="1">
+                <a:solidFill>
+                  <a:srgbClr val="F472B6"/>
+                </a:solidFill>
+                <a:latin typeface="Consolas"/>
+              </a:rPr>
+              <a:t>new</a:t>
+            </a:r>
+            <a:r>
+              <a:rPr sz="1100">
+                <a:solidFill>
+                  <a:srgbClr val="F1F5F9"/>
+                </a:solidFill>
+                <a:latin typeface="Consolas"/>
+              </a:rPr>
+              <a:t> </a:t>
+            </a:r>
+            <a:r>
+              <a:rPr sz="1100">
+                <a:solidFill>
+                  <a:srgbClr val="F1F5F9"/>
+                </a:solidFill>
+                <a:latin typeface="Consolas"/>
+              </a:rPr>
+              <a:t>Set</a:t>
+            </a:r>
+            <a:r>
+              <a:rPr sz="1100">
+                <a:solidFill>
+                  <a:srgbClr val="F1F5F9"/>
+                </a:solidFill>
+                <a:latin typeface="Consolas"/>
+              </a:rPr>
+              <a:t>([...</a:t>
+            </a:r>
+            <a:r>
+              <a:rPr sz="1100">
+                <a:solidFill>
+                  <a:srgbClr val="F1F5F9"/>
+                </a:solidFill>
+                <a:latin typeface="Consolas"/>
+              </a:rPr>
+              <a:t>words1</a:t>
+            </a:r>
+            <a:r>
+              <a:rPr sz="1100">
+                <a:solidFill>
+                  <a:srgbClr val="F1F5F9"/>
+                </a:solidFill>
+                <a:latin typeface="Consolas"/>
+              </a:rPr>
+              <a:t>,</a:t>
+            </a:r>
+            <a:r>
+              <a:rPr sz="1100">
+                <a:solidFill>
+                  <a:srgbClr val="F1F5F9"/>
+                </a:solidFill>
+                <a:latin typeface="Consolas"/>
+              </a:rPr>
+              <a:t> </a:t>
+            </a:r>
+            <a:r>
+              <a:rPr sz="1100">
+                <a:solidFill>
+                  <a:srgbClr val="F1F5F9"/>
+                </a:solidFill>
+                <a:latin typeface="Consolas"/>
+              </a:rPr>
+              <a:t>...</a:t>
+            </a:r>
+            <a:r>
+              <a:rPr sz="1100">
+                <a:solidFill>
+                  <a:srgbClr val="F1F5F9"/>
+                </a:solidFill>
+                <a:latin typeface="Consolas"/>
+              </a:rPr>
+              <a:t>words2</a:t>
+            </a:r>
+            <a:r>
+              <a:rPr sz="1100">
+                <a:solidFill>
+                  <a:srgbClr val="F1F5F9"/>
+                </a:solidFill>
+                <a:latin typeface="Consolas"/>
+              </a:rPr>
+              <a:t>]);</a:t>
             </a:r>
           </a:p>
           <a:p>
@@ -6661,15 +9118,150 @@
               <a:spcAft>
                 <a:spcPts val="200"/>
               </a:spcAft>
-              <a:defRPr sz="1100">
-                <a:solidFill>
-                  <a:srgbClr val="94E2FF"/>
-                </a:solidFill>
-                <a:latin typeface="Consolas"/>
-              </a:defRPr>
-            </a:pPr>
-            <a:r>
-              <a:t>if (union.size === 0) return 0;</a:t>
+            </a:pPr>
+            <a:r>
+              <a:rPr sz="1100" b="1">
+                <a:solidFill>
+                  <a:srgbClr val="F472B6"/>
+                </a:solidFill>
+                <a:latin typeface="Consolas"/>
+              </a:rPr>
+              <a:t>if</a:t>
+            </a:r>
+            <a:r>
+              <a:rPr sz="1100">
+                <a:solidFill>
+                  <a:srgbClr val="F1F5F9"/>
+                </a:solidFill>
+                <a:latin typeface="Consolas"/>
+              </a:rPr>
+              <a:t> </a:t>
+            </a:r>
+            <a:r>
+              <a:rPr sz="1100">
+                <a:solidFill>
+                  <a:srgbClr val="F1F5F9"/>
+                </a:solidFill>
+                <a:latin typeface="Consolas"/>
+              </a:rPr>
+              <a:t>(</a:t>
+            </a:r>
+            <a:r>
+              <a:rPr sz="1100">
+                <a:solidFill>
+                  <a:srgbClr val="F1F5F9"/>
+                </a:solidFill>
+                <a:latin typeface="Consolas"/>
+              </a:rPr>
+              <a:t>union</a:t>
+            </a:r>
+            <a:r>
+              <a:rPr sz="1100">
+                <a:solidFill>
+                  <a:srgbClr val="F1F5F9"/>
+                </a:solidFill>
+                <a:latin typeface="Consolas"/>
+              </a:rPr>
+              <a:t>.</a:t>
+            </a:r>
+            <a:r>
+              <a:rPr sz="1100">
+                <a:solidFill>
+                  <a:srgbClr val="F1F5F9"/>
+                </a:solidFill>
+                <a:latin typeface="Consolas"/>
+              </a:rPr>
+              <a:t>size</a:t>
+            </a:r>
+            <a:r>
+              <a:rPr sz="1100">
+                <a:solidFill>
+                  <a:srgbClr val="F1F5F9"/>
+                </a:solidFill>
+                <a:latin typeface="Consolas"/>
+              </a:rPr>
+              <a:t> </a:t>
+            </a:r>
+            <a:r>
+              <a:rPr sz="1100">
+                <a:solidFill>
+                  <a:srgbClr val="F1F5F9"/>
+                </a:solidFill>
+                <a:latin typeface="Consolas"/>
+              </a:rPr>
+              <a:t>===</a:t>
+            </a:r>
+            <a:r>
+              <a:rPr sz="1100">
+                <a:solidFill>
+                  <a:srgbClr val="F1F5F9"/>
+                </a:solidFill>
+                <a:latin typeface="Consolas"/>
+              </a:rPr>
+              <a:t> </a:t>
+            </a:r>
+            <a:r>
+              <a:rPr sz="1100">
+                <a:solidFill>
+                  <a:srgbClr val="818CF8"/>
+                </a:solidFill>
+                <a:latin typeface="Consolas"/>
+              </a:rPr>
+              <a:t>0</a:t>
+            </a:r>
+            <a:r>
+              <a:rPr sz="1100">
+                <a:solidFill>
+                  <a:srgbClr val="F1F5F9"/>
+                </a:solidFill>
+                <a:latin typeface="Consolas"/>
+              </a:rPr>
+              <a:t>)</a:t>
+            </a:r>
+            <a:r>
+              <a:rPr sz="1100">
+                <a:solidFill>
+                  <a:srgbClr val="F1F5F9"/>
+                </a:solidFill>
+                <a:latin typeface="Consolas"/>
+              </a:rPr>
+              <a:t> </a:t>
+            </a:r>
+            <a:r>
+              <a:rPr sz="1100" b="1">
+                <a:solidFill>
+                  <a:srgbClr val="F472B6"/>
+                </a:solidFill>
+                <a:latin typeface="Consolas"/>
+              </a:rPr>
+              <a:t>return</a:t>
+            </a:r>
+            <a:r>
+              <a:rPr sz="1100">
+                <a:solidFill>
+                  <a:srgbClr val="F1F5F9"/>
+                </a:solidFill>
+                <a:latin typeface="Consolas"/>
+              </a:rPr>
+              <a:t> </a:t>
+            </a:r>
+            <a:r>
+              <a:rPr sz="1100">
+                <a:solidFill>
+                  <a:srgbClr val="818CF8"/>
+                </a:solidFill>
+                <a:latin typeface="Consolas"/>
+              </a:rPr>
+              <a:t>0</a:t>
+            </a:r>
+            <a:r>
+              <a:rPr sz="1100">
+                <a:solidFill>
+                  <a:srgbClr val="F1F5F9"/>
+                </a:solidFill>
+                <a:latin typeface="Consolas"/>
+              </a:rPr>
+              <a:t>;</a:t>
             </a:r>
           </a:p>
           <a:p>
@@ -6677,15 +9269,168 @@
               <a:spcAft>
                 <a:spcPts val="200"/>
               </a:spcAft>
-              <a:defRPr sz="1100">
-                <a:solidFill>
-                  <a:srgbClr val="94E2FF"/>
-                </a:solidFill>
-                <a:latin typeface="Consolas"/>
-              </a:defRPr>
-            </a:pPr>
-            <a:r>
-              <a:t>return (intersection.size / union.size) * 100;</a:t>
+            </a:pPr>
+            <a:r>
+              <a:rPr sz="1100" b="1">
+                <a:solidFill>
+                  <a:srgbClr val="F472B6"/>
+                </a:solidFill>
+                <a:latin typeface="Consolas"/>
+              </a:rPr>
+              <a:t>return</a:t>
+            </a:r>
+            <a:r>
+              <a:rPr sz="1100">
+                <a:solidFill>
+                  <a:srgbClr val="F1F5F9"/>
+                </a:solidFill>
+                <a:latin typeface="Consolas"/>
+              </a:rPr>
+              <a:t> </a:t>
+            </a:r>
+            <a:r>
+              <a:rPr sz="1100">
+                <a:solidFill>
+                  <a:srgbClr val="F1F5F9"/>
+                </a:solidFill>
+                <a:latin typeface="Consolas"/>
+              </a:rPr>
+              <a:t>(</a:t>
+            </a:r>
+            <a:r>
+              <a:rPr sz="1100">
+                <a:solidFill>
+                  <a:srgbClr val="F1F5F9"/>
+                </a:solidFill>
+                <a:latin typeface="Consolas"/>
+              </a:rPr>
+              <a:t>intersection</a:t>
+            </a:r>
+            <a:r>
+              <a:rPr sz="1100">
+                <a:solidFill>
+                  <a:srgbClr val="F1F5F9"/>
+                </a:solidFill>
+                <a:latin typeface="Consolas"/>
+              </a:rPr>
+              <a:t>.</a:t>
+            </a:r>
+            <a:r>
+              <a:rPr sz="1100">
+                <a:solidFill>
+                  <a:srgbClr val="F1F5F9"/>
+                </a:solidFill>
+                <a:latin typeface="Consolas"/>
+              </a:rPr>
+              <a:t>size</a:t>
+            </a:r>
+            <a:r>
+              <a:rPr sz="1100">
+                <a:solidFill>
+                  <a:srgbClr val="F1F5F9"/>
+                </a:solidFill>
+                <a:latin typeface="Consolas"/>
+              </a:rPr>
+              <a:t> </a:t>
+            </a:r>
+            <a:r>
+              <a:rPr sz="1100">
+                <a:solidFill>
+                  <a:srgbClr val="F1F5F9"/>
+                </a:solidFill>
+                <a:latin typeface="Consolas"/>
+              </a:rPr>
+              <a:t>/</a:t>
+            </a:r>
+            <a:r>
+              <a:rPr sz="1100">
+                <a:solidFill>
+                  <a:srgbClr val="F1F5F9"/>
+                </a:solidFill>
+                <a:latin typeface="Consolas"/>
+              </a:rPr>
+              <a:t> </a:t>
+            </a:r>
+            <a:r>
+              <a:rPr sz="1100">
+                <a:solidFill>
+                  <a:srgbClr val="F1F5F9"/>
+                </a:solidFill>
+                <a:latin typeface="Consolas"/>
+              </a:rPr>
+              <a:t>union</a:t>
+            </a:r>
+            <a:r>
+              <a:rPr sz="1100">
+                <a:solidFill>
+                  <a:srgbClr val="F1F5F9"/>
+                </a:solidFill>
+                <a:latin typeface="Consolas"/>
+              </a:rPr>
+              <a:t>.</a:t>
+            </a:r>
+            <a:r>
+              <a:rPr sz="1100">
+                <a:solidFill>
+                  <a:srgbClr val="F1F5F9"/>
+                </a:solidFill>
+                <a:latin typeface="Consolas"/>
+              </a:rPr>
+              <a:t>size</a:t>
+            </a:r>
+            <a:r>
+              <a:rPr sz="1100">
+                <a:solidFill>
+                  <a:srgbClr val="F1F5F9"/>
+                </a:solidFill>
+                <a:latin typeface="Consolas"/>
+              </a:rPr>
+              <a:t>)</a:t>
+            </a:r>
+            <a:r>
+              <a:rPr sz="1100">
+                <a:solidFill>
+                  <a:srgbClr val="F1F5F9"/>
+                </a:solidFill>
+                <a:latin typeface="Consolas"/>
+              </a:rPr>
+              <a:t> </a:t>
+            </a:r>
+            <a:r>
+              <a:rPr sz="1100">
+                <a:solidFill>
+                  <a:srgbClr val="F1F5F9"/>
+                </a:solidFill>
+                <a:latin typeface="Consolas"/>
+              </a:rPr>
+              <a:t>*</a:t>
+            </a:r>
+            <a:r>
+              <a:rPr sz="1100">
+                <a:solidFill>
+                  <a:srgbClr val="F1F5F9"/>
+                </a:solidFill>
+                <a:latin typeface="Consolas"/>
+              </a:rPr>
+              <a:t> </a:t>
+            </a:r>
+            <a:r>
+              <a:rPr sz="1100">
+                <a:solidFill>
+                  <a:srgbClr val="818CF8"/>
+                </a:solidFill>
+                <a:latin typeface="Consolas"/>
+              </a:rPr>
+              <a:t>100</a:t>
+            </a:r>
+            <a:r>
+              <a:rPr sz="1100">
+                <a:solidFill>
+                  <a:srgbClr val="F1F5F9"/>
+                </a:solidFill>
+                <a:latin typeface="Consolas"/>
+              </a:rPr>
+              <a:t>;</a:t>
             </a:r>
           </a:p>
         </p:txBody>
@@ -7326,14 +10071,14 @@
               <a:spcAft>
                 <a:spcPts val="200"/>
               </a:spcAft>
-              <a:defRPr sz="1200">
-                <a:solidFill>
-                  <a:srgbClr val="94E2FF"/>
-                </a:solidFill>
-                <a:latin typeface="Consolas"/>
-              </a:defRPr>
-            </a:pPr>
-            <a:r>
+            </a:pPr>
+            <a:r>
+              <a:rPr sz="1200">
+                <a:solidFill>
+                  <a:srgbClr val="64748B"/>
+                </a:solidFill>
+                <a:latin typeface="Consolas"/>
+              </a:rPr>
               <a:t>// Radial Gauge update logic in JS</a:t>
             </a:r>
           </a:p>
@@ -7342,15 +10087,132 @@
               <a:spcAft>
                 <a:spcPts val="200"/>
               </a:spcAft>
-              <a:defRPr sz="1200">
-                <a:solidFill>
-                  <a:srgbClr val="94E2FF"/>
-                </a:solidFill>
-                <a:latin typeface="Consolas"/>
-              </a:defRPr>
-            </a:pPr>
-            <a:r>
-              <a:t>const circle = document.getElementById('radial-bar');</a:t>
+            </a:pPr>
+            <a:r>
+              <a:rPr sz="1200" b="1">
+                <a:solidFill>
+                  <a:srgbClr val="F472B6"/>
+                </a:solidFill>
+                <a:latin typeface="Consolas"/>
+              </a:rPr>
+              <a:t>const</a:t>
+            </a:r>
+            <a:r>
+              <a:rPr sz="1200">
+                <a:solidFill>
+                  <a:srgbClr val="F1F5F9"/>
+                </a:solidFill>
+                <a:latin typeface="Consolas"/>
+              </a:rPr>
+              <a:t> </a:t>
+            </a:r>
+            <a:r>
+              <a:rPr sz="1200">
+                <a:solidFill>
+                  <a:srgbClr val="38BDF8"/>
+                </a:solidFill>
+                <a:latin typeface="Consolas"/>
+              </a:rPr>
+              <a:t>circle</a:t>
+            </a:r>
+            <a:r>
+              <a:rPr sz="1200">
+                <a:solidFill>
+                  <a:srgbClr val="F1F5F9"/>
+                </a:solidFill>
+                <a:latin typeface="Consolas"/>
+              </a:rPr>
+              <a:t> </a:t>
+            </a:r>
+            <a:r>
+              <a:rPr sz="1200">
+                <a:solidFill>
+                  <a:srgbClr val="F1F5F9"/>
+                </a:solidFill>
+                <a:latin typeface="Consolas"/>
+              </a:rPr>
+              <a:t>=</a:t>
+            </a:r>
+            <a:r>
+              <a:rPr sz="1200">
+                <a:solidFill>
+                  <a:srgbClr val="F1F5F9"/>
+                </a:solidFill>
+                <a:latin typeface="Consolas"/>
+              </a:rPr>
+              <a:t> </a:t>
+            </a:r>
+            <a:r>
+              <a:rPr sz="1200">
+                <a:solidFill>
+                  <a:srgbClr val="38BDF8"/>
+                </a:solidFill>
+                <a:latin typeface="Consolas"/>
+              </a:rPr>
+              <a:t>document</a:t>
+            </a:r>
+            <a:r>
+              <a:rPr sz="1200">
+                <a:solidFill>
+                  <a:srgbClr val="F1F5F9"/>
+                </a:solidFill>
+                <a:latin typeface="Consolas"/>
+              </a:rPr>
+              <a:t>.</a:t>
+            </a:r>
+            <a:r>
+              <a:rPr sz="1200">
+                <a:solidFill>
+                  <a:srgbClr val="F1F5F9"/>
+                </a:solidFill>
+                <a:latin typeface="Consolas"/>
+              </a:rPr>
+              <a:t>getElementById</a:t>
+            </a:r>
+            <a:r>
+              <a:rPr sz="1200">
+                <a:solidFill>
+                  <a:srgbClr val="F1F5F9"/>
+                </a:solidFill>
+                <a:latin typeface="Consolas"/>
+              </a:rPr>
+              <a:t>('</a:t>
+            </a:r>
+            <a:r>
+              <a:rPr sz="1200">
+                <a:solidFill>
+                  <a:srgbClr val="F1F5F9"/>
+                </a:solidFill>
+                <a:latin typeface="Consolas"/>
+              </a:rPr>
+              <a:t>radial</a:t>
+            </a:r>
+            <a:r>
+              <a:rPr sz="1200">
+                <a:solidFill>
+                  <a:srgbClr val="F1F5F9"/>
+                </a:solidFill>
+                <a:latin typeface="Consolas"/>
+              </a:rPr>
+              <a:t>-</a:t>
+            </a:r>
+            <a:r>
+              <a:rPr sz="1200">
+                <a:solidFill>
+                  <a:srgbClr val="F1F5F9"/>
+                </a:solidFill>
+                <a:latin typeface="Consolas"/>
+              </a:rPr>
+              <a:t>bar</a:t>
+            </a:r>
+            <a:r>
+              <a:rPr sz="1200">
+                <a:solidFill>
+                  <a:srgbClr val="FDBA74"/>
+                </a:solidFill>
+                <a:latin typeface="Consolas"/>
+              </a:rPr>
+              <a:t>');</a:t>
             </a:r>
           </a:p>
           <a:p>
@@ -7358,15 +10220,96 @@
               <a:spcAft>
                 <a:spcPts val="200"/>
               </a:spcAft>
-              <a:defRPr sz="1200">
-                <a:solidFill>
-                  <a:srgbClr val="94E2FF"/>
-                </a:solidFill>
-                <a:latin typeface="Consolas"/>
-              </a:defRPr>
-            </a:pPr>
-            <a:r>
-              <a:t>const circumference = 326.7;</a:t>
+            </a:pPr>
+            <a:r>
+              <a:rPr sz="1200" b="1">
+                <a:solidFill>
+                  <a:srgbClr val="F472B6"/>
+                </a:solidFill>
+                <a:latin typeface="Consolas"/>
+              </a:rPr>
+              <a:t>const</a:t>
+            </a:r>
+            <a:r>
+              <a:rPr sz="1200">
+                <a:solidFill>
+                  <a:srgbClr val="F1F5F9"/>
+                </a:solidFill>
+                <a:latin typeface="Consolas"/>
+              </a:rPr>
+              <a:t> </a:t>
+            </a:r>
+            <a:r>
+              <a:rPr sz="1200">
+                <a:solidFill>
+                  <a:srgbClr val="F1F5F9"/>
+                </a:solidFill>
+                <a:latin typeface="Consolas"/>
+              </a:rPr>
+              <a:t>circumference</a:t>
+            </a:r>
+            <a:r>
+              <a:rPr sz="1200">
+                <a:solidFill>
+                  <a:srgbClr val="F1F5F9"/>
+                </a:solidFill>
+                <a:latin typeface="Consolas"/>
+              </a:rPr>
+              <a:t> </a:t>
+            </a:r>
+            <a:r>
+              <a:rPr sz="1200">
+                <a:solidFill>
+                  <a:srgbClr val="F1F5F9"/>
+                </a:solidFill>
+                <a:latin typeface="Consolas"/>
+              </a:rPr>
+              <a:t>=</a:t>
+            </a:r>
+            <a:r>
+              <a:rPr sz="1200">
+                <a:solidFill>
+                  <a:srgbClr val="F1F5F9"/>
+                </a:solidFill>
+                <a:latin typeface="Consolas"/>
+              </a:rPr>
+              <a:t> </a:t>
+            </a:r>
+            <a:r>
+              <a:rPr sz="1200">
+                <a:solidFill>
+                  <a:srgbClr val="818CF8"/>
+                </a:solidFill>
+                <a:latin typeface="Consolas"/>
+              </a:rPr>
+              <a:t>326</a:t>
+            </a:r>
+            <a:r>
+              <a:rPr sz="1200">
+                <a:solidFill>
+                  <a:srgbClr val="F1F5F9"/>
+                </a:solidFill>
+                <a:latin typeface="Consolas"/>
+              </a:rPr>
+              <a:t>.</a:t>
+            </a:r>
+            <a:r>
+              <a:rPr sz="1200">
+                <a:solidFill>
+                  <a:srgbClr val="818CF8"/>
+                </a:solidFill>
+                <a:latin typeface="Consolas"/>
+              </a:rPr>
+              <a:t>7</a:t>
+            </a:r>
+            <a:r>
+              <a:rPr sz="1200">
+                <a:solidFill>
+                  <a:srgbClr val="F1F5F9"/>
+                </a:solidFill>
+                <a:latin typeface="Consolas"/>
+              </a:rPr>
+              <a:t>;</a:t>
             </a:r>
           </a:p>
           <a:p>
@@ -7374,15 +10317,96 @@
               <a:spcAft>
                 <a:spcPts val="200"/>
               </a:spcAft>
-              <a:defRPr sz="1200">
-                <a:solidFill>
-                  <a:srgbClr val="94E2FF"/>
-                </a:solidFill>
-                <a:latin typeface="Consolas"/>
-              </a:defRPr>
-            </a:pPr>
-            <a:r>
-              <a:t>const offset = circumference - </a:t>
+            </a:pPr>
+            <a:r>
+              <a:rPr sz="1200" b="1">
+                <a:solidFill>
+                  <a:srgbClr val="F472B6"/>
+                </a:solidFill>
+                <a:latin typeface="Consolas"/>
+              </a:rPr>
+              <a:t>const</a:t>
+            </a:r>
+            <a:r>
+              <a:rPr sz="1200">
+                <a:solidFill>
+                  <a:srgbClr val="F1F5F9"/>
+                </a:solidFill>
+                <a:latin typeface="Consolas"/>
+              </a:rPr>
+              <a:t> </a:t>
+            </a:r>
+            <a:r>
+              <a:rPr sz="1200">
+                <a:solidFill>
+                  <a:srgbClr val="F1F5F9"/>
+                </a:solidFill>
+                <a:latin typeface="Consolas"/>
+              </a:rPr>
+              <a:t>offset</a:t>
+            </a:r>
+            <a:r>
+              <a:rPr sz="1200">
+                <a:solidFill>
+                  <a:srgbClr val="F1F5F9"/>
+                </a:solidFill>
+                <a:latin typeface="Consolas"/>
+              </a:rPr>
+              <a:t> </a:t>
+            </a:r>
+            <a:r>
+              <a:rPr sz="1200">
+                <a:solidFill>
+                  <a:srgbClr val="F1F5F9"/>
+                </a:solidFill>
+                <a:latin typeface="Consolas"/>
+              </a:rPr>
+              <a:t>=</a:t>
+            </a:r>
+            <a:r>
+              <a:rPr sz="1200">
+                <a:solidFill>
+                  <a:srgbClr val="F1F5F9"/>
+                </a:solidFill>
+                <a:latin typeface="Consolas"/>
+              </a:rPr>
+              <a:t> </a:t>
+            </a:r>
+            <a:r>
+              <a:rPr sz="1200">
+                <a:solidFill>
+                  <a:srgbClr val="F1F5F9"/>
+                </a:solidFill>
+                <a:latin typeface="Consolas"/>
+              </a:rPr>
+              <a:t>circumference</a:t>
+            </a:r>
+            <a:r>
+              <a:rPr sz="1200">
+                <a:solidFill>
+                  <a:srgbClr val="F1F5F9"/>
+                </a:solidFill>
+                <a:latin typeface="Consolas"/>
+              </a:rPr>
+              <a:t> </a:t>
+            </a:r>
+            <a:r>
+              <a:rPr sz="1200">
+                <a:solidFill>
+                  <a:srgbClr val="F1F5F9"/>
+                </a:solidFill>
+                <a:latin typeface="Consolas"/>
+              </a:rPr>
+              <a:t>-</a:t>
+            </a:r>
+            <a:r>
+              <a:rPr sz="1200">
+                <a:solidFill>
+                  <a:srgbClr val="F1F5F9"/>
+                </a:solidFill>
+                <a:latin typeface="Consolas"/>
+              </a:rPr>
+              <a:t> </a:t>
             </a:r>
           </a:p>
           <a:p>
@@ -7390,15 +10414,114 @@
               <a:spcAft>
                 <a:spcPts val="200"/>
               </a:spcAft>
-              <a:defRPr sz="1200">
-                <a:solidFill>
-                  <a:srgbClr val="94E2FF"/>
-                </a:solidFill>
-                <a:latin typeface="Consolas"/>
-              </a:defRPr>
-            </a:pPr>
-            <a:r>
-              <a:t>      (circumference * scoreInt / 100);</a:t>
+            </a:pPr>
+            <a:r>
+              <a:rPr sz="1200">
+                <a:solidFill>
+                  <a:srgbClr val="F1F5F9"/>
+                </a:solidFill>
+                <a:latin typeface="Consolas"/>
+              </a:rPr>
+              <a:t>      </a:t>
+            </a:r>
+            <a:r>
+              <a:rPr sz="1200">
+                <a:solidFill>
+                  <a:srgbClr val="F1F5F9"/>
+                </a:solidFill>
+                <a:latin typeface="Consolas"/>
+              </a:rPr>
+              <a:t>(</a:t>
+            </a:r>
+            <a:r>
+              <a:rPr sz="1200">
+                <a:solidFill>
+                  <a:srgbClr val="F1F5F9"/>
+                </a:solidFill>
+                <a:latin typeface="Consolas"/>
+              </a:rPr>
+              <a:t>circumference</a:t>
+            </a:r>
+            <a:r>
+              <a:rPr sz="1200">
+                <a:solidFill>
+                  <a:srgbClr val="F1F5F9"/>
+                </a:solidFill>
+                <a:latin typeface="Consolas"/>
+              </a:rPr>
+              <a:t> </a:t>
+            </a:r>
+            <a:r>
+              <a:rPr sz="1200">
+                <a:solidFill>
+                  <a:srgbClr val="F1F5F9"/>
+                </a:solidFill>
+                <a:latin typeface="Consolas"/>
+              </a:rPr>
+              <a:t>*</a:t>
+            </a:r>
+            <a:r>
+              <a:rPr sz="1200">
+                <a:solidFill>
+                  <a:srgbClr val="F1F5F9"/>
+                </a:solidFill>
+                <a:latin typeface="Consolas"/>
+              </a:rPr>
+              <a:t> </a:t>
+            </a:r>
+            <a:r>
+              <a:rPr sz="1200">
+                <a:solidFill>
+                  <a:srgbClr val="F1F5F9"/>
+                </a:solidFill>
+                <a:latin typeface="Consolas"/>
+              </a:rPr>
+              <a:t>scoreInt</a:t>
+            </a:r>
+            <a:r>
+              <a:rPr sz="1200">
+                <a:solidFill>
+                  <a:srgbClr val="F1F5F9"/>
+                </a:solidFill>
+                <a:latin typeface="Consolas"/>
+              </a:rPr>
+              <a:t> </a:t>
+            </a:r>
+            <a:r>
+              <a:rPr sz="1200">
+                <a:solidFill>
+                  <a:srgbClr val="F1F5F9"/>
+                </a:solidFill>
+                <a:latin typeface="Consolas"/>
+              </a:rPr>
+              <a:t>/</a:t>
+            </a:r>
+            <a:r>
+              <a:rPr sz="1200">
+                <a:solidFill>
+                  <a:srgbClr val="F1F5F9"/>
+                </a:solidFill>
+                <a:latin typeface="Consolas"/>
+              </a:rPr>
+              <a:t> </a:t>
+            </a:r>
+            <a:r>
+              <a:rPr sz="1200">
+                <a:solidFill>
+                  <a:srgbClr val="818CF8"/>
+                </a:solidFill>
+                <a:latin typeface="Consolas"/>
+              </a:rPr>
+              <a:t>100</a:t>
+            </a:r>
+            <a:r>
+              <a:rPr sz="1200">
+                <a:solidFill>
+                  <a:srgbClr val="F1F5F9"/>
+                </a:solidFill>
+                <a:latin typeface="Consolas"/>
+              </a:rPr>
+              <a:t>);</a:t>
             </a:r>
           </a:p>
           <a:p>
@@ -7406,15 +10529,96 @@
               <a:spcAft>
                 <a:spcPts val="200"/>
               </a:spcAft>
-              <a:defRPr sz="1200">
-                <a:solidFill>
-                  <a:srgbClr val="94E2FF"/>
-                </a:solidFill>
-                <a:latin typeface="Consolas"/>
-              </a:defRPr>
-            </a:pPr>
-            <a:r>
-              <a:t>circle.style.strokeDashoffset = offset;</a:t>
+            </a:pPr>
+            <a:r>
+              <a:rPr sz="1200">
+                <a:solidFill>
+                  <a:srgbClr val="38BDF8"/>
+                </a:solidFill>
+                <a:latin typeface="Consolas"/>
+              </a:rPr>
+              <a:t>circle</a:t>
+            </a:r>
+            <a:r>
+              <a:rPr sz="1200">
+                <a:solidFill>
+                  <a:srgbClr val="F1F5F9"/>
+                </a:solidFill>
+                <a:latin typeface="Consolas"/>
+              </a:rPr>
+              <a:t>.</a:t>
+            </a:r>
+            <a:r>
+              <a:rPr sz="1200">
+                <a:solidFill>
+                  <a:srgbClr val="F1F5F9"/>
+                </a:solidFill>
+                <a:latin typeface="Consolas"/>
+              </a:rPr>
+              <a:t>style</a:t>
+            </a:r>
+            <a:r>
+              <a:rPr sz="1200">
+                <a:solidFill>
+                  <a:srgbClr val="F1F5F9"/>
+                </a:solidFill>
+                <a:latin typeface="Consolas"/>
+              </a:rPr>
+              <a:t>.</a:t>
+            </a:r>
+            <a:r>
+              <a:rPr sz="1200">
+                <a:solidFill>
+                  <a:srgbClr val="F1F5F9"/>
+                </a:solidFill>
+                <a:latin typeface="Consolas"/>
+              </a:rPr>
+              <a:t>strokeDashoffset</a:t>
+            </a:r>
+            <a:r>
+              <a:rPr sz="1200">
+                <a:solidFill>
+                  <a:srgbClr val="F1F5F9"/>
+                </a:solidFill>
+                <a:latin typeface="Consolas"/>
+              </a:rPr>
+              <a:t> </a:t>
+            </a:r>
+            <a:r>
+              <a:rPr sz="1200">
+                <a:solidFill>
+                  <a:srgbClr val="F1F5F9"/>
+                </a:solidFill>
+                <a:latin typeface="Consolas"/>
+              </a:rPr>
+              <a:t>=</a:t>
+            </a:r>
+            <a:r>
+              <a:rPr sz="1200">
+                <a:solidFill>
+                  <a:srgbClr val="F1F5F9"/>
+                </a:solidFill>
+                <a:latin typeface="Consolas"/>
+              </a:rPr>
+              <a:t> </a:t>
+            </a:r>
+            <a:r>
+              <a:rPr sz="1200">
+                <a:solidFill>
+                  <a:srgbClr val="F1F5F9"/>
+                </a:solidFill>
+                <a:latin typeface="Consolas"/>
+              </a:rPr>
+              <a:t>offset</a:t>
+            </a:r>
+            <a:r>
+              <a:rPr sz="1200">
+                <a:solidFill>
+                  <a:srgbClr val="F1F5F9"/>
+                </a:solidFill>
+                <a:latin typeface="Consolas"/>
+              </a:rPr>
+              <a:t>;</a:t>
             </a:r>
           </a:p>
           <a:p>
@@ -7422,15 +10626,96 @@
               <a:spcAft>
                 <a:spcPts val="200"/>
               </a:spcAft>
-              <a:defRPr sz="1200">
-                <a:solidFill>
-                  <a:srgbClr val="94E2FF"/>
-                </a:solidFill>
-                <a:latin typeface="Consolas"/>
-              </a:defRPr>
-            </a:pPr>
-            <a:r>
-              <a:t>circle.style.stroke = color;</a:t>
+            </a:pPr>
+            <a:r>
+              <a:rPr sz="1200">
+                <a:solidFill>
+                  <a:srgbClr val="38BDF8"/>
+                </a:solidFill>
+                <a:latin typeface="Consolas"/>
+              </a:rPr>
+              <a:t>circle</a:t>
+            </a:r>
+            <a:r>
+              <a:rPr sz="1200">
+                <a:solidFill>
+                  <a:srgbClr val="F1F5F9"/>
+                </a:solidFill>
+                <a:latin typeface="Consolas"/>
+              </a:rPr>
+              <a:t>.</a:t>
+            </a:r>
+            <a:r>
+              <a:rPr sz="1200">
+                <a:solidFill>
+                  <a:srgbClr val="F1F5F9"/>
+                </a:solidFill>
+                <a:latin typeface="Consolas"/>
+              </a:rPr>
+              <a:t>style</a:t>
+            </a:r>
+            <a:r>
+              <a:rPr sz="1200">
+                <a:solidFill>
+                  <a:srgbClr val="F1F5F9"/>
+                </a:solidFill>
+                <a:latin typeface="Consolas"/>
+              </a:rPr>
+              <a:t>.</a:t>
+            </a:r>
+            <a:r>
+              <a:rPr sz="1200">
+                <a:solidFill>
+                  <a:srgbClr val="F1F5F9"/>
+                </a:solidFill>
+                <a:latin typeface="Consolas"/>
+              </a:rPr>
+              <a:t>stroke</a:t>
+            </a:r>
+            <a:r>
+              <a:rPr sz="1200">
+                <a:solidFill>
+                  <a:srgbClr val="F1F5F9"/>
+                </a:solidFill>
+                <a:latin typeface="Consolas"/>
+              </a:rPr>
+              <a:t> </a:t>
+            </a:r>
+            <a:r>
+              <a:rPr sz="1200">
+                <a:solidFill>
+                  <a:srgbClr val="F1F5F9"/>
+                </a:solidFill>
+                <a:latin typeface="Consolas"/>
+              </a:rPr>
+              <a:t>=</a:t>
+            </a:r>
+            <a:r>
+              <a:rPr sz="1200">
+                <a:solidFill>
+                  <a:srgbClr val="F1F5F9"/>
+                </a:solidFill>
+                <a:latin typeface="Consolas"/>
+              </a:rPr>
+              <a:t> </a:t>
+            </a:r>
+            <a:r>
+              <a:rPr sz="1200">
+                <a:solidFill>
+                  <a:srgbClr val="F1F5F9"/>
+                </a:solidFill>
+                <a:latin typeface="Consolas"/>
+              </a:rPr>
+              <a:t>color</a:t>
+            </a:r>
+            <a:r>
+              <a:rPr sz="1200">
+                <a:solidFill>
+                  <a:srgbClr val="F1F5F9"/>
+                </a:solidFill>
+                <a:latin typeface="Consolas"/>
+              </a:rPr>
+              <a:t>;</a:t>
             </a:r>
           </a:p>
           <a:p>
@@ -7438,15 +10723,78 @@
               <a:spcAft>
                 <a:spcPts val="200"/>
               </a:spcAft>
-              <a:defRPr sz="1200">
-                <a:solidFill>
-                  <a:srgbClr val="94E2FF"/>
-                </a:solidFill>
-                <a:latin typeface="Consolas"/>
-              </a:defRPr>
-            </a:pPr>
-            <a:r>
-              <a:t>circle.style.filter = </a:t>
+            </a:pPr>
+            <a:r>
+              <a:rPr sz="1200">
+                <a:solidFill>
+                  <a:srgbClr val="38BDF8"/>
+                </a:solidFill>
+                <a:latin typeface="Consolas"/>
+              </a:rPr>
+              <a:t>circle</a:t>
+            </a:r>
+            <a:r>
+              <a:rPr sz="1200">
+                <a:solidFill>
+                  <a:srgbClr val="F1F5F9"/>
+                </a:solidFill>
+                <a:latin typeface="Consolas"/>
+              </a:rPr>
+              <a:t>.</a:t>
+            </a:r>
+            <a:r>
+              <a:rPr sz="1200">
+                <a:solidFill>
+                  <a:srgbClr val="F1F5F9"/>
+                </a:solidFill>
+                <a:latin typeface="Consolas"/>
+              </a:rPr>
+              <a:t>style</a:t>
+            </a:r>
+            <a:r>
+              <a:rPr sz="1200">
+                <a:solidFill>
+                  <a:srgbClr val="F1F5F9"/>
+                </a:solidFill>
+                <a:latin typeface="Consolas"/>
+              </a:rPr>
+              <a:t>.</a:t>
+            </a:r>
+            <a:r>
+              <a:rPr sz="1200">
+                <a:solidFill>
+                  <a:srgbClr val="F1F5F9"/>
+                </a:solidFill>
+                <a:latin typeface="Consolas"/>
+              </a:rPr>
+              <a:t>filter</a:t>
+            </a:r>
+            <a:r>
+              <a:rPr sz="1200">
+                <a:solidFill>
+                  <a:srgbClr val="F1F5F9"/>
+                </a:solidFill>
+                <a:latin typeface="Consolas"/>
+              </a:rPr>
+              <a:t> </a:t>
+            </a:r>
+            <a:r>
+              <a:rPr sz="1200">
+                <a:solidFill>
+                  <a:srgbClr val="F1F5F9"/>
+                </a:solidFill>
+                <a:latin typeface="Consolas"/>
+              </a:rPr>
+              <a:t>=</a:t>
+            </a:r>
+            <a:r>
+              <a:rPr sz="1200">
+                <a:solidFill>
+                  <a:srgbClr val="F1F5F9"/>
+                </a:solidFill>
+                <a:latin typeface="Consolas"/>
+              </a:rPr>
+              <a:t> </a:t>
             </a:r>
           </a:p>
           <a:p>
@@ -7454,15 +10802,159 @@
               <a:spcAft>
                 <a:spcPts val="200"/>
               </a:spcAft>
-              <a:defRPr sz="1200">
-                <a:solidFill>
-                  <a:srgbClr val="94E2FF"/>
-                </a:solidFill>
-                <a:latin typeface="Consolas"/>
-              </a:defRPr>
-            </a:pPr>
-            <a:r>
-              <a:t>      `drop-shadow(0 0 8px ${color}80)`;</a:t>
+            </a:pPr>
+            <a:r>
+              <a:rPr sz="1200">
+                <a:solidFill>
+                  <a:srgbClr val="F1F5F9"/>
+                </a:solidFill>
+                <a:latin typeface="Consolas"/>
+              </a:rPr>
+              <a:t>      </a:t>
+            </a:r>
+            <a:r>
+              <a:rPr sz="1200">
+                <a:solidFill>
+                  <a:srgbClr val="F1F5F9"/>
+                </a:solidFill>
+                <a:latin typeface="Consolas"/>
+              </a:rPr>
+              <a:t>`</a:t>
+            </a:r>
+            <a:r>
+              <a:rPr sz="1200">
+                <a:solidFill>
+                  <a:srgbClr val="F1F5F9"/>
+                </a:solidFill>
+                <a:latin typeface="Consolas"/>
+              </a:rPr>
+              <a:t>drop</a:t>
+            </a:r>
+            <a:r>
+              <a:rPr sz="1200">
+                <a:solidFill>
+                  <a:srgbClr val="F1F5F9"/>
+                </a:solidFill>
+                <a:latin typeface="Consolas"/>
+              </a:rPr>
+              <a:t>-</a:t>
+            </a:r>
+            <a:r>
+              <a:rPr sz="1200">
+                <a:solidFill>
+                  <a:srgbClr val="F1F5F9"/>
+                </a:solidFill>
+                <a:latin typeface="Consolas"/>
+              </a:rPr>
+              <a:t>shadow</a:t>
+            </a:r>
+            <a:r>
+              <a:rPr sz="1200">
+                <a:solidFill>
+                  <a:srgbClr val="F1F5F9"/>
+                </a:solidFill>
+                <a:latin typeface="Consolas"/>
+              </a:rPr>
+              <a:t>(</a:t>
+            </a:r>
+            <a:r>
+              <a:rPr sz="1200">
+                <a:solidFill>
+                  <a:srgbClr val="818CF8"/>
+                </a:solidFill>
+                <a:latin typeface="Consolas"/>
+              </a:rPr>
+              <a:t>0</a:t>
+            </a:r>
+            <a:r>
+              <a:rPr sz="1200">
+                <a:solidFill>
+                  <a:srgbClr val="F1F5F9"/>
+                </a:solidFill>
+                <a:latin typeface="Consolas"/>
+              </a:rPr>
+              <a:t> </a:t>
+            </a:r>
+            <a:r>
+              <a:rPr sz="1200">
+                <a:solidFill>
+                  <a:srgbClr val="818CF8"/>
+                </a:solidFill>
+                <a:latin typeface="Consolas"/>
+              </a:rPr>
+              <a:t>0</a:t>
+            </a:r>
+            <a:r>
+              <a:rPr sz="1200">
+                <a:solidFill>
+                  <a:srgbClr val="F1F5F9"/>
+                </a:solidFill>
+                <a:latin typeface="Consolas"/>
+              </a:rPr>
+              <a:t> </a:t>
+            </a:r>
+            <a:r>
+              <a:rPr sz="1200">
+                <a:solidFill>
+                  <a:srgbClr val="F1F5F9"/>
+                </a:solidFill>
+                <a:latin typeface="Consolas"/>
+              </a:rPr>
+              <a:t>8px</a:t>
+            </a:r>
+            <a:r>
+              <a:rPr sz="1200">
+                <a:solidFill>
+                  <a:srgbClr val="F1F5F9"/>
+                </a:solidFill>
+                <a:latin typeface="Consolas"/>
+              </a:rPr>
+              <a:t> </a:t>
+            </a:r>
+            <a:r>
+              <a:rPr sz="1200">
+                <a:solidFill>
+                  <a:srgbClr val="F1F5F9"/>
+                </a:solidFill>
+                <a:latin typeface="Consolas"/>
+              </a:rPr>
+              <a:t>${</a:t>
+            </a:r>
+            <a:r>
+              <a:rPr sz="1200">
+                <a:solidFill>
+                  <a:srgbClr val="F1F5F9"/>
+                </a:solidFill>
+                <a:latin typeface="Consolas"/>
+              </a:rPr>
+              <a:t>color</a:t>
+            </a:r>
+            <a:r>
+              <a:rPr sz="1200">
+                <a:solidFill>
+                  <a:srgbClr val="F1F5F9"/>
+                </a:solidFill>
+                <a:latin typeface="Consolas"/>
+              </a:rPr>
+              <a:t>}</a:t>
+            </a:r>
+            <a:r>
+              <a:rPr sz="1200">
+                <a:solidFill>
+                  <a:srgbClr val="818CF8"/>
+                </a:solidFill>
+                <a:latin typeface="Consolas"/>
+              </a:rPr>
+              <a:t>80</a:t>
+            </a:r>
+            <a:r>
+              <a:rPr sz="1200">
+                <a:solidFill>
+                  <a:srgbClr val="F1F5F9"/>
+                </a:solidFill>
+                <a:latin typeface="Consolas"/>
+              </a:rPr>
+              <a:t>)`;</a:t>
             </a:r>
           </a:p>
         </p:txBody>
@@ -7882,15 +11374,78 @@
               <a:spcAft>
                 <a:spcPts val="200"/>
               </a:spcAft>
-              <a:defRPr sz="1100">
-                <a:solidFill>
-                  <a:srgbClr val="94E2FF"/>
-                </a:solidFill>
-                <a:latin typeface="Consolas"/>
-              </a:defRPr>
-            </a:pPr>
-            <a:r>
-              <a:t>async function startScanner() {</a:t>
+            </a:pPr>
+            <a:r>
+              <a:rPr sz="1100" b="1">
+                <a:solidFill>
+                  <a:srgbClr val="F472B6"/>
+                </a:solidFill>
+                <a:latin typeface="Consolas"/>
+              </a:rPr>
+              <a:t>async</a:t>
+            </a:r>
+            <a:r>
+              <a:rPr sz="1100">
+                <a:solidFill>
+                  <a:srgbClr val="F1F5F9"/>
+                </a:solidFill>
+                <a:latin typeface="Consolas"/>
+              </a:rPr>
+              <a:t> </a:t>
+            </a:r>
+            <a:r>
+              <a:rPr sz="1100" b="1">
+                <a:solidFill>
+                  <a:srgbClr val="F472B6"/>
+                </a:solidFill>
+                <a:latin typeface="Consolas"/>
+              </a:rPr>
+              <a:t>function</a:t>
+            </a:r>
+            <a:r>
+              <a:rPr sz="1100">
+                <a:solidFill>
+                  <a:srgbClr val="F1F5F9"/>
+                </a:solidFill>
+                <a:latin typeface="Consolas"/>
+              </a:rPr>
+              <a:t> </a:t>
+            </a:r>
+            <a:r>
+              <a:rPr sz="1100">
+                <a:solidFill>
+                  <a:srgbClr val="F1F5F9"/>
+                </a:solidFill>
+                <a:latin typeface="Consolas"/>
+              </a:rPr>
+              <a:t>startScanner</a:t>
+            </a:r>
+            <a:r>
+              <a:rPr sz="1100">
+                <a:solidFill>
+                  <a:srgbClr val="F1F5F9"/>
+                </a:solidFill>
+                <a:latin typeface="Consolas"/>
+              </a:rPr>
+              <a:t>()</a:t>
+            </a:r>
+            <a:r>
+              <a:rPr sz="1100">
+                <a:solidFill>
+                  <a:srgbClr val="F1F5F9"/>
+                </a:solidFill>
+                <a:latin typeface="Consolas"/>
+              </a:rPr>
+              <a:t> </a:t>
+            </a:r>
+            <a:r>
+              <a:rPr sz="1100">
+                <a:solidFill>
+                  <a:srgbClr val="F1F5F9"/>
+                </a:solidFill>
+                <a:latin typeface="Consolas"/>
+              </a:rPr>
+              <a:t>{</a:t>
             </a:r>
           </a:p>
           <a:p>
@@ -7898,15 +11453,42 @@
               <a:spcAft>
                 <a:spcPts val="200"/>
               </a:spcAft>
-              <a:defRPr sz="1100">
-                <a:solidFill>
-                  <a:srgbClr val="94E2FF"/>
-                </a:solidFill>
-                <a:latin typeface="Consolas"/>
-              </a:defRPr>
-            </a:pPr>
-            <a:r>
-              <a:t>  try {</a:t>
+            </a:pPr>
+            <a:r>
+              <a:rPr sz="1100">
+                <a:solidFill>
+                  <a:srgbClr val="F1F5F9"/>
+                </a:solidFill>
+                <a:latin typeface="Consolas"/>
+              </a:rPr>
+              <a:t>  </a:t>
+            </a:r>
+            <a:r>
+              <a:rPr sz="1100" b="1">
+                <a:solidFill>
+                  <a:srgbClr val="F472B6"/>
+                </a:solidFill>
+                <a:latin typeface="Consolas"/>
+              </a:rPr>
+              <a:t>try</a:t>
+            </a:r>
+            <a:r>
+              <a:rPr sz="1100">
+                <a:solidFill>
+                  <a:srgbClr val="F1F5F9"/>
+                </a:solidFill>
+                <a:latin typeface="Consolas"/>
+              </a:rPr>
+              <a:t> </a:t>
+            </a:r>
+            <a:r>
+              <a:rPr sz="1100">
+                <a:solidFill>
+                  <a:srgbClr val="F1F5F9"/>
+                </a:solidFill>
+                <a:latin typeface="Consolas"/>
+              </a:rPr>
+              <a:t>{</a:t>
             </a:r>
           </a:p>
           <a:p>
@@ -7914,15 +11496,177 @@
               <a:spcAft>
                 <a:spcPts val="200"/>
               </a:spcAft>
-              <a:defRPr sz="1100">
-                <a:solidFill>
-                  <a:srgbClr val="94E2FF"/>
-                </a:solidFill>
-                <a:latin typeface="Consolas"/>
-              </a:defRPr>
-            </a:pPr>
-            <a:r>
-              <a:t>    const t1 = await extractText('file1', 'text1', 'Doc A');</a:t>
+            </a:pPr>
+            <a:r>
+              <a:rPr sz="1100">
+                <a:solidFill>
+                  <a:srgbClr val="F1F5F9"/>
+                </a:solidFill>
+                <a:latin typeface="Consolas"/>
+              </a:rPr>
+              <a:t>    </a:t>
+            </a:r>
+            <a:r>
+              <a:rPr sz="1100" b="1">
+                <a:solidFill>
+                  <a:srgbClr val="F472B6"/>
+                </a:solidFill>
+                <a:latin typeface="Consolas"/>
+              </a:rPr>
+              <a:t>const</a:t>
+            </a:r>
+            <a:r>
+              <a:rPr sz="1100">
+                <a:solidFill>
+                  <a:srgbClr val="F1F5F9"/>
+                </a:solidFill>
+                <a:latin typeface="Consolas"/>
+              </a:rPr>
+              <a:t> </a:t>
+            </a:r>
+            <a:r>
+              <a:rPr sz="1100">
+                <a:solidFill>
+                  <a:srgbClr val="F1F5F9"/>
+                </a:solidFill>
+                <a:latin typeface="Consolas"/>
+              </a:rPr>
+              <a:t>t1</a:t>
+            </a:r>
+            <a:r>
+              <a:rPr sz="1100">
+                <a:solidFill>
+                  <a:srgbClr val="F1F5F9"/>
+                </a:solidFill>
+                <a:latin typeface="Consolas"/>
+              </a:rPr>
+              <a:t> </a:t>
+            </a:r>
+            <a:r>
+              <a:rPr sz="1100">
+                <a:solidFill>
+                  <a:srgbClr val="F1F5F9"/>
+                </a:solidFill>
+                <a:latin typeface="Consolas"/>
+              </a:rPr>
+              <a:t>=</a:t>
+            </a:r>
+            <a:r>
+              <a:rPr sz="1100">
+                <a:solidFill>
+                  <a:srgbClr val="F1F5F9"/>
+                </a:solidFill>
+                <a:latin typeface="Consolas"/>
+              </a:rPr>
+              <a:t> </a:t>
+            </a:r>
+            <a:r>
+              <a:rPr sz="1100" b="1">
+                <a:solidFill>
+                  <a:srgbClr val="F472B6"/>
+                </a:solidFill>
+                <a:latin typeface="Consolas"/>
+              </a:rPr>
+              <a:t>await</a:t>
+            </a:r>
+            <a:r>
+              <a:rPr sz="1100">
+                <a:solidFill>
+                  <a:srgbClr val="F1F5F9"/>
+                </a:solidFill>
+                <a:latin typeface="Consolas"/>
+              </a:rPr>
+              <a:t> </a:t>
+            </a:r>
+            <a:r>
+              <a:rPr sz="1100">
+                <a:solidFill>
+                  <a:srgbClr val="F1F5F9"/>
+                </a:solidFill>
+                <a:latin typeface="Consolas"/>
+              </a:rPr>
+              <a:t>extractText</a:t>
+            </a:r>
+            <a:r>
+              <a:rPr sz="1100">
+                <a:solidFill>
+                  <a:srgbClr val="F1F5F9"/>
+                </a:solidFill>
+                <a:latin typeface="Consolas"/>
+              </a:rPr>
+              <a:t>('</a:t>
+            </a:r>
+            <a:r>
+              <a:rPr sz="1100">
+                <a:solidFill>
+                  <a:srgbClr val="F1F5F9"/>
+                </a:solidFill>
+                <a:latin typeface="Consolas"/>
+              </a:rPr>
+              <a:t>file1</a:t>
+            </a:r>
+            <a:r>
+              <a:rPr sz="1100">
+                <a:solidFill>
+                  <a:srgbClr val="FDBA74"/>
+                </a:solidFill>
+                <a:latin typeface="Consolas"/>
+              </a:rPr>
+              <a:t>', '</a:t>
+            </a:r>
+            <a:r>
+              <a:rPr sz="1100">
+                <a:solidFill>
+                  <a:srgbClr val="F1F5F9"/>
+                </a:solidFill>
+                <a:latin typeface="Consolas"/>
+              </a:rPr>
+              <a:t>text1</a:t>
+            </a:r>
+            <a:r>
+              <a:rPr sz="1100">
+                <a:solidFill>
+                  <a:srgbClr val="FDBA74"/>
+                </a:solidFill>
+                <a:latin typeface="Consolas"/>
+              </a:rPr>
+              <a:t>', '</a:t>
+            </a:r>
+            <a:r>
+              <a:rPr sz="1100">
+                <a:solidFill>
+                  <a:srgbClr val="F1F5F9"/>
+                </a:solidFill>
+                <a:latin typeface="Consolas"/>
+              </a:rPr>
+              <a:t>Doc</a:t>
+            </a:r>
+            <a:r>
+              <a:rPr sz="1100">
+                <a:solidFill>
+                  <a:srgbClr val="F1F5F9"/>
+                </a:solidFill>
+                <a:latin typeface="Consolas"/>
+              </a:rPr>
+              <a:t> </a:t>
+            </a:r>
+            <a:r>
+              <a:rPr sz="1100">
+                <a:solidFill>
+                  <a:srgbClr val="F1F5F9"/>
+                </a:solidFill>
+                <a:latin typeface="Consolas"/>
+              </a:rPr>
+              <a:t>A</a:t>
+            </a:r>
+            <a:r>
+              <a:rPr sz="1100">
+                <a:solidFill>
+                  <a:srgbClr val="FDBA74"/>
+                </a:solidFill>
+                <a:latin typeface="Consolas"/>
+              </a:rPr>
+              <a:t>');</a:t>
             </a:r>
           </a:p>
           <a:p>
@@ -7930,15 +11674,177 @@
               <a:spcAft>
                 <a:spcPts val="200"/>
               </a:spcAft>
-              <a:defRPr sz="1100">
-                <a:solidFill>
-                  <a:srgbClr val="94E2FF"/>
-                </a:solidFill>
-                <a:latin typeface="Consolas"/>
-              </a:defRPr>
-            </a:pPr>
-            <a:r>
-              <a:t>    const t2 = await extractText('file2', 'text2', 'Doc B');</a:t>
+            </a:pPr>
+            <a:r>
+              <a:rPr sz="1100">
+                <a:solidFill>
+                  <a:srgbClr val="F1F5F9"/>
+                </a:solidFill>
+                <a:latin typeface="Consolas"/>
+              </a:rPr>
+              <a:t>    </a:t>
+            </a:r>
+            <a:r>
+              <a:rPr sz="1100" b="1">
+                <a:solidFill>
+                  <a:srgbClr val="F472B6"/>
+                </a:solidFill>
+                <a:latin typeface="Consolas"/>
+              </a:rPr>
+              <a:t>const</a:t>
+            </a:r>
+            <a:r>
+              <a:rPr sz="1100">
+                <a:solidFill>
+                  <a:srgbClr val="F1F5F9"/>
+                </a:solidFill>
+                <a:latin typeface="Consolas"/>
+              </a:rPr>
+              <a:t> </a:t>
+            </a:r>
+            <a:r>
+              <a:rPr sz="1100">
+                <a:solidFill>
+                  <a:srgbClr val="F1F5F9"/>
+                </a:solidFill>
+                <a:latin typeface="Consolas"/>
+              </a:rPr>
+              <a:t>t2</a:t>
+            </a:r>
+            <a:r>
+              <a:rPr sz="1100">
+                <a:solidFill>
+                  <a:srgbClr val="F1F5F9"/>
+                </a:solidFill>
+                <a:latin typeface="Consolas"/>
+              </a:rPr>
+              <a:t> </a:t>
+            </a:r>
+            <a:r>
+              <a:rPr sz="1100">
+                <a:solidFill>
+                  <a:srgbClr val="F1F5F9"/>
+                </a:solidFill>
+                <a:latin typeface="Consolas"/>
+              </a:rPr>
+              <a:t>=</a:t>
+            </a:r>
+            <a:r>
+              <a:rPr sz="1100">
+                <a:solidFill>
+                  <a:srgbClr val="F1F5F9"/>
+                </a:solidFill>
+                <a:latin typeface="Consolas"/>
+              </a:rPr>
+              <a:t> </a:t>
+            </a:r>
+            <a:r>
+              <a:rPr sz="1100" b="1">
+                <a:solidFill>
+                  <a:srgbClr val="F472B6"/>
+                </a:solidFill>
+                <a:latin typeface="Consolas"/>
+              </a:rPr>
+              <a:t>await</a:t>
+            </a:r>
+            <a:r>
+              <a:rPr sz="1100">
+                <a:solidFill>
+                  <a:srgbClr val="F1F5F9"/>
+                </a:solidFill>
+                <a:latin typeface="Consolas"/>
+              </a:rPr>
+              <a:t> </a:t>
+            </a:r>
+            <a:r>
+              <a:rPr sz="1100">
+                <a:solidFill>
+                  <a:srgbClr val="F1F5F9"/>
+                </a:solidFill>
+                <a:latin typeface="Consolas"/>
+              </a:rPr>
+              <a:t>extractText</a:t>
+            </a:r>
+            <a:r>
+              <a:rPr sz="1100">
+                <a:solidFill>
+                  <a:srgbClr val="F1F5F9"/>
+                </a:solidFill>
+                <a:latin typeface="Consolas"/>
+              </a:rPr>
+              <a:t>('</a:t>
+            </a:r>
+            <a:r>
+              <a:rPr sz="1100">
+                <a:solidFill>
+                  <a:srgbClr val="F1F5F9"/>
+                </a:solidFill>
+                <a:latin typeface="Consolas"/>
+              </a:rPr>
+              <a:t>file2</a:t>
+            </a:r>
+            <a:r>
+              <a:rPr sz="1100">
+                <a:solidFill>
+                  <a:srgbClr val="FDBA74"/>
+                </a:solidFill>
+                <a:latin typeface="Consolas"/>
+              </a:rPr>
+              <a:t>', '</a:t>
+            </a:r>
+            <a:r>
+              <a:rPr sz="1100">
+                <a:solidFill>
+                  <a:srgbClr val="F1F5F9"/>
+                </a:solidFill>
+                <a:latin typeface="Consolas"/>
+              </a:rPr>
+              <a:t>text2</a:t>
+            </a:r>
+            <a:r>
+              <a:rPr sz="1100">
+                <a:solidFill>
+                  <a:srgbClr val="FDBA74"/>
+                </a:solidFill>
+                <a:latin typeface="Consolas"/>
+              </a:rPr>
+              <a:t>', '</a:t>
+            </a:r>
+            <a:r>
+              <a:rPr sz="1100">
+                <a:solidFill>
+                  <a:srgbClr val="F1F5F9"/>
+                </a:solidFill>
+                <a:latin typeface="Consolas"/>
+              </a:rPr>
+              <a:t>Doc</a:t>
+            </a:r>
+            <a:r>
+              <a:rPr sz="1100">
+                <a:solidFill>
+                  <a:srgbClr val="F1F5F9"/>
+                </a:solidFill>
+                <a:latin typeface="Consolas"/>
+              </a:rPr>
+              <a:t> </a:t>
+            </a:r>
+            <a:r>
+              <a:rPr sz="1100">
+                <a:solidFill>
+                  <a:srgbClr val="F1F5F9"/>
+                </a:solidFill>
+                <a:latin typeface="Consolas"/>
+              </a:rPr>
+              <a:t>B</a:t>
+            </a:r>
+            <a:r>
+              <a:rPr sz="1100">
+                <a:solidFill>
+                  <a:srgbClr val="FDBA74"/>
+                </a:solidFill>
+                <a:latin typeface="Consolas"/>
+              </a:rPr>
+              <a:t>');</a:t>
             </a:r>
           </a:p>
           <a:p>
@@ -7946,15 +11852,123 @@
               <a:spcAft>
                 <a:spcPts val="200"/>
               </a:spcAft>
-              <a:defRPr sz="1100">
-                <a:solidFill>
-                  <a:srgbClr val="94E2FF"/>
-                </a:solidFill>
-                <a:latin typeface="Consolas"/>
-              </a:defRPr>
-            </a:pPr>
-            <a:r>
-              <a:t>    if (t1 &amp;&amp; !t2) {</a:t>
+            </a:pPr>
+            <a:r>
+              <a:rPr sz="1100">
+                <a:solidFill>
+                  <a:srgbClr val="F1F5F9"/>
+                </a:solidFill>
+                <a:latin typeface="Consolas"/>
+              </a:rPr>
+              <a:t>    </a:t>
+            </a:r>
+            <a:r>
+              <a:rPr sz="1100" b="1">
+                <a:solidFill>
+                  <a:srgbClr val="F472B6"/>
+                </a:solidFill>
+                <a:latin typeface="Consolas"/>
+              </a:rPr>
+              <a:t>if</a:t>
+            </a:r>
+            <a:r>
+              <a:rPr sz="1100">
+                <a:solidFill>
+                  <a:srgbClr val="F1F5F9"/>
+                </a:solidFill>
+                <a:latin typeface="Consolas"/>
+              </a:rPr>
+              <a:t> </a:t>
+            </a:r>
+            <a:r>
+              <a:rPr sz="1100">
+                <a:solidFill>
+                  <a:srgbClr val="F1F5F9"/>
+                </a:solidFill>
+                <a:latin typeface="Consolas"/>
+              </a:rPr>
+              <a:t>(</a:t>
+            </a:r>
+            <a:r>
+              <a:rPr sz="1100">
+                <a:solidFill>
+                  <a:srgbClr val="F1F5F9"/>
+                </a:solidFill>
+                <a:latin typeface="Consolas"/>
+              </a:rPr>
+              <a:t>t1</a:t>
+            </a:r>
+            <a:r>
+              <a:rPr sz="1100">
+                <a:solidFill>
+                  <a:srgbClr val="F1F5F9"/>
+                </a:solidFill>
+                <a:latin typeface="Consolas"/>
+              </a:rPr>
+              <a:t> </a:t>
+            </a:r>
+            <a:r>
+              <a:rPr sz="1100">
+                <a:solidFill>
+                  <a:srgbClr val="F1F5F9"/>
+                </a:solidFill>
+                <a:latin typeface="Consolas"/>
+              </a:rPr>
+              <a:t>&amp;&amp;</a:t>
+            </a:r>
+            <a:r>
+              <a:rPr sz="1100">
+                <a:solidFill>
+                  <a:srgbClr val="F1F5F9"/>
+                </a:solidFill>
+                <a:latin typeface="Consolas"/>
+              </a:rPr>
+              <a:t> </a:t>
+            </a:r>
+            <a:r>
+              <a:rPr sz="1100">
+                <a:solidFill>
+                  <a:srgbClr val="F1F5F9"/>
+                </a:solidFill>
+                <a:latin typeface="Consolas"/>
+              </a:rPr>
+              <a:t>!</a:t>
+            </a:r>
+            <a:r>
+              <a:rPr sz="1100">
+                <a:solidFill>
+                  <a:srgbClr val="F1F5F9"/>
+                </a:solidFill>
+                <a:latin typeface="Consolas"/>
+              </a:rPr>
+              <a:t>t2</a:t>
+            </a:r>
+            <a:r>
+              <a:rPr sz="1100">
+                <a:solidFill>
+                  <a:srgbClr val="F1F5F9"/>
+                </a:solidFill>
+                <a:latin typeface="Consolas"/>
+              </a:rPr>
+              <a:t>)</a:t>
+            </a:r>
+            <a:r>
+              <a:rPr sz="1100">
+                <a:solidFill>
+                  <a:srgbClr val="F1F5F9"/>
+                </a:solidFill>
+                <a:latin typeface="Consolas"/>
+              </a:rPr>
+              <a:t> </a:t>
+            </a:r>
+            <a:r>
+              <a:rPr sz="1100">
+                <a:solidFill>
+                  <a:srgbClr val="F1F5F9"/>
+                </a:solidFill>
+                <a:latin typeface="Consolas"/>
+              </a:rPr>
+              <a:t>{</a:t>
             </a:r>
           </a:p>
           <a:p>
@@ -7962,15 +11976,78 @@
               <a:spcAft>
                 <a:spcPts val="200"/>
               </a:spcAft>
-              <a:defRPr sz="1100">
-                <a:solidFill>
-                  <a:srgbClr val="94E2FF"/>
-                </a:solidFill>
-                <a:latin typeface="Consolas"/>
-              </a:defRPr>
-            </a:pPr>
-            <a:r>
-              <a:t>      renderSingleScannerResult('A', t1);</a:t>
+            </a:pPr>
+            <a:r>
+              <a:rPr sz="1100">
+                <a:solidFill>
+                  <a:srgbClr val="F1F5F9"/>
+                </a:solidFill>
+                <a:latin typeface="Consolas"/>
+              </a:rPr>
+              <a:t>      </a:t>
+            </a:r>
+            <a:r>
+              <a:rPr sz="1100">
+                <a:solidFill>
+                  <a:srgbClr val="F1F5F9"/>
+                </a:solidFill>
+                <a:latin typeface="Consolas"/>
+              </a:rPr>
+              <a:t>renderSingleScannerResult</a:t>
+            </a:r>
+            <a:r>
+              <a:rPr sz="1100">
+                <a:solidFill>
+                  <a:srgbClr val="F1F5F9"/>
+                </a:solidFill>
+                <a:latin typeface="Consolas"/>
+              </a:rPr>
+              <a:t>('</a:t>
+            </a:r>
+            <a:r>
+              <a:rPr sz="1100">
+                <a:solidFill>
+                  <a:srgbClr val="F1F5F9"/>
+                </a:solidFill>
+                <a:latin typeface="Consolas"/>
+              </a:rPr>
+              <a:t>A</a:t>
+            </a:r>
+            <a:r>
+              <a:rPr sz="1100">
+                <a:solidFill>
+                  <a:srgbClr val="FDBA74"/>
+                </a:solidFill>
+                <a:latin typeface="Consolas"/>
+              </a:rPr>
+              <a:t>',</a:t>
+            </a:r>
+            <a:r>
+              <a:rPr sz="1100">
+                <a:solidFill>
+                  <a:srgbClr val="F1F5F9"/>
+                </a:solidFill>
+                <a:latin typeface="Consolas"/>
+              </a:rPr>
+              <a:t> </a:t>
+            </a:r>
+            <a:r>
+              <a:rPr sz="1100">
+                <a:solidFill>
+                  <a:srgbClr val="F1F5F9"/>
+                </a:solidFill>
+                <a:latin typeface="Consolas"/>
+              </a:rPr>
+              <a:t>t1</a:t>
+            </a:r>
+            <a:r>
+              <a:rPr sz="1100">
+                <a:solidFill>
+                  <a:srgbClr val="F1F5F9"/>
+                </a:solidFill>
+                <a:latin typeface="Consolas"/>
+              </a:rPr>
+              <a:t>);</a:t>
             </a:r>
           </a:p>
           <a:p>
@@ -7978,15 +12055,60 @@
               <a:spcAft>
                 <a:spcPts val="200"/>
               </a:spcAft>
-              <a:defRPr sz="1100">
-                <a:solidFill>
-                  <a:srgbClr val="94E2FF"/>
-                </a:solidFill>
-                <a:latin typeface="Consolas"/>
-              </a:defRPr>
-            </a:pPr>
-            <a:r>
-              <a:t>    } else {</a:t>
+            </a:pPr>
+            <a:r>
+              <a:rPr sz="1100">
+                <a:solidFill>
+                  <a:srgbClr val="F1F5F9"/>
+                </a:solidFill>
+                <a:latin typeface="Consolas"/>
+              </a:rPr>
+              <a:t>    </a:t>
+            </a:r>
+            <a:r>
+              <a:rPr sz="1100">
+                <a:solidFill>
+                  <a:srgbClr val="F1F5F9"/>
+                </a:solidFill>
+                <a:latin typeface="Consolas"/>
+              </a:rPr>
+              <a:t>}</a:t>
+            </a:r>
+            <a:r>
+              <a:rPr sz="1100">
+                <a:solidFill>
+                  <a:srgbClr val="F1F5F9"/>
+                </a:solidFill>
+                <a:latin typeface="Consolas"/>
+              </a:rPr>
+              <a:t> </a:t>
+            </a:r>
+            <a:r>
+              <a:rPr sz="1100" b="1">
+                <a:solidFill>
+                  <a:srgbClr val="F472B6"/>
+                </a:solidFill>
+                <a:latin typeface="Consolas"/>
+              </a:rPr>
+              <a:t>else</a:t>
+            </a:r>
+            <a:r>
+              <a:rPr sz="1100">
+                <a:solidFill>
+                  <a:srgbClr val="F1F5F9"/>
+                </a:solidFill>
+                <a:latin typeface="Consolas"/>
+              </a:rPr>
+              <a:t> </a:t>
+            </a:r>
+            <a:r>
+              <a:rPr sz="1100">
+                <a:solidFill>
+                  <a:srgbClr val="F1F5F9"/>
+                </a:solidFill>
+                <a:latin typeface="Consolas"/>
+              </a:rPr>
+              <a:t>{</a:t>
             </a:r>
           </a:p>
           <a:p>
@@ -7994,15 +12116,78 @@
               <a:spcAft>
                 <a:spcPts val="200"/>
               </a:spcAft>
-              <a:defRPr sz="1100">
-                <a:solidFill>
-                  <a:srgbClr val="94E2FF"/>
-                </a:solidFill>
-                <a:latin typeface="Consolas"/>
-              </a:defRPr>
-            </a:pPr>
-            <a:r>
-              <a:t>      renderComparisonResult(t1, t2);</a:t>
+            </a:pPr>
+            <a:r>
+              <a:rPr sz="1100">
+                <a:solidFill>
+                  <a:srgbClr val="F1F5F9"/>
+                </a:solidFill>
+                <a:latin typeface="Consolas"/>
+              </a:rPr>
+              <a:t>      </a:t>
+            </a:r>
+            <a:r>
+              <a:rPr sz="1100">
+                <a:solidFill>
+                  <a:srgbClr val="F1F5F9"/>
+                </a:solidFill>
+                <a:latin typeface="Consolas"/>
+              </a:rPr>
+              <a:t>renderComparisonResult</a:t>
+            </a:r>
+            <a:r>
+              <a:rPr sz="1100">
+                <a:solidFill>
+                  <a:srgbClr val="F1F5F9"/>
+                </a:solidFill>
+                <a:latin typeface="Consolas"/>
+              </a:rPr>
+              <a:t>(</a:t>
+            </a:r>
+            <a:r>
+              <a:rPr sz="1100">
+                <a:solidFill>
+                  <a:srgbClr val="F1F5F9"/>
+                </a:solidFill>
+                <a:latin typeface="Consolas"/>
+              </a:rPr>
+              <a:t>t1</a:t>
+            </a:r>
+            <a:r>
+              <a:rPr sz="1100">
+                <a:solidFill>
+                  <a:srgbClr val="F1F5F9"/>
+                </a:solidFill>
+                <a:latin typeface="Consolas"/>
+              </a:rPr>
+              <a:t>,</a:t>
+            </a:r>
+            <a:r>
+              <a:rPr sz="1100">
+                <a:solidFill>
+                  <a:srgbClr val="F1F5F9"/>
+                </a:solidFill>
+                <a:latin typeface="Consolas"/>
+              </a:rPr>
+              <a:t> </a:t>
+            </a:r>
+            <a:r>
+              <a:rPr sz="1100">
+                <a:solidFill>
+                  <a:srgbClr val="F1F5F9"/>
+                </a:solidFill>
+                <a:latin typeface="Consolas"/>
+              </a:rPr>
+              <a:t>t2</a:t>
+            </a:r>
+            <a:r>
+              <a:rPr sz="1100">
+                <a:solidFill>
+                  <a:srgbClr val="F1F5F9"/>
+                </a:solidFill>
+                <a:latin typeface="Consolas"/>
+              </a:rPr>
+              <a:t>);</a:t>
             </a:r>
           </a:p>
           <a:p>
@@ -8010,15 +12195,24 @@
               <a:spcAft>
                 <a:spcPts val="200"/>
               </a:spcAft>
-              <a:defRPr sz="1100">
-                <a:solidFill>
-                  <a:srgbClr val="94E2FF"/>
-                </a:solidFill>
-                <a:latin typeface="Consolas"/>
-              </a:defRPr>
-            </a:pPr>
-            <a:r>
-              <a:t>    }</a:t>
+            </a:pPr>
+            <a:r>
+              <a:rPr sz="1100">
+                <a:solidFill>
+                  <a:srgbClr val="F1F5F9"/>
+                </a:solidFill>
+                <a:latin typeface="Consolas"/>
+              </a:rPr>
+              <a:t>    </a:t>
+            </a:r>
+            <a:r>
+              <a:rPr sz="1100">
+                <a:solidFill>
+                  <a:srgbClr val="F1F5F9"/>
+                </a:solidFill>
+                <a:latin typeface="Consolas"/>
+              </a:rPr>
+              <a:t>}</a:t>
             </a:r>
           </a:p>
           <a:p>
@@ -8026,15 +12220,96 @@
               <a:spcAft>
                 <a:spcPts val="200"/>
               </a:spcAft>
-              <a:defRPr sz="1100">
-                <a:solidFill>
-                  <a:srgbClr val="94E2FF"/>
-                </a:solidFill>
-                <a:latin typeface="Consolas"/>
-              </a:defRPr>
-            </a:pPr>
-            <a:r>
-              <a:t>  } catch (err) {</a:t>
+            </a:pPr>
+            <a:r>
+              <a:rPr sz="1100">
+                <a:solidFill>
+                  <a:srgbClr val="F1F5F9"/>
+                </a:solidFill>
+                <a:latin typeface="Consolas"/>
+              </a:rPr>
+              <a:t>  </a:t>
+            </a:r>
+            <a:r>
+              <a:rPr sz="1100">
+                <a:solidFill>
+                  <a:srgbClr val="F1F5F9"/>
+                </a:solidFill>
+                <a:latin typeface="Consolas"/>
+              </a:rPr>
+              <a:t>}</a:t>
+            </a:r>
+            <a:r>
+              <a:rPr sz="1100">
+                <a:solidFill>
+                  <a:srgbClr val="F1F5F9"/>
+                </a:solidFill>
+                <a:latin typeface="Consolas"/>
+              </a:rPr>
+              <a:t> </a:t>
+            </a:r>
+            <a:r>
+              <a:rPr sz="1100" b="1">
+                <a:solidFill>
+                  <a:srgbClr val="F472B6"/>
+                </a:solidFill>
+                <a:latin typeface="Consolas"/>
+              </a:rPr>
+              <a:t>catch</a:t>
+            </a:r>
+            <a:r>
+              <a:rPr sz="1100">
+                <a:solidFill>
+                  <a:srgbClr val="F1F5F9"/>
+                </a:solidFill>
+                <a:latin typeface="Consolas"/>
+              </a:rPr>
+              <a:t> </a:t>
+            </a:r>
+            <a:r>
+              <a:rPr sz="1100">
+                <a:solidFill>
+                  <a:srgbClr val="F1F5F9"/>
+                </a:solidFill>
+                <a:latin typeface="Consolas"/>
+              </a:rPr>
+              <a:t>(</a:t>
+            </a:r>
+            <a:r>
+              <a:rPr sz="1100">
+                <a:solidFill>
+                  <a:srgbClr val="F1F5F9"/>
+                </a:solidFill>
+                <a:latin typeface="Consolas"/>
+              </a:rPr>
+              <a:t>err</a:t>
+            </a:r>
+            <a:r>
+              <a:rPr sz="1100">
+                <a:solidFill>
+                  <a:srgbClr val="F1F5F9"/>
+                </a:solidFill>
+                <a:latin typeface="Consolas"/>
+              </a:rPr>
+              <a:t>)</a:t>
+            </a:r>
+            <a:r>
+              <a:rPr sz="1100">
+                <a:solidFill>
+                  <a:srgbClr val="F1F5F9"/>
+                </a:solidFill>
+                <a:latin typeface="Consolas"/>
+              </a:rPr>
+              <a:t> </a:t>
+            </a:r>
+            <a:r>
+              <a:rPr sz="1100">
+                <a:solidFill>
+                  <a:srgbClr val="F1F5F9"/>
+                </a:solidFill>
+                <a:latin typeface="Consolas"/>
+              </a:rPr>
+              <a:t>{</a:t>
             </a:r>
           </a:p>
           <a:p>
@@ -8042,15 +12317,51 @@
               <a:spcAft>
                 <a:spcPts val="200"/>
               </a:spcAft>
-              <a:defRPr sz="1100">
-                <a:solidFill>
-                  <a:srgbClr val="94E2FF"/>
-                </a:solidFill>
-                <a:latin typeface="Consolas"/>
-              </a:defRPr>
-            </a:pPr>
-            <a:r>
-              <a:t>    showError(err);</a:t>
+            </a:pPr>
+            <a:r>
+              <a:rPr sz="1100">
+                <a:solidFill>
+                  <a:srgbClr val="F1F5F9"/>
+                </a:solidFill>
+                <a:latin typeface="Consolas"/>
+              </a:rPr>
+              <a:t>    </a:t>
+            </a:r>
+            <a:r>
+              <a:rPr sz="1100">
+                <a:solidFill>
+                  <a:srgbClr val="F1F5F9"/>
+                </a:solidFill>
+                <a:latin typeface="Consolas"/>
+              </a:rPr>
+              <a:t>showError</a:t>
+            </a:r>
+            <a:r>
+              <a:rPr sz="1100">
+                <a:solidFill>
+                  <a:srgbClr val="F1F5F9"/>
+                </a:solidFill>
+                <a:latin typeface="Consolas"/>
+              </a:rPr>
+              <a:t>(</a:t>
+            </a:r>
+            <a:r>
+              <a:rPr sz="1100">
+                <a:solidFill>
+                  <a:srgbClr val="F1F5F9"/>
+                </a:solidFill>
+                <a:latin typeface="Consolas"/>
+              </a:rPr>
+              <a:t>err</a:t>
+            </a:r>
+            <a:r>
+              <a:rPr sz="1100">
+                <a:solidFill>
+                  <a:srgbClr val="F1F5F9"/>
+                </a:solidFill>
+                <a:latin typeface="Consolas"/>
+              </a:rPr>
+              <a:t>);</a:t>
             </a:r>
           </a:p>
           <a:p>
@@ -8058,15 +12369,24 @@
               <a:spcAft>
                 <a:spcPts val="200"/>
               </a:spcAft>
-              <a:defRPr sz="1100">
-                <a:solidFill>
-                  <a:srgbClr val="94E2FF"/>
-                </a:solidFill>
-                <a:latin typeface="Consolas"/>
-              </a:defRPr>
-            </a:pPr>
-            <a:r>
-              <a:t>  }</a:t>
+            </a:pPr>
+            <a:r>
+              <a:rPr sz="1100">
+                <a:solidFill>
+                  <a:srgbClr val="F1F5F9"/>
+                </a:solidFill>
+                <a:latin typeface="Consolas"/>
+              </a:rPr>
+              <a:t>  </a:t>
+            </a:r>
+            <a:r>
+              <a:rPr sz="1100">
+                <a:solidFill>
+                  <a:srgbClr val="F1F5F9"/>
+                </a:solidFill>
+                <a:latin typeface="Consolas"/>
+              </a:rPr>
+              <a:t>}</a:t>
             </a:r>
           </a:p>
           <a:p>
@@ -8074,14 +12394,14 @@
               <a:spcAft>
                 <a:spcPts val="200"/>
               </a:spcAft>
-              <a:defRPr sz="1100">
-                <a:solidFill>
-                  <a:srgbClr val="94E2FF"/>
-                </a:solidFill>
-                <a:latin typeface="Consolas"/>
-              </a:defRPr>
-            </a:pPr>
-            <a:r>
+            </a:pPr>
+            <a:r>
+              <a:rPr sz="1100">
+                <a:solidFill>
+                  <a:srgbClr val="F1F5F9"/>
+                </a:solidFill>
+                <a:latin typeface="Consolas"/>
+              </a:rPr>
               <a:t>}</a:t>
             </a:r>
           </a:p>

--- a/AI_Document_OCR_Scanner_Similarity_Detector_PBL.pptx
+++ b/AI_Document_OCR_Scanner_Similarity_Detector_PBL.pptx
@@ -3276,8 +3276,8 @@
         </p:nvSpPr>
         <p:spPr>
           <a:xfrm>
-            <a:off x="1097280" y="2651760"/>
-            <a:ext cx="4572000" cy="548640"/>
+            <a:off x="1097280" y="2560320"/>
+            <a:ext cx="4572000" cy="1005840"/>
           </a:xfrm>
           <a:prstGeom prst="rect">
             <a:avLst/>
@@ -3285,28 +3285,53 @@
           <a:noFill/>
         </p:spPr>
         <p:txBody>
-          <a:bodyPr wrap="none">
+          <a:bodyPr wrap="square">
             <a:spAutoFit/>
           </a:bodyPr>
           <a:lstStyle/>
           <a:p>
             <a:r>
-              <a:rPr b="1" sz="1800">
+              <a:rPr b="1" sz="1700">
                 <a:solidFill>
                   <a:srgbClr val="38BDF8"/>
                 </a:solidFill>
                 <a:latin typeface="Segoe UI"/>
               </a:rPr>
-              <a:t>NAME: </a:t>
-            </a:r>
-            <a:r>
-              <a:rPr sz="1800">
+              <a:t>NAME 1: </a:t>
+            </a:r>
+            <a:r>
+              <a:rPr sz="1700">
                 <a:solidFill>
                   <a:srgbClr val="FFFFFF"/>
                 </a:solidFill>
                 <a:latin typeface="Segoe UI"/>
               </a:rPr>
-              <a:t/>
+              <a:t>Nimavat Jaydeep M.</a:t>
+            </a:r>
+          </a:p>
+          <a:p>
+            <a:pPr>
+              <a:spcBef>
+                <a:spcPts val="400"/>
+              </a:spcBef>
+            </a:pPr>
+            <a:r>
+              <a:rPr b="1" sz="1700">
+                <a:solidFill>
+                  <a:srgbClr val="38BDF8"/>
+                </a:solidFill>
+                <a:latin typeface="Segoe UI"/>
+              </a:rPr>
+              <a:t>ENROLLMENT 1: </a:t>
+            </a:r>
+            <a:r>
+              <a:rPr sz="1700">
+                <a:solidFill>
+                  <a:srgbClr val="FFFFFF"/>
+                </a:solidFill>
+                <a:latin typeface="Segoe UI"/>
+              </a:rPr>
+              <a:t>250043107032</a:t>
             </a:r>
           </a:p>
         </p:txBody>
@@ -3319,8 +3344,8 @@
         </p:nvSpPr>
         <p:spPr>
           <a:xfrm>
-            <a:off x="6217920" y="2651760"/>
-            <a:ext cx="4572000" cy="548640"/>
+            <a:off x="6217920" y="2560320"/>
+            <a:ext cx="4572000" cy="1005840"/>
           </a:xfrm>
           <a:prstGeom prst="rect">
             <a:avLst/>
@@ -3328,28 +3353,53 @@
           <a:noFill/>
         </p:spPr>
         <p:txBody>
-          <a:bodyPr wrap="none">
+          <a:bodyPr wrap="square">
             <a:spAutoFit/>
           </a:bodyPr>
           <a:lstStyle/>
           <a:p>
             <a:r>
-              <a:rPr b="1" sz="1800">
+              <a:rPr b="1" sz="1700">
                 <a:solidFill>
                   <a:srgbClr val="38BDF8"/>
                 </a:solidFill>
                 <a:latin typeface="Segoe UI"/>
               </a:rPr>
-              <a:t>BRANCH: </a:t>
-            </a:r>
-            <a:r>
-              <a:rPr sz="1800">
+              <a:t>NAME 2: </a:t>
+            </a:r>
+            <a:r>
+              <a:rPr sz="1700">
                 <a:solidFill>
                   <a:srgbClr val="FFFFFF"/>
                 </a:solidFill>
                 <a:latin typeface="Segoe UI"/>
               </a:rPr>
-              <a:t>Computer Engineering</a:t>
+              <a:t>Upadhyay Hitarth S.</a:t>
+            </a:r>
+          </a:p>
+          <a:p>
+            <a:pPr>
+              <a:spcBef>
+                <a:spcPts val="400"/>
+              </a:spcBef>
+            </a:pPr>
+            <a:r>
+              <a:rPr b="1" sz="1700">
+                <a:solidFill>
+                  <a:srgbClr val="38BDF8"/>
+                </a:solidFill>
+                <a:latin typeface="Segoe UI"/>
+              </a:rPr>
+              <a:t>ENROLLMENT 2: </a:t>
+            </a:r>
+            <a:r>
+              <a:rPr sz="1700">
+                <a:solidFill>
+                  <a:srgbClr val="FFFFFF"/>
+                </a:solidFill>
+                <a:latin typeface="Segoe UI"/>
+              </a:rPr>
+              <a:t>250043107050</a:t>
             </a:r>
           </a:p>
         </p:txBody>
@@ -3362,93 +3412,7 @@
         </p:nvSpPr>
         <p:spPr>
           <a:xfrm>
-            <a:off x="1097280" y="3474720"/>
-            <a:ext cx="4572000" cy="548640"/>
-          </a:xfrm>
-          <a:prstGeom prst="rect">
-            <a:avLst/>
-          </a:prstGeom>
-          <a:noFill/>
-        </p:spPr>
-        <p:txBody>
-          <a:bodyPr wrap="none">
-            <a:spAutoFit/>
-          </a:bodyPr>
-          <a:lstStyle/>
-          <a:p>
-            <a:r>
-              <a:rPr b="1" sz="1800">
-                <a:solidFill>
-                  <a:srgbClr val="38BDF8"/>
-                </a:solidFill>
-                <a:latin typeface="Segoe UI"/>
-              </a:rPr>
-              <a:t>ENROLLMENT: </a:t>
-            </a:r>
-            <a:r>
-              <a:rPr sz="1800">
-                <a:solidFill>
-                  <a:srgbClr val="FFFFFF"/>
-                </a:solidFill>
-                <a:latin typeface="Segoe UI"/>
-              </a:rPr>
-              <a:t/>
-            </a:r>
-          </a:p>
-        </p:txBody>
-      </p:sp>
-      <p:sp>
-        <p:nvSpPr>
-          <p:cNvPr id="8" name="TextBox 7"/>
-          <p:cNvSpPr txBox="1"/>
-          <p:nvPr/>
-        </p:nvSpPr>
-        <p:spPr>
-          <a:xfrm>
-            <a:off x="6217920" y="3474720"/>
-            <a:ext cx="4572000" cy="548640"/>
-          </a:xfrm>
-          <a:prstGeom prst="rect">
-            <a:avLst/>
-          </a:prstGeom>
-          <a:noFill/>
-        </p:spPr>
-        <p:txBody>
-          <a:bodyPr wrap="none">
-            <a:spAutoFit/>
-          </a:bodyPr>
-          <a:lstStyle/>
-          <a:p>
-            <a:r>
-              <a:rPr b="1" sz="1800">
-                <a:solidFill>
-                  <a:srgbClr val="38BDF8"/>
-                </a:solidFill>
-                <a:latin typeface="Segoe UI"/>
-              </a:rPr>
-              <a:t>SEMESTER: </a:t>
-            </a:r>
-            <a:r>
-              <a:rPr sz="1800">
-                <a:solidFill>
-                  <a:srgbClr val="FFFFFF"/>
-                </a:solidFill>
-                <a:latin typeface="Segoe UI"/>
-              </a:rPr>
-              <a:t>5th</a:t>
-            </a:r>
-          </a:p>
-        </p:txBody>
-      </p:sp>
-      <p:sp>
-        <p:nvSpPr>
-          <p:cNvPr id="9" name="TextBox 8"/>
-          <p:cNvSpPr txBox="1"/>
-          <p:nvPr/>
-        </p:nvSpPr>
-        <p:spPr>
-          <a:xfrm>
-            <a:off x="1097280" y="4572000"/>
+            <a:off x="1097280" y="3931920"/>
             <a:ext cx="9966960" cy="548640"/>
           </a:xfrm>
           <a:prstGeom prst="rect">
@@ -3464,16 +3428,78 @@
           <a:p>
             <a:pPr algn="ctr"/>
             <a:r>
-              <a:rPr b="1" sz="1800">
+              <a:rPr b="1" sz="1700">
                 <a:solidFill>
                   <a:srgbClr val="38BDF8"/>
                 </a:solidFill>
                 <a:latin typeface="Segoe UI"/>
               </a:rPr>
+              <a:t>BRANCH: </a:t>
+            </a:r>
+            <a:r>
+              <a:rPr sz="1700">
+                <a:solidFill>
+                  <a:srgbClr val="FFFFFF"/>
+                </a:solidFill>
+                <a:latin typeface="Segoe UI"/>
+              </a:rPr>
+              <a:t>Computer Engineering     |     </a:t>
+            </a:r>
+            <a:r>
+              <a:rPr b="1" sz="1700">
+                <a:solidFill>
+                  <a:srgbClr val="38BDF8"/>
+                </a:solidFill>
+                <a:latin typeface="Segoe UI"/>
+              </a:rPr>
+              <a:t>SEMESTER: </a:t>
+            </a:r>
+            <a:r>
+              <a:rPr sz="1700">
+                <a:solidFill>
+                  <a:srgbClr val="FFFFFF"/>
+                </a:solidFill>
+                <a:latin typeface="Segoe UI"/>
+              </a:rPr>
+              <a:t>5th</a:t>
+            </a:r>
+          </a:p>
+        </p:txBody>
+      </p:sp>
+      <p:sp>
+        <p:nvSpPr>
+          <p:cNvPr id="8" name="TextBox 7"/>
+          <p:cNvSpPr txBox="1"/>
+          <p:nvPr/>
+        </p:nvSpPr>
+        <p:spPr>
+          <a:xfrm>
+            <a:off x="1097280" y="4663440"/>
+            <a:ext cx="9966960" cy="548640"/>
+          </a:xfrm>
+          <a:prstGeom prst="rect">
+            <a:avLst/>
+          </a:prstGeom>
+          <a:noFill/>
+        </p:spPr>
+        <p:txBody>
+          <a:bodyPr wrap="none">
+            <a:spAutoFit/>
+          </a:bodyPr>
+          <a:lstStyle/>
+          <a:p>
+            <a:pPr algn="ctr"/>
+            <a:r>
+              <a:rPr b="1" sz="1700">
+                <a:solidFill>
+                  <a:srgbClr val="38BDF8"/>
+                </a:solidFill>
+                <a:latin typeface="Segoe UI"/>
+              </a:rPr>
               <a:t>COLLEGE: </a:t>
             </a:r>
             <a:r>
-              <a:rPr sz="1800">
+              <a:rPr sz="1700">
                 <a:solidFill>
                   <a:srgbClr val="FFFFFF"/>
                 </a:solidFill>

--- a/AI_Document_OCR_Scanner_Similarity_Detector_PBL.pptx
+++ b/AI_Document_OCR_Scanner_Similarity_Detector_PBL.pptx
@@ -4325,7 +4325,7 @@
       </p:sp>
       <p:pic>
         <p:nvPicPr>
-          <p:cNvPr id="4" name="Picture 3" descr="ocr_scan.png"/>
+          <p:cNvPr id="4" name="Picture 3" descr="system_workflow_diagram.jpg"/>
           <p:cNvPicPr>
             <a:picLocks noChangeAspect="1"/>
           </p:cNvPicPr>
@@ -5602,7 +5602,23 @@
               </a:spcAft>
             </a:pPr>
             <a:r>
-              <a:rPr sz="1200" b="1">
+              <a:rPr sz="1100">
+                <a:solidFill>
+                  <a:srgbClr val="64748B"/>
+                </a:solidFill>
+                <a:latin typeface="Consolas"/>
+              </a:rPr>
+              <a:t>// Vector math in calculateCosine()</a:t>
+            </a:r>
+          </a:p>
+          <a:p>
+            <a:pPr>
+              <a:spcAft>
+                <a:spcPts val="200"/>
+              </a:spcAft>
+            </a:pPr>
+            <a:r>
+              <a:rPr sz="1100" b="1">
                 <a:solidFill>
                   <a:srgbClr val="F472B6"/>
                 </a:solidFill>
@@ -5611,7 +5627,7 @@
               <a:t>let</a:t>
             </a:r>
             <a:r>
-              <a:rPr sz="1200">
+              <a:rPr sz="1100">
                 <a:solidFill>
                   <a:srgbClr val="F1F5F9"/>
                 </a:solidFill>
@@ -5620,7 +5636,7 @@
               <a:t> </a:t>
             </a:r>
             <a:r>
-              <a:rPr sz="1200">
+              <a:rPr sz="1100">
                 <a:solidFill>
                   <a:srgbClr val="F1F5F9"/>
                 </a:solidFill>
@@ -5629,7 +5645,7 @@
               <a:t>dotProduct</a:t>
             </a:r>
             <a:r>
-              <a:rPr sz="1200">
+              <a:rPr sz="1100">
                 <a:solidFill>
                   <a:srgbClr val="F1F5F9"/>
                 </a:solidFill>
@@ -5638,7 +5654,7 @@
               <a:t> </a:t>
             </a:r>
             <a:r>
-              <a:rPr sz="1200">
+              <a:rPr sz="1100">
                 <a:solidFill>
                   <a:srgbClr val="F1F5F9"/>
                 </a:solidFill>
@@ -5647,7 +5663,7 @@
               <a:t>=</a:t>
             </a:r>
             <a:r>
-              <a:rPr sz="1200">
+              <a:rPr sz="1100">
                 <a:solidFill>
                   <a:srgbClr val="F1F5F9"/>
                 </a:solidFill>
@@ -5656,7 +5672,7 @@
               <a:t> </a:t>
             </a:r>
             <a:r>
-              <a:rPr sz="1200">
+              <a:rPr sz="1100">
                 <a:solidFill>
                   <a:srgbClr val="818CF8"/>
                 </a:solidFill>
@@ -5665,7 +5681,7 @@
               <a:t>0</a:t>
             </a:r>
             <a:r>
-              <a:rPr sz="1200">
+              <a:rPr sz="1100">
                 <a:solidFill>
                   <a:srgbClr val="F1F5F9"/>
                 </a:solidFill>
@@ -5681,7 +5697,7 @@
               </a:spcAft>
             </a:pPr>
             <a:r>
-              <a:rPr sz="1200" b="1">
+              <a:rPr sz="1100" b="1">
                 <a:solidFill>
                   <a:srgbClr val="F472B6"/>
                 </a:solidFill>
@@ -5690,7 +5706,7 @@
               <a:t>let</a:t>
             </a:r>
             <a:r>
-              <a:rPr sz="1200">
+              <a:rPr sz="1100">
                 <a:solidFill>
                   <a:srgbClr val="F1F5F9"/>
                 </a:solidFill>
@@ -5699,7 +5715,7 @@
               <a:t> </a:t>
             </a:r>
             <a:r>
-              <a:rPr sz="1200">
+              <a:rPr sz="1100">
                 <a:solidFill>
                   <a:srgbClr val="F1F5F9"/>
                 </a:solidFill>
@@ -5708,7 +5724,7 @@
               <a:t>mag1</a:t>
             </a:r>
             <a:r>
-              <a:rPr sz="1200">
+              <a:rPr sz="1100">
                 <a:solidFill>
                   <a:srgbClr val="F1F5F9"/>
                 </a:solidFill>
@@ -5717,7 +5733,7 @@
               <a:t> </a:t>
             </a:r>
             <a:r>
-              <a:rPr sz="1200">
+              <a:rPr sz="1100">
                 <a:solidFill>
                   <a:srgbClr val="F1F5F9"/>
                 </a:solidFill>
@@ -5726,7 +5742,7 @@
               <a:t>=</a:t>
             </a:r>
             <a:r>
-              <a:rPr sz="1200">
+              <a:rPr sz="1100">
                 <a:solidFill>
                   <a:srgbClr val="F1F5F9"/>
                 </a:solidFill>
@@ -5735,7 +5751,7 @@
               <a:t> </a:t>
             </a:r>
             <a:r>
-              <a:rPr sz="1200">
+              <a:rPr sz="1100">
                 <a:solidFill>
                   <a:srgbClr val="818CF8"/>
                 </a:solidFill>
@@ -5744,16 +5760,32 @@
               <a:t>0</a:t>
             </a:r>
             <a:r>
-              <a:rPr sz="1200">
-                <a:solidFill>
-                  <a:srgbClr val="F1F5F9"/>
-                </a:solidFill>
-                <a:latin typeface="Consolas"/>
-              </a:rPr>
-              <a:t>,</a:t>
-            </a:r>
-            <a:r>
-              <a:rPr sz="1200">
+              <a:rPr sz="1100">
+                <a:solidFill>
+                  <a:srgbClr val="F1F5F9"/>
+                </a:solidFill>
+                <a:latin typeface="Consolas"/>
+              </a:rPr>
+              <a:t>;</a:t>
+            </a:r>
+          </a:p>
+          <a:p>
+            <a:pPr>
+              <a:spcAft>
+                <a:spcPts val="200"/>
+              </a:spcAft>
+            </a:pPr>
+            <a:r>
+              <a:rPr sz="1100" b="1">
+                <a:solidFill>
+                  <a:srgbClr val="F472B6"/>
+                </a:solidFill>
+                <a:latin typeface="Consolas"/>
+              </a:rPr>
+              <a:t>let</a:t>
+            </a:r>
+            <a:r>
+              <a:rPr sz="1100">
                 <a:solidFill>
                   <a:srgbClr val="F1F5F9"/>
                 </a:solidFill>
@@ -5762,7 +5794,7 @@
               <a:t> </a:t>
             </a:r>
             <a:r>
-              <a:rPr sz="1200">
+              <a:rPr sz="1100">
                 <a:solidFill>
                   <a:srgbClr val="F1F5F9"/>
                 </a:solidFill>
@@ -5771,7 +5803,7 @@
               <a:t>mag2</a:t>
             </a:r>
             <a:r>
-              <a:rPr sz="1200">
+              <a:rPr sz="1100">
                 <a:solidFill>
                   <a:srgbClr val="F1F5F9"/>
                 </a:solidFill>
@@ -5780,7 +5812,7 @@
               <a:t> </a:t>
             </a:r>
             <a:r>
-              <a:rPr sz="1200">
+              <a:rPr sz="1100">
                 <a:solidFill>
                   <a:srgbClr val="F1F5F9"/>
                 </a:solidFill>
@@ -5789,7 +5821,7 @@
               <a:t>=</a:t>
             </a:r>
             <a:r>
-              <a:rPr sz="1200">
+              <a:rPr sz="1100">
                 <a:solidFill>
                   <a:srgbClr val="F1F5F9"/>
                 </a:solidFill>
@@ -5798,7 +5830,7 @@
               <a:t> </a:t>
             </a:r>
             <a:r>
-              <a:rPr sz="1200">
+              <a:rPr sz="1100">
                 <a:solidFill>
                   <a:srgbClr val="818CF8"/>
                 </a:solidFill>
@@ -5807,7 +5839,7 @@
               <a:t>0</a:t>
             </a:r>
             <a:r>
-              <a:rPr sz="1200">
+              <a:rPr sz="1100">
                 <a:solidFill>
                   <a:srgbClr val="F1F5F9"/>
                 </a:solidFill>
@@ -5823,7 +5855,7 @@
               </a:spcAft>
             </a:pPr>
             <a:r>
-              <a:rPr sz="1200">
+              <a:rPr sz="1100">
                 <a:solidFill>
                   <a:srgbClr val="F1F5F9"/>
                 </a:solidFill>
@@ -5832,7 +5864,7 @@
               <a:t>vocab</a:t>
             </a:r>
             <a:r>
-              <a:rPr sz="1200">
+              <a:rPr sz="1100">
                 <a:solidFill>
                   <a:srgbClr val="F1F5F9"/>
                 </a:solidFill>
@@ -5841,7 +5873,7 @@
               <a:t>.</a:t>
             </a:r>
             <a:r>
-              <a:rPr sz="1200">
+              <a:rPr sz="1100">
                 <a:solidFill>
                   <a:srgbClr val="F1F5F9"/>
                 </a:solidFill>
@@ -5850,7 +5882,7 @@
               <a:t>forEach</a:t>
             </a:r>
             <a:r>
-              <a:rPr sz="1200">
+              <a:rPr sz="1100">
                 <a:solidFill>
                   <a:srgbClr val="F1F5F9"/>
                 </a:solidFill>
@@ -5859,7 +5891,7 @@
               <a:t>(</a:t>
             </a:r>
             <a:r>
-              <a:rPr sz="1200">
+              <a:rPr sz="1100">
                 <a:solidFill>
                   <a:srgbClr val="F1F5F9"/>
                 </a:solidFill>
@@ -5868,7 +5900,7 @@
               <a:t>word</a:t>
             </a:r>
             <a:r>
-              <a:rPr sz="1200">
+              <a:rPr sz="1100">
                 <a:solidFill>
                   <a:srgbClr val="F1F5F9"/>
                 </a:solidFill>
@@ -5877,7 +5909,7 @@
               <a:t> </a:t>
             </a:r>
             <a:r>
-              <a:rPr sz="1200">
+              <a:rPr sz="1100">
                 <a:solidFill>
                   <a:srgbClr val="F1F5F9"/>
                 </a:solidFill>
@@ -5886,7 +5918,7 @@
               <a:t>=&gt;</a:t>
             </a:r>
             <a:r>
-              <a:rPr sz="1200">
+              <a:rPr sz="1100">
                 <a:solidFill>
                   <a:srgbClr val="F1F5F9"/>
                 </a:solidFill>
@@ -5895,7 +5927,7 @@
               <a:t> </a:t>
             </a:r>
             <a:r>
-              <a:rPr sz="1200">
+              <a:rPr sz="1100">
                 <a:solidFill>
                   <a:srgbClr val="F1F5F9"/>
                 </a:solidFill>
@@ -5911,7 +5943,7 @@
               </a:spcAft>
             </a:pPr>
             <a:r>
-              <a:rPr sz="1200">
+              <a:rPr sz="1100">
                 <a:solidFill>
                   <a:srgbClr val="F1F5F9"/>
                 </a:solidFill>
@@ -5920,7 +5952,7 @@
               <a:t>    </a:t>
             </a:r>
             <a:r>
-              <a:rPr sz="1200">
+              <a:rPr sz="1100">
                 <a:solidFill>
                   <a:srgbClr val="F1F5F9"/>
                 </a:solidFill>
@@ -5929,7 +5961,7 @@
               <a:t>dotProduct</a:t>
             </a:r>
             <a:r>
-              <a:rPr sz="1200">
+              <a:rPr sz="1100">
                 <a:solidFill>
                   <a:srgbClr val="F1F5F9"/>
                 </a:solidFill>
@@ -5938,7 +5970,7 @@
               <a:t> </a:t>
             </a:r>
             <a:r>
-              <a:rPr sz="1200">
+              <a:rPr sz="1100">
                 <a:solidFill>
                   <a:srgbClr val="F1F5F9"/>
                 </a:solidFill>
@@ -5947,7 +5979,7 @@
               <a:t>+=</a:t>
             </a:r>
             <a:r>
-              <a:rPr sz="1200">
+              <a:rPr sz="1100">
                 <a:solidFill>
                   <a:srgbClr val="F1F5F9"/>
                 </a:solidFill>
@@ -5956,7 +5988,7 @@
               <a:t> </a:t>
             </a:r>
             <a:r>
-              <a:rPr sz="1200">
+              <a:rPr sz="1100">
                 <a:solidFill>
                   <a:srgbClr val="F1F5F9"/>
                 </a:solidFill>
@@ -5965,7 +5997,7 @@
               <a:t>freq1</a:t>
             </a:r>
             <a:r>
-              <a:rPr sz="1200">
+              <a:rPr sz="1100">
                 <a:solidFill>
                   <a:srgbClr val="F1F5F9"/>
                 </a:solidFill>
@@ -5974,7 +6006,7 @@
               <a:t>[</a:t>
             </a:r>
             <a:r>
-              <a:rPr sz="1200">
+              <a:rPr sz="1100">
                 <a:solidFill>
                   <a:srgbClr val="F1F5F9"/>
                 </a:solidFill>
@@ -5983,7 +6015,7 @@
               <a:t>word</a:t>
             </a:r>
             <a:r>
-              <a:rPr sz="1200">
+              <a:rPr sz="1100">
                 <a:solidFill>
                   <a:srgbClr val="F1F5F9"/>
                 </a:solidFill>
@@ -5992,7 +6024,7 @@
               <a:t>]</a:t>
             </a:r>
             <a:r>
-              <a:rPr sz="1200">
+              <a:rPr sz="1100">
                 <a:solidFill>
                   <a:srgbClr val="F1F5F9"/>
                 </a:solidFill>
@@ -6001,7 +6033,7 @@
               <a:t> </a:t>
             </a:r>
             <a:r>
-              <a:rPr sz="1200">
+              <a:rPr sz="1100">
                 <a:solidFill>
                   <a:srgbClr val="F1F5F9"/>
                 </a:solidFill>
@@ -6010,7 +6042,7 @@
               <a:t>*</a:t>
             </a:r>
             <a:r>
-              <a:rPr sz="1200">
+              <a:rPr sz="1100">
                 <a:solidFill>
                   <a:srgbClr val="F1F5F9"/>
                 </a:solidFill>
@@ -6019,7 +6051,7 @@
               <a:t> </a:t>
             </a:r>
             <a:r>
-              <a:rPr sz="1200">
+              <a:rPr sz="1100">
                 <a:solidFill>
                   <a:srgbClr val="F1F5F9"/>
                 </a:solidFill>
@@ -6028,7 +6060,7 @@
               <a:t>freq2</a:t>
             </a:r>
             <a:r>
-              <a:rPr sz="1200">
+              <a:rPr sz="1100">
                 <a:solidFill>
                   <a:srgbClr val="F1F5F9"/>
                 </a:solidFill>
@@ -6037,7 +6069,7 @@
               <a:t>[</a:t>
             </a:r>
             <a:r>
-              <a:rPr sz="1200">
+              <a:rPr sz="1100">
                 <a:solidFill>
                   <a:srgbClr val="F1F5F9"/>
                 </a:solidFill>
@@ -6046,7 +6078,7 @@
               <a:t>word</a:t>
             </a:r>
             <a:r>
-              <a:rPr sz="1200">
+              <a:rPr sz="1100">
                 <a:solidFill>
                   <a:srgbClr val="F1F5F9"/>
                 </a:solidFill>
@@ -6062,7 +6094,7 @@
               </a:spcAft>
             </a:pPr>
             <a:r>
-              <a:rPr sz="1200">
+              <a:rPr sz="1100">
                 <a:solidFill>
                   <a:srgbClr val="F1F5F9"/>
                 </a:solidFill>
@@ -6071,7 +6103,7 @@
               <a:t>    </a:t>
             </a:r>
             <a:r>
-              <a:rPr sz="1200">
+              <a:rPr sz="1100">
                 <a:solidFill>
                   <a:srgbClr val="F1F5F9"/>
                 </a:solidFill>
@@ -6080,7 +6112,7 @@
               <a:t>mag1</a:t>
             </a:r>
             <a:r>
-              <a:rPr sz="1200">
+              <a:rPr sz="1100">
                 <a:solidFill>
                   <a:srgbClr val="F1F5F9"/>
                 </a:solidFill>
@@ -6089,7 +6121,7 @@
               <a:t> </a:t>
             </a:r>
             <a:r>
-              <a:rPr sz="1200">
+              <a:rPr sz="1100">
                 <a:solidFill>
                   <a:srgbClr val="F1F5F9"/>
                 </a:solidFill>
@@ -6098,7 +6130,7 @@
               <a:t>+=</a:t>
             </a:r>
             <a:r>
-              <a:rPr sz="1200">
+              <a:rPr sz="1100">
                 <a:solidFill>
                   <a:srgbClr val="F1F5F9"/>
                 </a:solidFill>
@@ -6107,7 +6139,7 @@
               <a:t> </a:t>
             </a:r>
             <a:r>
-              <a:rPr sz="1200">
+              <a:rPr sz="1100">
                 <a:solidFill>
                   <a:srgbClr val="F1F5F9"/>
                 </a:solidFill>
@@ -6116,7 +6148,7 @@
               <a:t>freq1</a:t>
             </a:r>
             <a:r>
-              <a:rPr sz="1200">
+              <a:rPr sz="1100">
                 <a:solidFill>
                   <a:srgbClr val="F1F5F9"/>
                 </a:solidFill>
@@ -6125,7 +6157,7 @@
               <a:t>[</a:t>
             </a:r>
             <a:r>
-              <a:rPr sz="1200">
+              <a:rPr sz="1100">
                 <a:solidFill>
                   <a:srgbClr val="F1F5F9"/>
                 </a:solidFill>
@@ -6134,7 +6166,7 @@
               <a:t>word</a:t>
             </a:r>
             <a:r>
-              <a:rPr sz="1200">
+              <a:rPr sz="1100">
                 <a:solidFill>
                   <a:srgbClr val="F1F5F9"/>
                 </a:solidFill>
@@ -6143,7 +6175,7 @@
               <a:t>]</a:t>
             </a:r>
             <a:r>
-              <a:rPr sz="1200">
+              <a:rPr sz="1100">
                 <a:solidFill>
                   <a:srgbClr val="F1F5F9"/>
                 </a:solidFill>
@@ -6152,7 +6184,7 @@
               <a:t> </a:t>
             </a:r>
             <a:r>
-              <a:rPr sz="1200">
+              <a:rPr sz="1100">
                 <a:solidFill>
                   <a:srgbClr val="F1F5F9"/>
                 </a:solidFill>
@@ -6161,7 +6193,7 @@
               <a:t>*</a:t>
             </a:r>
             <a:r>
-              <a:rPr sz="1200">
+              <a:rPr sz="1100">
                 <a:solidFill>
                   <a:srgbClr val="F1F5F9"/>
                 </a:solidFill>
@@ -6170,7 +6202,7 @@
               <a:t> </a:t>
             </a:r>
             <a:r>
-              <a:rPr sz="1200">
+              <a:rPr sz="1100">
                 <a:solidFill>
                   <a:srgbClr val="F1F5F9"/>
                 </a:solidFill>
@@ -6179,7 +6211,7 @@
               <a:t>freq1</a:t>
             </a:r>
             <a:r>
-              <a:rPr sz="1200">
+              <a:rPr sz="1100">
                 <a:solidFill>
                   <a:srgbClr val="F1F5F9"/>
                 </a:solidFill>
@@ -6188,7 +6220,7 @@
               <a:t>[</a:t>
             </a:r>
             <a:r>
-              <a:rPr sz="1200">
+              <a:rPr sz="1100">
                 <a:solidFill>
                   <a:srgbClr val="F1F5F9"/>
                 </a:solidFill>
@@ -6197,7 +6229,7 @@
               <a:t>word</a:t>
             </a:r>
             <a:r>
-              <a:rPr sz="1200">
+              <a:rPr sz="1100">
                 <a:solidFill>
                   <a:srgbClr val="F1F5F9"/>
                 </a:solidFill>
@@ -6213,7 +6245,7 @@
               </a:spcAft>
             </a:pPr>
             <a:r>
-              <a:rPr sz="1200">
+              <a:rPr sz="1100">
                 <a:solidFill>
                   <a:srgbClr val="F1F5F9"/>
                 </a:solidFill>
@@ -6222,7 +6254,7 @@
               <a:t>    </a:t>
             </a:r>
             <a:r>
-              <a:rPr sz="1200">
+              <a:rPr sz="1100">
                 <a:solidFill>
                   <a:srgbClr val="F1F5F9"/>
                 </a:solidFill>
@@ -6231,7 +6263,7 @@
               <a:t>mag2</a:t>
             </a:r>
             <a:r>
-              <a:rPr sz="1200">
+              <a:rPr sz="1100">
                 <a:solidFill>
                   <a:srgbClr val="F1F5F9"/>
                 </a:solidFill>
@@ -6240,7 +6272,7 @@
               <a:t> </a:t>
             </a:r>
             <a:r>
-              <a:rPr sz="1200">
+              <a:rPr sz="1100">
                 <a:solidFill>
                   <a:srgbClr val="F1F5F9"/>
                 </a:solidFill>
@@ -6249,7 +6281,7 @@
               <a:t>+=</a:t>
             </a:r>
             <a:r>
-              <a:rPr sz="1200">
+              <a:rPr sz="1100">
                 <a:solidFill>
                   <a:srgbClr val="F1F5F9"/>
                 </a:solidFill>
@@ -6258,7 +6290,7 @@
               <a:t> </a:t>
             </a:r>
             <a:r>
-              <a:rPr sz="1200">
+              <a:rPr sz="1100">
                 <a:solidFill>
                   <a:srgbClr val="F1F5F9"/>
                 </a:solidFill>
@@ -6267,7 +6299,7 @@
               <a:t>freq2</a:t>
             </a:r>
             <a:r>
-              <a:rPr sz="1200">
+              <a:rPr sz="1100">
                 <a:solidFill>
                   <a:srgbClr val="F1F5F9"/>
                 </a:solidFill>
@@ -6276,7 +6308,7 @@
               <a:t>[</a:t>
             </a:r>
             <a:r>
-              <a:rPr sz="1200">
+              <a:rPr sz="1100">
                 <a:solidFill>
                   <a:srgbClr val="F1F5F9"/>
                 </a:solidFill>
@@ -6285,7 +6317,7 @@
               <a:t>word</a:t>
             </a:r>
             <a:r>
-              <a:rPr sz="1200">
+              <a:rPr sz="1100">
                 <a:solidFill>
                   <a:srgbClr val="F1F5F9"/>
                 </a:solidFill>
@@ -6294,7 +6326,7 @@
               <a:t>]</a:t>
             </a:r>
             <a:r>
-              <a:rPr sz="1200">
+              <a:rPr sz="1100">
                 <a:solidFill>
                   <a:srgbClr val="F1F5F9"/>
                 </a:solidFill>
@@ -6303,7 +6335,7 @@
               <a:t> </a:t>
             </a:r>
             <a:r>
-              <a:rPr sz="1200">
+              <a:rPr sz="1100">
                 <a:solidFill>
                   <a:srgbClr val="F1F5F9"/>
                 </a:solidFill>
@@ -6312,7 +6344,7 @@
               <a:t>*</a:t>
             </a:r>
             <a:r>
-              <a:rPr sz="1200">
+              <a:rPr sz="1100">
                 <a:solidFill>
                   <a:srgbClr val="F1F5F9"/>
                 </a:solidFill>
@@ -6321,7 +6353,7 @@
               <a:t> </a:t>
             </a:r>
             <a:r>
-              <a:rPr sz="1200">
+              <a:rPr sz="1100">
                 <a:solidFill>
                   <a:srgbClr val="F1F5F9"/>
                 </a:solidFill>
@@ -6330,7 +6362,7 @@
               <a:t>freq2</a:t>
             </a:r>
             <a:r>
-              <a:rPr sz="1200">
+              <a:rPr sz="1100">
                 <a:solidFill>
                   <a:srgbClr val="F1F5F9"/>
                 </a:solidFill>
@@ -6339,7 +6371,7 @@
               <a:t>[</a:t>
             </a:r>
             <a:r>
-              <a:rPr sz="1200">
+              <a:rPr sz="1100">
                 <a:solidFill>
                   <a:srgbClr val="F1F5F9"/>
                 </a:solidFill>
@@ -6348,7 +6380,7 @@
               <a:t>word</a:t>
             </a:r>
             <a:r>
-              <a:rPr sz="1200">
+              <a:rPr sz="1100">
                 <a:solidFill>
                   <a:srgbClr val="F1F5F9"/>
                 </a:solidFill>
@@ -6364,7 +6396,7 @@
               </a:spcAft>
             </a:pPr>
             <a:r>
-              <a:rPr sz="1200">
+              <a:rPr sz="1100">
                 <a:solidFill>
                   <a:srgbClr val="F1F5F9"/>
                 </a:solidFill>
@@ -6380,7 +6412,7 @@
               </a:spcAft>
             </a:pPr>
             <a:r>
-              <a:rPr sz="1200" b="1">
+              <a:rPr sz="1100" b="1">
                 <a:solidFill>
                   <a:srgbClr val="F472B6"/>
                 </a:solidFill>
@@ -6389,7 +6421,7 @@
               <a:t>if</a:t>
             </a:r>
             <a:r>
-              <a:rPr sz="1200">
+              <a:rPr sz="1100">
                 <a:solidFill>
                   <a:srgbClr val="F1F5F9"/>
                 </a:solidFill>
@@ -6398,7 +6430,7 @@
               <a:t> </a:t>
             </a:r>
             <a:r>
-              <a:rPr sz="1200">
+              <a:rPr sz="1100">
                 <a:solidFill>
                   <a:srgbClr val="F1F5F9"/>
                 </a:solidFill>
@@ -6407,7 +6439,7 @@
               <a:t>(</a:t>
             </a:r>
             <a:r>
-              <a:rPr sz="1200">
+              <a:rPr sz="1100">
                 <a:solidFill>
                   <a:srgbClr val="F1F5F9"/>
                 </a:solidFill>
@@ -6416,7 +6448,7 @@
               <a:t>mag1</a:t>
             </a:r>
             <a:r>
-              <a:rPr sz="1200">
+              <a:rPr sz="1100">
                 <a:solidFill>
                   <a:srgbClr val="F1F5F9"/>
                 </a:solidFill>
@@ -6425,7 +6457,7 @@
               <a:t> </a:t>
             </a:r>
             <a:r>
-              <a:rPr sz="1200">
+              <a:rPr sz="1100">
                 <a:solidFill>
                   <a:srgbClr val="F1F5F9"/>
                 </a:solidFill>
@@ -6434,7 +6466,7 @@
               <a:t>===</a:t>
             </a:r>
             <a:r>
-              <a:rPr sz="1200">
+              <a:rPr sz="1100">
                 <a:solidFill>
                   <a:srgbClr val="F1F5F9"/>
                 </a:solidFill>
@@ -6443,7 +6475,7 @@
               <a:t> </a:t>
             </a:r>
             <a:r>
-              <a:rPr sz="1200">
+              <a:rPr sz="1100">
                 <a:solidFill>
                   <a:srgbClr val="818CF8"/>
                 </a:solidFill>
@@ -6452,7 +6484,7 @@
               <a:t>0</a:t>
             </a:r>
             <a:r>
-              <a:rPr sz="1200">
+              <a:rPr sz="1100">
                 <a:solidFill>
                   <a:srgbClr val="F1F5F9"/>
                 </a:solidFill>
@@ -6461,7 +6493,7 @@
               <a:t> </a:t>
             </a:r>
             <a:r>
-              <a:rPr sz="1200">
+              <a:rPr sz="1100">
                 <a:solidFill>
                   <a:srgbClr val="F1F5F9"/>
                 </a:solidFill>
@@ -6470,7 +6502,7 @@
               <a:t>||</a:t>
             </a:r>
             <a:r>
-              <a:rPr sz="1200">
+              <a:rPr sz="1100">
                 <a:solidFill>
                   <a:srgbClr val="F1F5F9"/>
                 </a:solidFill>
@@ -6479,7 +6511,7 @@
               <a:t> </a:t>
             </a:r>
             <a:r>
-              <a:rPr sz="1200">
+              <a:rPr sz="1100">
                 <a:solidFill>
                   <a:srgbClr val="F1F5F9"/>
                 </a:solidFill>
@@ -6488,7 +6520,7 @@
               <a:t>mag2</a:t>
             </a:r>
             <a:r>
-              <a:rPr sz="1200">
+              <a:rPr sz="1100">
                 <a:solidFill>
                   <a:srgbClr val="F1F5F9"/>
                 </a:solidFill>
@@ -6497,7 +6529,7 @@
               <a:t> </a:t>
             </a:r>
             <a:r>
-              <a:rPr sz="1200">
+              <a:rPr sz="1100">
                 <a:solidFill>
                   <a:srgbClr val="F1F5F9"/>
                 </a:solidFill>
@@ -6506,7 +6538,7 @@
               <a:t>===</a:t>
             </a:r>
             <a:r>
-              <a:rPr sz="1200">
+              <a:rPr sz="1100">
                 <a:solidFill>
                   <a:srgbClr val="F1F5F9"/>
                 </a:solidFill>
@@ -6515,7 +6547,7 @@
               <a:t> </a:t>
             </a:r>
             <a:r>
-              <a:rPr sz="1200">
+              <a:rPr sz="1100">
                 <a:solidFill>
                   <a:srgbClr val="818CF8"/>
                 </a:solidFill>
@@ -6524,7 +6556,7 @@
               <a:t>0</a:t>
             </a:r>
             <a:r>
-              <a:rPr sz="1200">
+              <a:rPr sz="1100">
                 <a:solidFill>
                   <a:srgbClr val="F1F5F9"/>
                 </a:solidFill>
@@ -6533,7 +6565,7 @@
               <a:t>)</a:t>
             </a:r>
             <a:r>
-              <a:rPr sz="1200">
+              <a:rPr sz="1100">
                 <a:solidFill>
                   <a:srgbClr val="F1F5F9"/>
                 </a:solidFill>
@@ -6542,7 +6574,7 @@
               <a:t> </a:t>
             </a:r>
             <a:r>
-              <a:rPr sz="1200" b="1">
+              <a:rPr sz="1100" b="1">
                 <a:solidFill>
                   <a:srgbClr val="F472B6"/>
                 </a:solidFill>
@@ -6551,7 +6583,7 @@
               <a:t>return</a:t>
             </a:r>
             <a:r>
-              <a:rPr sz="1200">
+              <a:rPr sz="1100">
                 <a:solidFill>
                   <a:srgbClr val="F1F5F9"/>
                 </a:solidFill>
@@ -6560,7 +6592,7 @@
               <a:t> </a:t>
             </a:r>
             <a:r>
-              <a:rPr sz="1200">
+              <a:rPr sz="1100">
                 <a:solidFill>
                   <a:srgbClr val="818CF8"/>
                 </a:solidFill>
@@ -6569,7 +6601,7 @@
               <a:t>0</a:t>
             </a:r>
             <a:r>
-              <a:rPr sz="1200">
+              <a:rPr sz="1100">
                 <a:solidFill>
                   <a:srgbClr val="F1F5F9"/>
                 </a:solidFill>
@@ -6585,7 +6617,7 @@
               </a:spcAft>
             </a:pPr>
             <a:r>
-              <a:rPr sz="1200" b="1">
+              <a:rPr sz="1100" b="1">
                 <a:solidFill>
                   <a:srgbClr val="F472B6"/>
                 </a:solidFill>
@@ -6594,7 +6626,7 @@
               <a:t>return</a:t>
             </a:r>
             <a:r>
-              <a:rPr sz="1200">
+              <a:rPr sz="1100">
                 <a:solidFill>
                   <a:srgbClr val="F1F5F9"/>
                 </a:solidFill>
@@ -6603,7 +6635,7 @@
               <a:t> </a:t>
             </a:r>
             <a:r>
-              <a:rPr sz="1200">
+              <a:rPr sz="1100">
                 <a:solidFill>
                   <a:srgbClr val="F1F5F9"/>
                 </a:solidFill>
@@ -6612,7 +6644,7 @@
               <a:t>(</a:t>
             </a:r>
             <a:r>
-              <a:rPr sz="1200">
+              <a:rPr sz="1100">
                 <a:solidFill>
                   <a:srgbClr val="F1F5F9"/>
                 </a:solidFill>
@@ -6621,7 +6653,7 @@
               <a:t>dotProduct</a:t>
             </a:r>
             <a:r>
-              <a:rPr sz="1200">
+              <a:rPr sz="1100">
                 <a:solidFill>
                   <a:srgbClr val="F1F5F9"/>
                 </a:solidFill>
@@ -6630,7 +6662,7 @@
               <a:t> </a:t>
             </a:r>
             <a:r>
-              <a:rPr sz="1200">
+              <a:rPr sz="1100">
                 <a:solidFill>
                   <a:srgbClr val="F1F5F9"/>
                 </a:solidFill>
@@ -6639,7 +6671,7 @@
               <a:t>/</a:t>
             </a:r>
             <a:r>
-              <a:rPr sz="1200">
+              <a:rPr sz="1100">
                 <a:solidFill>
                   <a:srgbClr val="F1F5F9"/>
                 </a:solidFill>
@@ -6648,7 +6680,7 @@
               <a:t> </a:t>
             </a:r>
             <a:r>
-              <a:rPr sz="1200">
+              <a:rPr sz="1100">
                 <a:solidFill>
                   <a:srgbClr val="F1F5F9"/>
                 </a:solidFill>
@@ -6657,7 +6689,7 @@
               <a:t>(</a:t>
             </a:r>
             <a:r>
-              <a:rPr sz="1200">
+              <a:rPr sz="1100">
                 <a:solidFill>
                   <a:srgbClr val="F1F5F9"/>
                 </a:solidFill>
@@ -6666,7 +6698,7 @@
               <a:t>Math</a:t>
             </a:r>
             <a:r>
-              <a:rPr sz="1200">
+              <a:rPr sz="1100">
                 <a:solidFill>
                   <a:srgbClr val="F1F5F9"/>
                 </a:solidFill>
@@ -6675,7 +6707,7 @@
               <a:t>.</a:t>
             </a:r>
             <a:r>
-              <a:rPr sz="1200">
+              <a:rPr sz="1100">
                 <a:solidFill>
                   <a:srgbClr val="F1F5F9"/>
                 </a:solidFill>
@@ -6684,7 +6716,7 @@
               <a:t>sqrt</a:t>
             </a:r>
             <a:r>
-              <a:rPr sz="1200">
+              <a:rPr sz="1100">
                 <a:solidFill>
                   <a:srgbClr val="F1F5F9"/>
                 </a:solidFill>
@@ -6693,7 +6725,7 @@
               <a:t>(</a:t>
             </a:r>
             <a:r>
-              <a:rPr sz="1200">
+              <a:rPr sz="1100">
                 <a:solidFill>
                   <a:srgbClr val="F1F5F9"/>
                 </a:solidFill>
@@ -6702,7 +6734,7 @@
               <a:t>mag1</a:t>
             </a:r>
             <a:r>
-              <a:rPr sz="1200">
+              <a:rPr sz="1100">
                 <a:solidFill>
                   <a:srgbClr val="F1F5F9"/>
                 </a:solidFill>
@@ -6711,7 +6743,7 @@
               <a:t>)</a:t>
             </a:r>
             <a:r>
-              <a:rPr sz="1200">
+              <a:rPr sz="1100">
                 <a:solidFill>
                   <a:srgbClr val="F1F5F9"/>
                 </a:solidFill>
@@ -6720,7 +6752,7 @@
               <a:t> </a:t>
             </a:r>
             <a:r>
-              <a:rPr sz="1200">
+              <a:rPr sz="1100">
                 <a:solidFill>
                   <a:srgbClr val="F1F5F9"/>
                 </a:solidFill>
@@ -6729,7 +6761,7 @@
               <a:t>*</a:t>
             </a:r>
             <a:r>
-              <a:rPr sz="1200">
+              <a:rPr sz="1100">
                 <a:solidFill>
                   <a:srgbClr val="F1F5F9"/>
                 </a:solidFill>
@@ -6738,7 +6770,7 @@
               <a:t> </a:t>
             </a:r>
             <a:r>
-              <a:rPr sz="1200">
+              <a:rPr sz="1100">
                 <a:solidFill>
                   <a:srgbClr val="F1F5F9"/>
                 </a:solidFill>
@@ -6747,7 +6779,7 @@
               <a:t>Math</a:t>
             </a:r>
             <a:r>
-              <a:rPr sz="1200">
+              <a:rPr sz="1100">
                 <a:solidFill>
                   <a:srgbClr val="F1F5F9"/>
                 </a:solidFill>
@@ -6756,7 +6788,7 @@
               <a:t>.</a:t>
             </a:r>
             <a:r>
-              <a:rPr sz="1200">
+              <a:rPr sz="1100">
                 <a:solidFill>
                   <a:srgbClr val="F1F5F9"/>
                 </a:solidFill>
@@ -6765,7 +6797,7 @@
               <a:t>sqrt</a:t>
             </a:r>
             <a:r>
-              <a:rPr sz="1200">
+              <a:rPr sz="1100">
                 <a:solidFill>
                   <a:srgbClr val="F1F5F9"/>
                 </a:solidFill>
@@ -6774,7 +6806,7 @@
               <a:t>(</a:t>
             </a:r>
             <a:r>
-              <a:rPr sz="1200">
+              <a:rPr sz="1100">
                 <a:solidFill>
                   <a:srgbClr val="F1F5F9"/>
                 </a:solidFill>
@@ -6783,7 +6815,7 @@
               <a:t>mag2</a:t>
             </a:r>
             <a:r>
-              <a:rPr sz="1200">
+              <a:rPr sz="1100">
                 <a:solidFill>
                   <a:srgbClr val="F1F5F9"/>
                 </a:solidFill>
@@ -6792,7 +6824,7 @@
               <a:t>)))</a:t>
             </a:r>
             <a:r>
-              <a:rPr sz="1200">
+              <a:rPr sz="1100">
                 <a:solidFill>
                   <a:srgbClr val="F1F5F9"/>
                 </a:solidFill>
@@ -6801,7 +6833,7 @@
               <a:t> </a:t>
             </a:r>
             <a:r>
-              <a:rPr sz="1200">
+              <a:rPr sz="1100">
                 <a:solidFill>
                   <a:srgbClr val="F1F5F9"/>
                 </a:solidFill>
@@ -6810,7 +6842,7 @@
               <a:t>*</a:t>
             </a:r>
             <a:r>
-              <a:rPr sz="1200">
+              <a:rPr sz="1100">
                 <a:solidFill>
                   <a:srgbClr val="F1F5F9"/>
                 </a:solidFill>
@@ -6819,7 +6851,7 @@
               <a:t> </a:t>
             </a:r>
             <a:r>
-              <a:rPr sz="1200">
+              <a:rPr sz="1100">
                 <a:solidFill>
                   <a:srgbClr val="818CF8"/>
                 </a:solidFill>
@@ -6828,7 +6860,7 @@
               <a:t>100</a:t>
             </a:r>
             <a:r>
-              <a:rPr sz="1200">
+              <a:rPr sz="1100">
                 <a:solidFill>
                   <a:srgbClr val="F1F5F9"/>
                 </a:solidFill>
@@ -7067,16 +7099,131 @@
               </a:spcAft>
             </a:pPr>
             <a:r>
-              <a:rPr sz="1100" b="1">
+              <a:rPr sz="1050" b="1">
                 <a:solidFill>
                   <a:srgbClr val="F472B6"/>
                 </a:solidFill>
                 <a:latin typeface="Consolas"/>
               </a:rPr>
+              <a:t>function</a:t>
+            </a:r>
+            <a:r>
+              <a:rPr sz="1050">
+                <a:solidFill>
+                  <a:srgbClr val="F1F5F9"/>
+                </a:solidFill>
+                <a:latin typeface="Consolas"/>
+              </a:rPr>
+              <a:t> </a:t>
+            </a:r>
+            <a:r>
+              <a:rPr sz="1050">
+                <a:solidFill>
+                  <a:srgbClr val="F1F5F9"/>
+                </a:solidFill>
+                <a:latin typeface="Consolas"/>
+              </a:rPr>
+              <a:t>calculateJaccard</a:t>
+            </a:r>
+            <a:r>
+              <a:rPr sz="1050">
+                <a:solidFill>
+                  <a:srgbClr val="F1F5F9"/>
+                </a:solidFill>
+                <a:latin typeface="Consolas"/>
+              </a:rPr>
+              <a:t>(</a:t>
+            </a:r>
+            <a:r>
+              <a:rPr sz="1050">
+                <a:solidFill>
+                  <a:srgbClr val="F1F5F9"/>
+                </a:solidFill>
+                <a:latin typeface="Consolas"/>
+              </a:rPr>
+              <a:t>text1</a:t>
+            </a:r>
+            <a:r>
+              <a:rPr sz="1050">
+                <a:solidFill>
+                  <a:srgbClr val="F1F5F9"/>
+                </a:solidFill>
+                <a:latin typeface="Consolas"/>
+              </a:rPr>
+              <a:t>,</a:t>
+            </a:r>
+            <a:r>
+              <a:rPr sz="1050">
+                <a:solidFill>
+                  <a:srgbClr val="F1F5F9"/>
+                </a:solidFill>
+                <a:latin typeface="Consolas"/>
+              </a:rPr>
+              <a:t> </a:t>
+            </a:r>
+            <a:r>
+              <a:rPr sz="1050">
+                <a:solidFill>
+                  <a:srgbClr val="F1F5F9"/>
+                </a:solidFill>
+                <a:latin typeface="Consolas"/>
+              </a:rPr>
+              <a:t>text2</a:t>
+            </a:r>
+            <a:r>
+              <a:rPr sz="1050">
+                <a:solidFill>
+                  <a:srgbClr val="F1F5F9"/>
+                </a:solidFill>
+                <a:latin typeface="Consolas"/>
+              </a:rPr>
+              <a:t>)</a:t>
+            </a:r>
+            <a:r>
+              <a:rPr sz="1050">
+                <a:solidFill>
+                  <a:srgbClr val="F1F5F9"/>
+                </a:solidFill>
+                <a:latin typeface="Consolas"/>
+              </a:rPr>
+              <a:t> </a:t>
+            </a:r>
+            <a:r>
+              <a:rPr sz="1050">
+                <a:solidFill>
+                  <a:srgbClr val="F1F5F9"/>
+                </a:solidFill>
+                <a:latin typeface="Consolas"/>
+              </a:rPr>
+              <a:t>{</a:t>
+            </a:r>
+          </a:p>
+          <a:p>
+            <a:pPr>
+              <a:spcAft>
+                <a:spcPts val="200"/>
+              </a:spcAft>
+            </a:pPr>
+            <a:r>
+              <a:rPr sz="1050">
+                <a:solidFill>
+                  <a:srgbClr val="F1F5F9"/>
+                </a:solidFill>
+                <a:latin typeface="Consolas"/>
+              </a:rPr>
+              <a:t>    </a:t>
+            </a:r>
+            <a:r>
+              <a:rPr sz="1050" b="1">
+                <a:solidFill>
+                  <a:srgbClr val="F472B6"/>
+                </a:solidFill>
+                <a:latin typeface="Consolas"/>
+              </a:rPr>
               <a:t>const</a:t>
             </a:r>
             <a:r>
-              <a:rPr sz="1100">
+              <a:rPr sz="1050">
                 <a:solidFill>
                   <a:srgbClr val="F1F5F9"/>
                 </a:solidFill>
@@ -7085,7 +7232,370 @@
               <a:t> </a:t>
             </a:r>
             <a:r>
-              <a:rPr sz="1100">
+              <a:rPr sz="1050">
+                <a:solidFill>
+                  <a:srgbClr val="F1F5F9"/>
+                </a:solidFill>
+                <a:latin typeface="Consolas"/>
+              </a:rPr>
+              <a:t>t1</a:t>
+            </a:r>
+            <a:r>
+              <a:rPr sz="1050">
+                <a:solidFill>
+                  <a:srgbClr val="F1F5F9"/>
+                </a:solidFill>
+                <a:latin typeface="Consolas"/>
+              </a:rPr>
+              <a:t> </a:t>
+            </a:r>
+            <a:r>
+              <a:rPr sz="1050">
+                <a:solidFill>
+                  <a:srgbClr val="F1F5F9"/>
+                </a:solidFill>
+                <a:latin typeface="Consolas"/>
+              </a:rPr>
+              <a:t>=</a:t>
+            </a:r>
+            <a:r>
+              <a:rPr sz="1050">
+                <a:solidFill>
+                  <a:srgbClr val="F1F5F9"/>
+                </a:solidFill>
+                <a:latin typeface="Consolas"/>
+              </a:rPr>
+              <a:t> </a:t>
+            </a:r>
+            <a:r>
+              <a:rPr sz="1050">
+                <a:solidFill>
+                  <a:srgbClr val="F1F5F9"/>
+                </a:solidFill>
+                <a:latin typeface="Consolas"/>
+              </a:rPr>
+              <a:t>cleanText</a:t>
+            </a:r>
+            <a:r>
+              <a:rPr sz="1050">
+                <a:solidFill>
+                  <a:srgbClr val="F1F5F9"/>
+                </a:solidFill>
+                <a:latin typeface="Consolas"/>
+              </a:rPr>
+              <a:t>(</a:t>
+            </a:r>
+            <a:r>
+              <a:rPr sz="1050">
+                <a:solidFill>
+                  <a:srgbClr val="F1F5F9"/>
+                </a:solidFill>
+                <a:latin typeface="Consolas"/>
+              </a:rPr>
+              <a:t>text1</a:t>
+            </a:r>
+            <a:r>
+              <a:rPr sz="1050">
+                <a:solidFill>
+                  <a:srgbClr val="F1F5F9"/>
+                </a:solidFill>
+                <a:latin typeface="Consolas"/>
+              </a:rPr>
+              <a:t>);</a:t>
+            </a:r>
+          </a:p>
+          <a:p>
+            <a:pPr>
+              <a:spcAft>
+                <a:spcPts val="200"/>
+              </a:spcAft>
+            </a:pPr>
+            <a:r>
+              <a:rPr sz="1050">
+                <a:solidFill>
+                  <a:srgbClr val="F1F5F9"/>
+                </a:solidFill>
+                <a:latin typeface="Consolas"/>
+              </a:rPr>
+              <a:t>    </a:t>
+            </a:r>
+            <a:r>
+              <a:rPr sz="1050" b="1">
+                <a:solidFill>
+                  <a:srgbClr val="F472B6"/>
+                </a:solidFill>
+                <a:latin typeface="Consolas"/>
+              </a:rPr>
+              <a:t>const</a:t>
+            </a:r>
+            <a:r>
+              <a:rPr sz="1050">
+                <a:solidFill>
+                  <a:srgbClr val="F1F5F9"/>
+                </a:solidFill>
+                <a:latin typeface="Consolas"/>
+              </a:rPr>
+              <a:t> </a:t>
+            </a:r>
+            <a:r>
+              <a:rPr sz="1050">
+                <a:solidFill>
+                  <a:srgbClr val="F1F5F9"/>
+                </a:solidFill>
+                <a:latin typeface="Consolas"/>
+              </a:rPr>
+              <a:t>t2</a:t>
+            </a:r>
+            <a:r>
+              <a:rPr sz="1050">
+                <a:solidFill>
+                  <a:srgbClr val="F1F5F9"/>
+                </a:solidFill>
+                <a:latin typeface="Consolas"/>
+              </a:rPr>
+              <a:t> </a:t>
+            </a:r>
+            <a:r>
+              <a:rPr sz="1050">
+                <a:solidFill>
+                  <a:srgbClr val="F1F5F9"/>
+                </a:solidFill>
+                <a:latin typeface="Consolas"/>
+              </a:rPr>
+              <a:t>=</a:t>
+            </a:r>
+            <a:r>
+              <a:rPr sz="1050">
+                <a:solidFill>
+                  <a:srgbClr val="F1F5F9"/>
+                </a:solidFill>
+                <a:latin typeface="Consolas"/>
+              </a:rPr>
+              <a:t> </a:t>
+            </a:r>
+            <a:r>
+              <a:rPr sz="1050">
+                <a:solidFill>
+                  <a:srgbClr val="F1F5F9"/>
+                </a:solidFill>
+                <a:latin typeface="Consolas"/>
+              </a:rPr>
+              <a:t>cleanText</a:t>
+            </a:r>
+            <a:r>
+              <a:rPr sz="1050">
+                <a:solidFill>
+                  <a:srgbClr val="F1F5F9"/>
+                </a:solidFill>
+                <a:latin typeface="Consolas"/>
+              </a:rPr>
+              <a:t>(</a:t>
+            </a:r>
+            <a:r>
+              <a:rPr sz="1050">
+                <a:solidFill>
+                  <a:srgbClr val="F1F5F9"/>
+                </a:solidFill>
+                <a:latin typeface="Consolas"/>
+              </a:rPr>
+              <a:t>text2</a:t>
+            </a:r>
+            <a:r>
+              <a:rPr sz="1050">
+                <a:solidFill>
+                  <a:srgbClr val="F1F5F9"/>
+                </a:solidFill>
+                <a:latin typeface="Consolas"/>
+              </a:rPr>
+              <a:t>);</a:t>
+            </a:r>
+          </a:p>
+          <a:p>
+            <a:pPr>
+              <a:spcAft>
+                <a:spcPts val="200"/>
+              </a:spcAft>
+            </a:pPr>
+            <a:r>
+              <a:rPr sz="1050">
+                <a:solidFill>
+                  <a:srgbClr val="F1F5F9"/>
+                </a:solidFill>
+                <a:latin typeface="Consolas"/>
+              </a:rPr>
+              <a:t>    </a:t>
+            </a:r>
+            <a:r>
+              <a:rPr sz="1050" b="1">
+                <a:solidFill>
+                  <a:srgbClr val="F472B6"/>
+                </a:solidFill>
+                <a:latin typeface="Consolas"/>
+              </a:rPr>
+              <a:t>if</a:t>
+            </a:r>
+            <a:r>
+              <a:rPr sz="1050">
+                <a:solidFill>
+                  <a:srgbClr val="F1F5F9"/>
+                </a:solidFill>
+                <a:latin typeface="Consolas"/>
+              </a:rPr>
+              <a:t> </a:t>
+            </a:r>
+            <a:r>
+              <a:rPr sz="1050">
+                <a:solidFill>
+                  <a:srgbClr val="F1F5F9"/>
+                </a:solidFill>
+                <a:latin typeface="Consolas"/>
+              </a:rPr>
+              <a:t>(!</a:t>
+            </a:r>
+            <a:r>
+              <a:rPr sz="1050">
+                <a:solidFill>
+                  <a:srgbClr val="F1F5F9"/>
+                </a:solidFill>
+                <a:latin typeface="Consolas"/>
+              </a:rPr>
+              <a:t>t1</a:t>
+            </a:r>
+            <a:r>
+              <a:rPr sz="1050">
+                <a:solidFill>
+                  <a:srgbClr val="F1F5F9"/>
+                </a:solidFill>
+                <a:latin typeface="Consolas"/>
+              </a:rPr>
+              <a:t> </a:t>
+            </a:r>
+            <a:r>
+              <a:rPr sz="1050">
+                <a:solidFill>
+                  <a:srgbClr val="F1F5F9"/>
+                </a:solidFill>
+                <a:latin typeface="Consolas"/>
+              </a:rPr>
+              <a:t>||</a:t>
+            </a:r>
+            <a:r>
+              <a:rPr sz="1050">
+                <a:solidFill>
+                  <a:srgbClr val="F1F5F9"/>
+                </a:solidFill>
+                <a:latin typeface="Consolas"/>
+              </a:rPr>
+              <a:t> </a:t>
+            </a:r>
+            <a:r>
+              <a:rPr sz="1050">
+                <a:solidFill>
+                  <a:srgbClr val="F1F5F9"/>
+                </a:solidFill>
+                <a:latin typeface="Consolas"/>
+              </a:rPr>
+              <a:t>!</a:t>
+            </a:r>
+            <a:r>
+              <a:rPr sz="1050">
+                <a:solidFill>
+                  <a:srgbClr val="F1F5F9"/>
+                </a:solidFill>
+                <a:latin typeface="Consolas"/>
+              </a:rPr>
+              <a:t>t2</a:t>
+            </a:r>
+            <a:r>
+              <a:rPr sz="1050">
+                <a:solidFill>
+                  <a:srgbClr val="F1F5F9"/>
+                </a:solidFill>
+                <a:latin typeface="Consolas"/>
+              </a:rPr>
+              <a:t>)</a:t>
+            </a:r>
+            <a:r>
+              <a:rPr sz="1050">
+                <a:solidFill>
+                  <a:srgbClr val="F1F5F9"/>
+                </a:solidFill>
+                <a:latin typeface="Consolas"/>
+              </a:rPr>
+              <a:t> </a:t>
+            </a:r>
+            <a:r>
+              <a:rPr sz="1050" b="1">
+                <a:solidFill>
+                  <a:srgbClr val="F472B6"/>
+                </a:solidFill>
+                <a:latin typeface="Consolas"/>
+              </a:rPr>
+              <a:t>return</a:t>
+            </a:r>
+            <a:r>
+              <a:rPr sz="1050">
+                <a:solidFill>
+                  <a:srgbClr val="F1F5F9"/>
+                </a:solidFill>
+                <a:latin typeface="Consolas"/>
+              </a:rPr>
+              <a:t> </a:t>
+            </a:r>
+            <a:r>
+              <a:rPr sz="1050">
+                <a:solidFill>
+                  <a:srgbClr val="818CF8"/>
+                </a:solidFill>
+                <a:latin typeface="Consolas"/>
+              </a:rPr>
+              <a:t>0</a:t>
+            </a:r>
+            <a:r>
+              <a:rPr sz="1050">
+                <a:solidFill>
+                  <a:srgbClr val="F1F5F9"/>
+                </a:solidFill>
+                <a:latin typeface="Consolas"/>
+              </a:rPr>
+              <a:t>;</a:t>
+            </a:r>
+          </a:p>
+          <a:p>
+            <a:pPr>
+              <a:spcAft>
+                <a:spcPts val="200"/>
+              </a:spcAft>
+            </a:pPr>
+            <a:r>
+              <a:rPr sz="1050">
+                <a:solidFill>
+                  <a:srgbClr val="F1F5F9"/>
+                </a:solidFill>
+                <a:latin typeface="Consolas"/>
+              </a:rPr>
+              <a:t>    </a:t>
+            </a:r>
+            <a:r>
+              <a:rPr sz="1050" b="1">
+                <a:solidFill>
+                  <a:srgbClr val="F472B6"/>
+                </a:solidFill>
+                <a:latin typeface="Consolas"/>
+              </a:rPr>
+              <a:t>const</a:t>
+            </a:r>
+            <a:r>
+              <a:rPr sz="1050">
+                <a:solidFill>
+                  <a:srgbClr val="F1F5F9"/>
+                </a:solidFill>
+                <a:latin typeface="Consolas"/>
+              </a:rPr>
+              <a:t> </a:t>
+            </a:r>
+            <a:r>
+              <a:rPr sz="1050">
                 <a:solidFill>
                   <a:srgbClr val="F1F5F9"/>
                 </a:solidFill>
@@ -7094,7 +7604,7 @@
               <a:t>words1</a:t>
             </a:r>
             <a:r>
-              <a:rPr sz="1100">
+              <a:rPr sz="1050">
                 <a:solidFill>
                   <a:srgbClr val="F1F5F9"/>
                 </a:solidFill>
@@ -7103,7 +7613,7 @@
               <a:t> </a:t>
             </a:r>
             <a:r>
-              <a:rPr sz="1100">
+              <a:rPr sz="1050">
                 <a:solidFill>
                   <a:srgbClr val="F1F5F9"/>
                 </a:solidFill>
@@ -7112,7 +7622,7 @@
               <a:t>=</a:t>
             </a:r>
             <a:r>
-              <a:rPr sz="1100">
+              <a:rPr sz="1050">
                 <a:solidFill>
                   <a:srgbClr val="F1F5F9"/>
                 </a:solidFill>
@@ -7121,7 +7631,7 @@
               <a:t> </a:t>
             </a:r>
             <a:r>
-              <a:rPr sz="1100" b="1">
+              <a:rPr sz="1050" b="1">
                 <a:solidFill>
                   <a:srgbClr val="F472B6"/>
                 </a:solidFill>
@@ -7130,7 +7640,7 @@
               <a:t>new</a:t>
             </a:r>
             <a:r>
-              <a:rPr sz="1100">
+              <a:rPr sz="1050">
                 <a:solidFill>
                   <a:srgbClr val="F1F5F9"/>
                 </a:solidFill>
@@ -7139,7 +7649,7 @@
               <a:t> </a:t>
             </a:r>
             <a:r>
-              <a:rPr sz="1100">
+              <a:rPr sz="1050">
                 <a:solidFill>
                   <a:srgbClr val="F1F5F9"/>
                 </a:solidFill>
@@ -7148,7 +7658,7 @@
               <a:t>Set</a:t>
             </a:r>
             <a:r>
-              <a:rPr sz="1100">
+              <a:rPr sz="1050">
                 <a:solidFill>
                   <a:srgbClr val="F1F5F9"/>
                 </a:solidFill>
@@ -7157,7 +7667,7 @@
               <a:t>(</a:t>
             </a:r>
             <a:r>
-              <a:rPr sz="1100">
+              <a:rPr sz="1050">
                 <a:solidFill>
                   <a:srgbClr val="F1F5F9"/>
                 </a:solidFill>
@@ -7166,7 +7676,7 @@
               <a:t>t1</a:t>
             </a:r>
             <a:r>
-              <a:rPr sz="1100">
+              <a:rPr sz="1050">
                 <a:solidFill>
                   <a:srgbClr val="F1F5F9"/>
                 </a:solidFill>
@@ -7175,7 +7685,7 @@
               <a:t>.</a:t>
             </a:r>
             <a:r>
-              <a:rPr sz="1100">
+              <a:rPr sz="1050">
                 <a:solidFill>
                   <a:srgbClr val="F1F5F9"/>
                 </a:solidFill>
@@ -7184,7 +7694,7 @@
               <a:t>split</a:t>
             </a:r>
             <a:r>
-              <a:rPr sz="1100">
+              <a:rPr sz="1050">
                 <a:solidFill>
                   <a:srgbClr val="F1F5F9"/>
                 </a:solidFill>
@@ -7193,7 +7703,7 @@
               <a:t>(/\</a:t>
             </a:r>
             <a:r>
-              <a:rPr sz="1100">
+              <a:rPr sz="1050">
                 <a:solidFill>
                   <a:srgbClr val="F1F5F9"/>
                 </a:solidFill>
@@ -7202,7 +7712,7 @@
               <a:t>s</a:t>
             </a:r>
             <a:r>
-              <a:rPr sz="1100">
+              <a:rPr sz="1050">
                 <a:solidFill>
                   <a:srgbClr val="F1F5F9"/>
                 </a:solidFill>
@@ -7218,7 +7728,16 @@
               </a:spcAft>
             </a:pPr>
             <a:r>
-              <a:rPr sz="1100" b="1">
+              <a:rPr sz="1050">
+                <a:solidFill>
+                  <a:srgbClr val="F1F5F9"/>
+                </a:solidFill>
+                <a:latin typeface="Consolas"/>
+              </a:rPr>
+              <a:t>    </a:t>
+            </a:r>
+            <a:r>
+              <a:rPr sz="1050" b="1">
                 <a:solidFill>
                   <a:srgbClr val="F472B6"/>
                 </a:solidFill>
@@ -7227,7 +7746,7 @@
               <a:t>const</a:t>
             </a:r>
             <a:r>
-              <a:rPr sz="1100">
+              <a:rPr sz="1050">
                 <a:solidFill>
                   <a:srgbClr val="F1F5F9"/>
                 </a:solidFill>
@@ -7236,7 +7755,7 @@
               <a:t> </a:t>
             </a:r>
             <a:r>
-              <a:rPr sz="1100">
+              <a:rPr sz="1050">
                 <a:solidFill>
                   <a:srgbClr val="F1F5F9"/>
                 </a:solidFill>
@@ -7245,7 +7764,7 @@
               <a:t>words2</a:t>
             </a:r>
             <a:r>
-              <a:rPr sz="1100">
+              <a:rPr sz="1050">
                 <a:solidFill>
                   <a:srgbClr val="F1F5F9"/>
                 </a:solidFill>
@@ -7254,7 +7773,7 @@
               <a:t> </a:t>
             </a:r>
             <a:r>
-              <a:rPr sz="1100">
+              <a:rPr sz="1050">
                 <a:solidFill>
                   <a:srgbClr val="F1F5F9"/>
                 </a:solidFill>
@@ -7263,7 +7782,7 @@
               <a:t>=</a:t>
             </a:r>
             <a:r>
-              <a:rPr sz="1100">
+              <a:rPr sz="1050">
                 <a:solidFill>
                   <a:srgbClr val="F1F5F9"/>
                 </a:solidFill>
@@ -7272,7 +7791,7 @@
               <a:t> </a:t>
             </a:r>
             <a:r>
-              <a:rPr sz="1100" b="1">
+              <a:rPr sz="1050" b="1">
                 <a:solidFill>
                   <a:srgbClr val="F472B6"/>
                 </a:solidFill>
@@ -7281,7 +7800,7 @@
               <a:t>new</a:t>
             </a:r>
             <a:r>
-              <a:rPr sz="1100">
+              <a:rPr sz="1050">
                 <a:solidFill>
                   <a:srgbClr val="F1F5F9"/>
                 </a:solidFill>
@@ -7290,7 +7809,7 @@
               <a:t> </a:t>
             </a:r>
             <a:r>
-              <a:rPr sz="1100">
+              <a:rPr sz="1050">
                 <a:solidFill>
                   <a:srgbClr val="F1F5F9"/>
                 </a:solidFill>
@@ -7299,7 +7818,7 @@
               <a:t>Set</a:t>
             </a:r>
             <a:r>
-              <a:rPr sz="1100">
+              <a:rPr sz="1050">
                 <a:solidFill>
                   <a:srgbClr val="F1F5F9"/>
                 </a:solidFill>
@@ -7308,7 +7827,7 @@
               <a:t>(</a:t>
             </a:r>
             <a:r>
-              <a:rPr sz="1100">
+              <a:rPr sz="1050">
                 <a:solidFill>
                   <a:srgbClr val="F1F5F9"/>
                 </a:solidFill>
@@ -7317,7 +7836,7 @@
               <a:t>t2</a:t>
             </a:r>
             <a:r>
-              <a:rPr sz="1100">
+              <a:rPr sz="1050">
                 <a:solidFill>
                   <a:srgbClr val="F1F5F9"/>
                 </a:solidFill>
@@ -7326,7 +7845,7 @@
               <a:t>.</a:t>
             </a:r>
             <a:r>
-              <a:rPr sz="1100">
+              <a:rPr sz="1050">
                 <a:solidFill>
                   <a:srgbClr val="F1F5F9"/>
                 </a:solidFill>
@@ -7335,7 +7854,7 @@
               <a:t>split</a:t>
             </a:r>
             <a:r>
-              <a:rPr sz="1100">
+              <a:rPr sz="1050">
                 <a:solidFill>
                   <a:srgbClr val="F1F5F9"/>
                 </a:solidFill>
@@ -7344,7 +7863,7 @@
               <a:t>(/\</a:t>
             </a:r>
             <a:r>
-              <a:rPr sz="1100">
+              <a:rPr sz="1050">
                 <a:solidFill>
                   <a:srgbClr val="F1F5F9"/>
                 </a:solidFill>
@@ -7353,7 +7872,7 @@
               <a:t>s</a:t>
             </a:r>
             <a:r>
-              <a:rPr sz="1100">
+              <a:rPr sz="1050">
                 <a:solidFill>
                   <a:srgbClr val="F1F5F9"/>
                 </a:solidFill>
@@ -7369,7 +7888,16 @@
               </a:spcAft>
             </a:pPr>
             <a:r>
-              <a:rPr sz="1100" b="1">
+              <a:rPr sz="1050">
+                <a:solidFill>
+                  <a:srgbClr val="F1F5F9"/>
+                </a:solidFill>
+                <a:latin typeface="Consolas"/>
+              </a:rPr>
+              <a:t>    </a:t>
+            </a:r>
+            <a:r>
+              <a:rPr sz="1050" b="1">
                 <a:solidFill>
                   <a:srgbClr val="F472B6"/>
                 </a:solidFill>
@@ -7378,7 +7906,7 @@
               <a:t>const</a:t>
             </a:r>
             <a:r>
-              <a:rPr sz="1100">
+              <a:rPr sz="1050">
                 <a:solidFill>
                   <a:srgbClr val="F1F5F9"/>
                 </a:solidFill>
@@ -7387,7 +7915,7 @@
               <a:t> </a:t>
             </a:r>
             <a:r>
-              <a:rPr sz="1100">
+              <a:rPr sz="1050">
                 <a:solidFill>
                   <a:srgbClr val="F1F5F9"/>
                 </a:solidFill>
@@ -7396,7 +7924,7 @@
               <a:t>intersection</a:t>
             </a:r>
             <a:r>
-              <a:rPr sz="1100">
+              <a:rPr sz="1050">
                 <a:solidFill>
                   <a:srgbClr val="F1F5F9"/>
                 </a:solidFill>
@@ -7405,7 +7933,7 @@
               <a:t> </a:t>
             </a:r>
             <a:r>
-              <a:rPr sz="1100">
+              <a:rPr sz="1050">
                 <a:solidFill>
                   <a:srgbClr val="F1F5F9"/>
                 </a:solidFill>
@@ -7414,7 +7942,7 @@
               <a:t>=</a:t>
             </a:r>
             <a:r>
-              <a:rPr sz="1100">
+              <a:rPr sz="1050">
                 <a:solidFill>
                   <a:srgbClr val="F1F5F9"/>
                 </a:solidFill>
@@ -7423,7 +7951,7 @@
               <a:t> </a:t>
             </a:r>
             <a:r>
-              <a:rPr sz="1100" b="1">
+              <a:rPr sz="1050" b="1">
                 <a:solidFill>
                   <a:srgbClr val="F472B6"/>
                 </a:solidFill>
@@ -7432,7 +7960,7 @@
               <a:t>new</a:t>
             </a:r>
             <a:r>
-              <a:rPr sz="1100">
+              <a:rPr sz="1050">
                 <a:solidFill>
                   <a:srgbClr val="F1F5F9"/>
                 </a:solidFill>
@@ -7441,7 +7969,7 @@
               <a:t> </a:t>
             </a:r>
             <a:r>
-              <a:rPr sz="1100">
+              <a:rPr sz="1050">
                 <a:solidFill>
                   <a:srgbClr val="F1F5F9"/>
                 </a:solidFill>
@@ -7450,7 +7978,7 @@
               <a:t>Set</a:t>
             </a:r>
             <a:r>
-              <a:rPr sz="1100">
+              <a:rPr sz="1050">
                 <a:solidFill>
                   <a:srgbClr val="F1F5F9"/>
                 </a:solidFill>
@@ -7466,7 +7994,158 @@
               </a:spcAft>
             </a:pPr>
             <a:r>
-              <a:rPr sz="1100">
+              <a:rPr sz="1050">
+                <a:solidFill>
+                  <a:srgbClr val="F1F5F9"/>
+                </a:solidFill>
+                <a:latin typeface="Consolas"/>
+              </a:rPr>
+              <a:t>        </a:t>
+            </a:r>
+            <a:r>
+              <a:rPr sz="1050">
+                <a:solidFill>
+                  <a:srgbClr val="F1F5F9"/>
+                </a:solidFill>
+                <a:latin typeface="Consolas"/>
+              </a:rPr>
+              <a:t>[...</a:t>
+            </a:r>
+            <a:r>
+              <a:rPr sz="1050">
+                <a:solidFill>
+                  <a:srgbClr val="F1F5F9"/>
+                </a:solidFill>
+                <a:latin typeface="Consolas"/>
+              </a:rPr>
+              <a:t>words1</a:t>
+            </a:r>
+            <a:r>
+              <a:rPr sz="1050">
+                <a:solidFill>
+                  <a:srgbClr val="F1F5F9"/>
+                </a:solidFill>
+                <a:latin typeface="Consolas"/>
+              </a:rPr>
+              <a:t>].</a:t>
+            </a:r>
+            <a:r>
+              <a:rPr sz="1050">
+                <a:solidFill>
+                  <a:srgbClr val="F1F5F9"/>
+                </a:solidFill>
+                <a:latin typeface="Consolas"/>
+              </a:rPr>
+              <a:t>filter</a:t>
+            </a:r>
+            <a:r>
+              <a:rPr sz="1050">
+                <a:solidFill>
+                  <a:srgbClr val="F1F5F9"/>
+                </a:solidFill>
+                <a:latin typeface="Consolas"/>
+              </a:rPr>
+              <a:t>(</a:t>
+            </a:r>
+            <a:r>
+              <a:rPr sz="1050">
+                <a:solidFill>
+                  <a:srgbClr val="F1F5F9"/>
+                </a:solidFill>
+                <a:latin typeface="Consolas"/>
+              </a:rPr>
+              <a:t>x</a:t>
+            </a:r>
+            <a:r>
+              <a:rPr sz="1050">
+                <a:solidFill>
+                  <a:srgbClr val="F1F5F9"/>
+                </a:solidFill>
+                <a:latin typeface="Consolas"/>
+              </a:rPr>
+              <a:t> </a:t>
+            </a:r>
+            <a:r>
+              <a:rPr sz="1050">
+                <a:solidFill>
+                  <a:srgbClr val="F1F5F9"/>
+                </a:solidFill>
+                <a:latin typeface="Consolas"/>
+              </a:rPr>
+              <a:t>=&gt;</a:t>
+            </a:r>
+            <a:r>
+              <a:rPr sz="1050">
+                <a:solidFill>
+                  <a:srgbClr val="F1F5F9"/>
+                </a:solidFill>
+                <a:latin typeface="Consolas"/>
+              </a:rPr>
+              <a:t> </a:t>
+            </a:r>
+            <a:r>
+              <a:rPr sz="1050">
+                <a:solidFill>
+                  <a:srgbClr val="F1F5F9"/>
+                </a:solidFill>
+                <a:latin typeface="Consolas"/>
+              </a:rPr>
+              <a:t>words2</a:t>
+            </a:r>
+            <a:r>
+              <a:rPr sz="1050">
+                <a:solidFill>
+                  <a:srgbClr val="F1F5F9"/>
+                </a:solidFill>
+                <a:latin typeface="Consolas"/>
+              </a:rPr>
+              <a:t>.</a:t>
+            </a:r>
+            <a:r>
+              <a:rPr sz="1050">
+                <a:solidFill>
+                  <a:srgbClr val="F1F5F9"/>
+                </a:solidFill>
+                <a:latin typeface="Consolas"/>
+              </a:rPr>
+              <a:t>has</a:t>
+            </a:r>
+            <a:r>
+              <a:rPr sz="1050">
+                <a:solidFill>
+                  <a:srgbClr val="F1F5F9"/>
+                </a:solidFill>
+                <a:latin typeface="Consolas"/>
+              </a:rPr>
+              <a:t>(</a:t>
+            </a:r>
+            <a:r>
+              <a:rPr sz="1050">
+                <a:solidFill>
+                  <a:srgbClr val="F1F5F9"/>
+                </a:solidFill>
+                <a:latin typeface="Consolas"/>
+              </a:rPr>
+              <a:t>x</a:t>
+            </a:r>
+            <a:r>
+              <a:rPr sz="1050">
+                <a:solidFill>
+                  <a:srgbClr val="F1F5F9"/>
+                </a:solidFill>
+                <a:latin typeface="Consolas"/>
+              </a:rPr>
+              <a:t>))</a:t>
+            </a:r>
+          </a:p>
+          <a:p>
+            <a:pPr>
+              <a:spcAft>
+                <a:spcPts val="200"/>
+              </a:spcAft>
+            </a:pPr>
+            <a:r>
+              <a:rPr sz="1050">
                 <a:solidFill>
                   <a:srgbClr val="F1F5F9"/>
                 </a:solidFill>
@@ -7475,16 +8154,122 @@
               <a:t>    </a:t>
             </a:r>
             <a:r>
-              <a:rPr sz="1100">
-                <a:solidFill>
-                  <a:srgbClr val="F1F5F9"/>
-                </a:solidFill>
-                <a:latin typeface="Consolas"/>
-              </a:rPr>
-              <a:t>[...</a:t>
-            </a:r>
-            <a:r>
-              <a:rPr sz="1100">
+              <a:rPr sz="1050">
+                <a:solidFill>
+                  <a:srgbClr val="F1F5F9"/>
+                </a:solidFill>
+                <a:latin typeface="Consolas"/>
+              </a:rPr>
+              <a:t>);</a:t>
+            </a:r>
+          </a:p>
+          <a:p>
+            <a:pPr>
+              <a:spcAft>
+                <a:spcPts val="200"/>
+              </a:spcAft>
+            </a:pPr>
+            <a:r>
+              <a:rPr sz="1050">
+                <a:solidFill>
+                  <a:srgbClr val="F1F5F9"/>
+                </a:solidFill>
+                <a:latin typeface="Consolas"/>
+              </a:rPr>
+              <a:t>    </a:t>
+            </a:r>
+            <a:r>
+              <a:rPr sz="1050" b="1">
+                <a:solidFill>
+                  <a:srgbClr val="F472B6"/>
+                </a:solidFill>
+                <a:latin typeface="Consolas"/>
+              </a:rPr>
+              <a:t>const</a:t>
+            </a:r>
+            <a:r>
+              <a:rPr sz="1050">
+                <a:solidFill>
+                  <a:srgbClr val="F1F5F9"/>
+                </a:solidFill>
+                <a:latin typeface="Consolas"/>
+              </a:rPr>
+              <a:t> </a:t>
+            </a:r>
+            <a:r>
+              <a:rPr sz="1050">
+                <a:solidFill>
+                  <a:srgbClr val="F1F5F9"/>
+                </a:solidFill>
+                <a:latin typeface="Consolas"/>
+              </a:rPr>
+              <a:t>union</a:t>
+            </a:r>
+            <a:r>
+              <a:rPr sz="1050">
+                <a:solidFill>
+                  <a:srgbClr val="F1F5F9"/>
+                </a:solidFill>
+                <a:latin typeface="Consolas"/>
+              </a:rPr>
+              <a:t> </a:t>
+            </a:r>
+            <a:r>
+              <a:rPr sz="1050">
+                <a:solidFill>
+                  <a:srgbClr val="F1F5F9"/>
+                </a:solidFill>
+                <a:latin typeface="Consolas"/>
+              </a:rPr>
+              <a:t>=</a:t>
+            </a:r>
+            <a:r>
+              <a:rPr sz="1050">
+                <a:solidFill>
+                  <a:srgbClr val="F1F5F9"/>
+                </a:solidFill>
+                <a:latin typeface="Consolas"/>
+              </a:rPr>
+              <a:t> </a:t>
+            </a:r>
+            <a:r>
+              <a:rPr sz="1050" b="1">
+                <a:solidFill>
+                  <a:srgbClr val="F472B6"/>
+                </a:solidFill>
+                <a:latin typeface="Consolas"/>
+              </a:rPr>
+              <a:t>new</a:t>
+            </a:r>
+            <a:r>
+              <a:rPr sz="1050">
+                <a:solidFill>
+                  <a:srgbClr val="F1F5F9"/>
+                </a:solidFill>
+                <a:latin typeface="Consolas"/>
+              </a:rPr>
+              <a:t> </a:t>
+            </a:r>
+            <a:r>
+              <a:rPr sz="1050">
+                <a:solidFill>
+                  <a:srgbClr val="F1F5F9"/>
+                </a:solidFill>
+                <a:latin typeface="Consolas"/>
+              </a:rPr>
+              <a:t>Set</a:t>
+            </a:r>
+            <a:r>
+              <a:rPr sz="1050">
+                <a:solidFill>
+                  <a:srgbClr val="F1F5F9"/>
+                </a:solidFill>
+                <a:latin typeface="Consolas"/>
+              </a:rPr>
+              <a:t>([...</a:t>
+            </a:r>
+            <a:r>
+              <a:rPr sz="1050">
                 <a:solidFill>
                   <a:srgbClr val="F1F5F9"/>
                 </a:solidFill>
@@ -7493,25 +8278,86 @@
               <a:t>words1</a:t>
             </a:r>
             <a:r>
-              <a:rPr sz="1100">
-                <a:solidFill>
-                  <a:srgbClr val="F1F5F9"/>
-                </a:solidFill>
-                <a:latin typeface="Consolas"/>
-              </a:rPr>
-              <a:t>].</a:t>
-            </a:r>
-            <a:r>
-              <a:rPr sz="1100">
-                <a:solidFill>
-                  <a:srgbClr val="F1F5F9"/>
-                </a:solidFill>
-                <a:latin typeface="Consolas"/>
-              </a:rPr>
-              <a:t>filter</a:t>
-            </a:r>
-            <a:r>
-              <a:rPr sz="1100">
+              <a:rPr sz="1050">
+                <a:solidFill>
+                  <a:srgbClr val="F1F5F9"/>
+                </a:solidFill>
+                <a:latin typeface="Consolas"/>
+              </a:rPr>
+              <a:t>,</a:t>
+            </a:r>
+            <a:r>
+              <a:rPr sz="1050">
+                <a:solidFill>
+                  <a:srgbClr val="F1F5F9"/>
+                </a:solidFill>
+                <a:latin typeface="Consolas"/>
+              </a:rPr>
+              <a:t> </a:t>
+            </a:r>
+            <a:r>
+              <a:rPr sz="1050">
+                <a:solidFill>
+                  <a:srgbClr val="F1F5F9"/>
+                </a:solidFill>
+                <a:latin typeface="Consolas"/>
+              </a:rPr>
+              <a:t>...</a:t>
+            </a:r>
+            <a:r>
+              <a:rPr sz="1050">
+                <a:solidFill>
+                  <a:srgbClr val="F1F5F9"/>
+                </a:solidFill>
+                <a:latin typeface="Consolas"/>
+              </a:rPr>
+              <a:t>words2</a:t>
+            </a:r>
+            <a:r>
+              <a:rPr sz="1050">
+                <a:solidFill>
+                  <a:srgbClr val="F1F5F9"/>
+                </a:solidFill>
+                <a:latin typeface="Consolas"/>
+              </a:rPr>
+              <a:t>]);</a:t>
+            </a:r>
+          </a:p>
+          <a:p>
+            <a:pPr>
+              <a:spcAft>
+                <a:spcPts val="200"/>
+              </a:spcAft>
+            </a:pPr>
+            <a:r>
+              <a:rPr sz="1050">
+                <a:solidFill>
+                  <a:srgbClr val="F1F5F9"/>
+                </a:solidFill>
+                <a:latin typeface="Consolas"/>
+              </a:rPr>
+              <a:t>    </a:t>
+            </a:r>
+            <a:r>
+              <a:rPr sz="1050" b="1">
+                <a:solidFill>
+                  <a:srgbClr val="F472B6"/>
+                </a:solidFill>
+                <a:latin typeface="Consolas"/>
+              </a:rPr>
+              <a:t>if</a:t>
+            </a:r>
+            <a:r>
+              <a:rPr sz="1050">
+                <a:solidFill>
+                  <a:srgbClr val="F1F5F9"/>
+                </a:solidFill>
+                <a:latin typeface="Consolas"/>
+              </a:rPr>
+              <a:t> </a:t>
+            </a:r>
+            <a:r>
+              <a:rPr sz="1050">
                 <a:solidFill>
                   <a:srgbClr val="F1F5F9"/>
                 </a:solidFill>
@@ -7520,16 +8366,34 @@
               <a:t>(</a:t>
             </a:r>
             <a:r>
-              <a:rPr sz="1100">
-                <a:solidFill>
-                  <a:srgbClr val="F1F5F9"/>
-                </a:solidFill>
-                <a:latin typeface="Consolas"/>
-              </a:rPr>
-              <a:t>x</a:t>
-            </a:r>
-            <a:r>
-              <a:rPr sz="1100">
+              <a:rPr sz="1050">
+                <a:solidFill>
+                  <a:srgbClr val="F1F5F9"/>
+                </a:solidFill>
+                <a:latin typeface="Consolas"/>
+              </a:rPr>
+              <a:t>union</a:t>
+            </a:r>
+            <a:r>
+              <a:rPr sz="1050">
+                <a:solidFill>
+                  <a:srgbClr val="F1F5F9"/>
+                </a:solidFill>
+                <a:latin typeface="Consolas"/>
+              </a:rPr>
+              <a:t>.</a:t>
+            </a:r>
+            <a:r>
+              <a:rPr sz="1050">
+                <a:solidFill>
+                  <a:srgbClr val="F1F5F9"/>
+                </a:solidFill>
+                <a:latin typeface="Consolas"/>
+              </a:rPr>
+              <a:t>size</a:t>
+            </a:r>
+            <a:r>
+              <a:rPr sz="1050">
                 <a:solidFill>
                   <a:srgbClr val="F1F5F9"/>
                 </a:solidFill>
@@ -7538,16 +8402,16 @@
               <a:t> </a:t>
             </a:r>
             <a:r>
-              <a:rPr sz="1100">
-                <a:solidFill>
-                  <a:srgbClr val="F1F5F9"/>
-                </a:solidFill>
-                <a:latin typeface="Consolas"/>
-              </a:rPr>
-              <a:t>=&gt;</a:t>
-            </a:r>
-            <a:r>
-              <a:rPr sz="1100">
+              <a:rPr sz="1050">
+                <a:solidFill>
+                  <a:srgbClr val="F1F5F9"/>
+                </a:solidFill>
+                <a:latin typeface="Consolas"/>
+              </a:rPr>
+              <a:t>===</a:t>
+            </a:r>
+            <a:r>
+              <a:rPr sz="1050">
                 <a:solidFill>
                   <a:srgbClr val="F1F5F9"/>
                 </a:solidFill>
@@ -7556,16 +8420,122 @@
               <a:t> </a:t>
             </a:r>
             <a:r>
-              <a:rPr sz="1100">
-                <a:solidFill>
-                  <a:srgbClr val="F1F5F9"/>
-                </a:solidFill>
-                <a:latin typeface="Consolas"/>
-              </a:rPr>
-              <a:t>words2</a:t>
-            </a:r>
-            <a:r>
-              <a:rPr sz="1100">
+              <a:rPr sz="1050">
+                <a:solidFill>
+                  <a:srgbClr val="818CF8"/>
+                </a:solidFill>
+                <a:latin typeface="Consolas"/>
+              </a:rPr>
+              <a:t>0</a:t>
+            </a:r>
+            <a:r>
+              <a:rPr sz="1050">
+                <a:solidFill>
+                  <a:srgbClr val="F1F5F9"/>
+                </a:solidFill>
+                <a:latin typeface="Consolas"/>
+              </a:rPr>
+              <a:t>)</a:t>
+            </a:r>
+            <a:r>
+              <a:rPr sz="1050">
+                <a:solidFill>
+                  <a:srgbClr val="F1F5F9"/>
+                </a:solidFill>
+                <a:latin typeface="Consolas"/>
+              </a:rPr>
+              <a:t> </a:t>
+            </a:r>
+            <a:r>
+              <a:rPr sz="1050" b="1">
+                <a:solidFill>
+                  <a:srgbClr val="F472B6"/>
+                </a:solidFill>
+                <a:latin typeface="Consolas"/>
+              </a:rPr>
+              <a:t>return</a:t>
+            </a:r>
+            <a:r>
+              <a:rPr sz="1050">
+                <a:solidFill>
+                  <a:srgbClr val="F1F5F9"/>
+                </a:solidFill>
+                <a:latin typeface="Consolas"/>
+              </a:rPr>
+              <a:t> </a:t>
+            </a:r>
+            <a:r>
+              <a:rPr sz="1050">
+                <a:solidFill>
+                  <a:srgbClr val="818CF8"/>
+                </a:solidFill>
+                <a:latin typeface="Consolas"/>
+              </a:rPr>
+              <a:t>0</a:t>
+            </a:r>
+            <a:r>
+              <a:rPr sz="1050">
+                <a:solidFill>
+                  <a:srgbClr val="F1F5F9"/>
+                </a:solidFill>
+                <a:latin typeface="Consolas"/>
+              </a:rPr>
+              <a:t>;</a:t>
+            </a:r>
+          </a:p>
+          <a:p>
+            <a:pPr>
+              <a:spcAft>
+                <a:spcPts val="200"/>
+              </a:spcAft>
+            </a:pPr>
+            <a:r>
+              <a:rPr sz="1050">
+                <a:solidFill>
+                  <a:srgbClr val="F1F5F9"/>
+                </a:solidFill>
+                <a:latin typeface="Consolas"/>
+              </a:rPr>
+              <a:t>    </a:t>
+            </a:r>
+            <a:r>
+              <a:rPr sz="1050" b="1">
+                <a:solidFill>
+                  <a:srgbClr val="F472B6"/>
+                </a:solidFill>
+                <a:latin typeface="Consolas"/>
+              </a:rPr>
+              <a:t>return</a:t>
+            </a:r>
+            <a:r>
+              <a:rPr sz="1050">
+                <a:solidFill>
+                  <a:srgbClr val="F1F5F9"/>
+                </a:solidFill>
+                <a:latin typeface="Consolas"/>
+              </a:rPr>
+              <a:t> </a:t>
+            </a:r>
+            <a:r>
+              <a:rPr sz="1050">
+                <a:solidFill>
+                  <a:srgbClr val="F1F5F9"/>
+                </a:solidFill>
+                <a:latin typeface="Consolas"/>
+              </a:rPr>
+              <a:t>(</a:t>
+            </a:r>
+            <a:r>
+              <a:rPr sz="1050">
+                <a:solidFill>
+                  <a:srgbClr val="F1F5F9"/>
+                </a:solidFill>
+                <a:latin typeface="Consolas"/>
+              </a:rPr>
+              <a:t>intersection</a:t>
+            </a:r>
+            <a:r>
+              <a:rPr sz="1050">
                 <a:solidFill>
                   <a:srgbClr val="F1F5F9"/>
                 </a:solidFill>
@@ -7574,40 +8544,121 @@
               <a:t>.</a:t>
             </a:r>
             <a:r>
-              <a:rPr sz="1100">
-                <a:solidFill>
-                  <a:srgbClr val="F1F5F9"/>
-                </a:solidFill>
-                <a:latin typeface="Consolas"/>
-              </a:rPr>
-              <a:t>has</a:t>
-            </a:r>
-            <a:r>
-              <a:rPr sz="1100">
-                <a:solidFill>
-                  <a:srgbClr val="F1F5F9"/>
-                </a:solidFill>
-                <a:latin typeface="Consolas"/>
-              </a:rPr>
-              <a:t>(</a:t>
-            </a:r>
-            <a:r>
-              <a:rPr sz="1100">
-                <a:solidFill>
-                  <a:srgbClr val="F1F5F9"/>
-                </a:solidFill>
-                <a:latin typeface="Consolas"/>
-              </a:rPr>
-              <a:t>x</a:t>
-            </a:r>
-            <a:r>
-              <a:rPr sz="1100">
-                <a:solidFill>
-                  <a:srgbClr val="F1F5F9"/>
-                </a:solidFill>
-                <a:latin typeface="Consolas"/>
-              </a:rPr>
-              <a:t>))</a:t>
+              <a:rPr sz="1050">
+                <a:solidFill>
+                  <a:srgbClr val="F1F5F9"/>
+                </a:solidFill>
+                <a:latin typeface="Consolas"/>
+              </a:rPr>
+              <a:t>size</a:t>
+            </a:r>
+            <a:r>
+              <a:rPr sz="1050">
+                <a:solidFill>
+                  <a:srgbClr val="F1F5F9"/>
+                </a:solidFill>
+                <a:latin typeface="Consolas"/>
+              </a:rPr>
+              <a:t> </a:t>
+            </a:r>
+            <a:r>
+              <a:rPr sz="1050">
+                <a:solidFill>
+                  <a:srgbClr val="F1F5F9"/>
+                </a:solidFill>
+                <a:latin typeface="Consolas"/>
+              </a:rPr>
+              <a:t>/</a:t>
+            </a:r>
+            <a:r>
+              <a:rPr sz="1050">
+                <a:solidFill>
+                  <a:srgbClr val="F1F5F9"/>
+                </a:solidFill>
+                <a:latin typeface="Consolas"/>
+              </a:rPr>
+              <a:t> </a:t>
+            </a:r>
+            <a:r>
+              <a:rPr sz="1050">
+                <a:solidFill>
+                  <a:srgbClr val="F1F5F9"/>
+                </a:solidFill>
+                <a:latin typeface="Consolas"/>
+              </a:rPr>
+              <a:t>union</a:t>
+            </a:r>
+            <a:r>
+              <a:rPr sz="1050">
+                <a:solidFill>
+                  <a:srgbClr val="F1F5F9"/>
+                </a:solidFill>
+                <a:latin typeface="Consolas"/>
+              </a:rPr>
+              <a:t>.</a:t>
+            </a:r>
+            <a:r>
+              <a:rPr sz="1050">
+                <a:solidFill>
+                  <a:srgbClr val="F1F5F9"/>
+                </a:solidFill>
+                <a:latin typeface="Consolas"/>
+              </a:rPr>
+              <a:t>size</a:t>
+            </a:r>
+            <a:r>
+              <a:rPr sz="1050">
+                <a:solidFill>
+                  <a:srgbClr val="F1F5F9"/>
+                </a:solidFill>
+                <a:latin typeface="Consolas"/>
+              </a:rPr>
+              <a:t>)</a:t>
+            </a:r>
+            <a:r>
+              <a:rPr sz="1050">
+                <a:solidFill>
+                  <a:srgbClr val="F1F5F9"/>
+                </a:solidFill>
+                <a:latin typeface="Consolas"/>
+              </a:rPr>
+              <a:t> </a:t>
+            </a:r>
+            <a:r>
+              <a:rPr sz="1050">
+                <a:solidFill>
+                  <a:srgbClr val="F1F5F9"/>
+                </a:solidFill>
+                <a:latin typeface="Consolas"/>
+              </a:rPr>
+              <a:t>*</a:t>
+            </a:r>
+            <a:r>
+              <a:rPr sz="1050">
+                <a:solidFill>
+                  <a:srgbClr val="F1F5F9"/>
+                </a:solidFill>
+                <a:latin typeface="Consolas"/>
+              </a:rPr>
+              <a:t> </a:t>
+            </a:r>
+            <a:r>
+              <a:rPr sz="1050">
+                <a:solidFill>
+                  <a:srgbClr val="818CF8"/>
+                </a:solidFill>
+                <a:latin typeface="Consolas"/>
+              </a:rPr>
+              <a:t>100</a:t>
+            </a:r>
+            <a:r>
+              <a:rPr sz="1050">
+                <a:solidFill>
+                  <a:srgbClr val="F1F5F9"/>
+                </a:solidFill>
+                <a:latin typeface="Consolas"/>
+              </a:rPr>
+              <a:t>;</a:t>
             </a:r>
           </a:p>
           <a:p>
@@ -7617,484 +8668,13 @@
               </a:spcAft>
             </a:pPr>
             <a:r>
-              <a:rPr sz="1100">
-                <a:solidFill>
-                  <a:srgbClr val="F1F5F9"/>
-                </a:solidFill>
-                <a:latin typeface="Consolas"/>
-              </a:rPr>
-              <a:t>);</a:t>
-            </a:r>
-          </a:p>
-          <a:p>
-            <a:pPr>
-              <a:spcAft>
-                <a:spcPts val="200"/>
-              </a:spcAft>
-            </a:pPr>
-            <a:r>
-              <a:rPr sz="1100" b="1">
-                <a:solidFill>
-                  <a:srgbClr val="F472B6"/>
-                </a:solidFill>
-                <a:latin typeface="Consolas"/>
-              </a:rPr>
-              <a:t>const</a:t>
-            </a:r>
-            <a:r>
-              <a:rPr sz="1100">
-                <a:solidFill>
-                  <a:srgbClr val="F1F5F9"/>
-                </a:solidFill>
-                <a:latin typeface="Consolas"/>
-              </a:rPr>
-              <a:t> </a:t>
-            </a:r>
-            <a:r>
-              <a:rPr sz="1100">
-                <a:solidFill>
-                  <a:srgbClr val="F1F5F9"/>
-                </a:solidFill>
-                <a:latin typeface="Consolas"/>
-              </a:rPr>
-              <a:t>union</a:t>
-            </a:r>
-            <a:r>
-              <a:rPr sz="1100">
-                <a:solidFill>
-                  <a:srgbClr val="F1F5F9"/>
-                </a:solidFill>
-                <a:latin typeface="Consolas"/>
-              </a:rPr>
-              <a:t> </a:t>
-            </a:r>
-            <a:r>
-              <a:rPr sz="1100">
-                <a:solidFill>
-                  <a:srgbClr val="F1F5F9"/>
-                </a:solidFill>
-                <a:latin typeface="Consolas"/>
-              </a:rPr>
-              <a:t>=</a:t>
-            </a:r>
-            <a:r>
-              <a:rPr sz="1100">
-                <a:solidFill>
-                  <a:srgbClr val="F1F5F9"/>
-                </a:solidFill>
-                <a:latin typeface="Consolas"/>
-              </a:rPr>
-              <a:t> </a:t>
-            </a:r>
-            <a:r>
-              <a:rPr sz="1100" b="1">
-                <a:solidFill>
-                  <a:srgbClr val="F472B6"/>
-                </a:solidFill>
-                <a:latin typeface="Consolas"/>
-              </a:rPr>
-              <a:t>new</a:t>
-            </a:r>
-            <a:r>
-              <a:rPr sz="1100">
-                <a:solidFill>
-                  <a:srgbClr val="F1F5F9"/>
-                </a:solidFill>
-                <a:latin typeface="Consolas"/>
-              </a:rPr>
-              <a:t> </a:t>
-            </a:r>
-            <a:r>
-              <a:rPr sz="1100">
-                <a:solidFill>
-                  <a:srgbClr val="F1F5F9"/>
-                </a:solidFill>
-                <a:latin typeface="Consolas"/>
-              </a:rPr>
-              <a:t>Set</a:t>
-            </a:r>
-            <a:r>
-              <a:rPr sz="1100">
-                <a:solidFill>
-                  <a:srgbClr val="F1F5F9"/>
-                </a:solidFill>
-                <a:latin typeface="Consolas"/>
-              </a:rPr>
-              <a:t>([...</a:t>
-            </a:r>
-            <a:r>
-              <a:rPr sz="1100">
-                <a:solidFill>
-                  <a:srgbClr val="F1F5F9"/>
-                </a:solidFill>
-                <a:latin typeface="Consolas"/>
-              </a:rPr>
-              <a:t>words1</a:t>
-            </a:r>
-            <a:r>
-              <a:rPr sz="1100">
-                <a:solidFill>
-                  <a:srgbClr val="F1F5F9"/>
-                </a:solidFill>
-                <a:latin typeface="Consolas"/>
-              </a:rPr>
-              <a:t>,</a:t>
-            </a:r>
-            <a:r>
-              <a:rPr sz="1100">
-                <a:solidFill>
-                  <a:srgbClr val="F1F5F9"/>
-                </a:solidFill>
-                <a:latin typeface="Consolas"/>
-              </a:rPr>
-              <a:t> </a:t>
-            </a:r>
-            <a:r>
-              <a:rPr sz="1100">
-                <a:solidFill>
-                  <a:srgbClr val="F1F5F9"/>
-                </a:solidFill>
-                <a:latin typeface="Consolas"/>
-              </a:rPr>
-              <a:t>...</a:t>
-            </a:r>
-            <a:r>
-              <a:rPr sz="1100">
-                <a:solidFill>
-                  <a:srgbClr val="F1F5F9"/>
-                </a:solidFill>
-                <a:latin typeface="Consolas"/>
-              </a:rPr>
-              <a:t>words2</a:t>
-            </a:r>
-            <a:r>
-              <a:rPr sz="1100">
-                <a:solidFill>
-                  <a:srgbClr val="F1F5F9"/>
-                </a:solidFill>
-                <a:latin typeface="Consolas"/>
-              </a:rPr>
-              <a:t>]);</a:t>
-            </a:r>
-          </a:p>
-          <a:p>
-            <a:pPr>
-              <a:spcAft>
-                <a:spcPts val="200"/>
-              </a:spcAft>
-            </a:pPr>
-            <a:r>
-              <a:rPr sz="1100" b="1">
-                <a:solidFill>
-                  <a:srgbClr val="F472B6"/>
-                </a:solidFill>
-                <a:latin typeface="Consolas"/>
-              </a:rPr>
-              <a:t>if</a:t>
-            </a:r>
-            <a:r>
-              <a:rPr sz="1100">
-                <a:solidFill>
-                  <a:srgbClr val="F1F5F9"/>
-                </a:solidFill>
-                <a:latin typeface="Consolas"/>
-              </a:rPr>
-              <a:t> </a:t>
-            </a:r>
-            <a:r>
-              <a:rPr sz="1100">
-                <a:solidFill>
-                  <a:srgbClr val="F1F5F9"/>
-                </a:solidFill>
-                <a:latin typeface="Consolas"/>
-              </a:rPr>
-              <a:t>(</a:t>
-            </a:r>
-            <a:r>
-              <a:rPr sz="1100">
-                <a:solidFill>
-                  <a:srgbClr val="F1F5F9"/>
-                </a:solidFill>
-                <a:latin typeface="Consolas"/>
-              </a:rPr>
-              <a:t>union</a:t>
-            </a:r>
-            <a:r>
-              <a:rPr sz="1100">
-                <a:solidFill>
-                  <a:srgbClr val="F1F5F9"/>
-                </a:solidFill>
-                <a:latin typeface="Consolas"/>
-              </a:rPr>
-              <a:t>.</a:t>
-            </a:r>
-            <a:r>
-              <a:rPr sz="1100">
-                <a:solidFill>
-                  <a:srgbClr val="F1F5F9"/>
-                </a:solidFill>
-                <a:latin typeface="Consolas"/>
-              </a:rPr>
-              <a:t>size</a:t>
-            </a:r>
-            <a:r>
-              <a:rPr sz="1100">
-                <a:solidFill>
-                  <a:srgbClr val="F1F5F9"/>
-                </a:solidFill>
-                <a:latin typeface="Consolas"/>
-              </a:rPr>
-              <a:t> </a:t>
-            </a:r>
-            <a:r>
-              <a:rPr sz="1100">
-                <a:solidFill>
-                  <a:srgbClr val="F1F5F9"/>
-                </a:solidFill>
-                <a:latin typeface="Consolas"/>
-              </a:rPr>
-              <a:t>===</a:t>
-            </a:r>
-            <a:r>
-              <a:rPr sz="1100">
-                <a:solidFill>
-                  <a:srgbClr val="F1F5F9"/>
-                </a:solidFill>
-                <a:latin typeface="Consolas"/>
-              </a:rPr>
-              <a:t> </a:t>
-            </a:r>
-            <a:r>
-              <a:rPr sz="1100">
-                <a:solidFill>
-                  <a:srgbClr val="818CF8"/>
-                </a:solidFill>
-                <a:latin typeface="Consolas"/>
-              </a:rPr>
-              <a:t>0</a:t>
-            </a:r>
-            <a:r>
-              <a:rPr sz="1100">
-                <a:solidFill>
-                  <a:srgbClr val="F1F5F9"/>
-                </a:solidFill>
-                <a:latin typeface="Consolas"/>
-              </a:rPr>
-              <a:t>)</a:t>
-            </a:r>
-            <a:r>
-              <a:rPr sz="1100">
-                <a:solidFill>
-                  <a:srgbClr val="F1F5F9"/>
-                </a:solidFill>
-                <a:latin typeface="Consolas"/>
-              </a:rPr>
-              <a:t> </a:t>
-            </a:r>
-            <a:r>
-              <a:rPr sz="1100" b="1">
-                <a:solidFill>
-                  <a:srgbClr val="F472B6"/>
-                </a:solidFill>
-                <a:latin typeface="Consolas"/>
-              </a:rPr>
-              <a:t>return</a:t>
-            </a:r>
-            <a:r>
-              <a:rPr sz="1100">
-                <a:solidFill>
-                  <a:srgbClr val="F1F5F9"/>
-                </a:solidFill>
-                <a:latin typeface="Consolas"/>
-              </a:rPr>
-              <a:t> </a:t>
-            </a:r>
-            <a:r>
-              <a:rPr sz="1100">
-                <a:solidFill>
-                  <a:srgbClr val="818CF8"/>
-                </a:solidFill>
-                <a:latin typeface="Consolas"/>
-              </a:rPr>
-              <a:t>0</a:t>
-            </a:r>
-            <a:r>
-              <a:rPr sz="1100">
-                <a:solidFill>
-                  <a:srgbClr val="F1F5F9"/>
-                </a:solidFill>
-                <a:latin typeface="Consolas"/>
-              </a:rPr>
-              <a:t>;</a:t>
-            </a:r>
-          </a:p>
-          <a:p>
-            <a:pPr>
-              <a:spcAft>
-                <a:spcPts val="200"/>
-              </a:spcAft>
-            </a:pPr>
-            <a:r>
-              <a:rPr sz="1100" b="1">
-                <a:solidFill>
-                  <a:srgbClr val="F472B6"/>
-                </a:solidFill>
-                <a:latin typeface="Consolas"/>
-              </a:rPr>
-              <a:t>return</a:t>
-            </a:r>
-            <a:r>
-              <a:rPr sz="1100">
-                <a:solidFill>
-                  <a:srgbClr val="F1F5F9"/>
-                </a:solidFill>
-                <a:latin typeface="Consolas"/>
-              </a:rPr>
-              <a:t> </a:t>
-            </a:r>
-            <a:r>
-              <a:rPr sz="1100">
-                <a:solidFill>
-                  <a:srgbClr val="F1F5F9"/>
-                </a:solidFill>
-                <a:latin typeface="Consolas"/>
-              </a:rPr>
-              <a:t>(</a:t>
-            </a:r>
-            <a:r>
-              <a:rPr sz="1100">
-                <a:solidFill>
-                  <a:srgbClr val="F1F5F9"/>
-                </a:solidFill>
-                <a:latin typeface="Consolas"/>
-              </a:rPr>
-              <a:t>intersection</a:t>
-            </a:r>
-            <a:r>
-              <a:rPr sz="1100">
-                <a:solidFill>
-                  <a:srgbClr val="F1F5F9"/>
-                </a:solidFill>
-                <a:latin typeface="Consolas"/>
-              </a:rPr>
-              <a:t>.</a:t>
-            </a:r>
-            <a:r>
-              <a:rPr sz="1100">
-                <a:solidFill>
-                  <a:srgbClr val="F1F5F9"/>
-                </a:solidFill>
-                <a:latin typeface="Consolas"/>
-              </a:rPr>
-              <a:t>size</a:t>
-            </a:r>
-            <a:r>
-              <a:rPr sz="1100">
-                <a:solidFill>
-                  <a:srgbClr val="F1F5F9"/>
-                </a:solidFill>
-                <a:latin typeface="Consolas"/>
-              </a:rPr>
-              <a:t> </a:t>
-            </a:r>
-            <a:r>
-              <a:rPr sz="1100">
-                <a:solidFill>
-                  <a:srgbClr val="F1F5F9"/>
-                </a:solidFill>
-                <a:latin typeface="Consolas"/>
-              </a:rPr>
-              <a:t>/</a:t>
-            </a:r>
-            <a:r>
-              <a:rPr sz="1100">
-                <a:solidFill>
-                  <a:srgbClr val="F1F5F9"/>
-                </a:solidFill>
-                <a:latin typeface="Consolas"/>
-              </a:rPr>
-              <a:t> </a:t>
-            </a:r>
-            <a:r>
-              <a:rPr sz="1100">
-                <a:solidFill>
-                  <a:srgbClr val="F1F5F9"/>
-                </a:solidFill>
-                <a:latin typeface="Consolas"/>
-              </a:rPr>
-              <a:t>union</a:t>
-            </a:r>
-            <a:r>
-              <a:rPr sz="1100">
-                <a:solidFill>
-                  <a:srgbClr val="F1F5F9"/>
-                </a:solidFill>
-                <a:latin typeface="Consolas"/>
-              </a:rPr>
-              <a:t>.</a:t>
-            </a:r>
-            <a:r>
-              <a:rPr sz="1100">
-                <a:solidFill>
-                  <a:srgbClr val="F1F5F9"/>
-                </a:solidFill>
-                <a:latin typeface="Consolas"/>
-              </a:rPr>
-              <a:t>size</a:t>
-            </a:r>
-            <a:r>
-              <a:rPr sz="1100">
-                <a:solidFill>
-                  <a:srgbClr val="F1F5F9"/>
-                </a:solidFill>
-                <a:latin typeface="Consolas"/>
-              </a:rPr>
-              <a:t>)</a:t>
-            </a:r>
-            <a:r>
-              <a:rPr sz="1100">
-                <a:solidFill>
-                  <a:srgbClr val="F1F5F9"/>
-                </a:solidFill>
-                <a:latin typeface="Consolas"/>
-              </a:rPr>
-              <a:t> </a:t>
-            </a:r>
-            <a:r>
-              <a:rPr sz="1100">
-                <a:solidFill>
-                  <a:srgbClr val="F1F5F9"/>
-                </a:solidFill>
-                <a:latin typeface="Consolas"/>
-              </a:rPr>
-              <a:t>*</a:t>
-            </a:r>
-            <a:r>
-              <a:rPr sz="1100">
-                <a:solidFill>
-                  <a:srgbClr val="F1F5F9"/>
-                </a:solidFill>
-                <a:latin typeface="Consolas"/>
-              </a:rPr>
-              <a:t> </a:t>
-            </a:r>
-            <a:r>
-              <a:rPr sz="1100">
-                <a:solidFill>
-                  <a:srgbClr val="818CF8"/>
-                </a:solidFill>
-                <a:latin typeface="Consolas"/>
-              </a:rPr>
-              <a:t>100</a:t>
-            </a:r>
-            <a:r>
-              <a:rPr sz="1100">
-                <a:solidFill>
-                  <a:srgbClr val="F1F5F9"/>
-                </a:solidFill>
-                <a:latin typeface="Consolas"/>
-              </a:rPr>
-              <a:t>;</a:t>
+              <a:rPr sz="1050">
+                <a:solidFill>
+                  <a:srgbClr val="F1F5F9"/>
+                </a:solidFill>
+                <a:latin typeface="Consolas"/>
+              </a:rPr>
+              <a:t>}</a:t>
             </a:r>
           </a:p>
         </p:txBody>
@@ -8860,7 +9440,7 @@
                 </a:solidFill>
                 <a:latin typeface="Consolas"/>
               </a:rPr>
-              <a:t>// Radial Gauge update logic in JS</a:t>
+              <a:t>// Render score with SVG gauge animation</a:t>
             </a:r>
           </a:p>
           <a:p>
@@ -9189,6 +9769,105 @@
               </a:rPr>
               <a:t> </a:t>
             </a:r>
+            <a:r>
+              <a:rPr sz="1200">
+                <a:solidFill>
+                  <a:srgbClr val="F1F5F9"/>
+                </a:solidFill>
+                <a:latin typeface="Consolas"/>
+              </a:rPr>
+              <a:t>(</a:t>
+            </a:r>
+            <a:r>
+              <a:rPr sz="1200">
+                <a:solidFill>
+                  <a:srgbClr val="F1F5F9"/>
+                </a:solidFill>
+                <a:latin typeface="Consolas"/>
+              </a:rPr>
+              <a:t>circumference</a:t>
+            </a:r>
+            <a:r>
+              <a:rPr sz="1200">
+                <a:solidFill>
+                  <a:srgbClr val="F1F5F9"/>
+                </a:solidFill>
+                <a:latin typeface="Consolas"/>
+              </a:rPr>
+              <a:t> </a:t>
+            </a:r>
+            <a:r>
+              <a:rPr sz="1200">
+                <a:solidFill>
+                  <a:srgbClr val="F1F5F9"/>
+                </a:solidFill>
+                <a:latin typeface="Consolas"/>
+              </a:rPr>
+              <a:t>*</a:t>
+            </a:r>
+            <a:r>
+              <a:rPr sz="1200">
+                <a:solidFill>
+                  <a:srgbClr val="F1F5F9"/>
+                </a:solidFill>
+                <a:latin typeface="Consolas"/>
+              </a:rPr>
+              <a:t> </a:t>
+            </a:r>
+            <a:r>
+              <a:rPr sz="1200">
+                <a:solidFill>
+                  <a:srgbClr val="F1F5F9"/>
+                </a:solidFill>
+                <a:latin typeface="Consolas"/>
+              </a:rPr>
+              <a:t>scoreInt</a:t>
+            </a:r>
+            <a:r>
+              <a:rPr sz="1200">
+                <a:solidFill>
+                  <a:srgbClr val="F1F5F9"/>
+                </a:solidFill>
+                <a:latin typeface="Consolas"/>
+              </a:rPr>
+              <a:t> </a:t>
+            </a:r>
+            <a:r>
+              <a:rPr sz="1200">
+                <a:solidFill>
+                  <a:srgbClr val="F1F5F9"/>
+                </a:solidFill>
+                <a:latin typeface="Consolas"/>
+              </a:rPr>
+              <a:t>/</a:t>
+            </a:r>
+            <a:r>
+              <a:rPr sz="1200">
+                <a:solidFill>
+                  <a:srgbClr val="F1F5F9"/>
+                </a:solidFill>
+                <a:latin typeface="Consolas"/>
+              </a:rPr>
+              <a:t> </a:t>
+            </a:r>
+            <a:r>
+              <a:rPr sz="1200">
+                <a:solidFill>
+                  <a:srgbClr val="818CF8"/>
+                </a:solidFill>
+                <a:latin typeface="Consolas"/>
+              </a:rPr>
+              <a:t>100</a:t>
+            </a:r>
+            <a:r>
+              <a:rPr sz="1200">
+                <a:solidFill>
+                  <a:srgbClr val="F1F5F9"/>
+                </a:solidFill>
+                <a:latin typeface="Consolas"/>
+              </a:rPr>
+              <a:t>);</a:t>
+            </a:r>
           </a:p>
           <a:p>
             <a:pPr>
@@ -9199,11 +9878,11 @@
             <a:r>
               <a:rPr sz="1200">
                 <a:solidFill>
-                  <a:srgbClr val="F1F5F9"/>
-                </a:solidFill>
-                <a:latin typeface="Consolas"/>
-              </a:rPr>
-              <a:t>      </a:t>
+                  <a:srgbClr val="38BDF8"/>
+                </a:solidFill>
+                <a:latin typeface="Consolas"/>
+              </a:rPr>
+              <a:t>circle</a:t>
             </a:r>
             <a:r>
               <a:rPr sz="1200">
@@ -9212,7 +9891,7 @@
                 </a:solidFill>
                 <a:latin typeface="Consolas"/>
               </a:rPr>
-              <a:t>(</a:t>
+              <a:t>.</a:t>
             </a:r>
             <a:r>
               <a:rPr sz="1200">
@@ -9221,7 +9900,7 @@
                 </a:solidFill>
                 <a:latin typeface="Consolas"/>
               </a:rPr>
-              <a:t>circumference</a:t>
+              <a:t>style</a:t>
             </a:r>
             <a:r>
               <a:rPr sz="1200">
@@ -9230,6 +9909,24 @@
                 </a:solidFill>
                 <a:latin typeface="Consolas"/>
               </a:rPr>
+              <a:t>.</a:t>
+            </a:r>
+            <a:r>
+              <a:rPr sz="1200">
+                <a:solidFill>
+                  <a:srgbClr val="F1F5F9"/>
+                </a:solidFill>
+                <a:latin typeface="Consolas"/>
+              </a:rPr>
+              <a:t>strokeDashoffset</a:t>
+            </a:r>
+            <a:r>
+              <a:rPr sz="1200">
+                <a:solidFill>
+                  <a:srgbClr val="F1F5F9"/>
+                </a:solidFill>
+                <a:latin typeface="Consolas"/>
+              </a:rPr>
               <a:t> </a:t>
             </a:r>
             <a:r>
@@ -9239,7 +9936,7 @@
                 </a:solidFill>
                 <a:latin typeface="Consolas"/>
               </a:rPr>
-              <a:t>*</a:t>
+              <a:t>=</a:t>
             </a:r>
             <a:r>
               <a:rPr sz="1200">
@@ -9257,7 +9954,7 @@
                 </a:solidFill>
                 <a:latin typeface="Consolas"/>
               </a:rPr>
-              <a:t>scoreInt</a:t>
+              <a:t>offset</a:t>
             </a:r>
             <a:r>
               <a:rPr sz="1200">
@@ -9266,6 +9963,67 @@
                 </a:solidFill>
                 <a:latin typeface="Consolas"/>
               </a:rPr>
+              <a:t>;</a:t>
+            </a:r>
+          </a:p>
+          <a:p>
+            <a:pPr>
+              <a:spcAft>
+                <a:spcPts val="200"/>
+              </a:spcAft>
+            </a:pPr>
+            <a:r>
+              <a:rPr sz="1200">
+                <a:solidFill>
+                  <a:srgbClr val="38BDF8"/>
+                </a:solidFill>
+                <a:latin typeface="Consolas"/>
+              </a:rPr>
+              <a:t>circle</a:t>
+            </a:r>
+            <a:r>
+              <a:rPr sz="1200">
+                <a:solidFill>
+                  <a:srgbClr val="F1F5F9"/>
+                </a:solidFill>
+                <a:latin typeface="Consolas"/>
+              </a:rPr>
+              <a:t>.</a:t>
+            </a:r>
+            <a:r>
+              <a:rPr sz="1200">
+                <a:solidFill>
+                  <a:srgbClr val="F1F5F9"/>
+                </a:solidFill>
+                <a:latin typeface="Consolas"/>
+              </a:rPr>
+              <a:t>style</a:t>
+            </a:r>
+            <a:r>
+              <a:rPr sz="1200">
+                <a:solidFill>
+                  <a:srgbClr val="F1F5F9"/>
+                </a:solidFill>
+                <a:latin typeface="Consolas"/>
+              </a:rPr>
+              <a:t>.</a:t>
+            </a:r>
+            <a:r>
+              <a:rPr sz="1200">
+                <a:solidFill>
+                  <a:srgbClr val="F1F5F9"/>
+                </a:solidFill>
+                <a:latin typeface="Consolas"/>
+              </a:rPr>
+              <a:t>stroke</a:t>
+            </a:r>
+            <a:r>
+              <a:rPr sz="1200">
+                <a:solidFill>
+                  <a:srgbClr val="F1F5F9"/>
+                </a:solidFill>
+                <a:latin typeface="Consolas"/>
+              </a:rPr>
               <a:t> </a:t>
             </a:r>
             <a:r>
@@ -9275,7 +10033,7 @@
                 </a:solidFill>
                 <a:latin typeface="Consolas"/>
               </a:rPr>
-              <a:t>/</a:t>
+              <a:t>=</a:t>
             </a:r>
             <a:r>
               <a:rPr sz="1200">
@@ -9289,11 +10047,11 @@
             <a:r>
               <a:rPr sz="1200">
                 <a:solidFill>
-                  <a:srgbClr val="818CF8"/>
-                </a:solidFill>
-                <a:latin typeface="Consolas"/>
-              </a:rPr>
-              <a:t>100</a:t>
+                  <a:srgbClr val="F1F5F9"/>
+                </a:solidFill>
+                <a:latin typeface="Consolas"/>
+              </a:rPr>
+              <a:t>color</a:t>
             </a:r>
             <a:r>
               <a:rPr sz="1200">
@@ -9302,7 +10060,7 @@
                 </a:solidFill>
                 <a:latin typeface="Consolas"/>
               </a:rPr>
-              <a:t>);</a:t>
+              <a:t>;</a:t>
             </a:r>
           </a:p>
           <a:p>
@@ -9354,7 +10112,7 @@
                 </a:solidFill>
                 <a:latin typeface="Consolas"/>
               </a:rPr>
-              <a:t>strokeDashoffset</a:t>
+              <a:t>filter</a:t>
             </a:r>
             <a:r>
               <a:rPr sz="1200">
@@ -9382,216 +10140,6 @@
                 <a:latin typeface="Consolas"/>
               </a:rPr>
               <a:t> </a:t>
-            </a:r>
-            <a:r>
-              <a:rPr sz="1200">
-                <a:solidFill>
-                  <a:srgbClr val="F1F5F9"/>
-                </a:solidFill>
-                <a:latin typeface="Consolas"/>
-              </a:rPr>
-              <a:t>offset</a:t>
-            </a:r>
-            <a:r>
-              <a:rPr sz="1200">
-                <a:solidFill>
-                  <a:srgbClr val="F1F5F9"/>
-                </a:solidFill>
-                <a:latin typeface="Consolas"/>
-              </a:rPr>
-              <a:t>;</a:t>
-            </a:r>
-          </a:p>
-          <a:p>
-            <a:pPr>
-              <a:spcAft>
-                <a:spcPts val="200"/>
-              </a:spcAft>
-            </a:pPr>
-            <a:r>
-              <a:rPr sz="1200">
-                <a:solidFill>
-                  <a:srgbClr val="38BDF8"/>
-                </a:solidFill>
-                <a:latin typeface="Consolas"/>
-              </a:rPr>
-              <a:t>circle</a:t>
-            </a:r>
-            <a:r>
-              <a:rPr sz="1200">
-                <a:solidFill>
-                  <a:srgbClr val="F1F5F9"/>
-                </a:solidFill>
-                <a:latin typeface="Consolas"/>
-              </a:rPr>
-              <a:t>.</a:t>
-            </a:r>
-            <a:r>
-              <a:rPr sz="1200">
-                <a:solidFill>
-                  <a:srgbClr val="F1F5F9"/>
-                </a:solidFill>
-                <a:latin typeface="Consolas"/>
-              </a:rPr>
-              <a:t>style</a:t>
-            </a:r>
-            <a:r>
-              <a:rPr sz="1200">
-                <a:solidFill>
-                  <a:srgbClr val="F1F5F9"/>
-                </a:solidFill>
-                <a:latin typeface="Consolas"/>
-              </a:rPr>
-              <a:t>.</a:t>
-            </a:r>
-            <a:r>
-              <a:rPr sz="1200">
-                <a:solidFill>
-                  <a:srgbClr val="F1F5F9"/>
-                </a:solidFill>
-                <a:latin typeface="Consolas"/>
-              </a:rPr>
-              <a:t>stroke</a:t>
-            </a:r>
-            <a:r>
-              <a:rPr sz="1200">
-                <a:solidFill>
-                  <a:srgbClr val="F1F5F9"/>
-                </a:solidFill>
-                <a:latin typeface="Consolas"/>
-              </a:rPr>
-              <a:t> </a:t>
-            </a:r>
-            <a:r>
-              <a:rPr sz="1200">
-                <a:solidFill>
-                  <a:srgbClr val="F1F5F9"/>
-                </a:solidFill>
-                <a:latin typeface="Consolas"/>
-              </a:rPr>
-              <a:t>=</a:t>
-            </a:r>
-            <a:r>
-              <a:rPr sz="1200">
-                <a:solidFill>
-                  <a:srgbClr val="F1F5F9"/>
-                </a:solidFill>
-                <a:latin typeface="Consolas"/>
-              </a:rPr>
-              <a:t> </a:t>
-            </a:r>
-            <a:r>
-              <a:rPr sz="1200">
-                <a:solidFill>
-                  <a:srgbClr val="F1F5F9"/>
-                </a:solidFill>
-                <a:latin typeface="Consolas"/>
-              </a:rPr>
-              <a:t>color</a:t>
-            </a:r>
-            <a:r>
-              <a:rPr sz="1200">
-                <a:solidFill>
-                  <a:srgbClr val="F1F5F9"/>
-                </a:solidFill>
-                <a:latin typeface="Consolas"/>
-              </a:rPr>
-              <a:t>;</a:t>
-            </a:r>
-          </a:p>
-          <a:p>
-            <a:pPr>
-              <a:spcAft>
-                <a:spcPts val="200"/>
-              </a:spcAft>
-            </a:pPr>
-            <a:r>
-              <a:rPr sz="1200">
-                <a:solidFill>
-                  <a:srgbClr val="38BDF8"/>
-                </a:solidFill>
-                <a:latin typeface="Consolas"/>
-              </a:rPr>
-              <a:t>circle</a:t>
-            </a:r>
-            <a:r>
-              <a:rPr sz="1200">
-                <a:solidFill>
-                  <a:srgbClr val="F1F5F9"/>
-                </a:solidFill>
-                <a:latin typeface="Consolas"/>
-              </a:rPr>
-              <a:t>.</a:t>
-            </a:r>
-            <a:r>
-              <a:rPr sz="1200">
-                <a:solidFill>
-                  <a:srgbClr val="F1F5F9"/>
-                </a:solidFill>
-                <a:latin typeface="Consolas"/>
-              </a:rPr>
-              <a:t>style</a:t>
-            </a:r>
-            <a:r>
-              <a:rPr sz="1200">
-                <a:solidFill>
-                  <a:srgbClr val="F1F5F9"/>
-                </a:solidFill>
-                <a:latin typeface="Consolas"/>
-              </a:rPr>
-              <a:t>.</a:t>
-            </a:r>
-            <a:r>
-              <a:rPr sz="1200">
-                <a:solidFill>
-                  <a:srgbClr val="F1F5F9"/>
-                </a:solidFill>
-                <a:latin typeface="Consolas"/>
-              </a:rPr>
-              <a:t>filter</a:t>
-            </a:r>
-            <a:r>
-              <a:rPr sz="1200">
-                <a:solidFill>
-                  <a:srgbClr val="F1F5F9"/>
-                </a:solidFill>
-                <a:latin typeface="Consolas"/>
-              </a:rPr>
-              <a:t> </a:t>
-            </a:r>
-            <a:r>
-              <a:rPr sz="1200">
-                <a:solidFill>
-                  <a:srgbClr val="F1F5F9"/>
-                </a:solidFill>
-                <a:latin typeface="Consolas"/>
-              </a:rPr>
-              <a:t>=</a:t>
-            </a:r>
-            <a:r>
-              <a:rPr sz="1200">
-                <a:solidFill>
-                  <a:srgbClr val="F1F5F9"/>
-                </a:solidFill>
-                <a:latin typeface="Consolas"/>
-              </a:rPr>
-              <a:t> </a:t>
-            </a:r>
-          </a:p>
-          <a:p>
-            <a:pPr>
-              <a:spcAft>
-                <a:spcPts val="200"/>
-              </a:spcAft>
-            </a:pPr>
-            <a:r>
-              <a:rPr sz="1200">
-                <a:solidFill>
-                  <a:srgbClr val="F1F5F9"/>
-                </a:solidFill>
-                <a:latin typeface="Consolas"/>
-              </a:rPr>
-              <a:t>      </a:t>
             </a:r>
             <a:r>
               <a:rPr sz="1200">
@@ -10141,7 +10689,7 @@
               </a:spcAft>
             </a:pPr>
             <a:r>
-              <a:rPr sz="1100" b="1">
+              <a:rPr sz="1000" b="1">
                 <a:solidFill>
                   <a:srgbClr val="F472B6"/>
                 </a:solidFill>
@@ -10150,7 +10698,7 @@
               <a:t>async</a:t>
             </a:r>
             <a:r>
-              <a:rPr sz="1100">
+              <a:rPr sz="1000">
                 <a:solidFill>
                   <a:srgbClr val="F1F5F9"/>
                 </a:solidFill>
@@ -10159,7 +10707,7 @@
               <a:t> </a:t>
             </a:r>
             <a:r>
-              <a:rPr sz="1100" b="1">
+              <a:rPr sz="1000" b="1">
                 <a:solidFill>
                   <a:srgbClr val="F472B6"/>
                 </a:solidFill>
@@ -10168,7 +10716,7 @@
               <a:t>function</a:t>
             </a:r>
             <a:r>
-              <a:rPr sz="1100">
+              <a:rPr sz="1000">
                 <a:solidFill>
                   <a:srgbClr val="F1F5F9"/>
                 </a:solidFill>
@@ -10177,7 +10725,7 @@
               <a:t> </a:t>
             </a:r>
             <a:r>
-              <a:rPr sz="1100">
+              <a:rPr sz="1000">
                 <a:solidFill>
                   <a:srgbClr val="F1F5F9"/>
                 </a:solidFill>
@@ -10186,7 +10734,7 @@
               <a:t>startScanner</a:t>
             </a:r>
             <a:r>
-              <a:rPr sz="1100">
+              <a:rPr sz="1000">
                 <a:solidFill>
                   <a:srgbClr val="F1F5F9"/>
                 </a:solidFill>
@@ -10195,7 +10743,7 @@
               <a:t>()</a:t>
             </a:r>
             <a:r>
-              <a:rPr sz="1100">
+              <a:rPr sz="1000">
                 <a:solidFill>
                   <a:srgbClr val="F1F5F9"/>
                 </a:solidFill>
@@ -10204,7 +10752,7 @@
               <a:t> </a:t>
             </a:r>
             <a:r>
-              <a:rPr sz="1100">
+              <a:rPr sz="1000">
                 <a:solidFill>
                   <a:srgbClr val="F1F5F9"/>
                 </a:solidFill>
@@ -10220,25 +10768,521 @@
               </a:spcAft>
             </a:pPr>
             <a:r>
-              <a:rPr sz="1100">
-                <a:solidFill>
-                  <a:srgbClr val="F1F5F9"/>
-                </a:solidFill>
-                <a:latin typeface="Consolas"/>
-              </a:rPr>
-              <a:t>  </a:t>
-            </a:r>
-            <a:r>
-              <a:rPr sz="1100" b="1">
+              <a:rPr sz="1000">
+                <a:solidFill>
+                  <a:srgbClr val="F1F5F9"/>
+                </a:solidFill>
+                <a:latin typeface="Consolas"/>
+              </a:rPr>
+              <a:t>    </a:t>
+            </a:r>
+            <a:r>
+              <a:rPr sz="1000" b="1">
                 <a:solidFill>
                   <a:srgbClr val="F472B6"/>
                 </a:solidFill>
                 <a:latin typeface="Consolas"/>
               </a:rPr>
+              <a:t>const</a:t>
+            </a:r>
+            <a:r>
+              <a:rPr sz="1000">
+                <a:solidFill>
+                  <a:srgbClr val="F1F5F9"/>
+                </a:solidFill>
+                <a:latin typeface="Consolas"/>
+              </a:rPr>
+              <a:t> </a:t>
+            </a:r>
+            <a:r>
+              <a:rPr sz="1000">
+                <a:solidFill>
+                  <a:srgbClr val="F1F5F9"/>
+                </a:solidFill>
+                <a:latin typeface="Consolas"/>
+              </a:rPr>
+              <a:t>overlay</a:t>
+            </a:r>
+            <a:r>
+              <a:rPr sz="1000">
+                <a:solidFill>
+                  <a:srgbClr val="F1F5F9"/>
+                </a:solidFill>
+                <a:latin typeface="Consolas"/>
+              </a:rPr>
+              <a:t> </a:t>
+            </a:r>
+            <a:r>
+              <a:rPr sz="1000">
+                <a:solidFill>
+                  <a:srgbClr val="F1F5F9"/>
+                </a:solidFill>
+                <a:latin typeface="Consolas"/>
+              </a:rPr>
+              <a:t>=</a:t>
+            </a:r>
+            <a:r>
+              <a:rPr sz="1000">
+                <a:solidFill>
+                  <a:srgbClr val="F1F5F9"/>
+                </a:solidFill>
+                <a:latin typeface="Consolas"/>
+              </a:rPr>
+              <a:t> </a:t>
+            </a:r>
+            <a:r>
+              <a:rPr sz="1000">
+                <a:solidFill>
+                  <a:srgbClr val="38BDF8"/>
+                </a:solidFill>
+                <a:latin typeface="Consolas"/>
+              </a:rPr>
+              <a:t>document</a:t>
+            </a:r>
+            <a:r>
+              <a:rPr sz="1000">
+                <a:solidFill>
+                  <a:srgbClr val="F1F5F9"/>
+                </a:solidFill>
+                <a:latin typeface="Consolas"/>
+              </a:rPr>
+              <a:t>.</a:t>
+            </a:r>
+            <a:r>
+              <a:rPr sz="1000">
+                <a:solidFill>
+                  <a:srgbClr val="F1F5F9"/>
+                </a:solidFill>
+                <a:latin typeface="Consolas"/>
+              </a:rPr>
+              <a:t>getElementById</a:t>
+            </a:r>
+            <a:r>
+              <a:rPr sz="1000">
+                <a:solidFill>
+                  <a:srgbClr val="F1F5F9"/>
+                </a:solidFill>
+                <a:latin typeface="Consolas"/>
+              </a:rPr>
+              <a:t>('</a:t>
+            </a:r>
+            <a:r>
+              <a:rPr sz="1000">
+                <a:solidFill>
+                  <a:srgbClr val="F1F5F9"/>
+                </a:solidFill>
+                <a:latin typeface="Consolas"/>
+              </a:rPr>
+              <a:t>loader</a:t>
+            </a:r>
+            <a:r>
+              <a:rPr sz="1000">
+                <a:solidFill>
+                  <a:srgbClr val="F1F5F9"/>
+                </a:solidFill>
+                <a:latin typeface="Consolas"/>
+              </a:rPr>
+              <a:t>-</a:t>
+            </a:r>
+            <a:r>
+              <a:rPr sz="1000">
+                <a:solidFill>
+                  <a:srgbClr val="F1F5F9"/>
+                </a:solidFill>
+                <a:latin typeface="Consolas"/>
+              </a:rPr>
+              <a:t>overlay</a:t>
+            </a:r>
+            <a:r>
+              <a:rPr sz="1000">
+                <a:solidFill>
+                  <a:srgbClr val="FDBA74"/>
+                </a:solidFill>
+                <a:latin typeface="Consolas"/>
+              </a:rPr>
+              <a:t>');</a:t>
+            </a:r>
+          </a:p>
+          <a:p>
+            <a:pPr>
+              <a:spcAft>
+                <a:spcPts val="200"/>
+              </a:spcAft>
+            </a:pPr>
+            <a:r>
+              <a:rPr sz="1000">
+                <a:solidFill>
+                  <a:srgbClr val="F1F5F9"/>
+                </a:solidFill>
+                <a:latin typeface="Consolas"/>
+              </a:rPr>
+              <a:t>    </a:t>
+            </a:r>
+            <a:r>
+              <a:rPr sz="1000" b="1">
+                <a:solidFill>
+                  <a:srgbClr val="F472B6"/>
+                </a:solidFill>
+                <a:latin typeface="Consolas"/>
+              </a:rPr>
+              <a:t>const</a:t>
+            </a:r>
+            <a:r>
+              <a:rPr sz="1000">
+                <a:solidFill>
+                  <a:srgbClr val="F1F5F9"/>
+                </a:solidFill>
+                <a:latin typeface="Consolas"/>
+              </a:rPr>
+              <a:t> </a:t>
+            </a:r>
+            <a:r>
+              <a:rPr sz="1000">
+                <a:solidFill>
+                  <a:srgbClr val="F1F5F9"/>
+                </a:solidFill>
+                <a:latin typeface="Consolas"/>
+              </a:rPr>
+              <a:t>errorBox</a:t>
+            </a:r>
+            <a:r>
+              <a:rPr sz="1000">
+                <a:solidFill>
+                  <a:srgbClr val="F1F5F9"/>
+                </a:solidFill>
+                <a:latin typeface="Consolas"/>
+              </a:rPr>
+              <a:t> </a:t>
+            </a:r>
+            <a:r>
+              <a:rPr sz="1000">
+                <a:solidFill>
+                  <a:srgbClr val="F1F5F9"/>
+                </a:solidFill>
+                <a:latin typeface="Consolas"/>
+              </a:rPr>
+              <a:t>=</a:t>
+            </a:r>
+            <a:r>
+              <a:rPr sz="1000">
+                <a:solidFill>
+                  <a:srgbClr val="F1F5F9"/>
+                </a:solidFill>
+                <a:latin typeface="Consolas"/>
+              </a:rPr>
+              <a:t> </a:t>
+            </a:r>
+            <a:r>
+              <a:rPr sz="1000">
+                <a:solidFill>
+                  <a:srgbClr val="38BDF8"/>
+                </a:solidFill>
+                <a:latin typeface="Consolas"/>
+              </a:rPr>
+              <a:t>document</a:t>
+            </a:r>
+            <a:r>
+              <a:rPr sz="1000">
+                <a:solidFill>
+                  <a:srgbClr val="F1F5F9"/>
+                </a:solidFill>
+                <a:latin typeface="Consolas"/>
+              </a:rPr>
+              <a:t>.</a:t>
+            </a:r>
+            <a:r>
+              <a:rPr sz="1000">
+                <a:solidFill>
+                  <a:srgbClr val="F1F5F9"/>
+                </a:solidFill>
+                <a:latin typeface="Consolas"/>
+              </a:rPr>
+              <a:t>getElementById</a:t>
+            </a:r>
+            <a:r>
+              <a:rPr sz="1000">
+                <a:solidFill>
+                  <a:srgbClr val="F1F5F9"/>
+                </a:solidFill>
+                <a:latin typeface="Consolas"/>
+              </a:rPr>
+              <a:t>('</a:t>
+            </a:r>
+            <a:r>
+              <a:rPr sz="1000">
+                <a:solidFill>
+                  <a:srgbClr val="F1F5F9"/>
+                </a:solidFill>
+                <a:latin typeface="Consolas"/>
+              </a:rPr>
+              <a:t>error</a:t>
+            </a:r>
+            <a:r>
+              <a:rPr sz="1000">
+                <a:solidFill>
+                  <a:srgbClr val="F1F5F9"/>
+                </a:solidFill>
+                <a:latin typeface="Consolas"/>
+              </a:rPr>
+              <a:t>-</a:t>
+            </a:r>
+            <a:r>
+              <a:rPr sz="1000">
+                <a:solidFill>
+                  <a:srgbClr val="F1F5F9"/>
+                </a:solidFill>
+                <a:latin typeface="Consolas"/>
+              </a:rPr>
+              <a:t>box</a:t>
+            </a:r>
+            <a:r>
+              <a:rPr sz="1000">
+                <a:solidFill>
+                  <a:srgbClr val="FDBA74"/>
+                </a:solidFill>
+                <a:latin typeface="Consolas"/>
+              </a:rPr>
+              <a:t>');</a:t>
+            </a:r>
+          </a:p>
+          <a:p>
+            <a:pPr>
+              <a:spcAft>
+                <a:spcPts val="200"/>
+              </a:spcAft>
+            </a:pPr>
+            <a:r>
+              <a:rPr sz="1000">
+                <a:solidFill>
+                  <a:srgbClr val="F1F5F9"/>
+                </a:solidFill>
+                <a:latin typeface="Consolas"/>
+              </a:rPr>
+              <a:t>    </a:t>
+            </a:r>
+            <a:r>
+              <a:rPr sz="1000">
+                <a:solidFill>
+                  <a:srgbClr val="F1F5F9"/>
+                </a:solidFill>
+                <a:latin typeface="Consolas"/>
+              </a:rPr>
+              <a:t>errorBox</a:t>
+            </a:r>
+            <a:r>
+              <a:rPr sz="1000">
+                <a:solidFill>
+                  <a:srgbClr val="F1F5F9"/>
+                </a:solidFill>
+                <a:latin typeface="Consolas"/>
+              </a:rPr>
+              <a:t>.</a:t>
+            </a:r>
+            <a:r>
+              <a:rPr sz="1000">
+                <a:solidFill>
+                  <a:srgbClr val="F1F5F9"/>
+                </a:solidFill>
+                <a:latin typeface="Consolas"/>
+              </a:rPr>
+              <a:t>style</a:t>
+            </a:r>
+            <a:r>
+              <a:rPr sz="1000">
+                <a:solidFill>
+                  <a:srgbClr val="F1F5F9"/>
+                </a:solidFill>
+                <a:latin typeface="Consolas"/>
+              </a:rPr>
+              <a:t>.</a:t>
+            </a:r>
+            <a:r>
+              <a:rPr sz="1000">
+                <a:solidFill>
+                  <a:srgbClr val="F1F5F9"/>
+                </a:solidFill>
+                <a:latin typeface="Consolas"/>
+              </a:rPr>
+              <a:t>display</a:t>
+            </a:r>
+            <a:r>
+              <a:rPr sz="1000">
+                <a:solidFill>
+                  <a:srgbClr val="F1F5F9"/>
+                </a:solidFill>
+                <a:latin typeface="Consolas"/>
+              </a:rPr>
+              <a:t> </a:t>
+            </a:r>
+            <a:r>
+              <a:rPr sz="1000">
+                <a:solidFill>
+                  <a:srgbClr val="F1F5F9"/>
+                </a:solidFill>
+                <a:latin typeface="Consolas"/>
+              </a:rPr>
+              <a:t>=</a:t>
+            </a:r>
+            <a:r>
+              <a:rPr sz="1000">
+                <a:solidFill>
+                  <a:srgbClr val="F1F5F9"/>
+                </a:solidFill>
+                <a:latin typeface="Consolas"/>
+              </a:rPr>
+              <a:t> </a:t>
+            </a:r>
+            <a:r>
+              <a:rPr sz="1000">
+                <a:solidFill>
+                  <a:srgbClr val="FDBA74"/>
+                </a:solidFill>
+                <a:latin typeface="Consolas"/>
+              </a:rPr>
+              <a:t>'none'</a:t>
+            </a:r>
+            <a:r>
+              <a:rPr sz="1000">
+                <a:solidFill>
+                  <a:srgbClr val="F1F5F9"/>
+                </a:solidFill>
+                <a:latin typeface="Consolas"/>
+              </a:rPr>
+              <a:t>;</a:t>
+            </a:r>
+          </a:p>
+          <a:p>
+            <a:pPr>
+              <a:spcAft>
+                <a:spcPts val="200"/>
+              </a:spcAft>
+            </a:pPr>
+            <a:r>
+              <a:rPr sz="1000">
+                <a:solidFill>
+                  <a:srgbClr val="F1F5F9"/>
+                </a:solidFill>
+                <a:latin typeface="Consolas"/>
+              </a:rPr>
+              <a:t>    </a:t>
+            </a:r>
+            <a:r>
+              <a:rPr sz="1000">
+                <a:solidFill>
+                  <a:srgbClr val="F1F5F9"/>
+                </a:solidFill>
+                <a:latin typeface="Consolas"/>
+              </a:rPr>
+              <a:t>overlay</a:t>
+            </a:r>
+            <a:r>
+              <a:rPr sz="1000">
+                <a:solidFill>
+                  <a:srgbClr val="F1F5F9"/>
+                </a:solidFill>
+                <a:latin typeface="Consolas"/>
+              </a:rPr>
+              <a:t>.</a:t>
+            </a:r>
+            <a:r>
+              <a:rPr sz="1000">
+                <a:solidFill>
+                  <a:srgbClr val="F1F5F9"/>
+                </a:solidFill>
+                <a:latin typeface="Consolas"/>
+              </a:rPr>
+              <a:t>style</a:t>
+            </a:r>
+            <a:r>
+              <a:rPr sz="1000">
+                <a:solidFill>
+                  <a:srgbClr val="F1F5F9"/>
+                </a:solidFill>
+                <a:latin typeface="Consolas"/>
+              </a:rPr>
+              <a:t>.</a:t>
+            </a:r>
+            <a:r>
+              <a:rPr sz="1000">
+                <a:solidFill>
+                  <a:srgbClr val="F1F5F9"/>
+                </a:solidFill>
+                <a:latin typeface="Consolas"/>
+              </a:rPr>
+              <a:t>display</a:t>
+            </a:r>
+            <a:r>
+              <a:rPr sz="1000">
+                <a:solidFill>
+                  <a:srgbClr val="F1F5F9"/>
+                </a:solidFill>
+                <a:latin typeface="Consolas"/>
+              </a:rPr>
+              <a:t> </a:t>
+            </a:r>
+            <a:r>
+              <a:rPr sz="1000">
+                <a:solidFill>
+                  <a:srgbClr val="F1F5F9"/>
+                </a:solidFill>
+                <a:latin typeface="Consolas"/>
+              </a:rPr>
+              <a:t>=</a:t>
+            </a:r>
+            <a:r>
+              <a:rPr sz="1000">
+                <a:solidFill>
+                  <a:srgbClr val="F1F5F9"/>
+                </a:solidFill>
+                <a:latin typeface="Consolas"/>
+              </a:rPr>
+              <a:t> </a:t>
+            </a:r>
+            <a:r>
+              <a:rPr sz="1000">
+                <a:solidFill>
+                  <a:srgbClr val="FDBA74"/>
+                </a:solidFill>
+                <a:latin typeface="Consolas"/>
+              </a:rPr>
+              <a:t>'flex'</a:t>
+            </a:r>
+            <a:r>
+              <a:rPr sz="1000">
+                <a:solidFill>
+                  <a:srgbClr val="F1F5F9"/>
+                </a:solidFill>
+                <a:latin typeface="Consolas"/>
+              </a:rPr>
+              <a:t>;</a:t>
+            </a:r>
+          </a:p>
+          <a:p>
+            <a:pPr>
+              <a:spcAft>
+                <a:spcPts val="200"/>
+              </a:spcAft>
+            </a:pPr>
+            <a:r>
+              <a:rPr sz="1000">
+                <a:solidFill>
+                  <a:srgbClr val="F1F5F9"/>
+                </a:solidFill>
+                <a:latin typeface="Consolas"/>
+              </a:rPr>
+              <a:t>    </a:t>
+            </a:r>
+            <a:r>
+              <a:rPr sz="1000" b="1">
+                <a:solidFill>
+                  <a:srgbClr val="F472B6"/>
+                </a:solidFill>
+                <a:latin typeface="Consolas"/>
+              </a:rPr>
               <a:t>try</a:t>
             </a:r>
             <a:r>
-              <a:rPr sz="1100">
+              <a:rPr sz="1000">
                 <a:solidFill>
                   <a:srgbClr val="F1F5F9"/>
                 </a:solidFill>
@@ -10247,7 +11291,7 @@
               <a:t> </a:t>
             </a:r>
             <a:r>
-              <a:rPr sz="1100">
+              <a:rPr sz="1000">
                 <a:solidFill>
                   <a:srgbClr val="F1F5F9"/>
                 </a:solidFill>
@@ -10263,7 +11307,803 @@
               </a:spcAft>
             </a:pPr>
             <a:r>
-              <a:rPr sz="1100">
+              <a:rPr sz="1000">
+                <a:solidFill>
+                  <a:srgbClr val="F1F5F9"/>
+                </a:solidFill>
+                <a:latin typeface="Consolas"/>
+              </a:rPr>
+              <a:t>        </a:t>
+            </a:r>
+            <a:r>
+              <a:rPr sz="1000" b="1">
+                <a:solidFill>
+                  <a:srgbClr val="F472B6"/>
+                </a:solidFill>
+                <a:latin typeface="Consolas"/>
+              </a:rPr>
+              <a:t>const</a:t>
+            </a:r>
+            <a:r>
+              <a:rPr sz="1000">
+                <a:solidFill>
+                  <a:srgbClr val="F1F5F9"/>
+                </a:solidFill>
+                <a:latin typeface="Consolas"/>
+              </a:rPr>
+              <a:t> </a:t>
+            </a:r>
+            <a:r>
+              <a:rPr sz="1000">
+                <a:solidFill>
+                  <a:srgbClr val="F1F5F9"/>
+                </a:solidFill>
+                <a:latin typeface="Consolas"/>
+              </a:rPr>
+              <a:t>t1</a:t>
+            </a:r>
+            <a:r>
+              <a:rPr sz="1000">
+                <a:solidFill>
+                  <a:srgbClr val="F1F5F9"/>
+                </a:solidFill>
+                <a:latin typeface="Consolas"/>
+              </a:rPr>
+              <a:t> </a:t>
+            </a:r>
+            <a:r>
+              <a:rPr sz="1000">
+                <a:solidFill>
+                  <a:srgbClr val="F1F5F9"/>
+                </a:solidFill>
+                <a:latin typeface="Consolas"/>
+              </a:rPr>
+              <a:t>=</a:t>
+            </a:r>
+            <a:r>
+              <a:rPr sz="1000">
+                <a:solidFill>
+                  <a:srgbClr val="F1F5F9"/>
+                </a:solidFill>
+                <a:latin typeface="Consolas"/>
+              </a:rPr>
+              <a:t> </a:t>
+            </a:r>
+            <a:r>
+              <a:rPr sz="1000" b="1">
+                <a:solidFill>
+                  <a:srgbClr val="F472B6"/>
+                </a:solidFill>
+                <a:latin typeface="Consolas"/>
+              </a:rPr>
+              <a:t>await</a:t>
+            </a:r>
+            <a:r>
+              <a:rPr sz="1000">
+                <a:solidFill>
+                  <a:srgbClr val="F1F5F9"/>
+                </a:solidFill>
+                <a:latin typeface="Consolas"/>
+              </a:rPr>
+              <a:t> </a:t>
+            </a:r>
+            <a:r>
+              <a:rPr sz="1000">
+                <a:solidFill>
+                  <a:srgbClr val="F1F5F9"/>
+                </a:solidFill>
+                <a:latin typeface="Consolas"/>
+              </a:rPr>
+              <a:t>extractText</a:t>
+            </a:r>
+            <a:r>
+              <a:rPr sz="1000">
+                <a:solidFill>
+                  <a:srgbClr val="F1F5F9"/>
+                </a:solidFill>
+                <a:latin typeface="Consolas"/>
+              </a:rPr>
+              <a:t>('</a:t>
+            </a:r>
+            <a:r>
+              <a:rPr sz="1000">
+                <a:solidFill>
+                  <a:srgbClr val="F1F5F9"/>
+                </a:solidFill>
+                <a:latin typeface="Consolas"/>
+              </a:rPr>
+              <a:t>file1</a:t>
+            </a:r>
+            <a:r>
+              <a:rPr sz="1000">
+                <a:solidFill>
+                  <a:srgbClr val="FDBA74"/>
+                </a:solidFill>
+                <a:latin typeface="Consolas"/>
+              </a:rPr>
+              <a:t>', '</a:t>
+            </a:r>
+            <a:r>
+              <a:rPr sz="1000">
+                <a:solidFill>
+                  <a:srgbClr val="F1F5F9"/>
+                </a:solidFill>
+                <a:latin typeface="Consolas"/>
+              </a:rPr>
+              <a:t>text1</a:t>
+            </a:r>
+            <a:r>
+              <a:rPr sz="1000">
+                <a:solidFill>
+                  <a:srgbClr val="FDBA74"/>
+                </a:solidFill>
+                <a:latin typeface="Consolas"/>
+              </a:rPr>
+              <a:t>', '</a:t>
+            </a:r>
+            <a:r>
+              <a:rPr sz="1000">
+                <a:solidFill>
+                  <a:srgbClr val="F1F5F9"/>
+                </a:solidFill>
+                <a:latin typeface="Consolas"/>
+              </a:rPr>
+              <a:t>Document</a:t>
+            </a:r>
+            <a:r>
+              <a:rPr sz="1000">
+                <a:solidFill>
+                  <a:srgbClr val="F1F5F9"/>
+                </a:solidFill>
+                <a:latin typeface="Consolas"/>
+              </a:rPr>
+              <a:t> </a:t>
+            </a:r>
+            <a:r>
+              <a:rPr sz="1000">
+                <a:solidFill>
+                  <a:srgbClr val="F1F5F9"/>
+                </a:solidFill>
+                <a:latin typeface="Consolas"/>
+              </a:rPr>
+              <a:t>A</a:t>
+            </a:r>
+            <a:r>
+              <a:rPr sz="1000">
+                <a:solidFill>
+                  <a:srgbClr val="FDBA74"/>
+                </a:solidFill>
+                <a:latin typeface="Consolas"/>
+              </a:rPr>
+              <a:t>');</a:t>
+            </a:r>
+          </a:p>
+          <a:p>
+            <a:pPr>
+              <a:spcAft>
+                <a:spcPts val="200"/>
+              </a:spcAft>
+            </a:pPr>
+            <a:r>
+              <a:rPr sz="1000">
+                <a:solidFill>
+                  <a:srgbClr val="F1F5F9"/>
+                </a:solidFill>
+                <a:latin typeface="Consolas"/>
+              </a:rPr>
+              <a:t>        </a:t>
+            </a:r>
+            <a:r>
+              <a:rPr sz="1000" b="1">
+                <a:solidFill>
+                  <a:srgbClr val="F472B6"/>
+                </a:solidFill>
+                <a:latin typeface="Consolas"/>
+              </a:rPr>
+              <a:t>const</a:t>
+            </a:r>
+            <a:r>
+              <a:rPr sz="1000">
+                <a:solidFill>
+                  <a:srgbClr val="F1F5F9"/>
+                </a:solidFill>
+                <a:latin typeface="Consolas"/>
+              </a:rPr>
+              <a:t> </a:t>
+            </a:r>
+            <a:r>
+              <a:rPr sz="1000">
+                <a:solidFill>
+                  <a:srgbClr val="F1F5F9"/>
+                </a:solidFill>
+                <a:latin typeface="Consolas"/>
+              </a:rPr>
+              <a:t>t2</a:t>
+            </a:r>
+            <a:r>
+              <a:rPr sz="1000">
+                <a:solidFill>
+                  <a:srgbClr val="F1F5F9"/>
+                </a:solidFill>
+                <a:latin typeface="Consolas"/>
+              </a:rPr>
+              <a:t> </a:t>
+            </a:r>
+            <a:r>
+              <a:rPr sz="1000">
+                <a:solidFill>
+                  <a:srgbClr val="F1F5F9"/>
+                </a:solidFill>
+                <a:latin typeface="Consolas"/>
+              </a:rPr>
+              <a:t>=</a:t>
+            </a:r>
+            <a:r>
+              <a:rPr sz="1000">
+                <a:solidFill>
+                  <a:srgbClr val="F1F5F9"/>
+                </a:solidFill>
+                <a:latin typeface="Consolas"/>
+              </a:rPr>
+              <a:t> </a:t>
+            </a:r>
+            <a:r>
+              <a:rPr sz="1000" b="1">
+                <a:solidFill>
+                  <a:srgbClr val="F472B6"/>
+                </a:solidFill>
+                <a:latin typeface="Consolas"/>
+              </a:rPr>
+              <a:t>await</a:t>
+            </a:r>
+            <a:r>
+              <a:rPr sz="1000">
+                <a:solidFill>
+                  <a:srgbClr val="F1F5F9"/>
+                </a:solidFill>
+                <a:latin typeface="Consolas"/>
+              </a:rPr>
+              <a:t> </a:t>
+            </a:r>
+            <a:r>
+              <a:rPr sz="1000">
+                <a:solidFill>
+                  <a:srgbClr val="F1F5F9"/>
+                </a:solidFill>
+                <a:latin typeface="Consolas"/>
+              </a:rPr>
+              <a:t>extractText</a:t>
+            </a:r>
+            <a:r>
+              <a:rPr sz="1000">
+                <a:solidFill>
+                  <a:srgbClr val="F1F5F9"/>
+                </a:solidFill>
+                <a:latin typeface="Consolas"/>
+              </a:rPr>
+              <a:t>('</a:t>
+            </a:r>
+            <a:r>
+              <a:rPr sz="1000">
+                <a:solidFill>
+                  <a:srgbClr val="F1F5F9"/>
+                </a:solidFill>
+                <a:latin typeface="Consolas"/>
+              </a:rPr>
+              <a:t>file2</a:t>
+            </a:r>
+            <a:r>
+              <a:rPr sz="1000">
+                <a:solidFill>
+                  <a:srgbClr val="FDBA74"/>
+                </a:solidFill>
+                <a:latin typeface="Consolas"/>
+              </a:rPr>
+              <a:t>', '</a:t>
+            </a:r>
+            <a:r>
+              <a:rPr sz="1000">
+                <a:solidFill>
+                  <a:srgbClr val="F1F5F9"/>
+                </a:solidFill>
+                <a:latin typeface="Consolas"/>
+              </a:rPr>
+              <a:t>text2</a:t>
+            </a:r>
+            <a:r>
+              <a:rPr sz="1000">
+                <a:solidFill>
+                  <a:srgbClr val="FDBA74"/>
+                </a:solidFill>
+                <a:latin typeface="Consolas"/>
+              </a:rPr>
+              <a:t>', '</a:t>
+            </a:r>
+            <a:r>
+              <a:rPr sz="1000">
+                <a:solidFill>
+                  <a:srgbClr val="F1F5F9"/>
+                </a:solidFill>
+                <a:latin typeface="Consolas"/>
+              </a:rPr>
+              <a:t>Document</a:t>
+            </a:r>
+            <a:r>
+              <a:rPr sz="1000">
+                <a:solidFill>
+                  <a:srgbClr val="F1F5F9"/>
+                </a:solidFill>
+                <a:latin typeface="Consolas"/>
+              </a:rPr>
+              <a:t> </a:t>
+            </a:r>
+            <a:r>
+              <a:rPr sz="1000">
+                <a:solidFill>
+                  <a:srgbClr val="F1F5F9"/>
+                </a:solidFill>
+                <a:latin typeface="Consolas"/>
+              </a:rPr>
+              <a:t>B</a:t>
+            </a:r>
+            <a:r>
+              <a:rPr sz="1000">
+                <a:solidFill>
+                  <a:srgbClr val="FDBA74"/>
+                </a:solidFill>
+                <a:latin typeface="Consolas"/>
+              </a:rPr>
+              <a:t>');</a:t>
+            </a:r>
+          </a:p>
+          <a:p>
+            <a:pPr>
+              <a:spcAft>
+                <a:spcPts val="200"/>
+              </a:spcAft>
+            </a:pPr>
+            <a:r>
+              <a:rPr sz="1000">
+                <a:solidFill>
+                  <a:srgbClr val="F1F5F9"/>
+                </a:solidFill>
+                <a:latin typeface="Consolas"/>
+              </a:rPr>
+              <a:t>        </a:t>
+            </a:r>
+            <a:r>
+              <a:rPr sz="1000" b="1">
+                <a:solidFill>
+                  <a:srgbClr val="F472B6"/>
+                </a:solidFill>
+                <a:latin typeface="Consolas"/>
+              </a:rPr>
+              <a:t>if</a:t>
+            </a:r>
+            <a:r>
+              <a:rPr sz="1000">
+                <a:solidFill>
+                  <a:srgbClr val="F1F5F9"/>
+                </a:solidFill>
+                <a:latin typeface="Consolas"/>
+              </a:rPr>
+              <a:t> </a:t>
+            </a:r>
+            <a:r>
+              <a:rPr sz="1000">
+                <a:solidFill>
+                  <a:srgbClr val="F1F5F9"/>
+                </a:solidFill>
+                <a:latin typeface="Consolas"/>
+              </a:rPr>
+              <a:t>(</a:t>
+            </a:r>
+            <a:r>
+              <a:rPr sz="1000">
+                <a:solidFill>
+                  <a:srgbClr val="F1F5F9"/>
+                </a:solidFill>
+                <a:latin typeface="Consolas"/>
+              </a:rPr>
+              <a:t>t1</a:t>
+            </a:r>
+            <a:r>
+              <a:rPr sz="1000">
+                <a:solidFill>
+                  <a:srgbClr val="F1F5F9"/>
+                </a:solidFill>
+                <a:latin typeface="Consolas"/>
+              </a:rPr>
+              <a:t>.</a:t>
+            </a:r>
+            <a:r>
+              <a:rPr sz="1000">
+                <a:solidFill>
+                  <a:srgbClr val="F1F5F9"/>
+                </a:solidFill>
+                <a:latin typeface="Consolas"/>
+              </a:rPr>
+              <a:t>trim</a:t>
+            </a:r>
+            <a:r>
+              <a:rPr sz="1000">
+                <a:solidFill>
+                  <a:srgbClr val="F1F5F9"/>
+                </a:solidFill>
+                <a:latin typeface="Consolas"/>
+              </a:rPr>
+              <a:t>()</a:t>
+            </a:r>
+            <a:r>
+              <a:rPr sz="1000">
+                <a:solidFill>
+                  <a:srgbClr val="F1F5F9"/>
+                </a:solidFill>
+                <a:latin typeface="Consolas"/>
+              </a:rPr>
+              <a:t> </a:t>
+            </a:r>
+            <a:r>
+              <a:rPr sz="1000">
+                <a:solidFill>
+                  <a:srgbClr val="F1F5F9"/>
+                </a:solidFill>
+                <a:latin typeface="Consolas"/>
+              </a:rPr>
+              <a:t>&amp;&amp;</a:t>
+            </a:r>
+            <a:r>
+              <a:rPr sz="1000">
+                <a:solidFill>
+                  <a:srgbClr val="F1F5F9"/>
+                </a:solidFill>
+                <a:latin typeface="Consolas"/>
+              </a:rPr>
+              <a:t> </a:t>
+            </a:r>
+            <a:r>
+              <a:rPr sz="1000">
+                <a:solidFill>
+                  <a:srgbClr val="F1F5F9"/>
+                </a:solidFill>
+                <a:latin typeface="Consolas"/>
+              </a:rPr>
+              <a:t>!</a:t>
+            </a:r>
+            <a:r>
+              <a:rPr sz="1000">
+                <a:solidFill>
+                  <a:srgbClr val="F1F5F9"/>
+                </a:solidFill>
+                <a:latin typeface="Consolas"/>
+              </a:rPr>
+              <a:t>t2</a:t>
+            </a:r>
+            <a:r>
+              <a:rPr sz="1000">
+                <a:solidFill>
+                  <a:srgbClr val="F1F5F9"/>
+                </a:solidFill>
+                <a:latin typeface="Consolas"/>
+              </a:rPr>
+              <a:t>.</a:t>
+            </a:r>
+            <a:r>
+              <a:rPr sz="1000">
+                <a:solidFill>
+                  <a:srgbClr val="F1F5F9"/>
+                </a:solidFill>
+                <a:latin typeface="Consolas"/>
+              </a:rPr>
+              <a:t>trim</a:t>
+            </a:r>
+            <a:r>
+              <a:rPr sz="1000">
+                <a:solidFill>
+                  <a:srgbClr val="F1F5F9"/>
+                </a:solidFill>
+                <a:latin typeface="Consolas"/>
+              </a:rPr>
+              <a:t>())</a:t>
+            </a:r>
+            <a:r>
+              <a:rPr sz="1000">
+                <a:solidFill>
+                  <a:srgbClr val="F1F5F9"/>
+                </a:solidFill>
+                <a:latin typeface="Consolas"/>
+              </a:rPr>
+              <a:t> </a:t>
+            </a:r>
+            <a:r>
+              <a:rPr sz="1000">
+                <a:solidFill>
+                  <a:srgbClr val="F1F5F9"/>
+                </a:solidFill>
+                <a:latin typeface="Consolas"/>
+              </a:rPr>
+              <a:t>{</a:t>
+            </a:r>
+          </a:p>
+          <a:p>
+            <a:pPr>
+              <a:spcAft>
+                <a:spcPts val="200"/>
+              </a:spcAft>
+            </a:pPr>
+            <a:r>
+              <a:rPr sz="1000">
+                <a:solidFill>
+                  <a:srgbClr val="F1F5F9"/>
+                </a:solidFill>
+                <a:latin typeface="Consolas"/>
+              </a:rPr>
+              <a:t>            </a:t>
+            </a:r>
+            <a:r>
+              <a:rPr sz="1000">
+                <a:solidFill>
+                  <a:srgbClr val="F1F5F9"/>
+                </a:solidFill>
+                <a:latin typeface="Consolas"/>
+              </a:rPr>
+              <a:t>renderSingleScannerResult</a:t>
+            </a:r>
+            <a:r>
+              <a:rPr sz="1000">
+                <a:solidFill>
+                  <a:srgbClr val="F1F5F9"/>
+                </a:solidFill>
+                <a:latin typeface="Consolas"/>
+              </a:rPr>
+              <a:t>('</a:t>
+            </a:r>
+            <a:r>
+              <a:rPr sz="1000">
+                <a:solidFill>
+                  <a:srgbClr val="F1F5F9"/>
+                </a:solidFill>
+                <a:latin typeface="Consolas"/>
+              </a:rPr>
+              <a:t>A</a:t>
+            </a:r>
+            <a:r>
+              <a:rPr sz="1000">
+                <a:solidFill>
+                  <a:srgbClr val="FDBA74"/>
+                </a:solidFill>
+                <a:latin typeface="Consolas"/>
+              </a:rPr>
+              <a:t>',</a:t>
+            </a:r>
+            <a:r>
+              <a:rPr sz="1000">
+                <a:solidFill>
+                  <a:srgbClr val="F1F5F9"/>
+                </a:solidFill>
+                <a:latin typeface="Consolas"/>
+              </a:rPr>
+              <a:t> </a:t>
+            </a:r>
+            <a:r>
+              <a:rPr sz="1000">
+                <a:solidFill>
+                  <a:srgbClr val="F1F5F9"/>
+                </a:solidFill>
+                <a:latin typeface="Consolas"/>
+              </a:rPr>
+              <a:t>t1</a:t>
+            </a:r>
+            <a:r>
+              <a:rPr sz="1000">
+                <a:solidFill>
+                  <a:srgbClr val="F1F5F9"/>
+                </a:solidFill>
+                <a:latin typeface="Consolas"/>
+              </a:rPr>
+              <a:t>,</a:t>
+            </a:r>
+            <a:r>
+              <a:rPr sz="1000">
+                <a:solidFill>
+                  <a:srgbClr val="F1F5F9"/>
+                </a:solidFill>
+                <a:latin typeface="Consolas"/>
+              </a:rPr>
+              <a:t> </a:t>
+            </a:r>
+            <a:r>
+              <a:rPr sz="1000">
+                <a:solidFill>
+                  <a:srgbClr val="F1F5F9"/>
+                </a:solidFill>
+                <a:latin typeface="Consolas"/>
+              </a:rPr>
+              <a:t>file1</a:t>
+            </a:r>
+            <a:r>
+              <a:rPr sz="1000">
+                <a:solidFill>
+                  <a:srgbClr val="F1F5F9"/>
+                </a:solidFill>
+                <a:latin typeface="Consolas"/>
+              </a:rPr>
+              <a:t>);</a:t>
+            </a:r>
+          </a:p>
+          <a:p>
+            <a:pPr>
+              <a:spcAft>
+                <a:spcPts val="200"/>
+              </a:spcAft>
+            </a:pPr>
+            <a:r>
+              <a:rPr sz="1000">
+                <a:solidFill>
+                  <a:srgbClr val="F1F5F9"/>
+                </a:solidFill>
+                <a:latin typeface="Consolas"/>
+              </a:rPr>
+              <a:t>        </a:t>
+            </a:r>
+            <a:r>
+              <a:rPr sz="1000">
+                <a:solidFill>
+                  <a:srgbClr val="F1F5F9"/>
+                </a:solidFill>
+                <a:latin typeface="Consolas"/>
+              </a:rPr>
+              <a:t>}</a:t>
+            </a:r>
+            <a:r>
+              <a:rPr sz="1000">
+                <a:solidFill>
+                  <a:srgbClr val="F1F5F9"/>
+                </a:solidFill>
+                <a:latin typeface="Consolas"/>
+              </a:rPr>
+              <a:t> </a:t>
+            </a:r>
+            <a:r>
+              <a:rPr sz="1000" b="1">
+                <a:solidFill>
+                  <a:srgbClr val="F472B6"/>
+                </a:solidFill>
+                <a:latin typeface="Consolas"/>
+              </a:rPr>
+              <a:t>else</a:t>
+            </a:r>
+            <a:r>
+              <a:rPr sz="1000">
+                <a:solidFill>
+                  <a:srgbClr val="F1F5F9"/>
+                </a:solidFill>
+                <a:latin typeface="Consolas"/>
+              </a:rPr>
+              <a:t> </a:t>
+            </a:r>
+            <a:r>
+              <a:rPr sz="1000">
+                <a:solidFill>
+                  <a:srgbClr val="F1F5F9"/>
+                </a:solidFill>
+                <a:latin typeface="Consolas"/>
+              </a:rPr>
+              <a:t>{</a:t>
+            </a:r>
+          </a:p>
+          <a:p>
+            <a:pPr>
+              <a:spcAft>
+                <a:spcPts val="200"/>
+              </a:spcAft>
+            </a:pPr>
+            <a:r>
+              <a:rPr sz="1000">
+                <a:solidFill>
+                  <a:srgbClr val="F1F5F9"/>
+                </a:solidFill>
+                <a:latin typeface="Consolas"/>
+              </a:rPr>
+              <a:t>            </a:t>
+            </a:r>
+            <a:r>
+              <a:rPr sz="1000">
+                <a:solidFill>
+                  <a:srgbClr val="F1F5F9"/>
+                </a:solidFill>
+                <a:latin typeface="Consolas"/>
+              </a:rPr>
+              <a:t>renderComparisonResult</a:t>
+            </a:r>
+            <a:r>
+              <a:rPr sz="1000">
+                <a:solidFill>
+                  <a:srgbClr val="F1F5F9"/>
+                </a:solidFill>
+                <a:latin typeface="Consolas"/>
+              </a:rPr>
+              <a:t>(</a:t>
+            </a:r>
+            <a:r>
+              <a:rPr sz="1000">
+                <a:solidFill>
+                  <a:srgbClr val="F1F5F9"/>
+                </a:solidFill>
+                <a:latin typeface="Consolas"/>
+              </a:rPr>
+              <a:t>t1</a:t>
+            </a:r>
+            <a:r>
+              <a:rPr sz="1000">
+                <a:solidFill>
+                  <a:srgbClr val="F1F5F9"/>
+                </a:solidFill>
+                <a:latin typeface="Consolas"/>
+              </a:rPr>
+              <a:t>,</a:t>
+            </a:r>
+            <a:r>
+              <a:rPr sz="1000">
+                <a:solidFill>
+                  <a:srgbClr val="F1F5F9"/>
+                </a:solidFill>
+                <a:latin typeface="Consolas"/>
+              </a:rPr>
+              <a:t> </a:t>
+            </a:r>
+            <a:r>
+              <a:rPr sz="1000">
+                <a:solidFill>
+                  <a:srgbClr val="F1F5F9"/>
+                </a:solidFill>
+                <a:latin typeface="Consolas"/>
+              </a:rPr>
+              <a:t>t2</a:t>
+            </a:r>
+            <a:r>
+              <a:rPr sz="1000">
+                <a:solidFill>
+                  <a:srgbClr val="F1F5F9"/>
+                </a:solidFill>
+                <a:latin typeface="Consolas"/>
+              </a:rPr>
+              <a:t>);</a:t>
+            </a:r>
+          </a:p>
+          <a:p>
+            <a:pPr>
+              <a:spcAft>
+                <a:spcPts val="200"/>
+              </a:spcAft>
+            </a:pPr>
+            <a:r>
+              <a:rPr sz="1000">
+                <a:solidFill>
+                  <a:srgbClr val="F1F5F9"/>
+                </a:solidFill>
+                <a:latin typeface="Consolas"/>
+              </a:rPr>
+              <a:t>        </a:t>
+            </a:r>
+            <a:r>
+              <a:rPr sz="1000">
+                <a:solidFill>
+                  <a:srgbClr val="F1F5F9"/>
+                </a:solidFill>
+                <a:latin typeface="Consolas"/>
+              </a:rPr>
+              <a:t>}</a:t>
+            </a:r>
+          </a:p>
+          <a:p>
+            <a:pPr>
+              <a:spcAft>
+                <a:spcPts val="200"/>
+              </a:spcAft>
+            </a:pPr>
+            <a:r>
+              <a:rPr sz="1000">
                 <a:solidFill>
                   <a:srgbClr val="F1F5F9"/>
                 </a:solidFill>
@@ -10272,16 +12112,34 @@
               <a:t>    </a:t>
             </a:r>
             <a:r>
-              <a:rPr sz="1100" b="1">
+              <a:rPr sz="1000">
+                <a:solidFill>
+                  <a:srgbClr val="F1F5F9"/>
+                </a:solidFill>
+                <a:latin typeface="Consolas"/>
+              </a:rPr>
+              <a:t>}</a:t>
+            </a:r>
+            <a:r>
+              <a:rPr sz="1000">
+                <a:solidFill>
+                  <a:srgbClr val="F1F5F9"/>
+                </a:solidFill>
+                <a:latin typeface="Consolas"/>
+              </a:rPr>
+              <a:t> </a:t>
+            </a:r>
+            <a:r>
+              <a:rPr sz="1000" b="1">
                 <a:solidFill>
                   <a:srgbClr val="F472B6"/>
                 </a:solidFill>
                 <a:latin typeface="Consolas"/>
               </a:rPr>
-              <a:t>const</a:t>
-            </a:r>
-            <a:r>
-              <a:rPr sz="1100">
+              <a:t>catch</a:t>
+            </a:r>
+            <a:r>
+              <a:rPr sz="1000">
                 <a:solidFill>
                   <a:srgbClr val="F1F5F9"/>
                 </a:solidFill>
@@ -10290,16 +12148,34 @@
               <a:t> </a:t>
             </a:r>
             <a:r>
-              <a:rPr sz="1100">
-                <a:solidFill>
-                  <a:srgbClr val="F1F5F9"/>
-                </a:solidFill>
-                <a:latin typeface="Consolas"/>
-              </a:rPr>
-              <a:t>t1</a:t>
-            </a:r>
-            <a:r>
-              <a:rPr sz="1100">
+              <a:rPr sz="1000">
+                <a:solidFill>
+                  <a:srgbClr val="F1F5F9"/>
+                </a:solidFill>
+                <a:latin typeface="Consolas"/>
+              </a:rPr>
+              <a:t>(</a:t>
+            </a:r>
+            <a:r>
+              <a:rPr sz="1000">
+                <a:solidFill>
+                  <a:srgbClr val="F1F5F9"/>
+                </a:solidFill>
+                <a:latin typeface="Consolas"/>
+              </a:rPr>
+              <a:t>err</a:t>
+            </a:r>
+            <a:r>
+              <a:rPr sz="1000">
+                <a:solidFill>
+                  <a:srgbClr val="F1F5F9"/>
+                </a:solidFill>
+                <a:latin typeface="Consolas"/>
+              </a:rPr>
+              <a:t>)</a:t>
+            </a:r>
+            <a:r>
+              <a:rPr sz="1000">
                 <a:solidFill>
                   <a:srgbClr val="F1F5F9"/>
                 </a:solidFill>
@@ -10308,7 +12184,68 @@
               <a:t> </a:t>
             </a:r>
             <a:r>
-              <a:rPr sz="1100">
+              <a:rPr sz="1000">
+                <a:solidFill>
+                  <a:srgbClr val="F1F5F9"/>
+                </a:solidFill>
+                <a:latin typeface="Consolas"/>
+              </a:rPr>
+              <a:t>{</a:t>
+            </a:r>
+          </a:p>
+          <a:p>
+            <a:pPr>
+              <a:spcAft>
+                <a:spcPts val="200"/>
+              </a:spcAft>
+            </a:pPr>
+            <a:r>
+              <a:rPr sz="1000">
+                <a:solidFill>
+                  <a:srgbClr val="F1F5F9"/>
+                </a:solidFill>
+                <a:latin typeface="Consolas"/>
+              </a:rPr>
+              <a:t>        </a:t>
+            </a:r>
+            <a:r>
+              <a:rPr sz="1000">
+                <a:solidFill>
+                  <a:srgbClr val="F1F5F9"/>
+                </a:solidFill>
+                <a:latin typeface="Consolas"/>
+              </a:rPr>
+              <a:t>errorBox</a:t>
+            </a:r>
+            <a:r>
+              <a:rPr sz="1000">
+                <a:solidFill>
+                  <a:srgbClr val="F1F5F9"/>
+                </a:solidFill>
+                <a:latin typeface="Consolas"/>
+              </a:rPr>
+              <a:t>.</a:t>
+            </a:r>
+            <a:r>
+              <a:rPr sz="1000">
+                <a:solidFill>
+                  <a:srgbClr val="F1F5F9"/>
+                </a:solidFill>
+                <a:latin typeface="Consolas"/>
+              </a:rPr>
+              <a:t>innerText</a:t>
+            </a:r>
+            <a:r>
+              <a:rPr sz="1000">
+                <a:solidFill>
+                  <a:srgbClr val="F1F5F9"/>
+                </a:solidFill>
+                <a:latin typeface="Consolas"/>
+              </a:rPr>
+              <a:t> </a:t>
+            </a:r>
+            <a:r>
+              <a:rPr sz="1000">
                 <a:solidFill>
                   <a:srgbClr val="F1F5F9"/>
                 </a:solidFill>
@@ -10317,7 +12254,7 @@
               <a:t>=</a:t>
             </a:r>
             <a:r>
-              <a:rPr sz="1100">
+              <a:rPr sz="1000">
                 <a:solidFill>
                   <a:srgbClr val="F1F5F9"/>
                 </a:solidFill>
@@ -10326,112 +12263,22 @@
               <a:t> </a:t>
             </a:r>
             <a:r>
-              <a:rPr sz="1100" b="1">
-                <a:solidFill>
-                  <a:srgbClr val="F472B6"/>
-                </a:solidFill>
-                <a:latin typeface="Consolas"/>
-              </a:rPr>
-              <a:t>await</a:t>
-            </a:r>
-            <a:r>
-              <a:rPr sz="1100">
-                <a:solidFill>
-                  <a:srgbClr val="F1F5F9"/>
-                </a:solidFill>
-                <a:latin typeface="Consolas"/>
-              </a:rPr>
-              <a:t> </a:t>
-            </a:r>
-            <a:r>
-              <a:rPr sz="1100">
-                <a:solidFill>
-                  <a:srgbClr val="F1F5F9"/>
-                </a:solidFill>
-                <a:latin typeface="Consolas"/>
-              </a:rPr>
-              <a:t>extractText</a:t>
-            </a:r>
-            <a:r>
-              <a:rPr sz="1100">
-                <a:solidFill>
-                  <a:srgbClr val="F1F5F9"/>
-                </a:solidFill>
-                <a:latin typeface="Consolas"/>
-              </a:rPr>
-              <a:t>('</a:t>
-            </a:r>
-            <a:r>
-              <a:rPr sz="1100">
-                <a:solidFill>
-                  <a:srgbClr val="F1F5F9"/>
-                </a:solidFill>
-                <a:latin typeface="Consolas"/>
-              </a:rPr>
-              <a:t>file1</a:t>
-            </a:r>
-            <a:r>
-              <a:rPr sz="1100">
-                <a:solidFill>
-                  <a:srgbClr val="FDBA74"/>
-                </a:solidFill>
-                <a:latin typeface="Consolas"/>
-              </a:rPr>
-              <a:t>', '</a:t>
-            </a:r>
-            <a:r>
-              <a:rPr sz="1100">
-                <a:solidFill>
-                  <a:srgbClr val="F1F5F9"/>
-                </a:solidFill>
-                <a:latin typeface="Consolas"/>
-              </a:rPr>
-              <a:t>text1</a:t>
-            </a:r>
-            <a:r>
-              <a:rPr sz="1100">
-                <a:solidFill>
-                  <a:srgbClr val="FDBA74"/>
-                </a:solidFill>
-                <a:latin typeface="Consolas"/>
-              </a:rPr>
-              <a:t>', '</a:t>
-            </a:r>
-            <a:r>
-              <a:rPr sz="1100">
-                <a:solidFill>
-                  <a:srgbClr val="F1F5F9"/>
-                </a:solidFill>
-                <a:latin typeface="Consolas"/>
-              </a:rPr>
-              <a:t>Doc</a:t>
-            </a:r>
-            <a:r>
-              <a:rPr sz="1100">
-                <a:solidFill>
-                  <a:srgbClr val="F1F5F9"/>
-                </a:solidFill>
-                <a:latin typeface="Consolas"/>
-              </a:rPr>
-              <a:t> </a:t>
-            </a:r>
-            <a:r>
-              <a:rPr sz="1100">
-                <a:solidFill>
-                  <a:srgbClr val="F1F5F9"/>
-                </a:solidFill>
-                <a:latin typeface="Consolas"/>
-              </a:rPr>
-              <a:t>A</a:t>
-            </a:r>
-            <a:r>
-              <a:rPr sz="1100">
-                <a:solidFill>
-                  <a:srgbClr val="FDBA74"/>
-                </a:solidFill>
-                <a:latin typeface="Consolas"/>
-              </a:rPr>
-              <a:t>');</a:t>
+              <a:rPr sz="1000">
+                <a:solidFill>
+                  <a:srgbClr val="F1F5F9"/>
+                </a:solidFill>
+                <a:latin typeface="Consolas"/>
+              </a:rPr>
+              <a:t>err</a:t>
+            </a:r>
+            <a:r>
+              <a:rPr sz="1000">
+                <a:solidFill>
+                  <a:srgbClr val="F1F5F9"/>
+                </a:solidFill>
+                <a:latin typeface="Consolas"/>
+              </a:rPr>
+              <a:t>;</a:t>
             </a:r>
           </a:p>
           <a:p>
@@ -10441,7 +12288,7 @@
               </a:spcAft>
             </a:pPr>
             <a:r>
-              <a:rPr sz="1100">
+              <a:rPr sz="1000">
                 <a:solidFill>
                   <a:srgbClr val="F1F5F9"/>
                 </a:solidFill>
@@ -10450,166 +12297,13 @@
               <a:t>    </a:t>
             </a:r>
             <a:r>
-              <a:rPr sz="1100" b="1">
-                <a:solidFill>
-                  <a:srgbClr val="F472B6"/>
-                </a:solidFill>
-                <a:latin typeface="Consolas"/>
-              </a:rPr>
-              <a:t>const</a:t>
-            </a:r>
-            <a:r>
-              <a:rPr sz="1100">
-                <a:solidFill>
-                  <a:srgbClr val="F1F5F9"/>
-                </a:solidFill>
-                <a:latin typeface="Consolas"/>
-              </a:rPr>
-              <a:t> </a:t>
-            </a:r>
-            <a:r>
-              <a:rPr sz="1100">
-                <a:solidFill>
-                  <a:srgbClr val="F1F5F9"/>
-                </a:solidFill>
-                <a:latin typeface="Consolas"/>
-              </a:rPr>
-              <a:t>t2</a:t>
-            </a:r>
-            <a:r>
-              <a:rPr sz="1100">
-                <a:solidFill>
-                  <a:srgbClr val="F1F5F9"/>
-                </a:solidFill>
-                <a:latin typeface="Consolas"/>
-              </a:rPr>
-              <a:t> </a:t>
-            </a:r>
-            <a:r>
-              <a:rPr sz="1100">
-                <a:solidFill>
-                  <a:srgbClr val="F1F5F9"/>
-                </a:solidFill>
-                <a:latin typeface="Consolas"/>
-              </a:rPr>
-              <a:t>=</a:t>
-            </a:r>
-            <a:r>
-              <a:rPr sz="1100">
-                <a:solidFill>
-                  <a:srgbClr val="F1F5F9"/>
-                </a:solidFill>
-                <a:latin typeface="Consolas"/>
-              </a:rPr>
-              <a:t> </a:t>
-            </a:r>
-            <a:r>
-              <a:rPr sz="1100" b="1">
-                <a:solidFill>
-                  <a:srgbClr val="F472B6"/>
-                </a:solidFill>
-                <a:latin typeface="Consolas"/>
-              </a:rPr>
-              <a:t>await</a:t>
-            </a:r>
-            <a:r>
-              <a:rPr sz="1100">
-                <a:solidFill>
-                  <a:srgbClr val="F1F5F9"/>
-                </a:solidFill>
-                <a:latin typeface="Consolas"/>
-              </a:rPr>
-              <a:t> </a:t>
-            </a:r>
-            <a:r>
-              <a:rPr sz="1100">
-                <a:solidFill>
-                  <a:srgbClr val="F1F5F9"/>
-                </a:solidFill>
-                <a:latin typeface="Consolas"/>
-              </a:rPr>
-              <a:t>extractText</a:t>
-            </a:r>
-            <a:r>
-              <a:rPr sz="1100">
-                <a:solidFill>
-                  <a:srgbClr val="F1F5F9"/>
-                </a:solidFill>
-                <a:latin typeface="Consolas"/>
-              </a:rPr>
-              <a:t>('</a:t>
-            </a:r>
-            <a:r>
-              <a:rPr sz="1100">
-                <a:solidFill>
-                  <a:srgbClr val="F1F5F9"/>
-                </a:solidFill>
-                <a:latin typeface="Consolas"/>
-              </a:rPr>
-              <a:t>file2</a:t>
-            </a:r>
-            <a:r>
-              <a:rPr sz="1100">
-                <a:solidFill>
-                  <a:srgbClr val="FDBA74"/>
-                </a:solidFill>
-                <a:latin typeface="Consolas"/>
-              </a:rPr>
-              <a:t>', '</a:t>
-            </a:r>
-            <a:r>
-              <a:rPr sz="1100">
-                <a:solidFill>
-                  <a:srgbClr val="F1F5F9"/>
-                </a:solidFill>
-                <a:latin typeface="Consolas"/>
-              </a:rPr>
-              <a:t>text2</a:t>
-            </a:r>
-            <a:r>
-              <a:rPr sz="1100">
-                <a:solidFill>
-                  <a:srgbClr val="FDBA74"/>
-                </a:solidFill>
-                <a:latin typeface="Consolas"/>
-              </a:rPr>
-              <a:t>', '</a:t>
-            </a:r>
-            <a:r>
-              <a:rPr sz="1100">
-                <a:solidFill>
-                  <a:srgbClr val="F1F5F9"/>
-                </a:solidFill>
-                <a:latin typeface="Consolas"/>
-              </a:rPr>
-              <a:t>Doc</a:t>
-            </a:r>
-            <a:r>
-              <a:rPr sz="1100">
-                <a:solidFill>
-                  <a:srgbClr val="F1F5F9"/>
-                </a:solidFill>
-                <a:latin typeface="Consolas"/>
-              </a:rPr>
-              <a:t> </a:t>
-            </a:r>
-            <a:r>
-              <a:rPr sz="1100">
-                <a:solidFill>
-                  <a:srgbClr val="F1F5F9"/>
-                </a:solidFill>
-                <a:latin typeface="Consolas"/>
-              </a:rPr>
-              <a:t>B</a:t>
-            </a:r>
-            <a:r>
-              <a:rPr sz="1100">
-                <a:solidFill>
-                  <a:srgbClr val="FDBA74"/>
-                </a:solidFill>
-                <a:latin typeface="Consolas"/>
-              </a:rPr>
-              <a:t>');</a:t>
+              <a:rPr sz="1000">
+                <a:solidFill>
+                  <a:srgbClr val="F1F5F9"/>
+                </a:solidFill>
+                <a:latin typeface="Consolas"/>
+              </a:rPr>
+              <a:t>}</a:t>
             </a:r>
           </a:p>
           <a:p>
@@ -10619,549 +12313,7 @@
               </a:spcAft>
             </a:pPr>
             <a:r>
-              <a:rPr sz="1100">
-                <a:solidFill>
-                  <a:srgbClr val="F1F5F9"/>
-                </a:solidFill>
-                <a:latin typeface="Consolas"/>
-              </a:rPr>
-              <a:t>    </a:t>
-            </a:r>
-            <a:r>
-              <a:rPr sz="1100" b="1">
-                <a:solidFill>
-                  <a:srgbClr val="F472B6"/>
-                </a:solidFill>
-                <a:latin typeface="Consolas"/>
-              </a:rPr>
-              <a:t>if</a:t>
-            </a:r>
-            <a:r>
-              <a:rPr sz="1100">
-                <a:solidFill>
-                  <a:srgbClr val="F1F5F9"/>
-                </a:solidFill>
-                <a:latin typeface="Consolas"/>
-              </a:rPr>
-              <a:t> </a:t>
-            </a:r>
-            <a:r>
-              <a:rPr sz="1100">
-                <a:solidFill>
-                  <a:srgbClr val="F1F5F9"/>
-                </a:solidFill>
-                <a:latin typeface="Consolas"/>
-              </a:rPr>
-              <a:t>(</a:t>
-            </a:r>
-            <a:r>
-              <a:rPr sz="1100">
-                <a:solidFill>
-                  <a:srgbClr val="F1F5F9"/>
-                </a:solidFill>
-                <a:latin typeface="Consolas"/>
-              </a:rPr>
-              <a:t>t1</a:t>
-            </a:r>
-            <a:r>
-              <a:rPr sz="1100">
-                <a:solidFill>
-                  <a:srgbClr val="F1F5F9"/>
-                </a:solidFill>
-                <a:latin typeface="Consolas"/>
-              </a:rPr>
-              <a:t> </a:t>
-            </a:r>
-            <a:r>
-              <a:rPr sz="1100">
-                <a:solidFill>
-                  <a:srgbClr val="F1F5F9"/>
-                </a:solidFill>
-                <a:latin typeface="Consolas"/>
-              </a:rPr>
-              <a:t>&amp;&amp;</a:t>
-            </a:r>
-            <a:r>
-              <a:rPr sz="1100">
-                <a:solidFill>
-                  <a:srgbClr val="F1F5F9"/>
-                </a:solidFill>
-                <a:latin typeface="Consolas"/>
-              </a:rPr>
-              <a:t> </a:t>
-            </a:r>
-            <a:r>
-              <a:rPr sz="1100">
-                <a:solidFill>
-                  <a:srgbClr val="F1F5F9"/>
-                </a:solidFill>
-                <a:latin typeface="Consolas"/>
-              </a:rPr>
-              <a:t>!</a:t>
-            </a:r>
-            <a:r>
-              <a:rPr sz="1100">
-                <a:solidFill>
-                  <a:srgbClr val="F1F5F9"/>
-                </a:solidFill>
-                <a:latin typeface="Consolas"/>
-              </a:rPr>
-              <a:t>t2</a:t>
-            </a:r>
-            <a:r>
-              <a:rPr sz="1100">
-                <a:solidFill>
-                  <a:srgbClr val="F1F5F9"/>
-                </a:solidFill>
-                <a:latin typeface="Consolas"/>
-              </a:rPr>
-              <a:t>)</a:t>
-            </a:r>
-            <a:r>
-              <a:rPr sz="1100">
-                <a:solidFill>
-                  <a:srgbClr val="F1F5F9"/>
-                </a:solidFill>
-                <a:latin typeface="Consolas"/>
-              </a:rPr>
-              <a:t> </a:t>
-            </a:r>
-            <a:r>
-              <a:rPr sz="1100">
-                <a:solidFill>
-                  <a:srgbClr val="F1F5F9"/>
-                </a:solidFill>
-                <a:latin typeface="Consolas"/>
-              </a:rPr>
-              <a:t>{</a:t>
-            </a:r>
-          </a:p>
-          <a:p>
-            <a:pPr>
-              <a:spcAft>
-                <a:spcPts val="200"/>
-              </a:spcAft>
-            </a:pPr>
-            <a:r>
-              <a:rPr sz="1100">
-                <a:solidFill>
-                  <a:srgbClr val="F1F5F9"/>
-                </a:solidFill>
-                <a:latin typeface="Consolas"/>
-              </a:rPr>
-              <a:t>      </a:t>
-            </a:r>
-            <a:r>
-              <a:rPr sz="1100">
-                <a:solidFill>
-                  <a:srgbClr val="F1F5F9"/>
-                </a:solidFill>
-                <a:latin typeface="Consolas"/>
-              </a:rPr>
-              <a:t>renderSingleScannerResult</a:t>
-            </a:r>
-            <a:r>
-              <a:rPr sz="1100">
-                <a:solidFill>
-                  <a:srgbClr val="F1F5F9"/>
-                </a:solidFill>
-                <a:latin typeface="Consolas"/>
-              </a:rPr>
-              <a:t>('</a:t>
-            </a:r>
-            <a:r>
-              <a:rPr sz="1100">
-                <a:solidFill>
-                  <a:srgbClr val="F1F5F9"/>
-                </a:solidFill>
-                <a:latin typeface="Consolas"/>
-              </a:rPr>
-              <a:t>A</a:t>
-            </a:r>
-            <a:r>
-              <a:rPr sz="1100">
-                <a:solidFill>
-                  <a:srgbClr val="FDBA74"/>
-                </a:solidFill>
-                <a:latin typeface="Consolas"/>
-              </a:rPr>
-              <a:t>',</a:t>
-            </a:r>
-            <a:r>
-              <a:rPr sz="1100">
-                <a:solidFill>
-                  <a:srgbClr val="F1F5F9"/>
-                </a:solidFill>
-                <a:latin typeface="Consolas"/>
-              </a:rPr>
-              <a:t> </a:t>
-            </a:r>
-            <a:r>
-              <a:rPr sz="1100">
-                <a:solidFill>
-                  <a:srgbClr val="F1F5F9"/>
-                </a:solidFill>
-                <a:latin typeface="Consolas"/>
-              </a:rPr>
-              <a:t>t1</a:t>
-            </a:r>
-            <a:r>
-              <a:rPr sz="1100">
-                <a:solidFill>
-                  <a:srgbClr val="F1F5F9"/>
-                </a:solidFill>
-                <a:latin typeface="Consolas"/>
-              </a:rPr>
-              <a:t>);</a:t>
-            </a:r>
-          </a:p>
-          <a:p>
-            <a:pPr>
-              <a:spcAft>
-                <a:spcPts val="200"/>
-              </a:spcAft>
-            </a:pPr>
-            <a:r>
-              <a:rPr sz="1100">
-                <a:solidFill>
-                  <a:srgbClr val="F1F5F9"/>
-                </a:solidFill>
-                <a:latin typeface="Consolas"/>
-              </a:rPr>
-              <a:t>    </a:t>
-            </a:r>
-            <a:r>
-              <a:rPr sz="1100">
-                <a:solidFill>
-                  <a:srgbClr val="F1F5F9"/>
-                </a:solidFill>
-                <a:latin typeface="Consolas"/>
-              </a:rPr>
-              <a:t>}</a:t>
-            </a:r>
-            <a:r>
-              <a:rPr sz="1100">
-                <a:solidFill>
-                  <a:srgbClr val="F1F5F9"/>
-                </a:solidFill>
-                <a:latin typeface="Consolas"/>
-              </a:rPr>
-              <a:t> </a:t>
-            </a:r>
-            <a:r>
-              <a:rPr sz="1100" b="1">
-                <a:solidFill>
-                  <a:srgbClr val="F472B6"/>
-                </a:solidFill>
-                <a:latin typeface="Consolas"/>
-              </a:rPr>
-              <a:t>else</a:t>
-            </a:r>
-            <a:r>
-              <a:rPr sz="1100">
-                <a:solidFill>
-                  <a:srgbClr val="F1F5F9"/>
-                </a:solidFill>
-                <a:latin typeface="Consolas"/>
-              </a:rPr>
-              <a:t> </a:t>
-            </a:r>
-            <a:r>
-              <a:rPr sz="1100">
-                <a:solidFill>
-                  <a:srgbClr val="F1F5F9"/>
-                </a:solidFill>
-                <a:latin typeface="Consolas"/>
-              </a:rPr>
-              <a:t>{</a:t>
-            </a:r>
-          </a:p>
-          <a:p>
-            <a:pPr>
-              <a:spcAft>
-                <a:spcPts val="200"/>
-              </a:spcAft>
-            </a:pPr>
-            <a:r>
-              <a:rPr sz="1100">
-                <a:solidFill>
-                  <a:srgbClr val="F1F5F9"/>
-                </a:solidFill>
-                <a:latin typeface="Consolas"/>
-              </a:rPr>
-              <a:t>      </a:t>
-            </a:r>
-            <a:r>
-              <a:rPr sz="1100">
-                <a:solidFill>
-                  <a:srgbClr val="F1F5F9"/>
-                </a:solidFill>
-                <a:latin typeface="Consolas"/>
-              </a:rPr>
-              <a:t>renderComparisonResult</a:t>
-            </a:r>
-            <a:r>
-              <a:rPr sz="1100">
-                <a:solidFill>
-                  <a:srgbClr val="F1F5F9"/>
-                </a:solidFill>
-                <a:latin typeface="Consolas"/>
-              </a:rPr>
-              <a:t>(</a:t>
-            </a:r>
-            <a:r>
-              <a:rPr sz="1100">
-                <a:solidFill>
-                  <a:srgbClr val="F1F5F9"/>
-                </a:solidFill>
-                <a:latin typeface="Consolas"/>
-              </a:rPr>
-              <a:t>t1</a:t>
-            </a:r>
-            <a:r>
-              <a:rPr sz="1100">
-                <a:solidFill>
-                  <a:srgbClr val="F1F5F9"/>
-                </a:solidFill>
-                <a:latin typeface="Consolas"/>
-              </a:rPr>
-              <a:t>,</a:t>
-            </a:r>
-            <a:r>
-              <a:rPr sz="1100">
-                <a:solidFill>
-                  <a:srgbClr val="F1F5F9"/>
-                </a:solidFill>
-                <a:latin typeface="Consolas"/>
-              </a:rPr>
-              <a:t> </a:t>
-            </a:r>
-            <a:r>
-              <a:rPr sz="1100">
-                <a:solidFill>
-                  <a:srgbClr val="F1F5F9"/>
-                </a:solidFill>
-                <a:latin typeface="Consolas"/>
-              </a:rPr>
-              <a:t>t2</a:t>
-            </a:r>
-            <a:r>
-              <a:rPr sz="1100">
-                <a:solidFill>
-                  <a:srgbClr val="F1F5F9"/>
-                </a:solidFill>
-                <a:latin typeface="Consolas"/>
-              </a:rPr>
-              <a:t>);</a:t>
-            </a:r>
-          </a:p>
-          <a:p>
-            <a:pPr>
-              <a:spcAft>
-                <a:spcPts val="200"/>
-              </a:spcAft>
-            </a:pPr>
-            <a:r>
-              <a:rPr sz="1100">
-                <a:solidFill>
-                  <a:srgbClr val="F1F5F9"/>
-                </a:solidFill>
-                <a:latin typeface="Consolas"/>
-              </a:rPr>
-              <a:t>    </a:t>
-            </a:r>
-            <a:r>
-              <a:rPr sz="1100">
-                <a:solidFill>
-                  <a:srgbClr val="F1F5F9"/>
-                </a:solidFill>
-                <a:latin typeface="Consolas"/>
-              </a:rPr>
-              <a:t>}</a:t>
-            </a:r>
-          </a:p>
-          <a:p>
-            <a:pPr>
-              <a:spcAft>
-                <a:spcPts val="200"/>
-              </a:spcAft>
-            </a:pPr>
-            <a:r>
-              <a:rPr sz="1100">
-                <a:solidFill>
-                  <a:srgbClr val="F1F5F9"/>
-                </a:solidFill>
-                <a:latin typeface="Consolas"/>
-              </a:rPr>
-              <a:t>  </a:t>
-            </a:r>
-            <a:r>
-              <a:rPr sz="1100">
-                <a:solidFill>
-                  <a:srgbClr val="F1F5F9"/>
-                </a:solidFill>
-                <a:latin typeface="Consolas"/>
-              </a:rPr>
-              <a:t>}</a:t>
-            </a:r>
-            <a:r>
-              <a:rPr sz="1100">
-                <a:solidFill>
-                  <a:srgbClr val="F1F5F9"/>
-                </a:solidFill>
-                <a:latin typeface="Consolas"/>
-              </a:rPr>
-              <a:t> </a:t>
-            </a:r>
-            <a:r>
-              <a:rPr sz="1100" b="1">
-                <a:solidFill>
-                  <a:srgbClr val="F472B6"/>
-                </a:solidFill>
-                <a:latin typeface="Consolas"/>
-              </a:rPr>
-              <a:t>catch</a:t>
-            </a:r>
-            <a:r>
-              <a:rPr sz="1100">
-                <a:solidFill>
-                  <a:srgbClr val="F1F5F9"/>
-                </a:solidFill>
-                <a:latin typeface="Consolas"/>
-              </a:rPr>
-              <a:t> </a:t>
-            </a:r>
-            <a:r>
-              <a:rPr sz="1100">
-                <a:solidFill>
-                  <a:srgbClr val="F1F5F9"/>
-                </a:solidFill>
-                <a:latin typeface="Consolas"/>
-              </a:rPr>
-              <a:t>(</a:t>
-            </a:r>
-            <a:r>
-              <a:rPr sz="1100">
-                <a:solidFill>
-                  <a:srgbClr val="F1F5F9"/>
-                </a:solidFill>
-                <a:latin typeface="Consolas"/>
-              </a:rPr>
-              <a:t>err</a:t>
-            </a:r>
-            <a:r>
-              <a:rPr sz="1100">
-                <a:solidFill>
-                  <a:srgbClr val="F1F5F9"/>
-                </a:solidFill>
-                <a:latin typeface="Consolas"/>
-              </a:rPr>
-              <a:t>)</a:t>
-            </a:r>
-            <a:r>
-              <a:rPr sz="1100">
-                <a:solidFill>
-                  <a:srgbClr val="F1F5F9"/>
-                </a:solidFill>
-                <a:latin typeface="Consolas"/>
-              </a:rPr>
-              <a:t> </a:t>
-            </a:r>
-            <a:r>
-              <a:rPr sz="1100">
-                <a:solidFill>
-                  <a:srgbClr val="F1F5F9"/>
-                </a:solidFill>
-                <a:latin typeface="Consolas"/>
-              </a:rPr>
-              <a:t>{</a:t>
-            </a:r>
-          </a:p>
-          <a:p>
-            <a:pPr>
-              <a:spcAft>
-                <a:spcPts val="200"/>
-              </a:spcAft>
-            </a:pPr>
-            <a:r>
-              <a:rPr sz="1100">
-                <a:solidFill>
-                  <a:srgbClr val="F1F5F9"/>
-                </a:solidFill>
-                <a:latin typeface="Consolas"/>
-              </a:rPr>
-              <a:t>    </a:t>
-            </a:r>
-            <a:r>
-              <a:rPr sz="1100">
-                <a:solidFill>
-                  <a:srgbClr val="F1F5F9"/>
-                </a:solidFill>
-                <a:latin typeface="Consolas"/>
-              </a:rPr>
-              <a:t>showError</a:t>
-            </a:r>
-            <a:r>
-              <a:rPr sz="1100">
-                <a:solidFill>
-                  <a:srgbClr val="F1F5F9"/>
-                </a:solidFill>
-                <a:latin typeface="Consolas"/>
-              </a:rPr>
-              <a:t>(</a:t>
-            </a:r>
-            <a:r>
-              <a:rPr sz="1100">
-                <a:solidFill>
-                  <a:srgbClr val="F1F5F9"/>
-                </a:solidFill>
-                <a:latin typeface="Consolas"/>
-              </a:rPr>
-              <a:t>err</a:t>
-            </a:r>
-            <a:r>
-              <a:rPr sz="1100">
-                <a:solidFill>
-                  <a:srgbClr val="F1F5F9"/>
-                </a:solidFill>
-                <a:latin typeface="Consolas"/>
-              </a:rPr>
-              <a:t>);</a:t>
-            </a:r>
-          </a:p>
-          <a:p>
-            <a:pPr>
-              <a:spcAft>
-                <a:spcPts val="200"/>
-              </a:spcAft>
-            </a:pPr>
-            <a:r>
-              <a:rPr sz="1100">
-                <a:solidFill>
-                  <a:srgbClr val="F1F5F9"/>
-                </a:solidFill>
-                <a:latin typeface="Consolas"/>
-              </a:rPr>
-              <a:t>  </a:t>
-            </a:r>
-            <a:r>
-              <a:rPr sz="1100">
-                <a:solidFill>
-                  <a:srgbClr val="F1F5F9"/>
-                </a:solidFill>
-                <a:latin typeface="Consolas"/>
-              </a:rPr>
-              <a:t>}</a:t>
-            </a:r>
-          </a:p>
-          <a:p>
-            <a:pPr>
-              <a:spcAft>
-                <a:spcPts val="200"/>
-              </a:spcAft>
-            </a:pPr>
-            <a:r>
-              <a:rPr sz="1100">
+              <a:rPr sz="1000">
                 <a:solidFill>
                   <a:srgbClr val="F1F5F9"/>
                 </a:solidFill>

--- a/AI_Document_OCR_Scanner_Similarity_Detector_PBL.pptx
+++ b/AI_Document_OCR_Scanner_Similarity_Detector_PBL.pptx
@@ -3472,48 +3472,73 @@
       </p:sp>
       <p:sp>
         <p:nvSpPr>
-          <p:cNvPr id="8" name="TextBox 7"/>
-          <p:cNvSpPr txBox="1"/>
+          <p:cNvPr id="8" name="Rounded Rectangle 7"/>
+          <p:cNvSpPr/>
           <p:nvPr/>
         </p:nvSpPr>
         <p:spPr>
           <a:xfrm>
-            <a:off x="1097280" y="4663440"/>
-            <a:ext cx="9966960" cy="548640"/>
+            <a:off x="3346704" y="4663440"/>
+            <a:ext cx="5486400" cy="1188720"/>
+          </a:xfrm>
+          <a:prstGeom prst="roundRect">
+            <a:avLst/>
+          </a:prstGeom>
+          <a:solidFill>
+            <a:srgbClr val="FFFFFF"/>
+          </a:solidFill>
+          <a:ln w="19050">
+            <a:solidFill>
+              <a:srgbClr val="38BDF8"/>
+            </a:solidFill>
+          </a:ln>
+        </p:spPr>
+        <p:style>
+          <a:lnRef idx="1">
+            <a:schemeClr val="accent1"/>
+          </a:lnRef>
+          <a:fillRef idx="3">
+            <a:schemeClr val="accent1"/>
+          </a:fillRef>
+          <a:effectRef idx="2">
+            <a:schemeClr val="accent1"/>
+          </a:effectRef>
+          <a:fontRef idx="minor">
+            <a:schemeClr val="lt1"/>
+          </a:fontRef>
+        </p:style>
+        <p:txBody>
+          <a:bodyPr rtlCol="0" anchor="ctr"/>
+          <a:lstStyle/>
+          <a:p>
+            <a:pPr algn="ctr"/>
+          </a:p>
+        </p:txBody>
+      </p:sp>
+      <p:pic>
+        <p:nvPicPr>
+          <p:cNvPr id="9" name="Picture 8" descr="college_logo.png"/>
+          <p:cNvPicPr>
+            <a:picLocks noChangeAspect="1"/>
+          </p:cNvPicPr>
+          <p:nvPr/>
+        </p:nvPicPr>
+        <p:blipFill>
+          <a:blip r:embed="rId2"/>
+          <a:stretch>
+            <a:fillRect/>
+          </a:stretch>
+        </p:blipFill>
+        <p:spPr>
+          <a:xfrm>
+            <a:off x="3438144" y="4709160"/>
+            <a:ext cx="5303520" cy="1097280"/>
           </a:xfrm>
           <a:prstGeom prst="rect">
             <a:avLst/>
           </a:prstGeom>
-          <a:noFill/>
         </p:spPr>
-        <p:txBody>
-          <a:bodyPr wrap="none">
-            <a:spAutoFit/>
-          </a:bodyPr>
-          <a:lstStyle/>
-          <a:p>
-            <a:pPr algn="ctr"/>
-            <a:r>
-              <a:rPr b="1" sz="1700">
-                <a:solidFill>
-                  <a:srgbClr val="38BDF8"/>
-                </a:solidFill>
-                <a:latin typeface="Segoe UI"/>
-              </a:rPr>
-              <a:t>COLLEGE: </a:t>
-            </a:r>
-            <a:r>
-              <a:rPr sz="1700">
-                <a:solidFill>
-                  <a:srgbClr val="FFFFFF"/>
-                </a:solidFill>
-                <a:latin typeface="Segoe UI"/>
-              </a:rPr>
-              <a:t>B H Gardi College Of Engineering And Technology</a:t>
-            </a:r>
-          </a:p>
-        </p:txBody>
-      </p:sp>
+      </p:pic>
     </p:spTree>
   </p:cSld>
   <p:clrMapOvr>

--- a/AI_Document_OCR_Scanner_Similarity_Detector_PBL.pptx
+++ b/AI_Document_OCR_Scanner_Similarity_Detector_PBL.pptx
@@ -3115,7 +3115,7 @@
     <p:bg>
       <p:bgPr>
         <a:solidFill>
-          <a:srgbClr val="0F172A"/>
+          <a:srgbClr val="F1F5F9"/>
         </a:solidFill>
         <a:effectLst/>
       </p:bgPr>
@@ -3152,7 +3152,7 @@
             <a:pPr algn="ctr">
               <a:defRPr sz="2800" b="1">
                 <a:solidFill>
-                  <a:srgbClr val="38BDF8"/>
+                  <a:srgbClr val="4F46E5"/>
                 </a:solidFill>
                 <a:latin typeface="Segoe UI"/>
               </a:defRPr>
@@ -3168,7 +3168,7 @@
               </a:spcBef>
               <a:defRPr sz="1600">
                 <a:solidFill>
-                  <a:srgbClr val="94A3B8"/>
+                  <a:srgbClr val="475569"/>
                 </a:solidFill>
                 <a:latin typeface="Segoe UI"/>
               </a:defRPr>
@@ -3209,7 +3209,7 @@
             <a:r>
               <a:rPr sz="1800" b="1">
                 <a:solidFill>
-                  <a:srgbClr val="A3E635"/>
+                  <a:srgbClr val="4F46E5"/>
                 </a:solidFill>
                 <a:latin typeface="Segoe UI"/>
               </a:rPr>
@@ -3218,7 +3218,7 @@
             <a:r>
               <a:rPr sz="1800" b="1">
                 <a:solidFill>
-                  <a:srgbClr val="FFFFFF"/>
+                  <a:srgbClr val="0F172A"/>
                 </a:solidFill>
                 <a:latin typeface="Segoe UI"/>
               </a:rPr>
@@ -3242,7 +3242,7 @@
             <a:avLst/>
           </a:prstGeom>
           <a:solidFill>
-            <a:srgbClr val="1E293B"/>
+            <a:srgbClr val="FFFFFF"/>
           </a:solidFill>
           <a:ln w="19050">
             <a:solidFill>
@@ -3297,7 +3297,7 @@
             <a:r>
               <a:rPr b="1" sz="1700">
                 <a:solidFill>
-                  <a:srgbClr val="38BDF8"/>
+                  <a:srgbClr val="4F46E5"/>
                 </a:solidFill>
                 <a:latin typeface="Segoe UI"/>
               </a:rPr>
@@ -3306,7 +3306,7 @@
             <a:r>
               <a:rPr sz="1700">
                 <a:solidFill>
-                  <a:srgbClr val="FFFFFF"/>
+                  <a:srgbClr val="0F172A"/>
                 </a:solidFill>
                 <a:latin typeface="Segoe UI"/>
               </a:rPr>
@@ -3322,7 +3322,7 @@
             <a:r>
               <a:rPr b="1" sz="1700">
                 <a:solidFill>
-                  <a:srgbClr val="38BDF8"/>
+                  <a:srgbClr val="4F46E5"/>
                 </a:solidFill>
                 <a:latin typeface="Segoe UI"/>
               </a:rPr>
@@ -3331,7 +3331,7 @@
             <a:r>
               <a:rPr sz="1700">
                 <a:solidFill>
-                  <a:srgbClr val="FFFFFF"/>
+                  <a:srgbClr val="0F172A"/>
                 </a:solidFill>
                 <a:latin typeface="Segoe UI"/>
               </a:rPr>
@@ -3365,7 +3365,7 @@
             <a:r>
               <a:rPr b="1" sz="1700">
                 <a:solidFill>
-                  <a:srgbClr val="38BDF8"/>
+                  <a:srgbClr val="4F46E5"/>
                 </a:solidFill>
                 <a:latin typeface="Segoe UI"/>
               </a:rPr>
@@ -3374,7 +3374,7 @@
             <a:r>
               <a:rPr sz="1700">
                 <a:solidFill>
-                  <a:srgbClr val="FFFFFF"/>
+                  <a:srgbClr val="0F172A"/>
                 </a:solidFill>
                 <a:latin typeface="Segoe UI"/>
               </a:rPr>
@@ -3390,7 +3390,7 @@
             <a:r>
               <a:rPr b="1" sz="1700">
                 <a:solidFill>
-                  <a:srgbClr val="38BDF8"/>
+                  <a:srgbClr val="4F46E5"/>
                 </a:solidFill>
                 <a:latin typeface="Segoe UI"/>
               </a:rPr>
@@ -3399,7 +3399,7 @@
             <a:r>
               <a:rPr sz="1700">
                 <a:solidFill>
-                  <a:srgbClr val="FFFFFF"/>
+                  <a:srgbClr val="0F172A"/>
                 </a:solidFill>
                 <a:latin typeface="Segoe UI"/>
               </a:rPr>
@@ -3434,7 +3434,7 @@
             <a:r>
               <a:rPr b="1" sz="1700">
                 <a:solidFill>
-                  <a:srgbClr val="38BDF8"/>
+                  <a:srgbClr val="4F46E5"/>
                 </a:solidFill>
                 <a:latin typeface="Segoe UI"/>
               </a:rPr>
@@ -3443,7 +3443,7 @@
             <a:r>
               <a:rPr sz="1700">
                 <a:solidFill>
-                  <a:srgbClr val="FFFFFF"/>
+                  <a:srgbClr val="0F172A"/>
                 </a:solidFill>
                 <a:latin typeface="Segoe UI"/>
               </a:rPr>
@@ -3452,7 +3452,7 @@
             <a:r>
               <a:rPr b="1" sz="1700">
                 <a:solidFill>
-                  <a:srgbClr val="38BDF8"/>
+                  <a:srgbClr val="4F46E5"/>
                 </a:solidFill>
                 <a:latin typeface="Segoe UI"/>
               </a:rPr>
@@ -3461,63 +3461,18 @@
             <a:r>
               <a:rPr sz="1700">
                 <a:solidFill>
-                  <a:srgbClr val="FFFFFF"/>
+                  <a:srgbClr val="0F172A"/>
                 </a:solidFill>
                 <a:latin typeface="Segoe UI"/>
               </a:rPr>
               <a:t>5th</a:t>
             </a:r>
-          </a:p>
-        </p:txBody>
-      </p:sp>
-      <p:sp>
-        <p:nvSpPr>
-          <p:cNvPr id="8" name="Rounded Rectangle 7"/>
-          <p:cNvSpPr/>
-          <p:nvPr/>
-        </p:nvSpPr>
-        <p:spPr>
-          <a:xfrm>
-            <a:off x="3346704" y="4663440"/>
-            <a:ext cx="5486400" cy="1188720"/>
-          </a:xfrm>
-          <a:prstGeom prst="roundRect">
-            <a:avLst/>
-          </a:prstGeom>
-          <a:solidFill>
-            <a:srgbClr val="FFFFFF"/>
-          </a:solidFill>
-          <a:ln w="19050">
-            <a:solidFill>
-              <a:srgbClr val="38BDF8"/>
-            </a:solidFill>
-          </a:ln>
-        </p:spPr>
-        <p:style>
-          <a:lnRef idx="1">
-            <a:schemeClr val="accent1"/>
-          </a:lnRef>
-          <a:fillRef idx="3">
-            <a:schemeClr val="accent1"/>
-          </a:fillRef>
-          <a:effectRef idx="2">
-            <a:schemeClr val="accent1"/>
-          </a:effectRef>
-          <a:fontRef idx="minor">
-            <a:schemeClr val="lt1"/>
-          </a:fontRef>
-        </p:style>
-        <p:txBody>
-          <a:bodyPr rtlCol="0" anchor="ctr"/>
-          <a:lstStyle/>
-          <a:p>
-            <a:pPr algn="ctr"/>
           </a:p>
         </p:txBody>
       </p:sp>
       <p:pic>
         <p:nvPicPr>
-          <p:cNvPr id="9" name="Picture 8" descr="college_logo.png"/>
+          <p:cNvPr id="8" name="Picture 7" descr="college_logo.png"/>
           <p:cNvPicPr>
             <a:picLocks noChangeAspect="1"/>
           </p:cNvPicPr>
@@ -3531,7 +3486,7 @@
         </p:blipFill>
         <p:spPr>
           <a:xfrm>
-            <a:off x="3438144" y="4709160"/>
+            <a:off x="3438144" y="4663440"/>
             <a:ext cx="5303520" cy="1097280"/>
           </a:xfrm>
           <a:prstGeom prst="rect">
@@ -3553,7 +3508,7 @@
     <p:bg>
       <p:bgPr>
         <a:solidFill>
-          <a:srgbClr val="0F172A"/>
+          <a:srgbClr val="F1F5F9"/>
         </a:solidFill>
         <a:effectLst/>
       </p:bgPr>
@@ -3590,7 +3545,7 @@
             <a:pPr>
               <a:defRPr sz="3200" b="1">
                 <a:solidFill>
-                  <a:srgbClr val="38BDF8"/>
+                  <a:srgbClr val="4F46E5"/>
                 </a:solidFill>
                 <a:latin typeface="Segoe UI"/>
               </a:defRPr>
@@ -3629,7 +3584,7 @@
               </a:spcAft>
               <a:defRPr sz="1600">
                 <a:solidFill>
-                  <a:srgbClr val="94A3B8"/>
+                  <a:srgbClr val="475569"/>
                 </a:solidFill>
                 <a:latin typeface="Segoe UI"/>
               </a:defRPr>
@@ -3645,7 +3600,7 @@
               </a:spcAft>
               <a:defRPr sz="1600">
                 <a:solidFill>
-                  <a:srgbClr val="94A3B8"/>
+                  <a:srgbClr val="475569"/>
                 </a:solidFill>
                 <a:latin typeface="Segoe UI"/>
               </a:defRPr>
@@ -3661,7 +3616,7 @@
               </a:spcAft>
               <a:defRPr sz="1600">
                 <a:solidFill>
-                  <a:srgbClr val="94A3B8"/>
+                  <a:srgbClr val="475569"/>
                 </a:solidFill>
                 <a:latin typeface="Segoe UI"/>
               </a:defRPr>
@@ -3677,7 +3632,7 @@
               </a:spcAft>
               <a:defRPr sz="1600">
                 <a:solidFill>
-                  <a:srgbClr val="94A3B8"/>
+                  <a:srgbClr val="475569"/>
                 </a:solidFill>
                 <a:latin typeface="Segoe UI"/>
               </a:defRPr>
@@ -3693,7 +3648,7 @@
               </a:spcAft>
               <a:defRPr sz="1600">
                 <a:solidFill>
-                  <a:srgbClr val="94A3B8"/>
+                  <a:srgbClr val="475569"/>
                 </a:solidFill>
                 <a:latin typeface="Segoe UI"/>
               </a:defRPr>
@@ -3718,7 +3673,7 @@
     <p:bg>
       <p:bgPr>
         <a:solidFill>
-          <a:srgbClr val="0F172A"/>
+          <a:srgbClr val="F1F5F9"/>
         </a:solidFill>
         <a:effectLst/>
       </p:bgPr>
@@ -3755,7 +3710,7 @@
             <a:pPr>
               <a:defRPr sz="3200" b="1">
                 <a:solidFill>
-                  <a:srgbClr val="38BDF8"/>
+                  <a:srgbClr val="4F46E5"/>
                 </a:solidFill>
                 <a:latin typeface="Segoe UI"/>
               </a:defRPr>
@@ -3794,7 +3749,7 @@
               </a:spcAft>
               <a:defRPr sz="1600">
                 <a:solidFill>
-                  <a:srgbClr val="94A3B8"/>
+                  <a:srgbClr val="475569"/>
                 </a:solidFill>
                 <a:latin typeface="Segoe UI"/>
               </a:defRPr>
@@ -3810,7 +3765,7 @@
               </a:spcAft>
               <a:defRPr sz="1600">
                 <a:solidFill>
-                  <a:srgbClr val="94A3B8"/>
+                  <a:srgbClr val="475569"/>
                 </a:solidFill>
                 <a:latin typeface="Segoe UI"/>
               </a:defRPr>
@@ -3826,7 +3781,7 @@
               </a:spcAft>
               <a:defRPr sz="1600">
                 <a:solidFill>
-                  <a:srgbClr val="94A3B8"/>
+                  <a:srgbClr val="475569"/>
                 </a:solidFill>
                 <a:latin typeface="Segoe UI"/>
               </a:defRPr>
@@ -3842,7 +3797,7 @@
               </a:spcAft>
               <a:defRPr sz="1600">
                 <a:solidFill>
-                  <a:srgbClr val="94A3B8"/>
+                  <a:srgbClr val="475569"/>
                 </a:solidFill>
                 <a:latin typeface="Segoe UI"/>
               </a:defRPr>
@@ -3867,7 +3822,7 @@
     <p:bg>
       <p:bgPr>
         <a:solidFill>
-          <a:srgbClr val="0F172A"/>
+          <a:srgbClr val="F1F5F9"/>
         </a:solidFill>
         <a:effectLst/>
       </p:bgPr>
@@ -3904,7 +3859,7 @@
             <a:pPr>
               <a:defRPr sz="3200" b="1">
                 <a:solidFill>
-                  <a:srgbClr val="38BDF8"/>
+                  <a:srgbClr val="4F46E5"/>
                 </a:solidFill>
                 <a:latin typeface="Segoe UI"/>
               </a:defRPr>
@@ -3943,7 +3898,7 @@
               </a:spcAft>
               <a:defRPr sz="1600">
                 <a:solidFill>
-                  <a:srgbClr val="94A3B8"/>
+                  <a:srgbClr val="475569"/>
                 </a:solidFill>
                 <a:latin typeface="Segoe UI"/>
               </a:defRPr>
@@ -3959,7 +3914,7 @@
               </a:spcAft>
               <a:defRPr sz="1600">
                 <a:solidFill>
-                  <a:srgbClr val="94A3B8"/>
+                  <a:srgbClr val="475569"/>
                 </a:solidFill>
                 <a:latin typeface="Segoe UI"/>
               </a:defRPr>
@@ -3975,7 +3930,7 @@
               </a:spcAft>
               <a:defRPr sz="1600">
                 <a:solidFill>
-                  <a:srgbClr val="94A3B8"/>
+                  <a:srgbClr val="475569"/>
                 </a:solidFill>
                 <a:latin typeface="Segoe UI"/>
               </a:defRPr>
@@ -3991,7 +3946,7 @@
               </a:spcAft>
               <a:defRPr sz="1600">
                 <a:solidFill>
-                  <a:srgbClr val="94A3B8"/>
+                  <a:srgbClr val="475569"/>
                 </a:solidFill>
                 <a:latin typeface="Segoe UI"/>
               </a:defRPr>
@@ -4007,7 +3962,7 @@
               </a:spcAft>
               <a:defRPr sz="1600">
                 <a:solidFill>
-                  <a:srgbClr val="94A3B8"/>
+                  <a:srgbClr val="475569"/>
                 </a:solidFill>
                 <a:latin typeface="Segoe UI"/>
               </a:defRPr>
@@ -4032,7 +3987,7 @@
     <p:bg>
       <p:bgPr>
         <a:solidFill>
-          <a:srgbClr val="0F172A"/>
+          <a:srgbClr val="F1F5F9"/>
         </a:solidFill>
         <a:effectLst/>
       </p:bgPr>
@@ -4069,7 +4024,7 @@
             <a:pPr>
               <a:defRPr sz="3200" b="1">
                 <a:solidFill>
-                  <a:srgbClr val="38BDF8"/>
+                  <a:srgbClr val="4F46E5"/>
                 </a:solidFill>
                 <a:latin typeface="Segoe UI"/>
               </a:defRPr>
@@ -4108,7 +4063,7 @@
               </a:spcAft>
               <a:defRPr sz="1600">
                 <a:solidFill>
-                  <a:srgbClr val="94A3B8"/>
+                  <a:srgbClr val="475569"/>
                 </a:solidFill>
                 <a:latin typeface="Segoe UI"/>
               </a:defRPr>
@@ -4124,7 +4079,7 @@
               </a:spcAft>
               <a:defRPr sz="1600">
                 <a:solidFill>
-                  <a:srgbClr val="94A3B8"/>
+                  <a:srgbClr val="475569"/>
                 </a:solidFill>
                 <a:latin typeface="Segoe UI"/>
               </a:defRPr>
@@ -4140,7 +4095,7 @@
               </a:spcAft>
               <a:defRPr sz="1600">
                 <a:solidFill>
-                  <a:srgbClr val="94A3B8"/>
+                  <a:srgbClr val="475569"/>
                 </a:solidFill>
                 <a:latin typeface="Segoe UI"/>
               </a:defRPr>
@@ -4156,7 +4111,7 @@
               </a:spcAft>
               <a:defRPr sz="1600">
                 <a:solidFill>
-                  <a:srgbClr val="94A3B8"/>
+                  <a:srgbClr val="475569"/>
                 </a:solidFill>
                 <a:latin typeface="Segoe UI"/>
               </a:defRPr>
@@ -4172,7 +4127,7 @@
               </a:spcAft>
               <a:defRPr sz="1600">
                 <a:solidFill>
-                  <a:srgbClr val="94A3B8"/>
+                  <a:srgbClr val="475569"/>
                 </a:solidFill>
                 <a:latin typeface="Segoe UI"/>
               </a:defRPr>
@@ -4197,7 +4152,7 @@
     <p:bg>
       <p:bgPr>
         <a:solidFill>
-          <a:srgbClr val="0F172A"/>
+          <a:srgbClr val="F1F5F9"/>
         </a:solidFill>
         <a:effectLst/>
       </p:bgPr>
@@ -4234,7 +4189,7 @@
             <a:pPr>
               <a:defRPr sz="3200" b="1">
                 <a:solidFill>
-                  <a:srgbClr val="38BDF8"/>
+                  <a:srgbClr val="4F46E5"/>
                 </a:solidFill>
                 <a:latin typeface="Segoe UI"/>
               </a:defRPr>
@@ -4273,7 +4228,7 @@
               </a:spcAft>
               <a:defRPr sz="1600">
                 <a:solidFill>
-                  <a:srgbClr val="94A3B8"/>
+                  <a:srgbClr val="475569"/>
                 </a:solidFill>
                 <a:latin typeface="Segoe UI"/>
               </a:defRPr>
@@ -4289,7 +4244,7 @@
               </a:spcAft>
               <a:defRPr sz="1600">
                 <a:solidFill>
-                  <a:srgbClr val="94A3B8"/>
+                  <a:srgbClr val="475569"/>
                 </a:solidFill>
                 <a:latin typeface="Segoe UI"/>
               </a:defRPr>
@@ -4305,7 +4260,7 @@
               </a:spcAft>
               <a:defRPr sz="1600">
                 <a:solidFill>
-                  <a:srgbClr val="94A3B8"/>
+                  <a:srgbClr val="475569"/>
                 </a:solidFill>
                 <a:latin typeface="Segoe UI"/>
               </a:defRPr>
@@ -4321,7 +4276,7 @@
               </a:spcAft>
               <a:defRPr sz="1600">
                 <a:solidFill>
-                  <a:srgbClr val="94A3B8"/>
+                  <a:srgbClr val="475569"/>
                 </a:solidFill>
                 <a:latin typeface="Segoe UI"/>
               </a:defRPr>
@@ -4337,7 +4292,7 @@
               </a:spcAft>
               <a:defRPr sz="1600">
                 <a:solidFill>
-                  <a:srgbClr val="94A3B8"/>
+                  <a:srgbClr val="475569"/>
                 </a:solidFill>
                 <a:latin typeface="Segoe UI"/>
               </a:defRPr>
@@ -4386,7 +4341,7 @@
     <p:bg>
       <p:bgPr>
         <a:solidFill>
-          <a:srgbClr val="0F172A"/>
+          <a:srgbClr val="F1F5F9"/>
         </a:solidFill>
         <a:effectLst/>
       </p:bgPr>
@@ -4423,7 +4378,7 @@
             <a:pPr>
               <a:defRPr sz="3200" b="1">
                 <a:solidFill>
-                  <a:srgbClr val="38BDF8"/>
+                  <a:srgbClr val="4F46E5"/>
                 </a:solidFill>
                 <a:latin typeface="Segoe UI"/>
               </a:defRPr>
@@ -4462,7 +4417,7 @@
               </a:spcAft>
               <a:defRPr sz="1600">
                 <a:solidFill>
-                  <a:srgbClr val="94A3B8"/>
+                  <a:srgbClr val="475569"/>
                 </a:solidFill>
                 <a:latin typeface="Segoe UI"/>
               </a:defRPr>
@@ -4478,7 +4433,7 @@
               </a:spcAft>
               <a:defRPr sz="1600">
                 <a:solidFill>
-                  <a:srgbClr val="94A3B8"/>
+                  <a:srgbClr val="475569"/>
                 </a:solidFill>
                 <a:latin typeface="Segoe UI"/>
               </a:defRPr>
@@ -4494,7 +4449,7 @@
               </a:spcAft>
               <a:defRPr sz="1600">
                 <a:solidFill>
-                  <a:srgbClr val="94A3B8"/>
+                  <a:srgbClr val="475569"/>
                 </a:solidFill>
                 <a:latin typeface="Segoe UI"/>
               </a:defRPr>
@@ -4510,7 +4465,7 @@
               </a:spcAft>
               <a:defRPr sz="1600">
                 <a:solidFill>
-                  <a:srgbClr val="94A3B8"/>
+                  <a:srgbClr val="475569"/>
                 </a:solidFill>
                 <a:latin typeface="Segoe UI"/>
               </a:defRPr>
@@ -4535,7 +4490,7 @@
     <p:bg>
       <p:bgPr>
         <a:solidFill>
-          <a:srgbClr val="0F172A"/>
+          <a:srgbClr val="F1F5F9"/>
         </a:solidFill>
         <a:effectLst/>
       </p:bgPr>
@@ -4572,7 +4527,7 @@
             <a:pPr>
               <a:defRPr sz="3200" b="1">
                 <a:solidFill>
-                  <a:srgbClr val="38BDF8"/>
+                  <a:srgbClr val="4F46E5"/>
                 </a:solidFill>
                 <a:latin typeface="Segoe UI"/>
               </a:defRPr>
@@ -4611,7 +4566,7 @@
               </a:spcAft>
               <a:defRPr sz="1600">
                 <a:solidFill>
-                  <a:srgbClr val="94A3B8"/>
+                  <a:srgbClr val="475569"/>
                 </a:solidFill>
                 <a:latin typeface="Segoe UI"/>
               </a:defRPr>
@@ -4627,7 +4582,7 @@
               </a:spcAft>
               <a:defRPr sz="1600">
                 <a:solidFill>
-                  <a:srgbClr val="94A3B8"/>
+                  <a:srgbClr val="475569"/>
                 </a:solidFill>
                 <a:latin typeface="Segoe UI"/>
               </a:defRPr>
@@ -4643,7 +4598,7 @@
               </a:spcAft>
               <a:defRPr sz="1600">
                 <a:solidFill>
-                  <a:srgbClr val="94A3B8"/>
+                  <a:srgbClr val="475569"/>
                 </a:solidFill>
                 <a:latin typeface="Segoe UI"/>
               </a:defRPr>
@@ -4659,7 +4614,7 @@
               </a:spcAft>
               <a:defRPr sz="1600">
                 <a:solidFill>
-                  <a:srgbClr val="94A3B8"/>
+                  <a:srgbClr val="475569"/>
                 </a:solidFill>
                 <a:latin typeface="Segoe UI"/>
               </a:defRPr>
@@ -4684,7 +4639,7 @@
     <p:bg>
       <p:bgPr>
         <a:solidFill>
-          <a:srgbClr val="0F172A"/>
+          <a:srgbClr val="F1F5F9"/>
         </a:solidFill>
         <a:effectLst/>
       </p:bgPr>
@@ -4721,7 +4676,7 @@
             <a:pPr>
               <a:defRPr sz="3200" b="1">
                 <a:solidFill>
-                  <a:srgbClr val="38BDF8"/>
+                  <a:srgbClr val="4F46E5"/>
                 </a:solidFill>
                 <a:latin typeface="Segoe UI"/>
               </a:defRPr>
@@ -4760,7 +4715,7 @@
               </a:spcAft>
               <a:defRPr sz="1600">
                 <a:solidFill>
-                  <a:srgbClr val="94A3B8"/>
+                  <a:srgbClr val="475569"/>
                 </a:solidFill>
                 <a:latin typeface="Segoe UI"/>
               </a:defRPr>
@@ -4776,7 +4731,7 @@
               </a:spcAft>
               <a:defRPr sz="1600">
                 <a:solidFill>
-                  <a:srgbClr val="94A3B8"/>
+                  <a:srgbClr val="475569"/>
                 </a:solidFill>
                 <a:latin typeface="Segoe UI"/>
               </a:defRPr>
@@ -4792,7 +4747,7 @@
               </a:spcAft>
               <a:defRPr sz="1600">
                 <a:solidFill>
-                  <a:srgbClr val="94A3B8"/>
+                  <a:srgbClr val="475569"/>
                 </a:solidFill>
                 <a:latin typeface="Segoe UI"/>
               </a:defRPr>
@@ -4808,7 +4763,7 @@
               </a:spcAft>
               <a:defRPr sz="1600">
                 <a:solidFill>
-                  <a:srgbClr val="94A3B8"/>
+                  <a:srgbClr val="475569"/>
                 </a:solidFill>
                 <a:latin typeface="Segoe UI"/>
               </a:defRPr>
@@ -4833,7 +4788,7 @@
     <p:bg>
       <p:bgPr>
         <a:solidFill>
-          <a:srgbClr val="0F172A"/>
+          <a:srgbClr val="F1F5F9"/>
         </a:solidFill>
         <a:effectLst/>
       </p:bgPr>
@@ -4870,7 +4825,7 @@
             <a:pPr>
               <a:defRPr sz="3200" b="1">
                 <a:solidFill>
-                  <a:srgbClr val="38BDF8"/>
+                  <a:srgbClr val="4F46E5"/>
                 </a:solidFill>
                 <a:latin typeface="Segoe UI"/>
               </a:defRPr>
@@ -4909,7 +4864,7 @@
               </a:spcAft>
               <a:defRPr sz="1600">
                 <a:solidFill>
-                  <a:srgbClr val="94A3B8"/>
+                  <a:srgbClr val="475569"/>
                 </a:solidFill>
                 <a:latin typeface="Segoe UI"/>
               </a:defRPr>
@@ -4925,7 +4880,7 @@
               </a:spcAft>
               <a:defRPr sz="1600">
                 <a:solidFill>
-                  <a:srgbClr val="94A3B8"/>
+                  <a:srgbClr val="475569"/>
                 </a:solidFill>
                 <a:latin typeface="Segoe UI"/>
               </a:defRPr>
@@ -4941,7 +4896,7 @@
               </a:spcAft>
               <a:defRPr sz="1600">
                 <a:solidFill>
-                  <a:srgbClr val="94A3B8"/>
+                  <a:srgbClr val="475569"/>
                 </a:solidFill>
                 <a:latin typeface="Segoe UI"/>
               </a:defRPr>
@@ -4957,7 +4912,7 @@
               </a:spcAft>
               <a:defRPr sz="1600">
                 <a:solidFill>
-                  <a:srgbClr val="94A3B8"/>
+                  <a:srgbClr val="475569"/>
                 </a:solidFill>
                 <a:latin typeface="Segoe UI"/>
               </a:defRPr>
@@ -4982,7 +4937,7 @@
     <p:bg>
       <p:bgPr>
         <a:solidFill>
-          <a:srgbClr val="0F172A"/>
+          <a:srgbClr val="F1F5F9"/>
         </a:solidFill>
         <a:effectLst/>
       </p:bgPr>
@@ -5019,7 +4974,7 @@
             <a:pPr>
               <a:defRPr sz="3200" b="1">
                 <a:solidFill>
-                  <a:srgbClr val="38BDF8"/>
+                  <a:srgbClr val="4F46E5"/>
                 </a:solidFill>
                 <a:latin typeface="Segoe UI"/>
               </a:defRPr>
@@ -5058,7 +5013,7 @@
               </a:spcAft>
               <a:defRPr sz="1600">
                 <a:solidFill>
-                  <a:srgbClr val="94A3B8"/>
+                  <a:srgbClr val="475569"/>
                 </a:solidFill>
                 <a:latin typeface="Segoe UI"/>
               </a:defRPr>
@@ -5074,7 +5029,7 @@
               </a:spcAft>
               <a:defRPr sz="1600">
                 <a:solidFill>
-                  <a:srgbClr val="94A3B8"/>
+                  <a:srgbClr val="475569"/>
                 </a:solidFill>
                 <a:latin typeface="Segoe UI"/>
               </a:defRPr>
@@ -5090,7 +5045,7 @@
               </a:spcAft>
               <a:defRPr sz="1600">
                 <a:solidFill>
-                  <a:srgbClr val="94A3B8"/>
+                  <a:srgbClr val="475569"/>
                 </a:solidFill>
                 <a:latin typeface="Segoe UI"/>
               </a:defRPr>
@@ -5115,7 +5070,7 @@
     <p:bg>
       <p:bgPr>
         <a:solidFill>
-          <a:srgbClr val="0F172A"/>
+          <a:srgbClr val="F1F5F9"/>
         </a:solidFill>
         <a:effectLst/>
       </p:bgPr>
@@ -5152,7 +5107,7 @@
             <a:pPr>
               <a:defRPr sz="3200" b="1">
                 <a:solidFill>
-                  <a:srgbClr val="38BDF8"/>
+                  <a:srgbClr val="4F46E5"/>
                 </a:solidFill>
                 <a:latin typeface="Segoe UI"/>
               </a:defRPr>
@@ -5191,7 +5146,7 @@
               </a:spcAft>
               <a:defRPr sz="1600">
                 <a:solidFill>
-                  <a:srgbClr val="94A3B8"/>
+                  <a:srgbClr val="475569"/>
                 </a:solidFill>
                 <a:latin typeface="Segoe UI"/>
               </a:defRPr>
@@ -5207,7 +5162,7 @@
               </a:spcAft>
               <a:defRPr sz="1600">
                 <a:solidFill>
-                  <a:srgbClr val="94A3B8"/>
+                  <a:srgbClr val="475569"/>
                 </a:solidFill>
                 <a:latin typeface="Segoe UI"/>
               </a:defRPr>
@@ -5223,7 +5178,7 @@
               </a:spcAft>
               <a:defRPr sz="1600">
                 <a:solidFill>
-                  <a:srgbClr val="94A3B8"/>
+                  <a:srgbClr val="475569"/>
                 </a:solidFill>
                 <a:latin typeface="Segoe UI"/>
               </a:defRPr>
@@ -5239,7 +5194,7 @@
               </a:spcAft>
               <a:defRPr sz="1600">
                 <a:solidFill>
-                  <a:srgbClr val="94A3B8"/>
+                  <a:srgbClr val="475569"/>
                 </a:solidFill>
                 <a:latin typeface="Segoe UI"/>
               </a:defRPr>
@@ -5255,7 +5210,7 @@
               </a:spcAft>
               <a:defRPr sz="1600">
                 <a:solidFill>
-                  <a:srgbClr val="94A3B8"/>
+                  <a:srgbClr val="475569"/>
                 </a:solidFill>
                 <a:latin typeface="Segoe UI"/>
               </a:defRPr>
@@ -5280,7 +5235,7 @@
     <p:bg>
       <p:bgPr>
         <a:solidFill>
-          <a:srgbClr val="0F172A"/>
+          <a:srgbClr val="F1F5F9"/>
         </a:solidFill>
         <a:effectLst/>
       </p:bgPr>
@@ -5317,7 +5272,7 @@
             <a:pPr>
               <a:defRPr sz="3200" b="1">
                 <a:solidFill>
-                  <a:srgbClr val="38BDF8"/>
+                  <a:srgbClr val="4F46E5"/>
                 </a:solidFill>
                 <a:latin typeface="Segoe UI"/>
               </a:defRPr>
@@ -5356,7 +5311,7 @@
               </a:spcAft>
               <a:defRPr sz="1600">
                 <a:solidFill>
-                  <a:srgbClr val="94A3B8"/>
+                  <a:srgbClr val="475569"/>
                 </a:solidFill>
                 <a:latin typeface="Segoe UI"/>
               </a:defRPr>
@@ -5372,7 +5327,7 @@
               </a:spcAft>
               <a:defRPr sz="1600">
                 <a:solidFill>
-                  <a:srgbClr val="94A3B8"/>
+                  <a:srgbClr val="475569"/>
                 </a:solidFill>
                 <a:latin typeface="Segoe UI"/>
               </a:defRPr>
@@ -5388,7 +5343,7 @@
               </a:spcAft>
               <a:defRPr sz="1600">
                 <a:solidFill>
-                  <a:srgbClr val="94A3B8"/>
+                  <a:srgbClr val="475569"/>
                 </a:solidFill>
                 <a:latin typeface="Segoe UI"/>
               </a:defRPr>
@@ -5404,7 +5359,7 @@
               </a:spcAft>
               <a:defRPr sz="1600">
                 <a:solidFill>
-                  <a:srgbClr val="94A3B8"/>
+                  <a:srgbClr val="475569"/>
                 </a:solidFill>
                 <a:latin typeface="Segoe UI"/>
               </a:defRPr>
@@ -5429,7 +5384,7 @@
     <p:bg>
       <p:bgPr>
         <a:solidFill>
-          <a:srgbClr val="0F172A"/>
+          <a:srgbClr val="F1F5F9"/>
         </a:solidFill>
         <a:effectLst/>
       </p:bgPr>
@@ -5466,7 +5421,7 @@
             <a:pPr>
               <a:defRPr sz="3200" b="1">
                 <a:solidFill>
-                  <a:srgbClr val="38BDF8"/>
+                  <a:srgbClr val="4F46E5"/>
                 </a:solidFill>
                 <a:latin typeface="Segoe UI"/>
               </a:defRPr>
@@ -5505,7 +5460,7 @@
               </a:spcAft>
               <a:defRPr sz="1600">
                 <a:solidFill>
-                  <a:srgbClr val="94A3B8"/>
+                  <a:srgbClr val="475569"/>
                 </a:solidFill>
                 <a:latin typeface="Segoe UI"/>
               </a:defRPr>
@@ -5521,7 +5476,7 @@
               </a:spcAft>
               <a:defRPr sz="1800">
                 <a:solidFill>
-                  <a:srgbClr val="94A3B8"/>
+                  <a:srgbClr val="475569"/>
                 </a:solidFill>
                 <a:latin typeface="Segoe UI"/>
               </a:defRPr>
@@ -5537,7 +5492,7 @@
               </a:spcAft>
               <a:defRPr sz="1600">
                 <a:solidFill>
-                  <a:srgbClr val="94A3B8"/>
+                  <a:srgbClr val="475569"/>
                 </a:solidFill>
                 <a:latin typeface="Segoe UI"/>
               </a:defRPr>
@@ -5553,7 +5508,7 @@
               </a:spcAft>
               <a:defRPr sz="1600">
                 <a:solidFill>
-                  <a:srgbClr val="94A3B8"/>
+                  <a:srgbClr val="475569"/>
                 </a:solidFill>
                 <a:latin typeface="Segoe UI"/>
               </a:defRPr>
@@ -5569,7 +5524,7 @@
               </a:spcAft>
               <a:defRPr sz="1600">
                 <a:solidFill>
-                  <a:srgbClr val="94A3B8"/>
+                  <a:srgbClr val="475569"/>
                 </a:solidFill>
                 <a:latin typeface="Segoe UI"/>
               </a:defRPr>
@@ -6910,7 +6865,7 @@
     <p:bg>
       <p:bgPr>
         <a:solidFill>
-          <a:srgbClr val="0F172A"/>
+          <a:srgbClr val="F1F5F9"/>
         </a:solidFill>
         <a:effectLst/>
       </p:bgPr>
@@ -6947,7 +6902,7 @@
             <a:pPr>
               <a:defRPr sz="3200" b="1">
                 <a:solidFill>
-                  <a:srgbClr val="38BDF8"/>
+                  <a:srgbClr val="4F46E5"/>
                 </a:solidFill>
                 <a:latin typeface="Segoe UI"/>
               </a:defRPr>
@@ -6986,7 +6941,7 @@
               </a:spcAft>
               <a:defRPr sz="1600">
                 <a:solidFill>
-                  <a:srgbClr val="94A3B8"/>
+                  <a:srgbClr val="475569"/>
                 </a:solidFill>
                 <a:latin typeface="Segoe UI"/>
               </a:defRPr>
@@ -7002,7 +6957,7 @@
               </a:spcAft>
               <a:defRPr sz="1800">
                 <a:solidFill>
-                  <a:srgbClr val="94A3B8"/>
+                  <a:srgbClr val="475569"/>
                 </a:solidFill>
                 <a:latin typeface="Segoe UI"/>
               </a:defRPr>
@@ -7018,7 +6973,7 @@
               </a:spcAft>
               <a:defRPr sz="1600">
                 <a:solidFill>
-                  <a:srgbClr val="94A3B8"/>
+                  <a:srgbClr val="475569"/>
                 </a:solidFill>
                 <a:latin typeface="Segoe UI"/>
               </a:defRPr>
@@ -7034,7 +6989,7 @@
               </a:spcAft>
               <a:defRPr sz="1600">
                 <a:solidFill>
-                  <a:srgbClr val="94A3B8"/>
+                  <a:srgbClr val="475569"/>
                 </a:solidFill>
                 <a:latin typeface="Segoe UI"/>
               </a:defRPr>
@@ -7050,7 +7005,7 @@
               </a:spcAft>
               <a:defRPr sz="1600">
                 <a:solidFill>
-                  <a:srgbClr val="94A3B8"/>
+                  <a:srgbClr val="475569"/>
                 </a:solidFill>
                 <a:latin typeface="Segoe UI"/>
               </a:defRPr>
@@ -7066,7 +7021,7 @@
               </a:spcAft>
               <a:defRPr sz="1600">
                 <a:solidFill>
-                  <a:srgbClr val="94A3B8"/>
+                  <a:srgbClr val="475569"/>
                 </a:solidFill>
                 <a:latin typeface="Segoe UI"/>
               </a:defRPr>
@@ -8718,7 +8673,7 @@
     <p:bg>
       <p:bgPr>
         <a:solidFill>
-          <a:srgbClr val="0F172A"/>
+          <a:srgbClr val="F1F5F9"/>
         </a:solidFill>
         <a:effectLst/>
       </p:bgPr>
@@ -8755,7 +8710,7 @@
             <a:pPr>
               <a:defRPr sz="3200" b="1">
                 <a:solidFill>
-                  <a:srgbClr val="38BDF8"/>
+                  <a:srgbClr val="4F46E5"/>
                 </a:solidFill>
                 <a:latin typeface="Segoe UI"/>
               </a:defRPr>
@@ -8794,7 +8749,7 @@
               </a:spcAft>
               <a:defRPr sz="1600">
                 <a:solidFill>
-                  <a:srgbClr val="94A3B8"/>
+                  <a:srgbClr val="475569"/>
                 </a:solidFill>
                 <a:latin typeface="Segoe UI"/>
               </a:defRPr>
@@ -8810,7 +8765,7 @@
               </a:spcAft>
               <a:defRPr sz="1600">
                 <a:solidFill>
-                  <a:srgbClr val="94A3B8"/>
+                  <a:srgbClr val="475569"/>
                 </a:solidFill>
                 <a:latin typeface="Segoe UI"/>
               </a:defRPr>
@@ -8826,7 +8781,7 @@
               </a:spcAft>
               <a:defRPr sz="1600">
                 <a:solidFill>
-                  <a:srgbClr val="94A3B8"/>
+                  <a:srgbClr val="475569"/>
                 </a:solidFill>
                 <a:latin typeface="Segoe UI"/>
               </a:defRPr>
@@ -8842,7 +8797,7 @@
               </a:spcAft>
               <a:defRPr sz="1600">
                 <a:solidFill>
-                  <a:srgbClr val="94A3B8"/>
+                  <a:srgbClr val="475569"/>
                 </a:solidFill>
                 <a:latin typeface="Segoe UI"/>
               </a:defRPr>
@@ -8858,7 +8813,7 @@
               </a:spcAft>
               <a:defRPr sz="1600">
                 <a:solidFill>
-                  <a:srgbClr val="94A3B8"/>
+                  <a:srgbClr val="475569"/>
                 </a:solidFill>
                 <a:latin typeface="Segoe UI"/>
               </a:defRPr>
@@ -8874,7 +8829,7 @@
               </a:spcAft>
               <a:defRPr sz="1600">
                 <a:solidFill>
-                  <a:srgbClr val="94A3B8"/>
+                  <a:srgbClr val="475569"/>
                 </a:solidFill>
                 <a:latin typeface="Segoe UI"/>
               </a:defRPr>
@@ -8890,7 +8845,7 @@
               </a:spcAft>
               <a:defRPr sz="1600">
                 <a:solidFill>
-                  <a:srgbClr val="94A3B8"/>
+                  <a:srgbClr val="475569"/>
                 </a:solidFill>
                 <a:latin typeface="Segoe UI"/>
               </a:defRPr>
@@ -8915,7 +8870,7 @@
     <p:bg>
       <p:bgPr>
         <a:solidFill>
-          <a:srgbClr val="0F172A"/>
+          <a:srgbClr val="F1F5F9"/>
         </a:solidFill>
         <a:effectLst/>
       </p:bgPr>
@@ -8952,7 +8907,7 @@
             <a:pPr>
               <a:defRPr sz="3200" b="1">
                 <a:solidFill>
-                  <a:srgbClr val="38BDF8"/>
+                  <a:srgbClr val="4F46E5"/>
                 </a:solidFill>
                 <a:latin typeface="Segoe UI"/>
               </a:defRPr>
@@ -8991,7 +8946,7 @@
               </a:spcAft>
               <a:defRPr sz="1600">
                 <a:solidFill>
-                  <a:srgbClr val="94A3B8"/>
+                  <a:srgbClr val="475569"/>
                 </a:solidFill>
                 <a:latin typeface="Segoe UI"/>
               </a:defRPr>
@@ -9007,7 +8962,7 @@
               </a:spcAft>
               <a:defRPr sz="1600">
                 <a:solidFill>
-                  <a:srgbClr val="94A3B8"/>
+                  <a:srgbClr val="475569"/>
                 </a:solidFill>
                 <a:latin typeface="Segoe UI"/>
               </a:defRPr>
@@ -9023,7 +8978,7 @@
               </a:spcAft>
               <a:defRPr sz="1600">
                 <a:solidFill>
-                  <a:srgbClr val="94A3B8"/>
+                  <a:srgbClr val="475569"/>
                 </a:solidFill>
                 <a:latin typeface="Segoe UI"/>
               </a:defRPr>
@@ -9039,7 +8994,7 @@
               </a:spcAft>
               <a:defRPr sz="1600">
                 <a:solidFill>
-                  <a:srgbClr val="94A3B8"/>
+                  <a:srgbClr val="475569"/>
                 </a:solidFill>
                 <a:latin typeface="Segoe UI"/>
               </a:defRPr>
@@ -9088,7 +9043,7 @@
     <p:bg>
       <p:bgPr>
         <a:solidFill>
-          <a:srgbClr val="0F172A"/>
+          <a:srgbClr val="F1F5F9"/>
         </a:solidFill>
         <a:effectLst/>
       </p:bgPr>
@@ -9125,7 +9080,7 @@
             <a:pPr>
               <a:defRPr sz="3200" b="1">
                 <a:solidFill>
-                  <a:srgbClr val="38BDF8"/>
+                  <a:srgbClr val="4F46E5"/>
                 </a:solidFill>
                 <a:latin typeface="Segoe UI"/>
               </a:defRPr>
@@ -9164,7 +9119,7 @@
               </a:spcAft>
               <a:defRPr sz="1600">
                 <a:solidFill>
-                  <a:srgbClr val="94A3B8"/>
+                  <a:srgbClr val="475569"/>
                 </a:solidFill>
                 <a:latin typeface="Segoe UI"/>
               </a:defRPr>
@@ -9180,7 +9135,7 @@
               </a:spcAft>
               <a:defRPr sz="1600">
                 <a:solidFill>
-                  <a:srgbClr val="94A3B8"/>
+                  <a:srgbClr val="475569"/>
                 </a:solidFill>
                 <a:latin typeface="Segoe UI"/>
               </a:defRPr>
@@ -9196,7 +9151,7 @@
               </a:spcAft>
               <a:defRPr sz="1600">
                 <a:solidFill>
-                  <a:srgbClr val="94A3B8"/>
+                  <a:srgbClr val="475569"/>
                 </a:solidFill>
                 <a:latin typeface="Segoe UI"/>
               </a:defRPr>
@@ -9212,7 +9167,7 @@
               </a:spcAft>
               <a:defRPr sz="1600">
                 <a:solidFill>
-                  <a:srgbClr val="94A3B8"/>
+                  <a:srgbClr val="475569"/>
                 </a:solidFill>
                 <a:latin typeface="Segoe UI"/>
               </a:defRPr>
@@ -9261,7 +9216,7 @@
     <p:bg>
       <p:bgPr>
         <a:solidFill>
-          <a:srgbClr val="0F172A"/>
+          <a:srgbClr val="F1F5F9"/>
         </a:solidFill>
         <a:effectLst/>
       </p:bgPr>
@@ -9298,7 +9253,7 @@
             <a:pPr>
               <a:defRPr sz="3200" b="1">
                 <a:solidFill>
-                  <a:srgbClr val="38BDF8"/>
+                  <a:srgbClr val="4F46E5"/>
                 </a:solidFill>
                 <a:latin typeface="Segoe UI"/>
               </a:defRPr>
@@ -9337,7 +9292,7 @@
               </a:spcAft>
               <a:defRPr sz="1600">
                 <a:solidFill>
-                  <a:srgbClr val="94A3B8"/>
+                  <a:srgbClr val="475569"/>
                 </a:solidFill>
                 <a:latin typeface="Segoe UI"/>
               </a:defRPr>
@@ -9353,7 +9308,7 @@
               </a:spcAft>
               <a:defRPr sz="1600">
                 <a:solidFill>
-                  <a:srgbClr val="94A3B8"/>
+                  <a:srgbClr val="475569"/>
                 </a:solidFill>
                 <a:latin typeface="Segoe UI"/>
               </a:defRPr>
@@ -9369,7 +9324,7 @@
               </a:spcAft>
               <a:defRPr sz="1600">
                 <a:solidFill>
-                  <a:srgbClr val="94A3B8"/>
+                  <a:srgbClr val="475569"/>
                 </a:solidFill>
                 <a:latin typeface="Segoe UI"/>
               </a:defRPr>
@@ -9385,7 +9340,7 @@
               </a:spcAft>
               <a:defRPr sz="1600">
                 <a:solidFill>
-                  <a:srgbClr val="94A3B8"/>
+                  <a:srgbClr val="475569"/>
                 </a:solidFill>
                 <a:latin typeface="Segoe UI"/>
               </a:defRPr>
@@ -9401,7 +9356,7 @@
               </a:spcAft>
               <a:defRPr sz="1600">
                 <a:solidFill>
-                  <a:srgbClr val="94A3B8"/>
+                  <a:srgbClr val="475569"/>
                 </a:solidFill>
                 <a:latin typeface="Segoe UI"/>
               </a:defRPr>
@@ -10327,7 +10282,7 @@
     <p:bg>
       <p:bgPr>
         <a:solidFill>
-          <a:srgbClr val="0F172A"/>
+          <a:srgbClr val="F1F5F9"/>
         </a:solidFill>
         <a:effectLst/>
       </p:bgPr>
@@ -10364,7 +10319,7 @@
             <a:pPr>
               <a:defRPr sz="3200" b="1">
                 <a:solidFill>
-                  <a:srgbClr val="38BDF8"/>
+                  <a:srgbClr val="4F46E5"/>
                 </a:solidFill>
                 <a:latin typeface="Segoe UI"/>
               </a:defRPr>
@@ -10403,7 +10358,7 @@
               </a:spcAft>
               <a:defRPr sz="1600">
                 <a:solidFill>
-                  <a:srgbClr val="94A3B8"/>
+                  <a:srgbClr val="475569"/>
                 </a:solidFill>
                 <a:latin typeface="Segoe UI"/>
               </a:defRPr>
@@ -10419,7 +10374,7 @@
               </a:spcAft>
               <a:defRPr sz="1600">
                 <a:solidFill>
-                  <a:srgbClr val="94A3B8"/>
+                  <a:srgbClr val="475569"/>
                 </a:solidFill>
                 <a:latin typeface="Segoe UI"/>
               </a:defRPr>
@@ -10435,7 +10390,7 @@
               </a:spcAft>
               <a:defRPr sz="1600">
                 <a:solidFill>
-                  <a:srgbClr val="94A3B8"/>
+                  <a:srgbClr val="475569"/>
                 </a:solidFill>
                 <a:latin typeface="Segoe UI"/>
               </a:defRPr>
@@ -10451,7 +10406,7 @@
               </a:spcAft>
               <a:defRPr sz="1600">
                 <a:solidFill>
-                  <a:srgbClr val="94A3B8"/>
+                  <a:srgbClr val="475569"/>
                 </a:solidFill>
                 <a:latin typeface="Segoe UI"/>
               </a:defRPr>
@@ -10467,7 +10422,7 @@
               </a:spcAft>
               <a:defRPr sz="1600">
                 <a:solidFill>
-                  <a:srgbClr val="94A3B8"/>
+                  <a:srgbClr val="475569"/>
                 </a:solidFill>
                 <a:latin typeface="Segoe UI"/>
               </a:defRPr>
@@ -10516,7 +10471,7 @@
     <p:bg>
       <p:bgPr>
         <a:solidFill>
-          <a:srgbClr val="0F172A"/>
+          <a:srgbClr val="F1F5F9"/>
         </a:solidFill>
         <a:effectLst/>
       </p:bgPr>
@@ -10553,7 +10508,7 @@
             <a:pPr>
               <a:defRPr sz="3200" b="1">
                 <a:solidFill>
-                  <a:srgbClr val="38BDF8"/>
+                  <a:srgbClr val="4F46E5"/>
                 </a:solidFill>
                 <a:latin typeface="Segoe UI"/>
               </a:defRPr>
@@ -10592,7 +10547,7 @@
               </a:spcAft>
               <a:defRPr sz="1600">
                 <a:solidFill>
-                  <a:srgbClr val="94A3B8"/>
+                  <a:srgbClr val="475569"/>
                 </a:solidFill>
                 <a:latin typeface="Segoe UI"/>
               </a:defRPr>
@@ -10608,7 +10563,7 @@
               </a:spcAft>
               <a:defRPr sz="1600">
                 <a:solidFill>
-                  <a:srgbClr val="94A3B8"/>
+                  <a:srgbClr val="475569"/>
                 </a:solidFill>
                 <a:latin typeface="Segoe UI"/>
               </a:defRPr>
@@ -10624,7 +10579,7 @@
               </a:spcAft>
               <a:defRPr sz="1600">
                 <a:solidFill>
-                  <a:srgbClr val="94A3B8"/>
+                  <a:srgbClr val="475569"/>
                 </a:solidFill>
                 <a:latin typeface="Segoe UI"/>
               </a:defRPr>
@@ -10640,7 +10595,7 @@
               </a:spcAft>
               <a:defRPr sz="1600">
                 <a:solidFill>
-                  <a:srgbClr val="94A3B8"/>
+                  <a:srgbClr val="475569"/>
                 </a:solidFill>
                 <a:latin typeface="Segoe UI"/>
               </a:defRPr>
@@ -10656,7 +10611,7 @@
               </a:spcAft>
               <a:defRPr sz="1600">
                 <a:solidFill>
-                  <a:srgbClr val="94A3B8"/>
+                  <a:srgbClr val="475569"/>
                 </a:solidFill>
                 <a:latin typeface="Segoe UI"/>
               </a:defRPr>
@@ -12363,7 +12318,7 @@
     <p:bg>
       <p:bgPr>
         <a:solidFill>
-          <a:srgbClr val="0F172A"/>
+          <a:srgbClr val="F1F5F9"/>
         </a:solidFill>
         <a:effectLst/>
       </p:bgPr>
@@ -12400,7 +12355,7 @@
             <a:pPr>
               <a:defRPr sz="3200" b="1">
                 <a:solidFill>
-                  <a:srgbClr val="38BDF8"/>
+                  <a:srgbClr val="4F46E5"/>
                 </a:solidFill>
                 <a:latin typeface="Segoe UI"/>
               </a:defRPr>
@@ -12439,7 +12394,7 @@
               </a:spcAft>
               <a:defRPr sz="1600">
                 <a:solidFill>
-                  <a:srgbClr val="94A3B8"/>
+                  <a:srgbClr val="475569"/>
                 </a:solidFill>
                 <a:latin typeface="Segoe UI"/>
               </a:defRPr>
@@ -12455,7 +12410,7 @@
               </a:spcAft>
               <a:defRPr sz="1600">
                 <a:solidFill>
-                  <a:srgbClr val="94A3B8"/>
+                  <a:srgbClr val="475569"/>
                 </a:solidFill>
                 <a:latin typeface="Segoe UI"/>
               </a:defRPr>
@@ -12471,7 +12426,7 @@
               </a:spcAft>
               <a:defRPr sz="1600">
                 <a:solidFill>
-                  <a:srgbClr val="94A3B8"/>
+                  <a:srgbClr val="475569"/>
                 </a:solidFill>
                 <a:latin typeface="Segoe UI"/>
               </a:defRPr>
@@ -12487,7 +12442,7 @@
               </a:spcAft>
               <a:defRPr sz="1600">
                 <a:solidFill>
-                  <a:srgbClr val="94A3B8"/>
+                  <a:srgbClr val="475569"/>
                 </a:solidFill>
                 <a:latin typeface="Segoe UI"/>
               </a:defRPr>
@@ -12536,7 +12491,7 @@
     <p:bg>
       <p:bgPr>
         <a:solidFill>
-          <a:srgbClr val="0F172A"/>
+          <a:srgbClr val="F1F5F9"/>
         </a:solidFill>
         <a:effectLst/>
       </p:bgPr>
@@ -12573,7 +12528,7 @@
             <a:pPr>
               <a:defRPr sz="3200" b="1">
                 <a:solidFill>
-                  <a:srgbClr val="38BDF8"/>
+                  <a:srgbClr val="4F46E5"/>
                 </a:solidFill>
                 <a:latin typeface="Segoe UI"/>
               </a:defRPr>
@@ -12612,7 +12567,7 @@
               </a:spcAft>
               <a:defRPr sz="1600">
                 <a:solidFill>
-                  <a:srgbClr val="94A3B8"/>
+                  <a:srgbClr val="475569"/>
                 </a:solidFill>
                 <a:latin typeface="Segoe UI"/>
               </a:defRPr>
@@ -12628,7 +12583,7 @@
               </a:spcAft>
               <a:defRPr sz="1600">
                 <a:solidFill>
-                  <a:srgbClr val="94A3B8"/>
+                  <a:srgbClr val="475569"/>
                 </a:solidFill>
                 <a:latin typeface="Segoe UI"/>
               </a:defRPr>
@@ -12644,7 +12599,7 @@
               </a:spcAft>
               <a:defRPr sz="1600">
                 <a:solidFill>
-                  <a:srgbClr val="94A3B8"/>
+                  <a:srgbClr val="475569"/>
                 </a:solidFill>
                 <a:latin typeface="Segoe UI"/>
               </a:defRPr>
@@ -12660,7 +12615,7 @@
               </a:spcAft>
               <a:defRPr sz="1600">
                 <a:solidFill>
-                  <a:srgbClr val="94A3B8"/>
+                  <a:srgbClr val="475569"/>
                 </a:solidFill>
                 <a:latin typeface="Segoe UI"/>
               </a:defRPr>
@@ -12676,7 +12631,7 @@
               </a:spcAft>
               <a:defRPr sz="1600">
                 <a:solidFill>
-                  <a:srgbClr val="94A3B8"/>
+                  <a:srgbClr val="475569"/>
                 </a:solidFill>
                 <a:latin typeface="Segoe UI"/>
               </a:defRPr>
@@ -12725,7 +12680,7 @@
     <p:bg>
       <p:bgPr>
         <a:solidFill>
-          <a:srgbClr val="0F172A"/>
+          <a:srgbClr val="F1F5F9"/>
         </a:solidFill>
         <a:effectLst/>
       </p:bgPr>
@@ -12762,7 +12717,7 @@
             <a:pPr>
               <a:defRPr sz="3200" b="1">
                 <a:solidFill>
-                  <a:srgbClr val="38BDF8"/>
+                  <a:srgbClr val="4F46E5"/>
                 </a:solidFill>
                 <a:latin typeface="Segoe UI"/>
               </a:defRPr>
@@ -12801,7 +12756,7 @@
               </a:spcAft>
               <a:defRPr sz="1600">
                 <a:solidFill>
-                  <a:srgbClr val="94A3B8"/>
+                  <a:srgbClr val="475569"/>
                 </a:solidFill>
                 <a:latin typeface="Segoe UI"/>
               </a:defRPr>
@@ -12817,7 +12772,7 @@
               </a:spcAft>
               <a:defRPr sz="1600">
                 <a:solidFill>
-                  <a:srgbClr val="94A3B8"/>
+                  <a:srgbClr val="475569"/>
                 </a:solidFill>
                 <a:latin typeface="Segoe UI"/>
               </a:defRPr>
@@ -12833,7 +12788,7 @@
               </a:spcAft>
               <a:defRPr sz="1600">
                 <a:solidFill>
-                  <a:srgbClr val="94A3B8"/>
+                  <a:srgbClr val="475569"/>
                 </a:solidFill>
                 <a:latin typeface="Segoe UI"/>
               </a:defRPr>
@@ -12849,7 +12804,7 @@
               </a:spcAft>
               <a:defRPr sz="1600">
                 <a:solidFill>
-                  <a:srgbClr val="94A3B8"/>
+                  <a:srgbClr val="475569"/>
                 </a:solidFill>
                 <a:latin typeface="Segoe UI"/>
               </a:defRPr>
@@ -12865,7 +12820,7 @@
               </a:spcAft>
               <a:defRPr sz="1600">
                 <a:solidFill>
-                  <a:srgbClr val="94A3B8"/>
+                  <a:srgbClr val="475569"/>
                 </a:solidFill>
                 <a:latin typeface="Segoe UI"/>
               </a:defRPr>
@@ -12881,7 +12836,7 @@
               </a:spcAft>
               <a:defRPr sz="1600">
                 <a:solidFill>
-                  <a:srgbClr val="94A3B8"/>
+                  <a:srgbClr val="475569"/>
                 </a:solidFill>
                 <a:latin typeface="Segoe UI"/>
               </a:defRPr>
@@ -12897,7 +12852,7 @@
               </a:spcAft>
               <a:defRPr sz="1600">
                 <a:solidFill>
-                  <a:srgbClr val="94A3B8"/>
+                  <a:srgbClr val="475569"/>
                 </a:solidFill>
                 <a:latin typeface="Segoe UI"/>
               </a:defRPr>
@@ -12922,7 +12877,7 @@
     <p:bg>
       <p:bgPr>
         <a:solidFill>
-          <a:srgbClr val="0F172A"/>
+          <a:srgbClr val="F1F5F9"/>
         </a:solidFill>
         <a:effectLst/>
       </p:bgPr>
@@ -12959,7 +12914,7 @@
             <a:pPr>
               <a:defRPr sz="3200" b="1">
                 <a:solidFill>
-                  <a:srgbClr val="38BDF8"/>
+                  <a:srgbClr val="4F46E5"/>
                 </a:solidFill>
                 <a:latin typeface="Segoe UI"/>
               </a:defRPr>
@@ -12998,7 +12953,7 @@
               </a:spcAft>
               <a:defRPr sz="1600">
                 <a:solidFill>
-                  <a:srgbClr val="94A3B8"/>
+                  <a:srgbClr val="475569"/>
                 </a:solidFill>
                 <a:latin typeface="Segoe UI"/>
               </a:defRPr>
@@ -13014,7 +12969,7 @@
               </a:spcAft>
               <a:defRPr sz="1600">
                 <a:solidFill>
-                  <a:srgbClr val="94A3B8"/>
+                  <a:srgbClr val="475569"/>
                 </a:solidFill>
                 <a:latin typeface="Segoe UI"/>
               </a:defRPr>
@@ -13030,7 +12985,7 @@
               </a:spcAft>
               <a:defRPr sz="1600">
                 <a:solidFill>
-                  <a:srgbClr val="94A3B8"/>
+                  <a:srgbClr val="475569"/>
                 </a:solidFill>
                 <a:latin typeface="Segoe UI"/>
               </a:defRPr>
@@ -13046,7 +13001,7 @@
               </a:spcAft>
               <a:defRPr sz="1600">
                 <a:solidFill>
-                  <a:srgbClr val="94A3B8"/>
+                  <a:srgbClr val="475569"/>
                 </a:solidFill>
                 <a:latin typeface="Segoe UI"/>
               </a:defRPr>
@@ -13071,7 +13026,7 @@
     <p:bg>
       <p:bgPr>
         <a:solidFill>
-          <a:srgbClr val="0F172A"/>
+          <a:srgbClr val="F1F5F9"/>
         </a:solidFill>
         <a:effectLst/>
       </p:bgPr>
@@ -13108,7 +13063,7 @@
             <a:pPr>
               <a:defRPr sz="3200" b="1">
                 <a:solidFill>
-                  <a:srgbClr val="38BDF8"/>
+                  <a:srgbClr val="4F46E5"/>
                 </a:solidFill>
                 <a:latin typeface="Segoe UI"/>
               </a:defRPr>
@@ -13147,7 +13102,7 @@
               </a:spcAft>
               <a:defRPr sz="2000">
                 <a:solidFill>
-                  <a:srgbClr val="94A3B8"/>
+                  <a:srgbClr val="475569"/>
                 </a:solidFill>
                 <a:latin typeface="Segoe UI"/>
               </a:defRPr>
@@ -13188,7 +13143,7 @@
             <a:pPr algn="ctr">
               <a:defRPr sz="3600" b="1">
                 <a:solidFill>
-                  <a:srgbClr val="38BDF8"/>
+                  <a:srgbClr val="4F46E5"/>
                 </a:solidFill>
                 <a:latin typeface="Segoe UI"/>
               </a:defRPr>
@@ -13218,7 +13173,7 @@
     <p:bg>
       <p:bgPr>
         <a:solidFill>
-          <a:srgbClr val="0F172A"/>
+          <a:srgbClr val="F1F5F9"/>
         </a:solidFill>
         <a:effectLst/>
       </p:bgPr>
@@ -13255,7 +13210,7 @@
             <a:pPr>
               <a:defRPr sz="3200" b="1">
                 <a:solidFill>
-                  <a:srgbClr val="38BDF8"/>
+                  <a:srgbClr val="4F46E5"/>
                 </a:solidFill>
                 <a:latin typeface="Segoe UI"/>
               </a:defRPr>
@@ -13294,7 +13249,7 @@
               </a:spcAft>
               <a:defRPr sz="1600">
                 <a:solidFill>
-                  <a:srgbClr val="94A3B8"/>
+                  <a:srgbClr val="475569"/>
                 </a:solidFill>
                 <a:latin typeface="Segoe UI"/>
               </a:defRPr>
@@ -13310,7 +13265,7 @@
               </a:spcAft>
               <a:defRPr sz="1600">
                 <a:solidFill>
-                  <a:srgbClr val="94A3B8"/>
+                  <a:srgbClr val="475569"/>
                 </a:solidFill>
                 <a:latin typeface="Segoe UI"/>
               </a:defRPr>
@@ -13326,7 +13281,7 @@
               </a:spcAft>
               <a:defRPr sz="1600">
                 <a:solidFill>
-                  <a:srgbClr val="94A3B8"/>
+                  <a:srgbClr val="475569"/>
                 </a:solidFill>
                 <a:latin typeface="Segoe UI"/>
               </a:defRPr>
@@ -13342,7 +13297,7 @@
               </a:spcAft>
               <a:defRPr sz="1600">
                 <a:solidFill>
-                  <a:srgbClr val="94A3B8"/>
+                  <a:srgbClr val="475569"/>
                 </a:solidFill>
                 <a:latin typeface="Segoe UI"/>
               </a:defRPr>
@@ -13367,7 +13322,7 @@
     <p:bg>
       <p:bgPr>
         <a:solidFill>
-          <a:srgbClr val="0F172A"/>
+          <a:srgbClr val="F1F5F9"/>
         </a:solidFill>
         <a:effectLst/>
       </p:bgPr>
@@ -13404,7 +13359,7 @@
             <a:pPr>
               <a:defRPr sz="3200" b="1">
                 <a:solidFill>
-                  <a:srgbClr val="38BDF8"/>
+                  <a:srgbClr val="4F46E5"/>
                 </a:solidFill>
                 <a:latin typeface="Segoe UI"/>
               </a:defRPr>
@@ -13443,7 +13398,7 @@
               </a:spcAft>
               <a:defRPr sz="1600">
                 <a:solidFill>
-                  <a:srgbClr val="94A3B8"/>
+                  <a:srgbClr val="475569"/>
                 </a:solidFill>
                 <a:latin typeface="Segoe UI"/>
               </a:defRPr>
@@ -13459,7 +13414,7 @@
               </a:spcAft>
               <a:defRPr sz="1600">
                 <a:solidFill>
-                  <a:srgbClr val="94A3B8"/>
+                  <a:srgbClr val="475569"/>
                 </a:solidFill>
                 <a:latin typeface="Segoe UI"/>
               </a:defRPr>
@@ -13475,7 +13430,7 @@
               </a:spcAft>
               <a:defRPr sz="1600">
                 <a:solidFill>
-                  <a:srgbClr val="94A3B8"/>
+                  <a:srgbClr val="475569"/>
                 </a:solidFill>
                 <a:latin typeface="Segoe UI"/>
               </a:defRPr>
@@ -13491,7 +13446,7 @@
               </a:spcAft>
               <a:defRPr sz="1600">
                 <a:solidFill>
-                  <a:srgbClr val="94A3B8"/>
+                  <a:srgbClr val="475569"/>
                 </a:solidFill>
                 <a:latin typeface="Segoe UI"/>
               </a:defRPr>
@@ -13507,7 +13462,7 @@
               </a:spcAft>
               <a:defRPr sz="1600">
                 <a:solidFill>
-                  <a:srgbClr val="94A3B8"/>
+                  <a:srgbClr val="475569"/>
                 </a:solidFill>
                 <a:latin typeface="Segoe UI"/>
               </a:defRPr>
@@ -13532,7 +13487,7 @@
     <p:bg>
       <p:bgPr>
         <a:solidFill>
-          <a:srgbClr val="0F172A"/>
+          <a:srgbClr val="F1F5F9"/>
         </a:solidFill>
         <a:effectLst/>
       </p:bgPr>
@@ -13569,7 +13524,7 @@
             <a:pPr>
               <a:defRPr sz="3200" b="1">
                 <a:solidFill>
-                  <a:srgbClr val="38BDF8"/>
+                  <a:srgbClr val="4F46E5"/>
                 </a:solidFill>
                 <a:latin typeface="Segoe UI"/>
               </a:defRPr>
@@ -13608,7 +13563,7 @@
               </a:spcAft>
               <a:defRPr sz="1600">
                 <a:solidFill>
-                  <a:srgbClr val="94A3B8"/>
+                  <a:srgbClr val="475569"/>
                 </a:solidFill>
                 <a:latin typeface="Segoe UI"/>
               </a:defRPr>
@@ -13624,7 +13579,7 @@
               </a:spcAft>
               <a:defRPr sz="1600">
                 <a:solidFill>
-                  <a:srgbClr val="94A3B8"/>
+                  <a:srgbClr val="475569"/>
                 </a:solidFill>
                 <a:latin typeface="Segoe UI"/>
               </a:defRPr>
@@ -13640,7 +13595,7 @@
               </a:spcAft>
               <a:defRPr sz="1600">
                 <a:solidFill>
-                  <a:srgbClr val="94A3B8"/>
+                  <a:srgbClr val="475569"/>
                 </a:solidFill>
                 <a:latin typeface="Segoe UI"/>
               </a:defRPr>
@@ -13656,7 +13611,7 @@
               </a:spcAft>
               <a:defRPr sz="1600">
                 <a:solidFill>
-                  <a:srgbClr val="94A3B8"/>
+                  <a:srgbClr val="475569"/>
                 </a:solidFill>
                 <a:latin typeface="Segoe UI"/>
               </a:defRPr>
@@ -13681,7 +13636,7 @@
     <p:bg>
       <p:bgPr>
         <a:solidFill>
-          <a:srgbClr val="0F172A"/>
+          <a:srgbClr val="F1F5F9"/>
         </a:solidFill>
         <a:effectLst/>
       </p:bgPr>
@@ -13718,7 +13673,7 @@
             <a:pPr>
               <a:defRPr sz="3200" b="1">
                 <a:solidFill>
-                  <a:srgbClr val="38BDF8"/>
+                  <a:srgbClr val="4F46E5"/>
                 </a:solidFill>
                 <a:latin typeface="Segoe UI"/>
               </a:defRPr>
@@ -13757,7 +13712,7 @@
               </a:spcAft>
               <a:defRPr sz="1600">
                 <a:solidFill>
-                  <a:srgbClr val="94A3B8"/>
+                  <a:srgbClr val="475569"/>
                 </a:solidFill>
                 <a:latin typeface="Segoe UI"/>
               </a:defRPr>
@@ -13773,7 +13728,7 @@
               </a:spcAft>
               <a:defRPr sz="1600">
                 <a:solidFill>
-                  <a:srgbClr val="94A3B8"/>
+                  <a:srgbClr val="475569"/>
                 </a:solidFill>
                 <a:latin typeface="Segoe UI"/>
               </a:defRPr>
@@ -13789,7 +13744,7 @@
               </a:spcAft>
               <a:defRPr sz="1600">
                 <a:solidFill>
-                  <a:srgbClr val="94A3B8"/>
+                  <a:srgbClr val="475569"/>
                 </a:solidFill>
                 <a:latin typeface="Segoe UI"/>
               </a:defRPr>
@@ -13805,7 +13760,7 @@
               </a:spcAft>
               <a:defRPr sz="1600">
                 <a:solidFill>
-                  <a:srgbClr val="94A3B8"/>
+                  <a:srgbClr val="475569"/>
                 </a:solidFill>
                 <a:latin typeface="Segoe UI"/>
               </a:defRPr>
@@ -13830,7 +13785,7 @@
     <p:bg>
       <p:bgPr>
         <a:solidFill>
-          <a:srgbClr val="0F172A"/>
+          <a:srgbClr val="F1F5F9"/>
         </a:solidFill>
         <a:effectLst/>
       </p:bgPr>
@@ -13867,7 +13822,7 @@
             <a:pPr>
               <a:defRPr sz="3200" b="1">
                 <a:solidFill>
-                  <a:srgbClr val="38BDF8"/>
+                  <a:srgbClr val="4F46E5"/>
                 </a:solidFill>
                 <a:latin typeface="Segoe UI"/>
               </a:defRPr>
@@ -13906,7 +13861,7 @@
               </a:spcAft>
               <a:defRPr sz="1600">
                 <a:solidFill>
-                  <a:srgbClr val="94A3B8"/>
+                  <a:srgbClr val="475569"/>
                 </a:solidFill>
                 <a:latin typeface="Segoe UI"/>
               </a:defRPr>
@@ -13922,7 +13877,7 @@
               </a:spcAft>
               <a:defRPr sz="1600">
                 <a:solidFill>
-                  <a:srgbClr val="94A3B8"/>
+                  <a:srgbClr val="475569"/>
                 </a:solidFill>
                 <a:latin typeface="Segoe UI"/>
               </a:defRPr>
@@ -13938,7 +13893,7 @@
               </a:spcAft>
               <a:defRPr sz="1600">
                 <a:solidFill>
-                  <a:srgbClr val="94A3B8"/>
+                  <a:srgbClr val="475569"/>
                 </a:solidFill>
                 <a:latin typeface="Segoe UI"/>
               </a:defRPr>
@@ -13954,7 +13909,7 @@
               </a:spcAft>
               <a:defRPr sz="1600">
                 <a:solidFill>
-                  <a:srgbClr val="94A3B8"/>
+                  <a:srgbClr val="475569"/>
                 </a:solidFill>
                 <a:latin typeface="Segoe UI"/>
               </a:defRPr>
@@ -13979,7 +13934,7 @@
     <p:bg>
       <p:bgPr>
         <a:solidFill>
-          <a:srgbClr val="0F172A"/>
+          <a:srgbClr val="F1F5F9"/>
         </a:solidFill>
         <a:effectLst/>
       </p:bgPr>
@@ -14016,7 +13971,7 @@
             <a:pPr>
               <a:defRPr sz="3200" b="1">
                 <a:solidFill>
-                  <a:srgbClr val="38BDF8"/>
+                  <a:srgbClr val="4F46E5"/>
                 </a:solidFill>
                 <a:latin typeface="Segoe UI"/>
               </a:defRPr>
@@ -14055,7 +14010,7 @@
               </a:spcAft>
               <a:defRPr sz="1600">
                 <a:solidFill>
-                  <a:srgbClr val="94A3B8"/>
+                  <a:srgbClr val="475569"/>
                 </a:solidFill>
                 <a:latin typeface="Segoe UI"/>
               </a:defRPr>
@@ -14071,7 +14026,7 @@
               </a:spcAft>
               <a:defRPr sz="1600">
                 <a:solidFill>
-                  <a:srgbClr val="94A3B8"/>
+                  <a:srgbClr val="475569"/>
                 </a:solidFill>
                 <a:latin typeface="Segoe UI"/>
               </a:defRPr>
@@ -14087,7 +14042,7 @@
               </a:spcAft>
               <a:defRPr sz="1600">
                 <a:solidFill>
-                  <a:srgbClr val="94A3B8"/>
+                  <a:srgbClr val="475569"/>
                 </a:solidFill>
                 <a:latin typeface="Segoe UI"/>
               </a:defRPr>
@@ -14103,7 +14058,7 @@
               </a:spcAft>
               <a:defRPr sz="1600">
                 <a:solidFill>
-                  <a:srgbClr val="94A3B8"/>
+                  <a:srgbClr val="475569"/>
                 </a:solidFill>
                 <a:latin typeface="Segoe UI"/>
               </a:defRPr>
